--- a/method_kline_peak/report/TW50_局部高低點_專題進度.pptx
+++ b/method_kline_peak/report/TW50_局部高低點_專題進度.pptx
@@ -13,15 +13,9 @@
     <p:sldId id="261" r:id="rId7"/>
     <p:sldId id="262" r:id="rId8"/>
     <p:sldId id="263" r:id="rId9"/>
-    <p:sldId id="264" r:id="rId10"/>
-    <p:sldId id="265" r:id="rId11"/>
-    <p:sldId id="266" r:id="rId12"/>
-    <p:sldId id="267" r:id="rId13"/>
-    <p:sldId id="268" r:id="rId14"/>
-    <p:sldId id="269" r:id="rId15"/>
   </p:sldIdLst>
   <p:notesMasterIdLst>
-    <p:notesMasterId r:id="rId16"/>
+    <p:notesMasterId r:id="rId10"/>
   </p:notesMasterIdLst>
   <p:sldSz cx="12192000" cy="6858000"/>
   <p:notesSz cx="6858000" cy="12192000"/>
@@ -120,38 +114,28 @@
   <p:extLst>
     <p:ext uri="{521415D9-36F7-43E2-AB2F-B90AF26B5E84}">
       <p14:sectionLst xmlns:p14="http://schemas.microsoft.com/office/powerpoint/2010/main">
-        <p14:section name="開場" id="{f6dad749-6b71-4c45-47e4-c85298a12167}">
+        <p14:section name="問題與資料" id="{6a86c6ba-6f3c-c8c4-0209-7c392b24efe2}">
           <p14:sldIdLst>
             <p14:sldId id="256"/>
             <p14:sldId id="257"/>
           </p14:sldIdLst>
         </p14:section>
-        <p14:section name="問題與資料" id="{da5e0e93-b598-9ae8-5087-44a59cf24cbc}">
+        <p14:section name="方法與計分" id="{cf7f66be-fa9b-ee4e-7762-2b31b7f2dd27}">
           <p14:sldIdLst>
             <p14:sldId id="258"/>
             <p14:sldId id="259"/>
-            <p14:sldId id="260"/>
           </p14:sldIdLst>
         </p14:section>
-        <p14:section name="方法與計分" id="{0ab6d104-8277-8326-c1cb-eaeb7fd68d00}">
+        <p14:section name="結果" id="{bcf3bc76-5d8d-90e3-8378-95511cf33d86}">
           <p14:sldIdLst>
+            <p14:sldId id="260"/>
             <p14:sldId id="261"/>
             <p14:sldId id="262"/>
-            <p14:sldId id="263"/>
           </p14:sldIdLst>
         </p14:section>
-        <p14:section name="結果" id="{b227a455-a42c-4583-9256-8efd5e8aaf79}">
+        <p14:section name="總結" id="{75d8b770-88d3-6c48-0b6a-8dd62cf05330}">
           <p14:sldIdLst>
-            <p14:sldId id="264"/>
-            <p14:sldId id="265"/>
-            <p14:sldId id="266"/>
-            <p14:sldId id="267"/>
-          </p14:sldIdLst>
-        </p14:section>
-        <p14:section name="收尾" id="{7dfc8a93-9619-7a7a-dbce-412d21b961d9}">
-          <p14:sldIdLst>
-            <p14:sldId id="268"/>
-            <p14:sldId id="269"/>
+            <p14:sldId id="263"/>
           </p14:sldIdLst>
         </p14:section>
       </p14:sectionLst>
@@ -789,10 +773,10 @@
                 <c:formatCode>General</c:formatCode>
                 <c:ptCount val="2"/>
                 <c:pt idx="0">
-                  <c:v>25.7</c:v>
+                  <c:v>25.2</c:v>
                 </c:pt>
                 <c:pt idx="1">
-                  <c:v>31.5</c:v>
+                  <c:v>31.3</c:v>
                 </c:pt>
               </c:numCache>
             </c:numRef>
@@ -1349,7 +1333,7 @@
           <a:p>
             <a:r>
               <a:rPr lang="en-US" dirty="0"/>
-              <a:t>今天報告我們把題目從「找 K 線型態預測漲跌」改成「找 11 天窗口裡的局部高點和低點」之後的結果。上面這排 11 個小方塊就是一個窗口,中間橘色那格是要判斷的那一天 t。</a:t>
+              <a:t>每個樣本是連續 11 個交易日,中間的第 6 天叫 t。t 日收盤如果是這 11 天最高就標高點、最低就標低點,其他都是非極值。左邊淺色的部分是 t 日收盤當下看得到的;右邊未來 5 天只用來貼標籤,模型看不到。</a:t>
             </a:r>
             <a:endParaRPr lang="en-US" dirty="0"/>
           </a:p>
@@ -1373,446 +1357,6 @@
             <a:fld id="{F7021451-1387-4CA6-816F-3879F97B5CBC}" type="slidenum">
               <a:rPr lang="en-US"/>
               <a:t>1</a:t>
-            </a:fld>
-            <a:endParaRPr lang="en-US"/>
-          </a:p>
-        </p:txBody>
-      </p:sp>
-    </p:spTree>
-    <p:extLst>
-      <p:ext uri="{BB962C8B-B14F-4D97-AF65-F5344CB8AC3E}">
-        <p14:creationId xmlns:p14="http://schemas.microsoft.com/office/powerpoint/2010/main" val="1024086991"/>
-      </p:ext>
-    </p:extLst>
-  </p:cSld>
-  <p:clrMapOvr>
-    <a:masterClrMapping/>
-  </p:clrMapOvr>
-</p:notes>
-</file>
-
-<file path=ppt/notesSlides/notesSlide10.xml><?xml version="1.0" encoding="utf-8"?>
-<p:notes xmlns:a="http://schemas.openxmlformats.org/drawingml/2006/main" xmlns:r="http://schemas.openxmlformats.org/officeDocument/2006/relationships" xmlns:p="http://schemas.openxmlformats.org/presentationml/2006/main">
-  <p:cSld>
-    <p:spTree>
-      <p:nvGrpSpPr>
-        <p:cNvPr id="1" name=""/>
-        <p:cNvGrpSpPr/>
-        <p:nvPr/>
-      </p:nvGrpSpPr>
-      <p:grpSpPr>
-        <a:xfrm>
-          <a:off x="0" y="0"/>
-          <a:ext cx="0" cy="0"/>
-          <a:chOff x="0" y="0"/>
-          <a:chExt cx="0" cy="0"/>
-        </a:xfrm>
-      </p:grpSpPr>
-      <p:sp>
-        <p:nvSpPr>
-          <p:cNvPr id="2" name="Slide Image Placeholder 1"/>
-          <p:cNvSpPr>
-            <a:spLocks noGrp="1" noRot="1" noChangeAspect="1"/>
-          </p:cNvSpPr>
-          <p:nvPr>
-            <p:ph type="sldImg"/>
-          </p:nvPr>
-        </p:nvSpPr>
-        <p:spPr/>
-      </p:sp>
-      <p:sp>
-        <p:nvSpPr>
-          <p:cNvPr id="3" name="Notes Placeholder 2"/>
-          <p:cNvSpPr>
-            <a:spLocks noGrp="1"/>
-          </p:cNvSpPr>
-          <p:nvPr>
-            <p:ph type="body" idx="1"/>
-          </p:nvPr>
-        </p:nvSpPr>
-        <p:spPr/>
-        <p:txBody>
-          <a:bodyPr/>
-          <a:lstStyle/>
-          <a:p>
-            <a:r>
-              <a:rPr lang="en-US" dirty="0"/>
-              <a:t>這頁是我們說的局部準確度。左圖是命中率:隨機挑一天是高點的機率只有 7.3%,被我們挑出來的候選是 25 到 32%,大約是 3.5 到 4 倍。右邊三個數字:真高低點幾乎全部找到,模型保留下 75 到 80%,判非極值時 94.5% 正確。</a:t>
-            </a:r>
-            <a:endParaRPr lang="en-US" dirty="0"/>
-          </a:p>
-        </p:txBody>
-      </p:sp>
-      <p:sp>
-        <p:nvSpPr>
-          <p:cNvPr id="4" name="Slide Number Placeholder 3"/>
-          <p:cNvSpPr>
-            <a:spLocks noGrp="1"/>
-          </p:cNvSpPr>
-          <p:nvPr>
-            <p:ph type="sldNum" sz="quarter" idx="10"/>
-          </p:nvPr>
-        </p:nvSpPr>
-        <p:spPr/>
-        <p:txBody>
-          <a:bodyPr/>
-          <a:lstStyle/>
-          <a:p>
-            <a:fld id="{F7021451-1387-4CA6-816F-3879F97B5CBC}" type="slidenum">
-              <a:rPr lang="en-US"/>
-              <a:t>10</a:t>
-            </a:fld>
-            <a:endParaRPr lang="en-US"/>
-          </a:p>
-        </p:txBody>
-      </p:sp>
-    </p:spTree>
-    <p:extLst>
-      <p:ext uri="{BB962C8B-B14F-4D97-AF65-F5344CB8AC3E}">
-        <p14:creationId xmlns:p14="http://schemas.microsoft.com/office/powerpoint/2010/main" val="1024086991"/>
-      </p:ext>
-    </p:extLst>
-  </p:cSld>
-  <p:clrMapOvr>
-    <a:masterClrMapping/>
-  </p:clrMapOvr>
-</p:notes>
-</file>
-
-<file path=ppt/notesSlides/notesSlide11.xml><?xml version="1.0" encoding="utf-8"?>
-<p:notes xmlns:a="http://schemas.openxmlformats.org/drawingml/2006/main" xmlns:r="http://schemas.openxmlformats.org/officeDocument/2006/relationships" xmlns:p="http://schemas.openxmlformats.org/presentationml/2006/main">
-  <p:cSld>
-    <p:spTree>
-      <p:nvGrpSpPr>
-        <p:cNvPr id="1" name=""/>
-        <p:cNvGrpSpPr/>
-        <p:nvPr/>
-      </p:nvGrpSpPr>
-      <p:grpSpPr>
-        <a:xfrm>
-          <a:off x="0" y="0"/>
-          <a:ext cx="0" cy="0"/>
-          <a:chOff x="0" y="0"/>
-          <a:chExt cx="0" cy="0"/>
-        </a:xfrm>
-      </p:grpSpPr>
-      <p:sp>
-        <p:nvSpPr>
-          <p:cNvPr id="2" name="Slide Image Placeholder 1"/>
-          <p:cNvSpPr>
-            <a:spLocks noGrp="1" noRot="1" noChangeAspect="1"/>
-          </p:cNvSpPr>
-          <p:nvPr>
-            <p:ph type="sldImg"/>
-          </p:nvPr>
-        </p:nvSpPr>
-        <p:spPr/>
-      </p:sp>
-      <p:sp>
-        <p:nvSpPr>
-          <p:cNvPr id="3" name="Notes Placeholder 2"/>
-          <p:cNvSpPr>
-            <a:spLocks noGrp="1"/>
-          </p:cNvSpPr>
-          <p:nvPr>
-            <p:ph type="body" idx="1"/>
-          </p:nvPr>
-        </p:nvSpPr>
-        <p:spPr/>
-        <p:txBody>
-          <a:bodyPr/>
-          <a:lstStyle/>
-          <a:p>
-            <a:r>
-              <a:rPr lang="en-US" dirty="0"/>
-              <a:t>這是測試期四種情況的典型例子:左上判對的高點,右上判對的低點,左下是規則挑出來但被模型正確刪掉的假候選,右下是誤報,判了高點但之後又創新高。每一類都是取報酬最接近中位數的窗口,不是挑最好看的。互動網頁(連結:https://claude.ai/artifact/4YudK9qBr4fnsV4NQatjEe,需先分享權限)可以看全部 50 檔。</a:t>
-            </a:r>
-            <a:endParaRPr lang="en-US" dirty="0"/>
-          </a:p>
-        </p:txBody>
-      </p:sp>
-      <p:sp>
-        <p:nvSpPr>
-          <p:cNvPr id="4" name="Slide Number Placeholder 3"/>
-          <p:cNvSpPr>
-            <a:spLocks noGrp="1"/>
-          </p:cNvSpPr>
-          <p:nvPr>
-            <p:ph type="sldNum" sz="quarter" idx="10"/>
-          </p:nvPr>
-        </p:nvSpPr>
-        <p:spPr/>
-        <p:txBody>
-          <a:bodyPr/>
-          <a:lstStyle/>
-          <a:p>
-            <a:fld id="{F7021451-1387-4CA6-816F-3879F97B5CBC}" type="slidenum">
-              <a:rPr lang="en-US"/>
-              <a:t>11</a:t>
-            </a:fld>
-            <a:endParaRPr lang="en-US"/>
-          </a:p>
-        </p:txBody>
-      </p:sp>
-    </p:spTree>
-    <p:extLst>
-      <p:ext uri="{BB962C8B-B14F-4D97-AF65-F5344CB8AC3E}">
-        <p14:creationId xmlns:p14="http://schemas.microsoft.com/office/powerpoint/2010/main" val="1024086991"/>
-      </p:ext>
-    </p:extLst>
-  </p:cSld>
-  <p:clrMapOvr>
-    <a:masterClrMapping/>
-  </p:clrMapOvr>
-</p:notes>
-</file>
-
-<file path=ppt/notesSlides/notesSlide12.xml><?xml version="1.0" encoding="utf-8"?>
-<p:notes xmlns:a="http://schemas.openxmlformats.org/drawingml/2006/main" xmlns:r="http://schemas.openxmlformats.org/officeDocument/2006/relationships" xmlns:p="http://schemas.openxmlformats.org/presentationml/2006/main">
-  <p:cSld>
-    <p:spTree>
-      <p:nvGrpSpPr>
-        <p:cNvPr id="1" name=""/>
-        <p:cNvGrpSpPr/>
-        <p:nvPr/>
-      </p:nvGrpSpPr>
-      <p:grpSpPr>
-        <a:xfrm>
-          <a:off x="0" y="0"/>
-          <a:ext cx="0" cy="0"/>
-          <a:chOff x="0" y="0"/>
-          <a:chExt cx="0" cy="0"/>
-        </a:xfrm>
-      </p:grpSpPr>
-      <p:sp>
-        <p:nvSpPr>
-          <p:cNvPr id="2" name="Slide Image Placeholder 1"/>
-          <p:cNvSpPr>
-            <a:spLocks noGrp="1" noRot="1" noChangeAspect="1"/>
-          </p:cNvSpPr>
-          <p:nvPr>
-            <p:ph type="sldImg"/>
-          </p:nvPr>
-        </p:nvSpPr>
-        <p:spPr/>
-      </p:sp>
-      <p:sp>
-        <p:nvSpPr>
-          <p:cNvPr id="3" name="Notes Placeholder 2"/>
-          <p:cNvSpPr>
-            <a:spLocks noGrp="1"/>
-          </p:cNvSpPr>
-          <p:nvPr>
-            <p:ph type="body" idx="1"/>
-          </p:nvPr>
-        </p:nvSpPr>
-        <p:spPr/>
-        <p:txBody>
-          <a:bodyPr/>
-          <a:lstStyle/>
-          <a:p>
-            <a:r>
-              <a:rPr lang="en-US" dirty="0"/>
-              <a:t>我們用論文的方法貼標,類別比例和規則基準的分數都跟論文幾乎一樣,代表我們的資料和流程是對的。論文的模型比規則多 1.43 點,主要是加了券商分點資料;它的純價格模型只多 0.6 點,我們的 AE 加 OC-SVM 也是同一個水準。</a:t>
-            </a:r>
-            <a:endParaRPr lang="en-US" dirty="0"/>
-          </a:p>
-        </p:txBody>
-      </p:sp>
-      <p:sp>
-        <p:nvSpPr>
-          <p:cNvPr id="4" name="Slide Number Placeholder 3"/>
-          <p:cNvSpPr>
-            <a:spLocks noGrp="1"/>
-          </p:cNvSpPr>
-          <p:nvPr>
-            <p:ph type="sldNum" sz="quarter" idx="10"/>
-          </p:nvPr>
-        </p:nvSpPr>
-        <p:spPr/>
-        <p:txBody>
-          <a:bodyPr/>
-          <a:lstStyle/>
-          <a:p>
-            <a:fld id="{F7021451-1387-4CA6-816F-3879F97B5CBC}" type="slidenum">
-              <a:rPr lang="en-US"/>
-              <a:t>12</a:t>
-            </a:fld>
-            <a:endParaRPr lang="en-US"/>
-          </a:p>
-        </p:txBody>
-      </p:sp>
-    </p:spTree>
-    <p:extLst>
-      <p:ext uri="{BB962C8B-B14F-4D97-AF65-F5344CB8AC3E}">
-        <p14:creationId xmlns:p14="http://schemas.microsoft.com/office/powerpoint/2010/main" val="1024086991"/>
-      </p:ext>
-    </p:extLst>
-  </p:cSld>
-  <p:clrMapOvr>
-    <a:masterClrMapping/>
-  </p:clrMapOvr>
-</p:notes>
-</file>
-
-<file path=ppt/notesSlides/notesSlide13.xml><?xml version="1.0" encoding="utf-8"?>
-<p:notes xmlns:a="http://schemas.openxmlformats.org/drawingml/2006/main" xmlns:r="http://schemas.openxmlformats.org/officeDocument/2006/relationships" xmlns:p="http://schemas.openxmlformats.org/presentationml/2006/main">
-  <p:cSld>
-    <p:spTree>
-      <p:nvGrpSpPr>
-        <p:cNvPr id="1" name=""/>
-        <p:cNvGrpSpPr/>
-        <p:nvPr/>
-      </p:nvGrpSpPr>
-      <p:grpSpPr>
-        <a:xfrm>
-          <a:off x="0" y="0"/>
-          <a:ext cx="0" cy="0"/>
-          <a:chOff x="0" y="0"/>
-          <a:chExt cx="0" cy="0"/>
-        </a:xfrm>
-      </p:grpSpPr>
-      <p:sp>
-        <p:nvSpPr>
-          <p:cNvPr id="2" name="Slide Image Placeholder 1"/>
-          <p:cNvSpPr>
-            <a:spLocks noGrp="1" noRot="1" noChangeAspect="1"/>
-          </p:cNvSpPr>
-          <p:nvPr>
-            <p:ph type="sldImg"/>
-          </p:nvPr>
-        </p:nvSpPr>
-        <p:spPr/>
-      </p:sp>
-      <p:sp>
-        <p:nvSpPr>
-          <p:cNvPr id="3" name="Notes Placeholder 2"/>
-          <p:cNvSpPr>
-            <a:spLocks noGrp="1"/>
-          </p:cNvSpPr>
-          <p:nvPr>
-            <p:ph type="body" idx="1"/>
-          </p:nvPr>
-        </p:nvSpPr>
-        <p:spPr/>
-        <p:txBody>
-          <a:bodyPr/>
-          <a:lstStyle/>
-          <a:p>
-            <a:r>
-              <a:rPr lang="en-US" dirty="0"/>
-              <a:t>目前的限制是:被挑出來的候選裡,每 4 個大約有 3 個是假的,AE 加 OC-SVM 還分不出真假候選。下一步的具體目標是把低點候選的命中率拉到 36% 以上,這是扣掉交易成本後不賠錢的門檻。</a:t>
-            </a:r>
-            <a:endParaRPr lang="en-US" dirty="0"/>
-          </a:p>
-        </p:txBody>
-      </p:sp>
-      <p:sp>
-        <p:nvSpPr>
-          <p:cNvPr id="4" name="Slide Number Placeholder 3"/>
-          <p:cNvSpPr>
-            <a:spLocks noGrp="1"/>
-          </p:cNvSpPr>
-          <p:nvPr>
-            <p:ph type="sldNum" sz="quarter" idx="10"/>
-          </p:nvPr>
-        </p:nvSpPr>
-        <p:spPr/>
-        <p:txBody>
-          <a:bodyPr/>
-          <a:lstStyle/>
-          <a:p>
-            <a:fld id="{F7021451-1387-4CA6-816F-3879F97B5CBC}" type="slidenum">
-              <a:rPr lang="en-US"/>
-              <a:t>13</a:t>
-            </a:fld>
-            <a:endParaRPr lang="en-US"/>
-          </a:p>
-        </p:txBody>
-      </p:sp>
-    </p:spTree>
-    <p:extLst>
-      <p:ext uri="{BB962C8B-B14F-4D97-AF65-F5344CB8AC3E}">
-        <p14:creationId xmlns:p14="http://schemas.microsoft.com/office/powerpoint/2010/main" val="1024086991"/>
-      </p:ext>
-    </p:extLst>
-  </p:cSld>
-  <p:clrMapOvr>
-    <a:masterClrMapping/>
-  </p:clrMapOvr>
-</p:notes>
-</file>
-
-<file path=ppt/notesSlides/notesSlide14.xml><?xml version="1.0" encoding="utf-8"?>
-<p:notes xmlns:a="http://schemas.openxmlformats.org/drawingml/2006/main" xmlns:r="http://schemas.openxmlformats.org/officeDocument/2006/relationships" xmlns:p="http://schemas.openxmlformats.org/presentationml/2006/main">
-  <p:cSld>
-    <p:spTree>
-      <p:nvGrpSpPr>
-        <p:cNvPr id="1" name=""/>
-        <p:cNvGrpSpPr/>
-        <p:nvPr/>
-      </p:nvGrpSpPr>
-      <p:grpSpPr>
-        <a:xfrm>
-          <a:off x="0" y="0"/>
-          <a:ext cx="0" cy="0"/>
-          <a:chOff x="0" y="0"/>
-          <a:chExt cx="0" cy="0"/>
-        </a:xfrm>
-      </p:grpSpPr>
-      <p:sp>
-        <p:nvSpPr>
-          <p:cNvPr id="2" name="Slide Image Placeholder 1"/>
-          <p:cNvSpPr>
-            <a:spLocks noGrp="1" noRot="1" noChangeAspect="1"/>
-          </p:cNvSpPr>
-          <p:nvPr>
-            <p:ph type="sldImg"/>
-          </p:nvPr>
-        </p:nvSpPr>
-        <p:spPr/>
-      </p:sp>
-      <p:sp>
-        <p:nvSpPr>
-          <p:cNvPr id="3" name="Notes Placeholder 2"/>
-          <p:cNvSpPr>
-            <a:spLocks noGrp="1"/>
-          </p:cNvSpPr>
-          <p:nvPr>
-            <p:ph type="body" idx="1"/>
-          </p:nvPr>
-        </p:nvSpPr>
-        <p:spPr/>
-        <p:txBody>
-          <a:bodyPr/>
-          <a:lstStyle/>
-          <a:p>
-            <a:r>
-              <a:rPr lang="en-US" dirty="0"/>
-              <a:t>總結三點。第一,我們照論文方法重現了標籤和規則基準。第二,局部準確度很好:不漏掉真高低點、判非極值很準、候選比亂猜準 3.5 到 4 倍。第三,接下來要提高候選的命中率。謝謝。</a:t>
-            </a:r>
-            <a:endParaRPr lang="en-US" dirty="0"/>
-          </a:p>
-        </p:txBody>
-      </p:sp>
-      <p:sp>
-        <p:nvSpPr>
-          <p:cNvPr id="4" name="Slide Number Placeholder 3"/>
-          <p:cNvSpPr>
-            <a:spLocks noGrp="1"/>
-          </p:cNvSpPr>
-          <p:nvPr>
-            <p:ph type="sldNum" sz="quarter" idx="10"/>
-          </p:nvPr>
-        </p:nvSpPr>
-        <p:spPr/>
-        <p:txBody>
-          <a:bodyPr/>
-          <a:lstStyle/>
-          <a:p>
-            <a:fld id="{F7021451-1387-4CA6-816F-3879F97B5CBC}" type="slidenum">
-              <a:rPr lang="en-US"/>
-              <a:t>14</a:t>
             </a:fld>
             <a:endParaRPr lang="en-US"/>
           </a:p>
@@ -1877,7 +1421,7 @@
           <a:p>
             <a:r>
               <a:rPr lang="en-US" dirty="0"/>
-              <a:t>先講結論。第一,真正的 11 日高點我們一個都沒漏,低點也只漏一個。第二,模型說「這天不是高低點」的時候,94.5% 是對的。第三,被我們挑出來的候選,是真高低點的機率是隨便挑一天的 3.5 到 4 倍。最後一行是目前的限制,後面會說明。</a:t>
+              <a:t>資料是 TW50 的 50 檔股票,2016 到 2026 年 9 月的還原日 K,總共約 12.9 萬個股票日。訓練用 2020 到 2023 年 48,585 筆,測試用 2025 年到 2026 年 9 月 20,189 筆。高點和低點各只佔 7 到 8%,這個不平衡很重要,後面算 acc 時會再提到。</a:t>
             </a:r>
             <a:endParaRPr lang="en-US" dirty="0"/>
           </a:p>
@@ -1965,7 +1509,7 @@
           <a:p>
             <a:r>
               <a:rPr lang="en-US" dirty="0"/>
-              <a:t>原本的系統是用 AE 加 OC-SVM 找會大漲的 K 線型態,但回測輸給買進持有。所以我們參考逢甲大學的論文,把目標改成找 11 天窗口裡的局部高點和低點,也就是波段的轉折點。</a:t>
+              <a:t>流程分四步。關鍵在第二步的規則:真正的 11 日高點,一定也是近 6 天的高點,所以規則先把所有可能的候選挑出來,保證不漏。第三步才是我們的 AE 加 OC-SVM,它要從候選裡刪掉那些之後 5 天又被超越的假候選。</a:t>
             </a:r>
             <a:endParaRPr lang="en-US" dirty="0"/>
           </a:p>
@@ -2053,7 +1597,7 @@
           <a:p>
             <a:r>
               <a:rPr lang="en-US" dirty="0"/>
-              <a:t>每個樣本是連續 11 個交易日,中間的第 6 天叫 t。t 日收盤如果是這 11 天最高就標高點、最低就標低點,其他都是非極值。左邊淺色的部分是 t 日收盤當下看得到的;右邊未來 5 天只用來貼標籤,模型看不到。</a:t>
+              <a:t>模型沿用我們原本系統的 AE 加 OC-SVM。AE 的輸入是 t-5 到 t 六根 K 線的 29 個數字:每天的開高低收都除以 t 日收盤(t 日收盤自己固定是 1,所以拿掉),每天的量除以 10 日均量。AE 把這 29 個數字壓成 4 維,OC-SVM 在這 4 維空間裡圈出真高點候選的範圍。測試時,候選點落在範圍內就保留,否則改判非極值。高點和低點各訓練一組。</a:t>
             </a:r>
             <a:endParaRPr lang="en-US" dirty="0"/>
           </a:p>
@@ -2141,7 +1685,7 @@
           <a:p>
             <a:r>
               <a:rPr lang="en-US" dirty="0"/>
-              <a:t>資料是 TW50 的 50 檔股票,2016 到 2026 年 9 月的還原日 K,總共約 12.9 萬個股票日。訓練用 2020 到 2023 年 48,585 筆,測試用 2025 年到 2026 年 9 月 20,189 筆。高點和低點各只佔 7 到 8%,這個不平衡很重要,後面算 acc 時會再提到。</a:t>
+              <a:t>這是測試期的混淆矩陣。看第一列和最後一列:真低點有 82.7% 被判成低點,真高點有 75.1% 被判成高點,而且高點和低點從來不會互相判錯。右邊的表比較三種做法,模型的 acc 是 66.8%,判非極值時 94.6% 正確。</a:t>
             </a:r>
             <a:endParaRPr lang="en-US" dirty="0"/>
           </a:p>
@@ -2229,7 +1773,7 @@
           <a:p>
             <a:r>
               <a:rPr lang="en-US" dirty="0"/>
-              <a:t>流程分四步。關鍵在第二步的規則:真正的 11 日高點,一定也是近 6 天的高點,所以規則先把所有可能的候選挑出來,保證不漏。第三步才是我們的 AE 加 OC-SVM,它要從候選裡刪掉那些之後 5 天又被超越的假候選。</a:t>
+              <a:t>這頁是我們說的局部準確度。左圖是命中率:隨機挑一天是高點的機率只有 7.3%,被我們挑出來的候選是 25 到 31%,大約是 3.5 到 4 倍。右邊三個數字:真高低點全部進了候選,模型判對 75 到 83%,判非極值時 94.6% 正確。</a:t>
             </a:r>
             <a:endParaRPr lang="en-US" dirty="0"/>
           </a:p>
@@ -2317,7 +1861,7 @@
           <a:p>
             <a:r>
               <a:rPr lang="en-US" dirty="0"/>
-              <a:t>模型沿用我們原本系統的 AE 加 OC-SVM。AE 把 6 根 K 線的 29 個數字壓成 4 維,OC-SVM 在這 4 維空間裡圈出真高點候選的範圍。測試時,候選點落在範圍內就保留,否則改判非極值。高點和低點各訓練一組。</a:t>
+              <a:t>這是測試期四種情況的典型例子:左上判對的高點,右上判對的低點,左下是規則挑出來但被模型正確刪掉的假候選,右下是誤報,判了高點但之後又創新高。每一類都是取報酬最接近中位數的窗口,不是挑最好看的。互動網頁(連結:https://claude.ai/artifact/4YudK9qBr4fnsV4NQatjEe,需先分享權限)可以看全部 50 檔。</a:t>
             </a:r>
             <a:endParaRPr lang="en-US" dirty="0"/>
           </a:p>
@@ -2405,7 +1949,7 @@
           <a:p>
             <a:r>
               <a:rPr lang="en-US" dirty="0"/>
-              <a:t>判對的定義很簡單:模型的判斷和 11 日窗口貼出來的標籤一樣就算對。acc 是判對的天數除以全部天數。但因為 85% 的日子都是非極值,全猜非極值 acc 就有 85%,卻一個高低點都沒找到,所以論文和我們都用 macro-F1 當主要指標,同時看找到率和命中率。</a:t>
+              <a:t>總結。我們把題目定成找 11 天窗口裡的局部高低點,在 TW50 的測試期:真高低點全部進了候選;模型判出的高點和低點從來不會互相搞錯;模型說「這天不是高低點」時 94.6% 是對的;挑出來的候選是真高低點的機率是隨便挑一天的 3.5 到 4.1 倍。模型最後判對了 75% 的真高點和 83% 的真低點。謝謝。</a:t>
             </a:r>
             <a:endParaRPr lang="en-US" dirty="0"/>
           </a:p>
@@ -2429,94 +1973,6 @@
             <a:fld id="{F7021451-1387-4CA6-816F-3879F97B5CBC}" type="slidenum">
               <a:rPr lang="en-US"/>
               <a:t>8</a:t>
-            </a:fld>
-            <a:endParaRPr lang="en-US"/>
-          </a:p>
-        </p:txBody>
-      </p:sp>
-    </p:spTree>
-    <p:extLst>
-      <p:ext uri="{BB962C8B-B14F-4D97-AF65-F5344CB8AC3E}">
-        <p14:creationId xmlns:p14="http://schemas.microsoft.com/office/powerpoint/2010/main" val="1024086991"/>
-      </p:ext>
-    </p:extLst>
-  </p:cSld>
-  <p:clrMapOvr>
-    <a:masterClrMapping/>
-  </p:clrMapOvr>
-</p:notes>
-</file>
-
-<file path=ppt/notesSlides/notesSlide9.xml><?xml version="1.0" encoding="utf-8"?>
-<p:notes xmlns:a="http://schemas.openxmlformats.org/drawingml/2006/main" xmlns:r="http://schemas.openxmlformats.org/officeDocument/2006/relationships" xmlns:p="http://schemas.openxmlformats.org/presentationml/2006/main">
-  <p:cSld>
-    <p:spTree>
-      <p:nvGrpSpPr>
-        <p:cNvPr id="1" name=""/>
-        <p:cNvGrpSpPr/>
-        <p:nvPr/>
-      </p:nvGrpSpPr>
-      <p:grpSpPr>
-        <a:xfrm>
-          <a:off x="0" y="0"/>
-          <a:ext cx="0" cy="0"/>
-          <a:chOff x="0" y="0"/>
-          <a:chExt cx="0" cy="0"/>
-        </a:xfrm>
-      </p:grpSpPr>
-      <p:sp>
-        <p:nvSpPr>
-          <p:cNvPr id="2" name="Slide Image Placeholder 1"/>
-          <p:cNvSpPr>
-            <a:spLocks noGrp="1" noRot="1" noChangeAspect="1"/>
-          </p:cNvSpPr>
-          <p:nvPr>
-            <p:ph type="sldImg"/>
-          </p:nvPr>
-        </p:nvSpPr>
-        <p:spPr/>
-      </p:sp>
-      <p:sp>
-        <p:nvSpPr>
-          <p:cNvPr id="3" name="Notes Placeholder 2"/>
-          <p:cNvSpPr>
-            <a:spLocks noGrp="1"/>
-          </p:cNvSpPr>
-          <p:nvPr>
-            <p:ph type="body" idx="1"/>
-          </p:nvPr>
-        </p:nvSpPr>
-        <p:spPr/>
-        <p:txBody>
-          <a:bodyPr/>
-          <a:lstStyle/>
-          <a:p>
-            <a:r>
-              <a:rPr lang="en-US" dirty="0"/>
-              <a:t>這是測試期的混淆矩陣。看第一列和最後一列:真低點有 80.7% 被判成低點,真高點有 75.6% 被判成高點,而且高點和低點從來不會互相判錯。右邊的表比較三種做法,模型的 acc 是 67.5%,判非極值時 94.5% 正確。</a:t>
-            </a:r>
-            <a:endParaRPr lang="en-US" dirty="0"/>
-          </a:p>
-        </p:txBody>
-      </p:sp>
-      <p:sp>
-        <p:nvSpPr>
-          <p:cNvPr id="4" name="Slide Number Placeholder 3"/>
-          <p:cNvSpPr>
-            <a:spLocks noGrp="1"/>
-          </p:cNvSpPr>
-          <p:nvPr>
-            <p:ph type="sldNum" sz="quarter" idx="10"/>
-          </p:nvPr>
-        </p:nvSpPr>
-        <p:spPr/>
-        <p:txBody>
-          <a:bodyPr/>
-          <a:lstStyle/>
-          <a:p>
-            <a:fld id="{F7021451-1387-4CA6-816F-3879F97B5CBC}" type="slidenum">
-              <a:rPr lang="en-US"/>
-              <a:t>9</a:t>
             </a:fld>
             <a:endParaRPr lang="en-US"/>
           </a:p>
@@ -3618,135 +3074,6 @@
         </p:nvSpPr>
         <p:spPr>
           <a:xfrm>
-            <a:off x="731520" y="1920240"/>
-            <a:ext cx="10698480" cy="1371600"/>
-          </a:xfrm>
-          <a:prstGeom prst="rect">
-            <a:avLst/>
-          </a:prstGeom>
-          <a:noFill/>
-          <a:ln/>
-        </p:spPr>
-        <p:txBody>
-          <a:bodyPr wrap="square" lIns="0" tIns="0" rIns="0" bIns="0" rtlCol="0" anchor="t"/>
-          <a:lstStyle/>
-          <a:p>
-            <a:pPr indent="0" marL="0">
-              <a:buNone/>
-            </a:pPr>
-            <a:r>
-              <a:rPr lang="en-US" sz="4400" b="1" dirty="0">
-                <a:solidFill>
-                  <a:schemeClr val="bg1"/>
-                </a:solidFill>
-              </a:rPr>
-              <a:t>TW50 局部高低點偵測</a:t>
-            </a:r>
-            <a:endParaRPr lang="en-US" sz="4400" dirty="0"/>
-          </a:p>
-        </p:txBody>
-      </p:sp>
-      <p:sp>
-        <p:nvSpPr>
-          <p:cNvPr id="3" name="Text 11"/>
-          <p:cNvSpPr/>
-          <p:nvPr>
-            <p:ph idx="112" type="body" hasCustomPrompt="1"/>
-          </p:nvPr>
-        </p:nvSpPr>
-        <p:spPr>
-          <a:xfrm>
-            <a:off x="731520" y="3429000"/>
-            <a:ext cx="10698480" cy="2377440"/>
-          </a:xfrm>
-          <a:prstGeom prst="rect">
-            <a:avLst/>
-          </a:prstGeom>
-          <a:noFill/>
-          <a:ln/>
-        </p:spPr>
-        <p:txBody>
-          <a:bodyPr wrap="square" lIns="0" tIns="0" rIns="0" bIns="0" rtlCol="0" anchor="t"/>
-          <a:lstStyle/>
-          <a:p>
-            <a:pPr indent="0" marL="0">
-              <a:buNone/>
-            </a:pPr>
-            <a:r>
-              <a:rPr lang="en-US" sz="1800" dirty="0">
-                <a:solidFill>
-                  <a:schemeClr val="bg2"/>
-                </a:solidFill>
-              </a:rPr>
-              <a:t>11 日窗口 · 論文標籤 + 規則候選 + AE + OC-SVM</a:t>
-            </a:r>
-            <a:endParaRPr lang="en-US" sz="1800" dirty="0"/>
-          </a:p>
-          <a:p>
-            <a:pPr indent="0" marL="0">
-              <a:buNone/>
-            </a:pPr>
-            <a:r>
-              <a:rPr lang="en-US" sz="1000" dirty="0">
-                <a:solidFill>
-                  <a:schemeClr val="bg2"/>
-                </a:solidFill>
-              </a:rPr>
-              <a:t> </a:t>
-            </a:r>
-            <a:endParaRPr lang="en-US" sz="1800" dirty="0"/>
-          </a:p>
-          <a:p>
-            <a:pPr indent="0" marL="0">
-              <a:buNone/>
-            </a:pPr>
-            <a:r>
-              <a:rPr lang="en-US" sz="1500" dirty="0">
-                <a:solidFill>
-                  <a:schemeClr val="accent6"/>
-                </a:solidFill>
-              </a:rPr>
-              <a:t>專題進度報告 · 2026-10-19</a:t>
-            </a:r>
-            <a:endParaRPr lang="en-US" sz="1800" dirty="0"/>
-          </a:p>
-        </p:txBody>
-      </p:sp>
-    </p:spTree>
-  </p:cSld>
-  <p:clrMapOvr>
-    <a:masterClrMapping/>
-  </p:clrMapOvr>
-</p:sld>
-</file>
-
-<file path=ppt/slides/slide10.xml><?xml version="1.0" encoding="utf-8"?>
-<p:sld xmlns:a="http://schemas.openxmlformats.org/drawingml/2006/main" xmlns:r="http://schemas.openxmlformats.org/officeDocument/2006/relationships" xmlns:p="http://schemas.openxmlformats.org/presentationml/2006/main">
-  <p:cSld name="Slide 10">
-    <p:spTree>
-      <p:nvGrpSpPr>
-        <p:cNvPr id="1" name=""/>
-        <p:cNvGrpSpPr/>
-        <p:nvPr/>
-      </p:nvGrpSpPr>
-      <p:grpSpPr>
-        <a:xfrm>
-          <a:off x="0" y="0"/>
-          <a:ext cx="0" cy="0"/>
-          <a:chOff x="0" y="0"/>
-          <a:chExt cx="0" cy="0"/>
-        </a:xfrm>
-      </p:grpSpPr>
-      <p:sp>
-        <p:nvSpPr>
-          <p:cNvPr id="2" name="Text 11"/>
-          <p:cNvSpPr/>
-          <p:nvPr>
-            <p:ph idx="111" type="title" hasCustomPrompt="1"/>
-          </p:nvPr>
-        </p:nvSpPr>
-        <p:spPr>
-          <a:xfrm>
             <a:off x="548640" y="320040"/>
             <a:ext cx="9418320" cy="777240"/>
           </a:xfrm>
@@ -3769,42 +3096,86 @@
                   <a:schemeClr val="tx1"/>
                 </a:solidFill>
               </a:rPr>
-              <a:t>局部準確度:挑出的候選比亂猜準 3.5–4.2 倍</a:t>
+              <a:t>標籤怎麼貼:第 6 天是不是 11 天的最高或最低</a:t>
             </a:r>
             <a:endParaRPr lang="en-US" sz="3200" dirty="0"/>
           </a:p>
         </p:txBody>
       </p:sp>
-      <p:graphicFrame>
-        <p:nvGraphicFramePr>
-          <p:cNvPr id="3" name="precision-chart" descr=""/>
-          <p:cNvGraphicFramePr/>
+      <p:pic>
+        <p:nvPicPr>
+          <p:cNvPr id="3" name="window-example" descr="window_annotated.png">    </p:cNvPr>
+          <p:cNvPicPr>
+            <a:picLocks noChangeAspect="1"/>
+          </p:cNvPicPr>
           <p:nvPr/>
-        </p:nvGraphicFramePr>
-        <p:xfrm>
-          <a:off x="548640" y="1371600"/>
-          <a:ext cx="6583680" cy="4389120"/>
-        </p:xfrm>
-        <a:graphic xmlns:a="http://schemas.openxmlformats.org/drawingml/2006/main">
-          <a:graphicData uri="http://schemas.openxmlformats.org/drawingml/2006/chart">
-            <c:chart xmlns:c="http://schemas.openxmlformats.org/drawingml/2006/chart" r:id="rId1"/>
-          </a:graphicData>
-        </a:graphic>
-      </p:graphicFrame>
-      <p:sp>
-        <p:nvSpPr>
-          <p:cNvPr id="4" name="loc-0"/>
+        </p:nvPicPr>
+        <p:blipFill>
+          <a:blip r:embed="rId1"/>
+          <a:stretch>
+            <a:fillRect/>
+          </a:stretch>
+        </p:blipFill>
+        <p:spPr>
+          <a:xfrm>
+            <a:off x="548640" y="1371600"/>
+            <a:ext cx="6766560" cy="3666744"/>
+          </a:xfrm>
+          <a:prstGeom prst="rect">
+            <a:avLst/>
+          </a:prstGeom>
+        </p:spPr>
+      </p:pic>
+      <p:sp>
+        <p:nvSpPr>
+          <p:cNvPr id="4" name="Text 1"/>
+          <p:cNvSpPr txBox="1"/>
+          <p:nvPr/>
+        </p:nvSpPr>
+        <p:spPr>
+          <a:xfrm>
+            <a:off x="548640" y="5166360"/>
+            <a:ext cx="6766560" cy="457200"/>
+          </a:xfrm>
+          <a:prstGeom prst="rect">
+            <a:avLst/>
+          </a:prstGeom>
+          <a:noFill/>
+          <a:ln/>
+        </p:spPr>
+        <p:txBody>
+          <a:bodyPr wrap="square" lIns="0" tIns="0" rIns="0" bIns="0" rtlCol="0" anchor="t"/>
+          <a:lstStyle/>
+          <a:p>
+            <a:pPr indent="0" marL="0">
+              <a:buNone/>
+            </a:pPr>
+            <a:r>
+              <a:rPr lang="en-US" sz="1200" dirty="0">
+                <a:solidFill>
+                  <a:schemeClr val="accent5"/>
+                </a:solidFill>
+              </a:rPr>
+              <a:t>實例:台積電 2026-02-25,t 日收盤 2003 是前後各 5 天裡最高 → 高點</a:t>
+            </a:r>
+            <a:endParaRPr lang="en-US" sz="1200" dirty="0"/>
+          </a:p>
+        </p:txBody>
+      </p:sp>
+      <p:sp>
+        <p:nvSpPr>
+          <p:cNvPr id="5" name="rules"/>
           <p:cNvSpPr/>
           <p:nvPr/>
         </p:nvSpPr>
         <p:spPr>
           <a:xfrm>
-            <a:off x="7498080" y="1463040"/>
-            <a:ext cx="4114800" cy="1280160"/>
+            <a:off x="7680960" y="1371600"/>
+            <a:ext cx="3931920" cy="4251960"/>
           </a:xfrm>
           <a:prstGeom prst="roundRect">
             <a:avLst>
-              <a:gd name="adj" fmla="val 5714"/>
+              <a:gd name="adj" fmla="val 1860"/>
             </a:avLst>
           </a:prstGeom>
           <a:solidFill>
@@ -3820,14 +3191,14 @@
       </p:sp>
       <p:sp>
         <p:nvSpPr>
-          <p:cNvPr id="5" name="Text 2"/>
+          <p:cNvPr id="6" name="Text 3"/>
           <p:cNvSpPr txBox="1"/>
           <p:nvPr/>
         </p:nvSpPr>
         <p:spPr>
           <a:xfrm>
-            <a:off x="7726680" y="1600200"/>
-            <a:ext cx="3749040" cy="594360"/>
+            <a:off x="7955280" y="1600200"/>
+            <a:ext cx="3474720" cy="3840480"/>
           </a:xfrm>
           <a:prstGeom prst="rect">
             <a:avLst/>
@@ -3843,248 +3214,152 @@
               <a:buNone/>
             </a:pPr>
             <a:r>
-              <a:rPr lang="en-US" sz="2800" b="1" dirty="0">
+              <a:rPr lang="en-US" sz="1400" b="1" dirty="0">
+                <a:solidFill>
+                  <a:schemeClr val="tx1"/>
+                </a:solidFill>
+              </a:rPr>
+              <a:t>窗口</a:t>
+            </a:r>
+            <a:endParaRPr lang="en-US" sz="1400" dirty="0"/>
+          </a:p>
+          <a:p>
+            <a:pPr indent="0" marL="0">
+              <a:spcAft>
+                <a:spcPts val="1000"/>
+              </a:spcAft>
+              <a:buNone/>
+            </a:pPr>
+            <a:r>
+              <a:rPr lang="en-US" sz="1400" dirty="0">
+                <a:solidFill>
+                  <a:schemeClr val="tx2"/>
+                </a:solidFill>
+              </a:rPr>
+              <a:t>t-5 ~ t+5,共 11 個交易日,t 是第 6 天</a:t>
+            </a:r>
+            <a:endParaRPr lang="en-US" sz="1400" dirty="0"/>
+          </a:p>
+          <a:p>
+            <a:pPr indent="0" marL="0">
+              <a:buNone/>
+            </a:pPr>
+            <a:r>
+              <a:rPr lang="en-US" sz="1400" b="1" dirty="0">
                 <a:solidFill>
                   <a:schemeClr val="accent1"/>
                 </a:solidFill>
               </a:rPr>
-              <a:t>100% / 99.9%</a:t>
+              <a:t>高點</a:t>
             </a:r>
-            <a:endParaRPr lang="en-US" sz="2800" dirty="0"/>
-          </a:p>
-        </p:txBody>
-      </p:sp>
-      <p:sp>
-        <p:nvSpPr>
-          <p:cNvPr id="6" name="Text 3"/>
-          <p:cNvSpPr txBox="1"/>
-          <p:nvPr/>
-        </p:nvSpPr>
-        <p:spPr>
-          <a:xfrm>
-            <a:off x="7726680" y="2212848"/>
-            <a:ext cx="3749040" cy="411480"/>
-          </a:xfrm>
-          <a:prstGeom prst="rect">
-            <a:avLst/>
-          </a:prstGeom>
-          <a:noFill/>
-          <a:ln/>
-        </p:spPr>
-        <p:txBody>
-          <a:bodyPr wrap="square" lIns="0" tIns="0" rIns="0" bIns="0" rtlCol="0" anchor="t"/>
-          <a:lstStyle/>
+            <a:endParaRPr lang="en-US" sz="1400" dirty="0"/>
+          </a:p>
+          <a:p>
+            <a:pPr indent="0" marL="0">
+              <a:spcAft>
+                <a:spcPts val="1000"/>
+              </a:spcAft>
+              <a:buNone/>
+            </a:pPr>
+            <a:r>
+              <a:rPr lang="en-US" sz="1400" dirty="0">
+                <a:solidFill>
+                  <a:schemeClr val="tx2"/>
+                </a:solidFill>
+              </a:rPr>
+              <a:t>t 日收盤是 11 天最高</a:t>
+            </a:r>
+            <a:endParaRPr lang="en-US" sz="1400" dirty="0"/>
+          </a:p>
           <a:p>
             <a:pPr indent="0" marL="0">
               <a:buNone/>
             </a:pPr>
             <a:r>
-              <a:rPr lang="en-US" sz="1300" dirty="0">
+              <a:rPr lang="en-US" sz="1400" b="1" dirty="0">
+                <a:solidFill>
+                  <a:schemeClr val="accent2"/>
+                </a:solidFill>
+              </a:rPr>
+              <a:t>低點</a:t>
+            </a:r>
+            <a:endParaRPr lang="en-US" sz="1400" dirty="0"/>
+          </a:p>
+          <a:p>
+            <a:pPr indent="0" marL="0">
+              <a:spcAft>
+                <a:spcPts val="1000"/>
+              </a:spcAft>
+              <a:buNone/>
+            </a:pPr>
+            <a:r>
+              <a:rPr lang="en-US" sz="1400" dirty="0">
                 <a:solidFill>
                   <a:schemeClr val="tx2"/>
                 </a:solidFill>
               </a:rPr>
-              <a:t>規則找到的真高點 / 真低點</a:t>
+              <a:t>t 日收盤是 11 天最低</a:t>
             </a:r>
-            <a:endParaRPr lang="en-US" sz="1300" dirty="0"/>
-          </a:p>
-        </p:txBody>
-      </p:sp>
-      <p:sp>
-        <p:nvSpPr>
-          <p:cNvPr id="7" name="loc-1"/>
-          <p:cNvSpPr/>
-          <p:nvPr/>
-        </p:nvSpPr>
-        <p:spPr>
-          <a:xfrm>
-            <a:off x="7498080" y="2926080"/>
-            <a:ext cx="4114800" cy="1280160"/>
-          </a:xfrm>
-          <a:prstGeom prst="roundRect">
-            <a:avLst>
-              <a:gd name="adj" fmla="val 5714"/>
-            </a:avLst>
-          </a:prstGeom>
-          <a:solidFill>
-            <a:schemeClr val="bg2"/>
-          </a:solidFill>
-          <a:ln w="12700">
-            <a:solidFill>
-              <a:schemeClr val="bg2"/>
-            </a:solidFill>
-            <a:prstDash val="solid"/>
-          </a:ln>
-        </p:spPr>
-      </p:sp>
-      <p:sp>
-        <p:nvSpPr>
-          <p:cNvPr id="8" name="Text 5"/>
-          <p:cNvSpPr txBox="1"/>
-          <p:nvPr/>
-        </p:nvSpPr>
-        <p:spPr>
-          <a:xfrm>
-            <a:off x="7726680" y="3063240"/>
-            <a:ext cx="3749040" cy="594360"/>
-          </a:xfrm>
-          <a:prstGeom prst="rect">
-            <a:avLst/>
-          </a:prstGeom>
-          <a:noFill/>
-          <a:ln/>
-        </p:spPr>
-        <p:txBody>
-          <a:bodyPr wrap="square" lIns="0" tIns="0" rIns="0" bIns="0" rtlCol="0" anchor="t"/>
-          <a:lstStyle/>
+            <a:endParaRPr lang="en-US" sz="1400" dirty="0"/>
+          </a:p>
           <a:p>
             <a:pPr indent="0" marL="0">
               <a:buNone/>
             </a:pPr>
             <a:r>
-              <a:rPr lang="en-US" sz="2800" b="1" dirty="0">
+              <a:rPr lang="en-US" sz="1400" b="1" dirty="0">
                 <a:solidFill>
-                  <a:schemeClr val="accent2"/>
+                  <a:schemeClr val="tx1"/>
                 </a:solidFill>
               </a:rPr>
-              <a:t>75.6% / 80.7%</a:t>
+              <a:t>非極值</a:t>
             </a:r>
-            <a:endParaRPr lang="en-US" sz="2800" dirty="0"/>
-          </a:p>
-        </p:txBody>
-      </p:sp>
-      <p:sp>
-        <p:nvSpPr>
-          <p:cNvPr id="9" name="Text 6"/>
-          <p:cNvSpPr txBox="1"/>
-          <p:nvPr/>
-        </p:nvSpPr>
-        <p:spPr>
-          <a:xfrm>
-            <a:off x="7726680" y="3675888"/>
-            <a:ext cx="3749040" cy="411480"/>
-          </a:xfrm>
-          <a:prstGeom prst="rect">
-            <a:avLst/>
-          </a:prstGeom>
-          <a:noFill/>
-          <a:ln/>
-        </p:spPr>
-        <p:txBody>
-          <a:bodyPr wrap="square" lIns="0" tIns="0" rIns="0" bIns="0" rtlCol="0" anchor="t"/>
-          <a:lstStyle/>
+            <a:endParaRPr lang="en-US" sz="1400" dirty="0"/>
+          </a:p>
+          <a:p>
+            <a:pPr indent="0" marL="0">
+              <a:spcAft>
+                <a:spcPts val="1000"/>
+              </a:spcAft>
+              <a:buNone/>
+            </a:pPr>
+            <a:r>
+              <a:rPr lang="en-US" sz="1400" dirty="0">
+                <a:solidFill>
+                  <a:schemeClr val="tx2"/>
+                </a:solidFill>
+              </a:rPr>
+              <a:t>其餘;與別天並列最高(低)也算高(低)點</a:t>
+            </a:r>
+            <a:endParaRPr lang="en-US" sz="1400" dirty="0"/>
+          </a:p>
           <a:p>
             <a:pPr indent="0" marL="0">
               <a:buNone/>
             </a:pPr>
             <a:r>
-              <a:rPr lang="en-US" sz="1300" dirty="0">
+              <a:rPr lang="en-US" sz="1400" b="1" dirty="0">
+                <a:solidFill>
+                  <a:schemeClr val="tx1"/>
+                </a:solidFill>
+              </a:rPr>
+              <a:t>判斷時點</a:t>
+            </a:r>
+            <a:endParaRPr lang="en-US" sz="1400" dirty="0"/>
+          </a:p>
+          <a:p>
+            <a:pPr indent="0" marL="0">
+              <a:buNone/>
+            </a:pPr>
+            <a:r>
+              <a:rPr lang="en-US" sz="1400" dirty="0">
                 <a:solidFill>
                   <a:schemeClr val="tx2"/>
                 </a:solidFill>
               </a:rPr>
-              <a:t>模型保留下來的真高點 / 真低點</a:t>
+              <a:t>t 日收盤後,只看得到 t-5 ~ t</a:t>
             </a:r>
-            <a:endParaRPr lang="en-US" sz="1300" dirty="0"/>
-          </a:p>
-        </p:txBody>
-      </p:sp>
-      <p:sp>
-        <p:nvSpPr>
-          <p:cNvPr id="10" name="loc-2"/>
-          <p:cNvSpPr/>
-          <p:nvPr/>
-        </p:nvSpPr>
-        <p:spPr>
-          <a:xfrm>
-            <a:off x="7498080" y="4389120"/>
-            <a:ext cx="4114800" cy="1280160"/>
-          </a:xfrm>
-          <a:prstGeom prst="roundRect">
-            <a:avLst>
-              <a:gd name="adj" fmla="val 5714"/>
-            </a:avLst>
-          </a:prstGeom>
-          <a:solidFill>
-            <a:schemeClr val="bg2"/>
-          </a:solidFill>
-          <a:ln w="12700">
-            <a:solidFill>
-              <a:schemeClr val="bg2"/>
-            </a:solidFill>
-            <a:prstDash val="solid"/>
-          </a:ln>
-        </p:spPr>
-      </p:sp>
-      <p:sp>
-        <p:nvSpPr>
-          <p:cNvPr id="11" name="Text 8"/>
-          <p:cNvSpPr txBox="1"/>
-          <p:nvPr/>
-        </p:nvSpPr>
-        <p:spPr>
-          <a:xfrm>
-            <a:off x="7726680" y="4526280"/>
-            <a:ext cx="3749040" cy="594360"/>
-          </a:xfrm>
-          <a:prstGeom prst="rect">
-            <a:avLst/>
-          </a:prstGeom>
-          <a:noFill/>
-          <a:ln/>
-        </p:spPr>
-        <p:txBody>
-          <a:bodyPr wrap="square" lIns="0" tIns="0" rIns="0" bIns="0" rtlCol="0" anchor="t"/>
-          <a:lstStyle/>
-          <a:p>
-            <a:pPr indent="0" marL="0">
-              <a:buNone/>
-            </a:pPr>
-            <a:r>
-              <a:rPr lang="en-US" sz="2800" b="1" dirty="0">
-                <a:solidFill>
-                  <a:schemeClr val="accent3"/>
-                </a:solidFill>
-              </a:rPr>
-              <a:t>94.5%</a:t>
-            </a:r>
-            <a:endParaRPr lang="en-US" sz="2800" dirty="0"/>
-          </a:p>
-        </p:txBody>
-      </p:sp>
-      <p:sp>
-        <p:nvSpPr>
-          <p:cNvPr id="12" name="Text 9"/>
-          <p:cNvSpPr txBox="1"/>
-          <p:nvPr/>
-        </p:nvSpPr>
-        <p:spPr>
-          <a:xfrm>
-            <a:off x="7726680" y="5138928"/>
-            <a:ext cx="3749040" cy="411480"/>
-          </a:xfrm>
-          <a:prstGeom prst="rect">
-            <a:avLst/>
-          </a:prstGeom>
-          <a:noFill/>
-          <a:ln/>
-        </p:spPr>
-        <p:txBody>
-          <a:bodyPr wrap="square" lIns="0" tIns="0" rIns="0" bIns="0" rtlCol="0" anchor="t"/>
-          <a:lstStyle/>
-          <a:p>
-            <a:pPr indent="0" marL="0">
-              <a:buNone/>
-            </a:pPr>
-            <a:r>
-              <a:rPr lang="en-US" sz="1300" dirty="0">
-                <a:solidFill>
-                  <a:schemeClr val="tx2"/>
-                </a:solidFill>
-              </a:rPr>
-              <a:t>模型判非極值時的正確率</a:t>
-            </a:r>
-            <a:endParaRPr lang="en-US" sz="1300" dirty="0"/>
+            <a:endParaRPr lang="en-US" sz="1400" dirty="0"/>
           </a:p>
         </p:txBody>
       </p:sp>
@@ -4127,2803 +3402,9 @@
             <a:pPr algn="r"/>
             <a:fld id="{F7021451-1387-4CA6-816F-3879F97B5CBC}" type="slidenum">
               <a:rPr b="0" lang="en-US"/>
-              <a:t>10</a:t>
+              <a:t>1</a:t>
             </a:fld>
             <a:endParaRPr lang="en-US"/>
-          </a:p>
-        </p:txBody>
-      </p:sp>
-    </p:spTree>
-  </p:cSld>
-  <p:clrMapOvr>
-    <a:masterClrMapping/>
-  </p:clrMapOvr>
-</p:sld>
-</file>
-
-<file path=ppt/slides/slide11.xml><?xml version="1.0" encoding="utf-8"?>
-<p:sld xmlns:a="http://schemas.openxmlformats.org/drawingml/2006/main" xmlns:r="http://schemas.openxmlformats.org/officeDocument/2006/relationships" xmlns:p="http://schemas.openxmlformats.org/presentationml/2006/main">
-  <p:cSld name="Slide 11">
-    <p:spTree>
-      <p:nvGrpSpPr>
-        <p:cNvPr id="1" name=""/>
-        <p:cNvGrpSpPr/>
-        <p:nvPr/>
-      </p:nvGrpSpPr>
-      <p:grpSpPr>
-        <a:xfrm>
-          <a:off x="0" y="0"/>
-          <a:ext cx="0" cy="0"/>
-          <a:chOff x="0" y="0"/>
-          <a:chExt cx="0" cy="0"/>
-        </a:xfrm>
-      </p:grpSpPr>
-      <p:sp>
-        <p:nvSpPr>
-          <p:cNvPr id="2" name="Text 11"/>
-          <p:cNvSpPr/>
-          <p:nvPr>
-            <p:ph idx="111" type="title" hasCustomPrompt="1"/>
-          </p:nvPr>
-        </p:nvSpPr>
-        <p:spPr>
-          <a:xfrm>
-            <a:off x="548640" y="320040"/>
-            <a:ext cx="9418320" cy="777240"/>
-          </a:xfrm>
-          <a:prstGeom prst="rect">
-            <a:avLst/>
-          </a:prstGeom>
-          <a:noFill/>
-          <a:ln/>
-        </p:spPr>
-        <p:txBody>
-          <a:bodyPr wrap="square" lIns="0" tIns="0" rIns="0" bIns="0" rtlCol="0" anchor="ctr"/>
-          <a:lstStyle/>
-          <a:p>
-            <a:pPr indent="0" marL="0">
-              <a:buNone/>
-            </a:pPr>
-            <a:r>
-              <a:rPr lang="en-US" sz="3200" b="1" dirty="0">
-                <a:solidFill>
-                  <a:schemeClr val="tx1"/>
-                </a:solidFill>
-              </a:rPr>
-              <a:t>找到的結果長什麼樣</a:t>
-            </a:r>
-            <a:endParaRPr lang="en-US" sz="3200" dirty="0"/>
-          </a:p>
-        </p:txBody>
-      </p:sp>
-      <p:pic>
-        <p:nvPicPr>
-          <p:cNvPr id="3" name="examples" descr="examples.png">    </p:cNvPr>
-          <p:cNvPicPr>
-            <a:picLocks noChangeAspect="1"/>
-          </p:cNvPicPr>
-          <p:nvPr/>
-        </p:nvPicPr>
-        <p:blipFill>
-          <a:blip r:embed="rId1"/>
-          <a:stretch>
-            <a:fillRect/>
-          </a:stretch>
-        </p:blipFill>
-        <p:spPr>
-          <a:xfrm>
-            <a:off x="822960" y="1280160"/>
-            <a:ext cx="9052560" cy="5102352"/>
-          </a:xfrm>
-          <a:prstGeom prst="rect">
-            <a:avLst/>
-          </a:prstGeom>
-        </p:spPr>
-      </p:pic>
-      <p:sp>
-        <p:nvSpPr>
-          <p:cNvPr id="4" name="Text 1"/>
-          <p:cNvSpPr txBox="1"/>
-          <p:nvPr/>
-        </p:nvSpPr>
-        <p:spPr>
-          <a:xfrm>
-            <a:off x="10012680" y="1463040"/>
-            <a:ext cx="1691640" cy="4572000"/>
-          </a:xfrm>
-          <a:prstGeom prst="rect">
-            <a:avLst/>
-          </a:prstGeom>
-          <a:noFill/>
-          <a:ln/>
-        </p:spPr>
-        <p:txBody>
-          <a:bodyPr wrap="square" lIns="0" tIns="0" rIns="0" bIns="0" rtlCol="0" anchor="t"/>
-          <a:lstStyle/>
-          <a:p>
-            <a:pPr indent="0" marL="0">
-              <a:buNone/>
-            </a:pPr>
-            <a:r>
-              <a:rPr lang="en-US" sz="1200" b="1" dirty="0">
-                <a:solidFill>
-                  <a:schemeClr val="tx1"/>
-                </a:solidFill>
-              </a:rPr>
-              <a:t>怎麼看</a:t>
-            </a:r>
-            <a:endParaRPr lang="en-US" sz="1200" dirty="0"/>
-          </a:p>
-          <a:p>
-            <a:pPr indent="0" marL="0">
-              <a:spcAft>
-                <a:spcPts val="1000"/>
-              </a:spcAft>
-              <a:buNone/>
-            </a:pPr>
-            <a:r>
-              <a:rPr lang="en-US" sz="1200" dirty="0">
-                <a:solidFill>
-                  <a:schemeClr val="tx2"/>
-                </a:solidFill>
-              </a:rPr>
-              <a:t>淺色底 = t 日看得到的 6 天;框起來的是 t;虛線是 t 日收盤。</a:t>
-            </a:r>
-            <a:endParaRPr lang="en-US" sz="1200" dirty="0"/>
-          </a:p>
-          <a:p>
-            <a:pPr indent="0" marL="0">
-              <a:buNone/>
-            </a:pPr>
-            <a:r>
-              <a:rPr lang="en-US" sz="1200" b="1" dirty="0">
-                <a:solidFill>
-                  <a:schemeClr val="tx1"/>
-                </a:solidFill>
-              </a:rPr>
-              <a:t>怎麼挑</a:t>
-            </a:r>
-            <a:endParaRPr lang="en-US" sz="1200" dirty="0"/>
-          </a:p>
-          <a:p>
-            <a:pPr indent="0" marL="0">
-              <a:spcAft>
-                <a:spcPts val="1000"/>
-              </a:spcAft>
-              <a:buNone/>
-            </a:pPr>
-            <a:r>
-              <a:rPr lang="en-US" sz="1200" dirty="0">
-                <a:solidFill>
-                  <a:schemeClr val="tx2"/>
-                </a:solidFill>
-              </a:rPr>
-              <a:t>每類取「之後 5 天報酬」最接近該類中位數的窗口,是典型例子,不是最好看的。</a:t>
-            </a:r>
-            <a:endParaRPr lang="en-US" sz="1200" dirty="0"/>
-          </a:p>
-          <a:p>
-            <a:pPr indent="0" marL="0">
-              <a:buNone/>
-            </a:pPr>
-            <a:r>
-              <a:rPr lang="en-US" sz="1200" b="1" dirty="0">
-                <a:solidFill>
-                  <a:schemeClr val="tx1"/>
-                </a:solidFill>
-              </a:rPr>
-              <a:t>互動版</a:t>
-            </a:r>
-            <a:endParaRPr lang="en-US" sz="1200" dirty="0"/>
-          </a:p>
-          <a:p>
-            <a:pPr indent="0" marL="0">
-              <a:buNone/>
-            </a:pPr>
-            <a:r>
-              <a:rPr lang="en-US" sz="1200" dirty="0">
-                <a:solidFill>
-                  <a:schemeClr val="tx2"/>
-                </a:solidFill>
-              </a:rPr>
-              <a:t>網頁可逐檔、逐日點開每個 11 日窗口。</a:t>
-            </a:r>
-            <a:endParaRPr lang="en-US" sz="1200" dirty="0"/>
-          </a:p>
-        </p:txBody>
-      </p:sp>
-      <p:sp>
-        <p:nvSpPr>
-          <p:cNvPr id="25" name="Slide Number Placeholder 0"/>
-          <p:cNvSpPr>
-            <a:spLocks noGrp="1"/>
-          </p:cNvSpPr>
-          <p:nvPr>
-            <p:ph type="sldNum" sz="quarter" idx="4294967295"/>
-          </p:nvPr>
-        </p:nvSpPr>
-        <p:spPr>
-          <a:xfrm>
-            <a:off x="11201400" y="6355080"/>
-            <a:ext cx="457200" cy="274320"/>
-          </a:xfrm>
-          <a:prstGeom prst="rect">
-            <a:avLst/>
-          </a:prstGeom>
-          <a:extLst>
-            <a:ext uri="{C572A759-6A51-4108-AA02-DFA0A04FC94B}">
-              <ma14:wrappingTextBoxFlag xmlns:ma14="http://schemas.microsoft.com/office/mac/drawingml/2011/main" val="0"/>
-            </a:ext>
-          </a:extLst>
-        </p:spPr>
-        <p:txBody>
-          <a:bodyPr/>
-          <a:lstStyle>
-            <a:lvl1pPr>
-              <a:defRPr sz="1000">
-                <a:solidFill>
-                  <a:srgbClr val="7A8691"/>
-                </a:solidFill>
-              </a:defRPr>
-            </a:lvl1pPr>
-          </a:lstStyle>
-          <a:p>
-            <a:pPr algn="r"/>
-            <a:fld id="{F7021451-1387-4CA6-816F-3879F97B5CBC}" type="slidenum">
-              <a:rPr b="0" lang="en-US"/>
-              <a:t>11</a:t>
-            </a:fld>
-            <a:endParaRPr lang="en-US"/>
-          </a:p>
-        </p:txBody>
-      </p:sp>
-    </p:spTree>
-  </p:cSld>
-  <p:clrMapOvr>
-    <a:masterClrMapping/>
-  </p:clrMapOvr>
-</p:sld>
-</file>
-
-<file path=ppt/slides/slide12.xml><?xml version="1.0" encoding="utf-8"?>
-<p:sld xmlns:a="http://schemas.openxmlformats.org/drawingml/2006/main" xmlns:r="http://schemas.openxmlformats.org/officeDocument/2006/relationships" xmlns:p="http://schemas.openxmlformats.org/presentationml/2006/main">
-  <p:cSld name="Slide 12">
-    <p:spTree>
-      <p:nvGrpSpPr>
-        <p:cNvPr id="1" name=""/>
-        <p:cNvGrpSpPr/>
-        <p:nvPr/>
-      </p:nvGrpSpPr>
-      <p:grpSpPr>
-        <a:xfrm>
-          <a:off x="0" y="0"/>
-          <a:ext cx="0" cy="0"/>
-          <a:chOff x="0" y="0"/>
-          <a:chExt cx="0" cy="0"/>
-        </a:xfrm>
-      </p:grpSpPr>
-      <p:sp>
-        <p:nvSpPr>
-          <p:cNvPr id="2" name="Text 11"/>
-          <p:cNvSpPr/>
-          <p:nvPr>
-            <p:ph idx="111" type="title" hasCustomPrompt="1"/>
-          </p:nvPr>
-        </p:nvSpPr>
-        <p:spPr>
-          <a:xfrm>
-            <a:off x="548640" y="320040"/>
-            <a:ext cx="9418320" cy="777240"/>
-          </a:xfrm>
-          <a:prstGeom prst="rect">
-            <a:avLst/>
-          </a:prstGeom>
-          <a:noFill/>
-          <a:ln/>
-        </p:spPr>
-        <p:txBody>
-          <a:bodyPr wrap="square" lIns="0" tIns="0" rIns="0" bIns="0" rtlCol="0" anchor="ctr"/>
-          <a:lstStyle/>
-          <a:p>
-            <a:pPr indent="0" marL="0">
-              <a:buNone/>
-            </a:pPr>
-            <a:r>
-              <a:rPr lang="en-US" sz="3200" b="1" dirty="0">
-                <a:solidFill>
-                  <a:schemeClr val="tx1"/>
-                </a:solidFill>
-              </a:rPr>
-              <a:t>與論文比較:規則基準完整重現</a:t>
-            </a:r>
-            <a:endParaRPr lang="en-US" sz="3200" dirty="0"/>
-          </a:p>
-        </p:txBody>
-      </p:sp>
-      <p:graphicFrame>
-        <p:nvGraphicFramePr>
-          <p:cNvPr id="13" name="Table 0"/>
-          <p:cNvGraphicFramePr>
-            <a:graphicFrameLocks noGrp="1"/>
-          </p:cNvGraphicFramePr>
-          <p:nvPr>
-            <p:extLst>
-              <p:ext uri="{D42A27DB-BD31-4B8C-83A1-F6EECF244321}">
-                <p14:modId xmlns:p14="http://schemas.microsoft.com/office/powerpoint/2010/main" val="1579011935"/>
-              </p:ext>
-            </p:extLst>
-          </p:nvPr>
-        </p:nvGraphicFramePr>
-        <p:xfrm>
-          <a:off x="548640" y="1463040"/>
-          <a:ext cx="11064240" cy="914400"/>
-        </p:xfrm>
-        <a:graphic>
-          <a:graphicData uri="http://schemas.openxmlformats.org/drawingml/2006/table">
-            <a:tbl>
-              <a:tblPr/>
-              <a:tblGrid>
-                <a:gridCol w="2377440"/>
-                <a:gridCol w="3383280"/>
-                <a:gridCol w="2651760"/>
-                <a:gridCol w="2651760"/>
-              </a:tblGrid>
-              <a:tr h="566928">
-                <a:tc>
-                  <a:txBody>
-                    <a:bodyPr/>
-                    <a:lstStyle/>
-                    <a:p>
-                      <a:pPr indent="0" marL="0">
-                        <a:buNone/>
-                      </a:pPr>
-                      <a:endParaRPr lang="en-US" sz="1200" dirty="0">
-                        <a:latin typeface="Microsoft JhengHei" charset="0"/>
-                        <a:ea typeface="Microsoft JhengHei" charset="0"/>
-                        <a:cs typeface="Microsoft JhengHei" charset="0"/>
-                      </a:endParaRPr>
-                    </a:p>
-                  </a:txBody>
-                  <a:tcPr marL="91440" marR="91440" marT="0" marB="0" anchor="ctr">
-                    <a:lnL w="9525" cap="flat" cmpd="sng" algn="ctr">
-                      <a:solidFill>
-                        <a:srgbClr val="D9E0E6"/>
-                      </a:solidFill>
-                      <a:prstDash val="solid"/>
-                      <a:round/>
-                      <a:headEnd type="none" w="med" len="med"/>
-                      <a:tailEnd type="none" w="med" len="med"/>
-                    </a:lnL>
-                    <a:lnR w="9525" cap="flat" cmpd="sng" algn="ctr">
-                      <a:solidFill>
-                        <a:srgbClr val="D9E0E6"/>
-                      </a:solidFill>
-                      <a:prstDash val="solid"/>
-                      <a:round/>
-                      <a:headEnd type="none" w="med" len="med"/>
-                      <a:tailEnd type="none" w="med" len="med"/>
-                    </a:lnR>
-                    <a:lnT w="9525" cap="flat" cmpd="sng" algn="ctr">
-                      <a:solidFill>
-                        <a:srgbClr val="D9E0E6"/>
-                      </a:solidFill>
-                      <a:prstDash val="solid"/>
-                      <a:round/>
-                      <a:headEnd type="none" w="med" len="med"/>
-                      <a:tailEnd type="none" w="med" len="med"/>
-                    </a:lnT>
-                    <a:lnB w="9525" cap="flat" cmpd="sng" algn="ctr">
-                      <a:solidFill>
-                        <a:srgbClr val="D9E0E6"/>
-                      </a:solidFill>
-                      <a:prstDash val="solid"/>
-                      <a:round/>
-                      <a:headEnd type="none" w="med" len="med"/>
-                      <a:tailEnd type="none" w="med" len="med"/>
-                    </a:lnB>
-                  </a:tcPr>
-                </a:tc>
-                <a:tc>
-                  <a:txBody>
-                    <a:bodyPr/>
-                    <a:lstStyle/>
-                    <a:p>
-                      <a:pPr indent="0" marL="0">
-                        <a:buNone/>
-                      </a:pPr>
-                      <a:r>
-                        <a:rPr lang="en-US" sz="1200" b="1" dirty="0">
-                          <a:solidFill>
-                            <a:srgbClr val="7A8691"/>
-                          </a:solidFill>
-                          <a:latin typeface="Microsoft JhengHei" pitchFamily="34" charset="0"/>
-                          <a:ea typeface="Microsoft JhengHei" pitchFamily="34" charset="-122"/>
-                          <a:cs typeface="Microsoft JhengHei" pitchFamily="34" charset="-120"/>
-                        </a:rPr>
-                        <a:t>論文(12 檔,測試 2025-10 ~ 2026-03)</a:t>
-                      </a:r>
-                      <a:endParaRPr lang="en-US" sz="1200" dirty="0">
-                        <a:latin typeface="Microsoft JhengHei" charset="0"/>
-                        <a:ea typeface="Microsoft JhengHei" charset="0"/>
-                        <a:cs typeface="Microsoft JhengHei" charset="0"/>
-                      </a:endParaRPr>
-                    </a:p>
-                  </a:txBody>
-                  <a:tcPr marL="91440" marR="91440" marT="0" marB="0" anchor="ctr">
-                    <a:lnL w="9525" cap="flat" cmpd="sng" algn="ctr">
-                      <a:solidFill>
-                        <a:srgbClr val="D9E0E6"/>
-                      </a:solidFill>
-                      <a:prstDash val="solid"/>
-                      <a:round/>
-                      <a:headEnd type="none" w="med" len="med"/>
-                      <a:tailEnd type="none" w="med" len="med"/>
-                    </a:lnL>
-                    <a:lnR w="9525" cap="flat" cmpd="sng" algn="ctr">
-                      <a:solidFill>
-                        <a:srgbClr val="D9E0E6"/>
-                      </a:solidFill>
-                      <a:prstDash val="solid"/>
-                      <a:round/>
-                      <a:headEnd type="none" w="med" len="med"/>
-                      <a:tailEnd type="none" w="med" len="med"/>
-                    </a:lnR>
-                    <a:lnT w="9525" cap="flat" cmpd="sng" algn="ctr">
-                      <a:solidFill>
-                        <a:srgbClr val="D9E0E6"/>
-                      </a:solidFill>
-                      <a:prstDash val="solid"/>
-                      <a:round/>
-                      <a:headEnd type="none" w="med" len="med"/>
-                      <a:tailEnd type="none" w="med" len="med"/>
-                    </a:lnT>
-                    <a:lnB w="9525" cap="flat" cmpd="sng" algn="ctr">
-                      <a:solidFill>
-                        <a:srgbClr val="D9E0E6"/>
-                      </a:solidFill>
-                      <a:prstDash val="solid"/>
-                      <a:round/>
-                      <a:headEnd type="none" w="med" len="med"/>
-                      <a:tailEnd type="none" w="med" len="med"/>
-                    </a:lnB>
-                  </a:tcPr>
-                </a:tc>
-                <a:tc>
-                  <a:txBody>
-                    <a:bodyPr/>
-                    <a:lstStyle/>
-                    <a:p>
-                      <a:pPr indent="0" marL="0">
-                        <a:buNone/>
-                      </a:pPr>
-                      <a:r>
-                        <a:rPr lang="en-US" sz="1200" b="1" dirty="0">
-                          <a:solidFill>
-                            <a:srgbClr val="7A8691"/>
-                          </a:solidFill>
-                          <a:latin typeface="Microsoft JhengHei" pitchFamily="34" charset="0"/>
-                          <a:ea typeface="Microsoft JhengHei" pitchFamily="34" charset="-122"/>
-                          <a:cs typeface="Microsoft JhengHei" pitchFamily="34" charset="-120"/>
-                        </a:rPr>
-                        <a:t>我們 TW50 · 論文切分</a:t>
-                      </a:r>
-                      <a:endParaRPr lang="en-US" sz="1200" dirty="0">
-                        <a:latin typeface="Microsoft JhengHei" charset="0"/>
-                        <a:ea typeface="Microsoft JhengHei" charset="0"/>
-                        <a:cs typeface="Microsoft JhengHei" charset="0"/>
-                      </a:endParaRPr>
-                    </a:p>
-                  </a:txBody>
-                  <a:tcPr marL="91440" marR="91440" marT="0" marB="0" anchor="ctr">
-                    <a:lnL w="9525" cap="flat" cmpd="sng" algn="ctr">
-                      <a:solidFill>
-                        <a:srgbClr val="D9E0E6"/>
-                      </a:solidFill>
-                      <a:prstDash val="solid"/>
-                      <a:round/>
-                      <a:headEnd type="none" w="med" len="med"/>
-                      <a:tailEnd type="none" w="med" len="med"/>
-                    </a:lnL>
-                    <a:lnR w="9525" cap="flat" cmpd="sng" algn="ctr">
-                      <a:solidFill>
-                        <a:srgbClr val="D9E0E6"/>
-                      </a:solidFill>
-                      <a:prstDash val="solid"/>
-                      <a:round/>
-                      <a:headEnd type="none" w="med" len="med"/>
-                      <a:tailEnd type="none" w="med" len="med"/>
-                    </a:lnR>
-                    <a:lnT w="9525" cap="flat" cmpd="sng" algn="ctr">
-                      <a:solidFill>
-                        <a:srgbClr val="D9E0E6"/>
-                      </a:solidFill>
-                      <a:prstDash val="solid"/>
-                      <a:round/>
-                      <a:headEnd type="none" w="med" len="med"/>
-                      <a:tailEnd type="none" w="med" len="med"/>
-                    </a:lnT>
-                    <a:lnB w="9525" cap="flat" cmpd="sng" algn="ctr">
-                      <a:solidFill>
-                        <a:srgbClr val="D9E0E6"/>
-                      </a:solidFill>
-                      <a:prstDash val="solid"/>
-                      <a:round/>
-                      <a:headEnd type="none" w="med" len="med"/>
-                      <a:tailEnd type="none" w="med" len="med"/>
-                    </a:lnB>
-                  </a:tcPr>
-                </a:tc>
-                <a:tc>
-                  <a:txBody>
-                    <a:bodyPr/>
-                    <a:lstStyle/>
-                    <a:p>
-                      <a:pPr indent="0" marL="0">
-                        <a:buNone/>
-                      </a:pPr>
-                      <a:r>
-                        <a:rPr lang="en-US" sz="1200" b="1" dirty="0">
-                          <a:solidFill>
-                            <a:srgbClr val="7A8691"/>
-                          </a:solidFill>
-                          <a:latin typeface="Microsoft JhengHei" pitchFamily="34" charset="0"/>
-                          <a:ea typeface="Microsoft JhengHei" pitchFamily="34" charset="-122"/>
-                          <a:cs typeface="Microsoft JhengHei" pitchFamily="34" charset="-120"/>
-                        </a:rPr>
-                        <a:t>我們 TW50 · 我們的切分</a:t>
-                      </a:r>
-                      <a:endParaRPr lang="en-US" sz="1200" dirty="0">
-                        <a:latin typeface="Microsoft JhengHei" charset="0"/>
-                        <a:ea typeface="Microsoft JhengHei" charset="0"/>
-                        <a:cs typeface="Microsoft JhengHei" charset="0"/>
-                      </a:endParaRPr>
-                    </a:p>
-                  </a:txBody>
-                  <a:tcPr marL="91440" marR="91440" marT="0" marB="0" anchor="ctr">
-                    <a:lnL w="9525" cap="flat" cmpd="sng" algn="ctr">
-                      <a:solidFill>
-                        <a:srgbClr val="D9E0E6"/>
-                      </a:solidFill>
-                      <a:prstDash val="solid"/>
-                      <a:round/>
-                      <a:headEnd type="none" w="med" len="med"/>
-                      <a:tailEnd type="none" w="med" len="med"/>
-                    </a:lnL>
-                    <a:lnR w="9525" cap="flat" cmpd="sng" algn="ctr">
-                      <a:solidFill>
-                        <a:srgbClr val="D9E0E6"/>
-                      </a:solidFill>
-                      <a:prstDash val="solid"/>
-                      <a:round/>
-                      <a:headEnd type="none" w="med" len="med"/>
-                      <a:tailEnd type="none" w="med" len="med"/>
-                    </a:lnR>
-                    <a:lnT w="9525" cap="flat" cmpd="sng" algn="ctr">
-                      <a:solidFill>
-                        <a:srgbClr val="D9E0E6"/>
-                      </a:solidFill>
-                      <a:prstDash val="solid"/>
-                      <a:round/>
-                      <a:headEnd type="none" w="med" len="med"/>
-                      <a:tailEnd type="none" w="med" len="med"/>
-                    </a:lnT>
-                    <a:lnB w="9525" cap="flat" cmpd="sng" algn="ctr">
-                      <a:solidFill>
-                        <a:srgbClr val="D9E0E6"/>
-                      </a:solidFill>
-                      <a:prstDash val="solid"/>
-                      <a:round/>
-                      <a:headEnd type="none" w="med" len="med"/>
-                      <a:tailEnd type="none" w="med" len="med"/>
-                    </a:lnB>
-                  </a:tcPr>
-                </a:tc>
-              </a:tr>
-              <a:tr h="566928">
-                <a:tc>
-                  <a:txBody>
-                    <a:bodyPr/>
-                    <a:lstStyle/>
-                    <a:p>
-                      <a:pPr algn="l" indent="0" marL="0">
-                        <a:buNone/>
-                      </a:pPr>
-                      <a:r>
-                        <a:rPr lang="en-US" sz="1400" b="1" dirty="0">
-                          <a:solidFill>
-                            <a:srgbClr val="13202A"/>
-                          </a:solidFill>
-                          <a:latin typeface="Microsoft JhengHei" pitchFamily="34" charset="0"/>
-                          <a:ea typeface="Microsoft JhengHei" pitchFamily="34" charset="-122"/>
-                          <a:cs typeface="Microsoft JhengHei" pitchFamily="34" charset="-120"/>
-                        </a:rPr>
-                        <a:t>低點 / 非極值 / 高點</a:t>
-                      </a:r>
-                      <a:endParaRPr lang="en-US" sz="1400" dirty="0">
-                        <a:latin typeface="Microsoft JhengHei" charset="0"/>
-                        <a:ea typeface="Microsoft JhengHei" charset="0"/>
-                        <a:cs typeface="Microsoft JhengHei" charset="0"/>
-                      </a:endParaRPr>
-                    </a:p>
-                  </a:txBody>
-                  <a:tcPr marL="91440" marR="91440" marT="0" marB="0" anchor="ctr">
-                    <a:lnL w="9525" cap="flat" cmpd="sng" algn="ctr">
-                      <a:solidFill>
-                        <a:srgbClr val="D9E0E6"/>
-                      </a:solidFill>
-                      <a:prstDash val="solid"/>
-                      <a:round/>
-                      <a:headEnd type="none" w="med" len="med"/>
-                      <a:tailEnd type="none" w="med" len="med"/>
-                    </a:lnL>
-                    <a:lnR w="9525" cap="flat" cmpd="sng" algn="ctr">
-                      <a:solidFill>
-                        <a:srgbClr val="D9E0E6"/>
-                      </a:solidFill>
-                      <a:prstDash val="solid"/>
-                      <a:round/>
-                      <a:headEnd type="none" w="med" len="med"/>
-                      <a:tailEnd type="none" w="med" len="med"/>
-                    </a:lnR>
-                    <a:lnT w="9525" cap="flat" cmpd="sng" algn="ctr">
-                      <a:solidFill>
-                        <a:srgbClr val="D9E0E6"/>
-                      </a:solidFill>
-                      <a:prstDash val="solid"/>
-                      <a:round/>
-                      <a:headEnd type="none" w="med" len="med"/>
-                      <a:tailEnd type="none" w="med" len="med"/>
-                    </a:lnT>
-                    <a:lnB w="9525" cap="flat" cmpd="sng" algn="ctr">
-                      <a:solidFill>
-                        <a:srgbClr val="D9E0E6"/>
-                      </a:solidFill>
-                      <a:prstDash val="solid"/>
-                      <a:round/>
-                      <a:headEnd type="none" w="med" len="med"/>
-                      <a:tailEnd type="none" w="med" len="med"/>
-                    </a:lnB>
-                  </a:tcPr>
-                </a:tc>
-                <a:tc>
-                  <a:txBody>
-                    <a:bodyPr/>
-                    <a:lstStyle/>
-                    <a:p>
-                      <a:pPr algn="ctr" indent="0" marL="0">
-                        <a:buNone/>
-                      </a:pPr>
-                      <a:r>
-                        <a:rPr lang="en-US" sz="1400" dirty="0">
-                          <a:solidFill>
-                            <a:srgbClr val="13202A"/>
-                          </a:solidFill>
-                          <a:latin typeface="Microsoft JhengHei" pitchFamily="34" charset="0"/>
-                          <a:ea typeface="Microsoft JhengHei" pitchFamily="34" charset="-122"/>
-                          <a:cs typeface="Microsoft JhengHei" pitchFamily="34" charset="-120"/>
-                        </a:rPr>
-                        <a:t>8.5 / 84.5 / 7.0%</a:t>
-                      </a:r>
-                      <a:endParaRPr lang="en-US" sz="1400" dirty="0">
-                        <a:latin typeface="Microsoft JhengHei" charset="0"/>
-                        <a:ea typeface="Microsoft JhengHei" charset="0"/>
-                        <a:cs typeface="Microsoft JhengHei" charset="0"/>
-                      </a:endParaRPr>
-                    </a:p>
-                  </a:txBody>
-                  <a:tcPr marL="91440" marR="91440" marT="0" marB="0" anchor="ctr">
-                    <a:lnL w="9525" cap="flat" cmpd="sng" algn="ctr">
-                      <a:solidFill>
-                        <a:srgbClr val="D9E0E6"/>
-                      </a:solidFill>
-                      <a:prstDash val="solid"/>
-                      <a:round/>
-                      <a:headEnd type="none" w="med" len="med"/>
-                      <a:tailEnd type="none" w="med" len="med"/>
-                    </a:lnL>
-                    <a:lnR w="9525" cap="flat" cmpd="sng" algn="ctr">
-                      <a:solidFill>
-                        <a:srgbClr val="D9E0E6"/>
-                      </a:solidFill>
-                      <a:prstDash val="solid"/>
-                      <a:round/>
-                      <a:headEnd type="none" w="med" len="med"/>
-                      <a:tailEnd type="none" w="med" len="med"/>
-                    </a:lnR>
-                    <a:lnT w="9525" cap="flat" cmpd="sng" algn="ctr">
-                      <a:solidFill>
-                        <a:srgbClr val="D9E0E6"/>
-                      </a:solidFill>
-                      <a:prstDash val="solid"/>
-                      <a:round/>
-                      <a:headEnd type="none" w="med" len="med"/>
-                      <a:tailEnd type="none" w="med" len="med"/>
-                    </a:lnT>
-                    <a:lnB w="9525" cap="flat" cmpd="sng" algn="ctr">
-                      <a:solidFill>
-                        <a:srgbClr val="D9E0E6"/>
-                      </a:solidFill>
-                      <a:prstDash val="solid"/>
-                      <a:round/>
-                      <a:headEnd type="none" w="med" len="med"/>
-                      <a:tailEnd type="none" w="med" len="med"/>
-                    </a:lnB>
-                  </a:tcPr>
-                </a:tc>
-                <a:tc>
-                  <a:txBody>
-                    <a:bodyPr/>
-                    <a:lstStyle/>
-                    <a:p>
-                      <a:pPr algn="ctr" indent="0" marL="0">
-                        <a:buNone/>
-                      </a:pPr>
-                      <a:r>
-                        <a:rPr lang="en-US" sz="1400" dirty="0">
-                          <a:solidFill>
-                            <a:srgbClr val="13202A"/>
-                          </a:solidFill>
-                          <a:latin typeface="Microsoft JhengHei" pitchFamily="34" charset="0"/>
-                          <a:ea typeface="Microsoft JhengHei" pitchFamily="34" charset="-122"/>
-                          <a:cs typeface="Microsoft JhengHei" pitchFamily="34" charset="-120"/>
-                        </a:rPr>
-                        <a:t>8.0 / 85.0 / 7.0%</a:t>
-                      </a:r>
-                      <a:endParaRPr lang="en-US" sz="1400" dirty="0">
-                        <a:latin typeface="Microsoft JhengHei" charset="0"/>
-                        <a:ea typeface="Microsoft JhengHei" charset="0"/>
-                        <a:cs typeface="Microsoft JhengHei" charset="0"/>
-                      </a:endParaRPr>
-                    </a:p>
-                  </a:txBody>
-                  <a:tcPr marL="91440" marR="91440" marT="0" marB="0" anchor="ctr">
-                    <a:lnL w="9525" cap="flat" cmpd="sng" algn="ctr">
-                      <a:solidFill>
-                        <a:srgbClr val="D9E0E6"/>
-                      </a:solidFill>
-                      <a:prstDash val="solid"/>
-                      <a:round/>
-                      <a:headEnd type="none" w="med" len="med"/>
-                      <a:tailEnd type="none" w="med" len="med"/>
-                    </a:lnL>
-                    <a:lnR w="9525" cap="flat" cmpd="sng" algn="ctr">
-                      <a:solidFill>
-                        <a:srgbClr val="D9E0E6"/>
-                      </a:solidFill>
-                      <a:prstDash val="solid"/>
-                      <a:round/>
-                      <a:headEnd type="none" w="med" len="med"/>
-                      <a:tailEnd type="none" w="med" len="med"/>
-                    </a:lnR>
-                    <a:lnT w="9525" cap="flat" cmpd="sng" algn="ctr">
-                      <a:solidFill>
-                        <a:srgbClr val="D9E0E6"/>
-                      </a:solidFill>
-                      <a:prstDash val="solid"/>
-                      <a:round/>
-                      <a:headEnd type="none" w="med" len="med"/>
-                      <a:tailEnd type="none" w="med" len="med"/>
-                    </a:lnT>
-                    <a:lnB w="9525" cap="flat" cmpd="sng" algn="ctr">
-                      <a:solidFill>
-                        <a:srgbClr val="D9E0E6"/>
-                      </a:solidFill>
-                      <a:prstDash val="solid"/>
-                      <a:round/>
-                      <a:headEnd type="none" w="med" len="med"/>
-                      <a:tailEnd type="none" w="med" len="med"/>
-                    </a:lnB>
-                  </a:tcPr>
-                </a:tc>
-                <a:tc>
-                  <a:txBody>
-                    <a:bodyPr/>
-                    <a:lstStyle/>
-                    <a:p>
-                      <a:pPr algn="ctr" indent="0" marL="0">
-                        <a:buNone/>
-                      </a:pPr>
-                      <a:r>
-                        <a:rPr lang="en-US" sz="1400" dirty="0">
-                          <a:solidFill>
-                            <a:srgbClr val="13202A"/>
-                          </a:solidFill>
-                          <a:latin typeface="Microsoft JhengHei" pitchFamily="34" charset="0"/>
-                          <a:ea typeface="Microsoft JhengHei" pitchFamily="34" charset="-122"/>
-                          <a:cs typeface="Microsoft JhengHei" pitchFamily="34" charset="-120"/>
-                        </a:rPr>
-                        <a:t>7.6 / 85.1 / 7.3%</a:t>
-                      </a:r>
-                      <a:endParaRPr lang="en-US" sz="1400" dirty="0">
-                        <a:latin typeface="Microsoft JhengHei" charset="0"/>
-                        <a:ea typeface="Microsoft JhengHei" charset="0"/>
-                        <a:cs typeface="Microsoft JhengHei" charset="0"/>
-                      </a:endParaRPr>
-                    </a:p>
-                  </a:txBody>
-                  <a:tcPr marL="91440" marR="91440" marT="0" marB="0" anchor="ctr">
-                    <a:lnL w="9525" cap="flat" cmpd="sng" algn="ctr">
-                      <a:solidFill>
-                        <a:srgbClr val="D9E0E6"/>
-                      </a:solidFill>
-                      <a:prstDash val="solid"/>
-                      <a:round/>
-                      <a:headEnd type="none" w="med" len="med"/>
-                      <a:tailEnd type="none" w="med" len="med"/>
-                    </a:lnL>
-                    <a:lnR w="9525" cap="flat" cmpd="sng" algn="ctr">
-                      <a:solidFill>
-                        <a:srgbClr val="D9E0E6"/>
-                      </a:solidFill>
-                      <a:prstDash val="solid"/>
-                      <a:round/>
-                      <a:headEnd type="none" w="med" len="med"/>
-                      <a:tailEnd type="none" w="med" len="med"/>
-                    </a:lnR>
-                    <a:lnT w="9525" cap="flat" cmpd="sng" algn="ctr">
-                      <a:solidFill>
-                        <a:srgbClr val="D9E0E6"/>
-                      </a:solidFill>
-                      <a:prstDash val="solid"/>
-                      <a:round/>
-                      <a:headEnd type="none" w="med" len="med"/>
-                      <a:tailEnd type="none" w="med" len="med"/>
-                    </a:lnT>
-                    <a:lnB w="9525" cap="flat" cmpd="sng" algn="ctr">
-                      <a:solidFill>
-                        <a:srgbClr val="D9E0E6"/>
-                      </a:solidFill>
-                      <a:prstDash val="solid"/>
-                      <a:round/>
-                      <a:headEnd type="none" w="med" len="med"/>
-                      <a:tailEnd type="none" w="med" len="med"/>
-                    </a:lnB>
-                  </a:tcPr>
-                </a:tc>
-              </a:tr>
-              <a:tr h="566928">
-                <a:tc>
-                  <a:txBody>
-                    <a:bodyPr/>
-                    <a:lstStyle/>
-                    <a:p>
-                      <a:pPr algn="l" indent="0" marL="0">
-                        <a:buNone/>
-                      </a:pPr>
-                      <a:r>
-                        <a:rPr lang="en-US" sz="1400" b="1" dirty="0">
-                          <a:solidFill>
-                            <a:srgbClr val="13202A"/>
-                          </a:solidFill>
-                          <a:latin typeface="Microsoft JhengHei" pitchFamily="34" charset="0"/>
-                          <a:ea typeface="Microsoft JhengHei" pitchFamily="34" charset="-122"/>
-                          <a:cs typeface="Microsoft JhengHei" pitchFamily="34" charset="-120"/>
-                        </a:rPr>
-                        <a:t>規則基準 macro-F1</a:t>
-                      </a:r>
-                      <a:endParaRPr lang="en-US" sz="1400" dirty="0">
-                        <a:latin typeface="Microsoft JhengHei" charset="0"/>
-                        <a:ea typeface="Microsoft JhengHei" charset="0"/>
-                        <a:cs typeface="Microsoft JhengHei" charset="0"/>
-                      </a:endParaRPr>
-                    </a:p>
-                  </a:txBody>
-                  <a:tcPr marL="91440" marR="91440" marT="0" marB="0" anchor="ctr">
-                    <a:lnL w="9525" cap="flat" cmpd="sng" algn="ctr">
-                      <a:solidFill>
-                        <a:srgbClr val="D9E0E6"/>
-                      </a:solidFill>
-                      <a:prstDash val="solid"/>
-                      <a:round/>
-                      <a:headEnd type="none" w="med" len="med"/>
-                      <a:tailEnd type="none" w="med" len="med"/>
-                    </a:lnL>
-                    <a:lnR w="9525" cap="flat" cmpd="sng" algn="ctr">
-                      <a:solidFill>
-                        <a:srgbClr val="D9E0E6"/>
-                      </a:solidFill>
-                      <a:prstDash val="solid"/>
-                      <a:round/>
-                      <a:headEnd type="none" w="med" len="med"/>
-                      <a:tailEnd type="none" w="med" len="med"/>
-                    </a:lnR>
-                    <a:lnT w="9525" cap="flat" cmpd="sng" algn="ctr">
-                      <a:solidFill>
-                        <a:srgbClr val="D9E0E6"/>
-                      </a:solidFill>
-                      <a:prstDash val="solid"/>
-                      <a:round/>
-                      <a:headEnd type="none" w="med" len="med"/>
-                      <a:tailEnd type="none" w="med" len="med"/>
-                    </a:lnT>
-                    <a:lnB w="9525" cap="flat" cmpd="sng" algn="ctr">
-                      <a:solidFill>
-                        <a:srgbClr val="D9E0E6"/>
-                      </a:solidFill>
-                      <a:prstDash val="solid"/>
-                      <a:round/>
-                      <a:headEnd type="none" w="med" len="med"/>
-                      <a:tailEnd type="none" w="med" len="med"/>
-                    </a:lnB>
-                  </a:tcPr>
-                </a:tc>
-                <a:tc>
-                  <a:txBody>
-                    <a:bodyPr/>
-                    <a:lstStyle/>
-                    <a:p>
-                      <a:pPr algn="ctr" indent="0" marL="0">
-                        <a:buNone/>
-                      </a:pPr>
-                      <a:r>
-                        <a:rPr lang="en-US" sz="1400" dirty="0">
-                          <a:solidFill>
-                            <a:srgbClr val="13202A"/>
-                          </a:solidFill>
-                          <a:latin typeface="Microsoft JhengHei" pitchFamily="34" charset="0"/>
-                          <a:ea typeface="Microsoft JhengHei" pitchFamily="34" charset="-122"/>
-                          <a:cs typeface="Microsoft JhengHei" pitchFamily="34" charset="-120"/>
-                        </a:rPr>
-                        <a:t>53.38%</a:t>
-                      </a:r>
-                      <a:endParaRPr lang="en-US" sz="1400" dirty="0">
-                        <a:latin typeface="Microsoft JhengHei" charset="0"/>
-                        <a:ea typeface="Microsoft JhengHei" charset="0"/>
-                        <a:cs typeface="Microsoft JhengHei" charset="0"/>
-                      </a:endParaRPr>
-                    </a:p>
-                  </a:txBody>
-                  <a:tcPr marL="91440" marR="91440" marT="0" marB="0" anchor="ctr">
-                    <a:lnL w="9525" cap="flat" cmpd="sng" algn="ctr">
-                      <a:solidFill>
-                        <a:srgbClr val="D9E0E6"/>
-                      </a:solidFill>
-                      <a:prstDash val="solid"/>
-                      <a:round/>
-                      <a:headEnd type="none" w="med" len="med"/>
-                      <a:tailEnd type="none" w="med" len="med"/>
-                    </a:lnL>
-                    <a:lnR w="9525" cap="flat" cmpd="sng" algn="ctr">
-                      <a:solidFill>
-                        <a:srgbClr val="D9E0E6"/>
-                      </a:solidFill>
-                      <a:prstDash val="solid"/>
-                      <a:round/>
-                      <a:headEnd type="none" w="med" len="med"/>
-                      <a:tailEnd type="none" w="med" len="med"/>
-                    </a:lnR>
-                    <a:lnT w="9525" cap="flat" cmpd="sng" algn="ctr">
-                      <a:solidFill>
-                        <a:srgbClr val="D9E0E6"/>
-                      </a:solidFill>
-                      <a:prstDash val="solid"/>
-                      <a:round/>
-                      <a:headEnd type="none" w="med" len="med"/>
-                      <a:tailEnd type="none" w="med" len="med"/>
-                    </a:lnT>
-                    <a:lnB w="9525" cap="flat" cmpd="sng" algn="ctr">
-                      <a:solidFill>
-                        <a:srgbClr val="D9E0E6"/>
-                      </a:solidFill>
-                      <a:prstDash val="solid"/>
-                      <a:round/>
-                      <a:headEnd type="none" w="med" len="med"/>
-                      <a:tailEnd type="none" w="med" len="med"/>
-                    </a:lnB>
-                  </a:tcPr>
-                </a:tc>
-                <a:tc>
-                  <a:txBody>
-                    <a:bodyPr/>
-                    <a:lstStyle/>
-                    <a:p>
-                      <a:pPr algn="ctr" indent="0" marL="0">
-                        <a:buNone/>
-                      </a:pPr>
-                      <a:r>
-                        <a:rPr lang="en-US" sz="1400" dirty="0">
-                          <a:solidFill>
-                            <a:srgbClr val="13202A"/>
-                          </a:solidFill>
-                          <a:latin typeface="Microsoft JhengHei" pitchFamily="34" charset="0"/>
-                          <a:ea typeface="Microsoft JhengHei" pitchFamily="34" charset="-122"/>
-                          <a:cs typeface="Microsoft JhengHei" pitchFamily="34" charset="-120"/>
-                        </a:rPr>
-                        <a:t>52.32%</a:t>
-                      </a:r>
-                      <a:endParaRPr lang="en-US" sz="1400" dirty="0">
-                        <a:latin typeface="Microsoft JhengHei" charset="0"/>
-                        <a:ea typeface="Microsoft JhengHei" charset="0"/>
-                        <a:cs typeface="Microsoft JhengHei" charset="0"/>
-                      </a:endParaRPr>
-                    </a:p>
-                  </a:txBody>
-                  <a:tcPr marL="91440" marR="91440" marT="0" marB="0" anchor="ctr">
-                    <a:lnL w="9525" cap="flat" cmpd="sng" algn="ctr">
-                      <a:solidFill>
-                        <a:srgbClr val="D9E0E6"/>
-                      </a:solidFill>
-                      <a:prstDash val="solid"/>
-                      <a:round/>
-                      <a:headEnd type="none" w="med" len="med"/>
-                      <a:tailEnd type="none" w="med" len="med"/>
-                    </a:lnL>
-                    <a:lnR w="9525" cap="flat" cmpd="sng" algn="ctr">
-                      <a:solidFill>
-                        <a:srgbClr val="D9E0E6"/>
-                      </a:solidFill>
-                      <a:prstDash val="solid"/>
-                      <a:round/>
-                      <a:headEnd type="none" w="med" len="med"/>
-                      <a:tailEnd type="none" w="med" len="med"/>
-                    </a:lnR>
-                    <a:lnT w="9525" cap="flat" cmpd="sng" algn="ctr">
-                      <a:solidFill>
-                        <a:srgbClr val="D9E0E6"/>
-                      </a:solidFill>
-                      <a:prstDash val="solid"/>
-                      <a:round/>
-                      <a:headEnd type="none" w="med" len="med"/>
-                      <a:tailEnd type="none" w="med" len="med"/>
-                    </a:lnT>
-                    <a:lnB w="9525" cap="flat" cmpd="sng" algn="ctr">
-                      <a:solidFill>
-                        <a:srgbClr val="D9E0E6"/>
-                      </a:solidFill>
-                      <a:prstDash val="solid"/>
-                      <a:round/>
-                      <a:headEnd type="none" w="med" len="med"/>
-                      <a:tailEnd type="none" w="med" len="med"/>
-                    </a:lnB>
-                  </a:tcPr>
-                </a:tc>
-                <a:tc>
-                  <a:txBody>
-                    <a:bodyPr/>
-                    <a:lstStyle/>
-                    <a:p>
-                      <a:pPr algn="ctr" indent="0" marL="0">
-                        <a:buNone/>
-                      </a:pPr>
-                      <a:r>
-                        <a:rPr lang="en-US" sz="1400" dirty="0">
-                          <a:solidFill>
-                            <a:srgbClr val="13202A"/>
-                          </a:solidFill>
-                          <a:latin typeface="Microsoft JhengHei" pitchFamily="34" charset="0"/>
-                          <a:ea typeface="Microsoft JhengHei" pitchFamily="34" charset="-122"/>
-                          <a:cs typeface="Microsoft JhengHei" pitchFamily="34" charset="-120"/>
-                        </a:rPr>
-                        <a:t>53.54%</a:t>
-                      </a:r>
-                      <a:endParaRPr lang="en-US" sz="1400" dirty="0">
-                        <a:latin typeface="Microsoft JhengHei" charset="0"/>
-                        <a:ea typeface="Microsoft JhengHei" charset="0"/>
-                        <a:cs typeface="Microsoft JhengHei" charset="0"/>
-                      </a:endParaRPr>
-                    </a:p>
-                  </a:txBody>
-                  <a:tcPr marL="91440" marR="91440" marT="0" marB="0" anchor="ctr">
-                    <a:lnL w="9525" cap="flat" cmpd="sng" algn="ctr">
-                      <a:solidFill>
-                        <a:srgbClr val="D9E0E6"/>
-                      </a:solidFill>
-                      <a:prstDash val="solid"/>
-                      <a:round/>
-                      <a:headEnd type="none" w="med" len="med"/>
-                      <a:tailEnd type="none" w="med" len="med"/>
-                    </a:lnL>
-                    <a:lnR w="9525" cap="flat" cmpd="sng" algn="ctr">
-                      <a:solidFill>
-                        <a:srgbClr val="D9E0E6"/>
-                      </a:solidFill>
-                      <a:prstDash val="solid"/>
-                      <a:round/>
-                      <a:headEnd type="none" w="med" len="med"/>
-                      <a:tailEnd type="none" w="med" len="med"/>
-                    </a:lnR>
-                    <a:lnT w="9525" cap="flat" cmpd="sng" algn="ctr">
-                      <a:solidFill>
-                        <a:srgbClr val="D9E0E6"/>
-                      </a:solidFill>
-                      <a:prstDash val="solid"/>
-                      <a:round/>
-                      <a:headEnd type="none" w="med" len="med"/>
-                      <a:tailEnd type="none" w="med" len="med"/>
-                    </a:lnT>
-                    <a:lnB w="9525" cap="flat" cmpd="sng" algn="ctr">
-                      <a:solidFill>
-                        <a:srgbClr val="D9E0E6"/>
-                      </a:solidFill>
-                      <a:prstDash val="solid"/>
-                      <a:round/>
-                      <a:headEnd type="none" w="med" len="med"/>
-                      <a:tailEnd type="none" w="med" len="med"/>
-                    </a:lnB>
-                  </a:tcPr>
-                </a:tc>
-              </a:tr>
-              <a:tr h="566928">
-                <a:tc>
-                  <a:txBody>
-                    <a:bodyPr/>
-                    <a:lstStyle/>
-                    <a:p>
-                      <a:pPr algn="l" indent="0" marL="0">
-                        <a:buNone/>
-                      </a:pPr>
-                      <a:r>
-                        <a:rPr lang="en-US" sz="1400" b="1" dirty="0">
-                          <a:solidFill>
-                            <a:srgbClr val="13202A"/>
-                          </a:solidFill>
-                          <a:latin typeface="Microsoft JhengHei" pitchFamily="34" charset="0"/>
-                          <a:ea typeface="Microsoft JhengHei" pitchFamily="34" charset="-122"/>
-                          <a:cs typeface="Microsoft JhengHei" pitchFamily="34" charset="-120"/>
-                        </a:rPr>
-                        <a:t>規則基準 BalAcc</a:t>
-                      </a:r>
-                      <a:endParaRPr lang="en-US" sz="1400" dirty="0">
-                        <a:latin typeface="Microsoft JhengHei" charset="0"/>
-                        <a:ea typeface="Microsoft JhengHei" charset="0"/>
-                        <a:cs typeface="Microsoft JhengHei" charset="0"/>
-                      </a:endParaRPr>
-                    </a:p>
-                  </a:txBody>
-                  <a:tcPr marL="91440" marR="91440" marT="0" marB="0" anchor="ctr">
-                    <a:lnL w="9525" cap="flat" cmpd="sng" algn="ctr">
-                      <a:solidFill>
-                        <a:srgbClr val="D9E0E6"/>
-                      </a:solidFill>
-                      <a:prstDash val="solid"/>
-                      <a:round/>
-                      <a:headEnd type="none" w="med" len="med"/>
-                      <a:tailEnd type="none" w="med" len="med"/>
-                    </a:lnL>
-                    <a:lnR w="9525" cap="flat" cmpd="sng" algn="ctr">
-                      <a:solidFill>
-                        <a:srgbClr val="D9E0E6"/>
-                      </a:solidFill>
-                      <a:prstDash val="solid"/>
-                      <a:round/>
-                      <a:headEnd type="none" w="med" len="med"/>
-                      <a:tailEnd type="none" w="med" len="med"/>
-                    </a:lnR>
-                    <a:lnT w="9525" cap="flat" cmpd="sng" algn="ctr">
-                      <a:solidFill>
-                        <a:srgbClr val="D9E0E6"/>
-                      </a:solidFill>
-                      <a:prstDash val="solid"/>
-                      <a:round/>
-                      <a:headEnd type="none" w="med" len="med"/>
-                      <a:tailEnd type="none" w="med" len="med"/>
-                    </a:lnT>
-                    <a:lnB w="9525" cap="flat" cmpd="sng" algn="ctr">
-                      <a:solidFill>
-                        <a:srgbClr val="D9E0E6"/>
-                      </a:solidFill>
-                      <a:prstDash val="solid"/>
-                      <a:round/>
-                      <a:headEnd type="none" w="med" len="med"/>
-                      <a:tailEnd type="none" w="med" len="med"/>
-                    </a:lnB>
-                  </a:tcPr>
-                </a:tc>
-                <a:tc>
-                  <a:txBody>
-                    <a:bodyPr/>
-                    <a:lstStyle/>
-                    <a:p>
-                      <a:pPr algn="ctr" indent="0" marL="0">
-                        <a:buNone/>
-                      </a:pPr>
-                      <a:r>
-                        <a:rPr lang="en-US" sz="1400" dirty="0">
-                          <a:solidFill>
-                            <a:srgbClr val="13202A"/>
-                          </a:solidFill>
-                          <a:latin typeface="Microsoft JhengHei" pitchFamily="34" charset="0"/>
-                          <a:ea typeface="Microsoft JhengHei" pitchFamily="34" charset="-122"/>
-                          <a:cs typeface="Microsoft JhengHei" pitchFamily="34" charset="-120"/>
-                        </a:rPr>
-                        <a:t>84.90%</a:t>
-                      </a:r>
-                      <a:endParaRPr lang="en-US" sz="1400" dirty="0">
-                        <a:latin typeface="Microsoft JhengHei" charset="0"/>
-                        <a:ea typeface="Microsoft JhengHei" charset="0"/>
-                        <a:cs typeface="Microsoft JhengHei" charset="0"/>
-                      </a:endParaRPr>
-                    </a:p>
-                  </a:txBody>
-                  <a:tcPr marL="91440" marR="91440" marT="0" marB="0" anchor="ctr">
-                    <a:lnL w="9525" cap="flat" cmpd="sng" algn="ctr">
-                      <a:solidFill>
-                        <a:srgbClr val="D9E0E6"/>
-                      </a:solidFill>
-                      <a:prstDash val="solid"/>
-                      <a:round/>
-                      <a:headEnd type="none" w="med" len="med"/>
-                      <a:tailEnd type="none" w="med" len="med"/>
-                    </a:lnL>
-                    <a:lnR w="9525" cap="flat" cmpd="sng" algn="ctr">
-                      <a:solidFill>
-                        <a:srgbClr val="D9E0E6"/>
-                      </a:solidFill>
-                      <a:prstDash val="solid"/>
-                      <a:round/>
-                      <a:headEnd type="none" w="med" len="med"/>
-                      <a:tailEnd type="none" w="med" len="med"/>
-                    </a:lnR>
-                    <a:lnT w="9525" cap="flat" cmpd="sng" algn="ctr">
-                      <a:solidFill>
-                        <a:srgbClr val="D9E0E6"/>
-                      </a:solidFill>
-                      <a:prstDash val="solid"/>
-                      <a:round/>
-                      <a:headEnd type="none" w="med" len="med"/>
-                      <a:tailEnd type="none" w="med" len="med"/>
-                    </a:lnT>
-                    <a:lnB w="9525" cap="flat" cmpd="sng" algn="ctr">
-                      <a:solidFill>
-                        <a:srgbClr val="D9E0E6"/>
-                      </a:solidFill>
-                      <a:prstDash val="solid"/>
-                      <a:round/>
-                      <a:headEnd type="none" w="med" len="med"/>
-                      <a:tailEnd type="none" w="med" len="med"/>
-                    </a:lnB>
-                  </a:tcPr>
-                </a:tc>
-                <a:tc>
-                  <a:txBody>
-                    <a:bodyPr/>
-                    <a:lstStyle/>
-                    <a:p>
-                      <a:pPr algn="ctr" indent="0" marL="0">
-                        <a:buNone/>
-                      </a:pPr>
-                      <a:r>
-                        <a:rPr lang="en-US" sz="1400" dirty="0">
-                          <a:solidFill>
-                            <a:srgbClr val="13202A"/>
-                          </a:solidFill>
-                          <a:latin typeface="Microsoft JhengHei" pitchFamily="34" charset="0"/>
-                          <a:ea typeface="Microsoft JhengHei" pitchFamily="34" charset="-122"/>
-                          <a:cs typeface="Microsoft JhengHei" pitchFamily="34" charset="-120"/>
-                        </a:rPr>
-                        <a:t>84.69%</a:t>
-                      </a:r>
-                      <a:endParaRPr lang="en-US" sz="1400" dirty="0">
-                        <a:latin typeface="Microsoft JhengHei" charset="0"/>
-                        <a:ea typeface="Microsoft JhengHei" charset="0"/>
-                        <a:cs typeface="Microsoft JhengHei" charset="0"/>
-                      </a:endParaRPr>
-                    </a:p>
-                  </a:txBody>
-                  <a:tcPr marL="91440" marR="91440" marT="0" marB="0" anchor="ctr">
-                    <a:lnL w="9525" cap="flat" cmpd="sng" algn="ctr">
-                      <a:solidFill>
-                        <a:srgbClr val="D9E0E6"/>
-                      </a:solidFill>
-                      <a:prstDash val="solid"/>
-                      <a:round/>
-                      <a:headEnd type="none" w="med" len="med"/>
-                      <a:tailEnd type="none" w="med" len="med"/>
-                    </a:lnL>
-                    <a:lnR w="9525" cap="flat" cmpd="sng" algn="ctr">
-                      <a:solidFill>
-                        <a:srgbClr val="D9E0E6"/>
-                      </a:solidFill>
-                      <a:prstDash val="solid"/>
-                      <a:round/>
-                      <a:headEnd type="none" w="med" len="med"/>
-                      <a:tailEnd type="none" w="med" len="med"/>
-                    </a:lnR>
-                    <a:lnT w="9525" cap="flat" cmpd="sng" algn="ctr">
-                      <a:solidFill>
-                        <a:srgbClr val="D9E0E6"/>
-                      </a:solidFill>
-                      <a:prstDash val="solid"/>
-                      <a:round/>
-                      <a:headEnd type="none" w="med" len="med"/>
-                      <a:tailEnd type="none" w="med" len="med"/>
-                    </a:lnT>
-                    <a:lnB w="9525" cap="flat" cmpd="sng" algn="ctr">
-                      <a:solidFill>
-                        <a:srgbClr val="D9E0E6"/>
-                      </a:solidFill>
-                      <a:prstDash val="solid"/>
-                      <a:round/>
-                      <a:headEnd type="none" w="med" len="med"/>
-                      <a:tailEnd type="none" w="med" len="med"/>
-                    </a:lnB>
-                  </a:tcPr>
-                </a:tc>
-                <a:tc>
-                  <a:txBody>
-                    <a:bodyPr/>
-                    <a:lstStyle/>
-                    <a:p>
-                      <a:pPr algn="ctr" indent="0" marL="0">
-                        <a:buNone/>
-                      </a:pPr>
-                      <a:r>
-                        <a:rPr lang="en-US" sz="1400" dirty="0">
-                          <a:solidFill>
-                            <a:srgbClr val="13202A"/>
-                          </a:solidFill>
-                          <a:latin typeface="Microsoft JhengHei" pitchFamily="34" charset="0"/>
-                          <a:ea typeface="Microsoft JhengHei" pitchFamily="34" charset="-122"/>
-                          <a:cs typeface="Microsoft JhengHei" pitchFamily="34" charset="-120"/>
-                        </a:rPr>
-                        <a:t>85.27%</a:t>
-                      </a:r>
-                      <a:endParaRPr lang="en-US" sz="1400" dirty="0">
-                        <a:latin typeface="Microsoft JhengHei" charset="0"/>
-                        <a:ea typeface="Microsoft JhengHei" charset="0"/>
-                        <a:cs typeface="Microsoft JhengHei" charset="0"/>
-                      </a:endParaRPr>
-                    </a:p>
-                  </a:txBody>
-                  <a:tcPr marL="91440" marR="91440" marT="0" marB="0" anchor="ctr">
-                    <a:lnL w="9525" cap="flat" cmpd="sng" algn="ctr">
-                      <a:solidFill>
-                        <a:srgbClr val="D9E0E6"/>
-                      </a:solidFill>
-                      <a:prstDash val="solid"/>
-                      <a:round/>
-                      <a:headEnd type="none" w="med" len="med"/>
-                      <a:tailEnd type="none" w="med" len="med"/>
-                    </a:lnL>
-                    <a:lnR w="9525" cap="flat" cmpd="sng" algn="ctr">
-                      <a:solidFill>
-                        <a:srgbClr val="D9E0E6"/>
-                      </a:solidFill>
-                      <a:prstDash val="solid"/>
-                      <a:round/>
-                      <a:headEnd type="none" w="med" len="med"/>
-                      <a:tailEnd type="none" w="med" len="med"/>
-                    </a:lnR>
-                    <a:lnT w="9525" cap="flat" cmpd="sng" algn="ctr">
-                      <a:solidFill>
-                        <a:srgbClr val="D9E0E6"/>
-                      </a:solidFill>
-                      <a:prstDash val="solid"/>
-                      <a:round/>
-                      <a:headEnd type="none" w="med" len="med"/>
-                      <a:tailEnd type="none" w="med" len="med"/>
-                    </a:lnT>
-                    <a:lnB w="9525" cap="flat" cmpd="sng" algn="ctr">
-                      <a:solidFill>
-                        <a:srgbClr val="D9E0E6"/>
-                      </a:solidFill>
-                      <a:prstDash val="solid"/>
-                      <a:round/>
-                      <a:headEnd type="none" w="med" len="med"/>
-                      <a:tailEnd type="none" w="med" len="med"/>
-                    </a:lnB>
-                  </a:tcPr>
-                </a:tc>
-              </a:tr>
-              <a:tr h="566928">
-                <a:tc>
-                  <a:txBody>
-                    <a:bodyPr/>
-                    <a:lstStyle/>
-                    <a:p>
-                      <a:pPr algn="l" indent="0" marL="0">
-                        <a:buNone/>
-                      </a:pPr>
-                      <a:r>
-                        <a:rPr lang="en-US" sz="1400" b="1" dirty="0">
-                          <a:solidFill>
-                            <a:srgbClr val="13202A"/>
-                          </a:solidFill>
-                          <a:latin typeface="Microsoft JhengHei" pitchFamily="34" charset="0"/>
-                          <a:ea typeface="Microsoft JhengHei" pitchFamily="34" charset="-122"/>
-                          <a:cs typeface="Microsoft JhengHei" pitchFamily="34" charset="-120"/>
-                        </a:rPr>
-                        <a:t>模型 macro-F1</a:t>
-                      </a:r>
-                      <a:endParaRPr lang="en-US" sz="1400" dirty="0">
-                        <a:latin typeface="Microsoft JhengHei" charset="0"/>
-                        <a:ea typeface="Microsoft JhengHei" charset="0"/>
-                        <a:cs typeface="Microsoft JhengHei" charset="0"/>
-                      </a:endParaRPr>
-                    </a:p>
-                  </a:txBody>
-                  <a:tcPr marL="91440" marR="91440" marT="0" marB="0" anchor="ctr">
-                    <a:lnL w="9525" cap="flat" cmpd="sng" algn="ctr">
-                      <a:solidFill>
-                        <a:srgbClr val="D9E0E6"/>
-                      </a:solidFill>
-                      <a:prstDash val="solid"/>
-                      <a:round/>
-                      <a:headEnd type="none" w="med" len="med"/>
-                      <a:tailEnd type="none" w="med" len="med"/>
-                    </a:lnL>
-                    <a:lnR w="9525" cap="flat" cmpd="sng" algn="ctr">
-                      <a:solidFill>
-                        <a:srgbClr val="D9E0E6"/>
-                      </a:solidFill>
-                      <a:prstDash val="solid"/>
-                      <a:round/>
-                      <a:headEnd type="none" w="med" len="med"/>
-                      <a:tailEnd type="none" w="med" len="med"/>
-                    </a:lnR>
-                    <a:lnT w="9525" cap="flat" cmpd="sng" algn="ctr">
-                      <a:solidFill>
-                        <a:srgbClr val="D9E0E6"/>
-                      </a:solidFill>
-                      <a:prstDash val="solid"/>
-                      <a:round/>
-                      <a:headEnd type="none" w="med" len="med"/>
-                      <a:tailEnd type="none" w="med" len="med"/>
-                    </a:lnT>
-                    <a:lnB w="9525" cap="flat" cmpd="sng" algn="ctr">
-                      <a:solidFill>
-                        <a:srgbClr val="D9E0E6"/>
-                      </a:solidFill>
-                      <a:prstDash val="solid"/>
-                      <a:round/>
-                      <a:headEnd type="none" w="med" len="med"/>
-                      <a:tailEnd type="none" w="med" len="med"/>
-                    </a:lnB>
-                  </a:tcPr>
-                </a:tc>
-                <a:tc>
-                  <a:txBody>
-                    <a:bodyPr/>
-                    <a:lstStyle/>
-                    <a:p>
-                      <a:pPr algn="ctr" indent="0" marL="0">
-                        <a:buNone/>
-                      </a:pPr>
-                      <a:r>
-                        <a:rPr lang="en-US" sz="1400" dirty="0">
-                          <a:solidFill>
-                            <a:srgbClr val="13202A"/>
-                          </a:solidFill>
-                          <a:latin typeface="Microsoft JhengHei" pitchFamily="34" charset="0"/>
-                          <a:ea typeface="Microsoft JhengHei" pitchFamily="34" charset="-122"/>
-                          <a:cs typeface="Microsoft JhengHei" pitchFamily="34" charset="-120"/>
-                        </a:rPr>
-                        <a:t>54.81%(雙分支 GNN + 券商分點)</a:t>
-                      </a:r>
-                      <a:endParaRPr lang="en-US" sz="1400" dirty="0">
-                        <a:latin typeface="Microsoft JhengHei" charset="0"/>
-                        <a:ea typeface="Microsoft JhengHei" charset="0"/>
-                        <a:cs typeface="Microsoft JhengHei" charset="0"/>
-                      </a:endParaRPr>
-                    </a:p>
-                  </a:txBody>
-                  <a:tcPr marL="91440" marR="91440" marT="0" marB="0" anchor="ctr">
-                    <a:lnL w="9525" cap="flat" cmpd="sng" algn="ctr">
-                      <a:solidFill>
-                        <a:srgbClr val="D9E0E6"/>
-                      </a:solidFill>
-                      <a:prstDash val="solid"/>
-                      <a:round/>
-                      <a:headEnd type="none" w="med" len="med"/>
-                      <a:tailEnd type="none" w="med" len="med"/>
-                    </a:lnL>
-                    <a:lnR w="9525" cap="flat" cmpd="sng" algn="ctr">
-                      <a:solidFill>
-                        <a:srgbClr val="D9E0E6"/>
-                      </a:solidFill>
-                      <a:prstDash val="solid"/>
-                      <a:round/>
-                      <a:headEnd type="none" w="med" len="med"/>
-                      <a:tailEnd type="none" w="med" len="med"/>
-                    </a:lnR>
-                    <a:lnT w="9525" cap="flat" cmpd="sng" algn="ctr">
-                      <a:solidFill>
-                        <a:srgbClr val="D9E0E6"/>
-                      </a:solidFill>
-                      <a:prstDash val="solid"/>
-                      <a:round/>
-                      <a:headEnd type="none" w="med" len="med"/>
-                      <a:tailEnd type="none" w="med" len="med"/>
-                    </a:lnT>
-                    <a:lnB w="9525" cap="flat" cmpd="sng" algn="ctr">
-                      <a:solidFill>
-                        <a:srgbClr val="D9E0E6"/>
-                      </a:solidFill>
-                      <a:prstDash val="solid"/>
-                      <a:round/>
-                      <a:headEnd type="none" w="med" len="med"/>
-                      <a:tailEnd type="none" w="med" len="med"/>
-                    </a:lnB>
-                  </a:tcPr>
-                </a:tc>
-                <a:tc>
-                  <a:txBody>
-                    <a:bodyPr/>
-                    <a:lstStyle/>
-                    <a:p>
-                      <a:pPr algn="ctr" indent="0" marL="0">
-                        <a:buNone/>
-                      </a:pPr>
-                      <a:r>
-                        <a:rPr lang="en-US" sz="1400" dirty="0">
-                          <a:solidFill>
-                            <a:srgbClr val="13202A"/>
-                          </a:solidFill>
-                          <a:latin typeface="Microsoft JhengHei" pitchFamily="34" charset="0"/>
-                          <a:ea typeface="Microsoft JhengHei" pitchFamily="34" charset="-122"/>
-                          <a:cs typeface="Microsoft JhengHei" pitchFamily="34" charset="-120"/>
-                        </a:rPr>
-                        <a:t>52.52%(AE + OC-SVM)</a:t>
-                      </a:r>
-                      <a:endParaRPr lang="en-US" sz="1400" dirty="0">
-                        <a:latin typeface="Microsoft JhengHei" charset="0"/>
-                        <a:ea typeface="Microsoft JhengHei" charset="0"/>
-                        <a:cs typeface="Microsoft JhengHei" charset="0"/>
-                      </a:endParaRPr>
-                    </a:p>
-                  </a:txBody>
-                  <a:tcPr marL="91440" marR="91440" marT="0" marB="0" anchor="ctr">
-                    <a:lnL w="9525" cap="flat" cmpd="sng" algn="ctr">
-                      <a:solidFill>
-                        <a:srgbClr val="D9E0E6"/>
-                      </a:solidFill>
-                      <a:prstDash val="solid"/>
-                      <a:round/>
-                      <a:headEnd type="none" w="med" len="med"/>
-                      <a:tailEnd type="none" w="med" len="med"/>
-                    </a:lnL>
-                    <a:lnR w="9525" cap="flat" cmpd="sng" algn="ctr">
-                      <a:solidFill>
-                        <a:srgbClr val="D9E0E6"/>
-                      </a:solidFill>
-                      <a:prstDash val="solid"/>
-                      <a:round/>
-                      <a:headEnd type="none" w="med" len="med"/>
-                      <a:tailEnd type="none" w="med" len="med"/>
-                    </a:lnR>
-                    <a:lnT w="9525" cap="flat" cmpd="sng" algn="ctr">
-                      <a:solidFill>
-                        <a:srgbClr val="D9E0E6"/>
-                      </a:solidFill>
-                      <a:prstDash val="solid"/>
-                      <a:round/>
-                      <a:headEnd type="none" w="med" len="med"/>
-                      <a:tailEnd type="none" w="med" len="med"/>
-                    </a:lnT>
-                    <a:lnB w="9525" cap="flat" cmpd="sng" algn="ctr">
-                      <a:solidFill>
-                        <a:srgbClr val="D9E0E6"/>
-                      </a:solidFill>
-                      <a:prstDash val="solid"/>
-                      <a:round/>
-                      <a:headEnd type="none" w="med" len="med"/>
-                      <a:tailEnd type="none" w="med" len="med"/>
-                    </a:lnB>
-                  </a:tcPr>
-                </a:tc>
-                <a:tc>
-                  <a:txBody>
-                    <a:bodyPr/>
-                    <a:lstStyle/>
-                    <a:p>
-                      <a:pPr algn="ctr" indent="0" marL="0">
-                        <a:buNone/>
-                      </a:pPr>
-                      <a:r>
-                        <a:rPr lang="en-US" sz="1400" dirty="0">
-                          <a:solidFill>
-                            <a:srgbClr val="13202A"/>
-                          </a:solidFill>
-                          <a:latin typeface="Microsoft JhengHei" pitchFamily="34" charset="0"/>
-                          <a:ea typeface="Microsoft JhengHei" pitchFamily="34" charset="-122"/>
-                          <a:cs typeface="Microsoft JhengHei" pitchFamily="34" charset="-120"/>
-                        </a:rPr>
-                        <a:t>53.60%(AE + OC-SVM)</a:t>
-                      </a:r>
-                      <a:endParaRPr lang="en-US" sz="1400" dirty="0">
-                        <a:latin typeface="Microsoft JhengHei" charset="0"/>
-                        <a:ea typeface="Microsoft JhengHei" charset="0"/>
-                        <a:cs typeface="Microsoft JhengHei" charset="0"/>
-                      </a:endParaRPr>
-                    </a:p>
-                  </a:txBody>
-                  <a:tcPr marL="91440" marR="91440" marT="0" marB="0" anchor="ctr">
-                    <a:lnL w="9525" cap="flat" cmpd="sng" algn="ctr">
-                      <a:solidFill>
-                        <a:srgbClr val="D9E0E6"/>
-                      </a:solidFill>
-                      <a:prstDash val="solid"/>
-                      <a:round/>
-                      <a:headEnd type="none" w="med" len="med"/>
-                      <a:tailEnd type="none" w="med" len="med"/>
-                    </a:lnL>
-                    <a:lnR w="9525" cap="flat" cmpd="sng" algn="ctr">
-                      <a:solidFill>
-                        <a:srgbClr val="D9E0E6"/>
-                      </a:solidFill>
-                      <a:prstDash val="solid"/>
-                      <a:round/>
-                      <a:headEnd type="none" w="med" len="med"/>
-                      <a:tailEnd type="none" w="med" len="med"/>
-                    </a:lnR>
-                    <a:lnT w="9525" cap="flat" cmpd="sng" algn="ctr">
-                      <a:solidFill>
-                        <a:srgbClr val="D9E0E6"/>
-                      </a:solidFill>
-                      <a:prstDash val="solid"/>
-                      <a:round/>
-                      <a:headEnd type="none" w="med" len="med"/>
-                      <a:tailEnd type="none" w="med" len="med"/>
-                    </a:lnT>
-                    <a:lnB w="9525" cap="flat" cmpd="sng" algn="ctr">
-                      <a:solidFill>
-                        <a:srgbClr val="D9E0E6"/>
-                      </a:solidFill>
-                      <a:prstDash val="solid"/>
-                      <a:round/>
-                      <a:headEnd type="none" w="med" len="med"/>
-                      <a:tailEnd type="none" w="med" len="med"/>
-                    </a:lnB>
-                  </a:tcPr>
-                </a:tc>
-              </a:tr>
-              <a:tr h="566928">
-                <a:tc>
-                  <a:txBody>
-                    <a:bodyPr/>
-                    <a:lstStyle/>
-                    <a:p>
-                      <a:pPr algn="l" indent="0" marL="0">
-                        <a:buNone/>
-                      </a:pPr>
-                      <a:r>
-                        <a:rPr lang="en-US" sz="1400" b="1" dirty="0">
-                          <a:solidFill>
-                            <a:srgbClr val="13202A"/>
-                          </a:solidFill>
-                          <a:latin typeface="Microsoft JhengHei" pitchFamily="34" charset="0"/>
-                          <a:ea typeface="Microsoft JhengHei" pitchFamily="34" charset="-122"/>
-                          <a:cs typeface="Microsoft JhengHei" pitchFamily="34" charset="-120"/>
-                        </a:rPr>
-                        <a:t>模型 − 規則</a:t>
-                      </a:r>
-                      <a:endParaRPr lang="en-US" sz="1400" dirty="0">
-                        <a:latin typeface="Microsoft JhengHei" charset="0"/>
-                        <a:ea typeface="Microsoft JhengHei" charset="0"/>
-                        <a:cs typeface="Microsoft JhengHei" charset="0"/>
-                      </a:endParaRPr>
-                    </a:p>
-                  </a:txBody>
-                  <a:tcPr marL="91440" marR="91440" marT="0" marB="0" anchor="ctr">
-                    <a:lnL w="9525" cap="flat" cmpd="sng" algn="ctr">
-                      <a:solidFill>
-                        <a:srgbClr val="D9E0E6"/>
-                      </a:solidFill>
-                      <a:prstDash val="solid"/>
-                      <a:round/>
-                      <a:headEnd type="none" w="med" len="med"/>
-                      <a:tailEnd type="none" w="med" len="med"/>
-                    </a:lnL>
-                    <a:lnR w="9525" cap="flat" cmpd="sng" algn="ctr">
-                      <a:solidFill>
-                        <a:srgbClr val="D9E0E6"/>
-                      </a:solidFill>
-                      <a:prstDash val="solid"/>
-                      <a:round/>
-                      <a:headEnd type="none" w="med" len="med"/>
-                      <a:tailEnd type="none" w="med" len="med"/>
-                    </a:lnR>
-                    <a:lnT w="9525" cap="flat" cmpd="sng" algn="ctr">
-                      <a:solidFill>
-                        <a:srgbClr val="D9E0E6"/>
-                      </a:solidFill>
-                      <a:prstDash val="solid"/>
-                      <a:round/>
-                      <a:headEnd type="none" w="med" len="med"/>
-                      <a:tailEnd type="none" w="med" len="med"/>
-                    </a:lnT>
-                    <a:lnB w="9525" cap="flat" cmpd="sng" algn="ctr">
-                      <a:solidFill>
-                        <a:srgbClr val="D9E0E6"/>
-                      </a:solidFill>
-                      <a:prstDash val="solid"/>
-                      <a:round/>
-                      <a:headEnd type="none" w="med" len="med"/>
-                      <a:tailEnd type="none" w="med" len="med"/>
-                    </a:lnB>
-                  </a:tcPr>
-                </a:tc>
-                <a:tc>
-                  <a:txBody>
-                    <a:bodyPr/>
-                    <a:lstStyle/>
-                    <a:p>
-                      <a:pPr algn="ctr" indent="0" marL="0">
-                        <a:buNone/>
-                      </a:pPr>
-                      <a:r>
-                        <a:rPr lang="en-US" sz="1400" dirty="0">
-                          <a:solidFill>
-                            <a:srgbClr val="13202A"/>
-                          </a:solidFill>
-                          <a:latin typeface="Microsoft JhengHei" pitchFamily="34" charset="0"/>
-                          <a:ea typeface="Microsoft JhengHei" pitchFamily="34" charset="-122"/>
-                          <a:cs typeface="Microsoft JhengHei" pitchFamily="34" charset="-120"/>
-                        </a:rPr>
-                        <a:t>+1.43 點</a:t>
-                      </a:r>
-                      <a:endParaRPr lang="en-US" sz="1400" dirty="0">
-                        <a:latin typeface="Microsoft JhengHei" charset="0"/>
-                        <a:ea typeface="Microsoft JhengHei" charset="0"/>
-                        <a:cs typeface="Microsoft JhengHei" charset="0"/>
-                      </a:endParaRPr>
-                    </a:p>
-                  </a:txBody>
-                  <a:tcPr marL="91440" marR="91440" marT="0" marB="0" anchor="ctr">
-                    <a:lnL w="9525" cap="flat" cmpd="sng" algn="ctr">
-                      <a:solidFill>
-                        <a:srgbClr val="D9E0E6"/>
-                      </a:solidFill>
-                      <a:prstDash val="solid"/>
-                      <a:round/>
-                      <a:headEnd type="none" w="med" len="med"/>
-                      <a:tailEnd type="none" w="med" len="med"/>
-                    </a:lnL>
-                    <a:lnR w="9525" cap="flat" cmpd="sng" algn="ctr">
-                      <a:solidFill>
-                        <a:srgbClr val="D9E0E6"/>
-                      </a:solidFill>
-                      <a:prstDash val="solid"/>
-                      <a:round/>
-                      <a:headEnd type="none" w="med" len="med"/>
-                      <a:tailEnd type="none" w="med" len="med"/>
-                    </a:lnR>
-                    <a:lnT w="9525" cap="flat" cmpd="sng" algn="ctr">
-                      <a:solidFill>
-                        <a:srgbClr val="D9E0E6"/>
-                      </a:solidFill>
-                      <a:prstDash val="solid"/>
-                      <a:round/>
-                      <a:headEnd type="none" w="med" len="med"/>
-                      <a:tailEnd type="none" w="med" len="med"/>
-                    </a:lnT>
-                    <a:lnB w="9525" cap="flat" cmpd="sng" algn="ctr">
-                      <a:solidFill>
-                        <a:srgbClr val="D9E0E6"/>
-                      </a:solidFill>
-                      <a:prstDash val="solid"/>
-                      <a:round/>
-                      <a:headEnd type="none" w="med" len="med"/>
-                      <a:tailEnd type="none" w="med" len="med"/>
-                    </a:lnB>
-                  </a:tcPr>
-                </a:tc>
-                <a:tc>
-                  <a:txBody>
-                    <a:bodyPr/>
-                    <a:lstStyle/>
-                    <a:p>
-                      <a:pPr algn="ctr" indent="0" marL="0">
-                        <a:buNone/>
-                      </a:pPr>
-                      <a:r>
-                        <a:rPr lang="en-US" sz="1400" dirty="0">
-                          <a:solidFill>
-                            <a:srgbClr val="13202A"/>
-                          </a:solidFill>
-                          <a:latin typeface="Microsoft JhengHei" pitchFamily="34" charset="0"/>
-                          <a:ea typeface="Microsoft JhengHei" pitchFamily="34" charset="-122"/>
-                          <a:cs typeface="Microsoft JhengHei" pitchFamily="34" charset="-120"/>
-                        </a:rPr>
-                        <a:t>+0.21 點</a:t>
-                      </a:r>
-                      <a:endParaRPr lang="en-US" sz="1400" dirty="0">
-                        <a:latin typeface="Microsoft JhengHei" charset="0"/>
-                        <a:ea typeface="Microsoft JhengHei" charset="0"/>
-                        <a:cs typeface="Microsoft JhengHei" charset="0"/>
-                      </a:endParaRPr>
-                    </a:p>
-                  </a:txBody>
-                  <a:tcPr marL="91440" marR="91440" marT="0" marB="0" anchor="ctr">
-                    <a:lnL w="9525" cap="flat" cmpd="sng" algn="ctr">
-                      <a:solidFill>
-                        <a:srgbClr val="D9E0E6"/>
-                      </a:solidFill>
-                      <a:prstDash val="solid"/>
-                      <a:round/>
-                      <a:headEnd type="none" w="med" len="med"/>
-                      <a:tailEnd type="none" w="med" len="med"/>
-                    </a:lnL>
-                    <a:lnR w="9525" cap="flat" cmpd="sng" algn="ctr">
-                      <a:solidFill>
-                        <a:srgbClr val="D9E0E6"/>
-                      </a:solidFill>
-                      <a:prstDash val="solid"/>
-                      <a:round/>
-                      <a:headEnd type="none" w="med" len="med"/>
-                      <a:tailEnd type="none" w="med" len="med"/>
-                    </a:lnR>
-                    <a:lnT w="9525" cap="flat" cmpd="sng" algn="ctr">
-                      <a:solidFill>
-                        <a:srgbClr val="D9E0E6"/>
-                      </a:solidFill>
-                      <a:prstDash val="solid"/>
-                      <a:round/>
-                      <a:headEnd type="none" w="med" len="med"/>
-                      <a:tailEnd type="none" w="med" len="med"/>
-                    </a:lnT>
-                    <a:lnB w="9525" cap="flat" cmpd="sng" algn="ctr">
-                      <a:solidFill>
-                        <a:srgbClr val="D9E0E6"/>
-                      </a:solidFill>
-                      <a:prstDash val="solid"/>
-                      <a:round/>
-                      <a:headEnd type="none" w="med" len="med"/>
-                      <a:tailEnd type="none" w="med" len="med"/>
-                    </a:lnB>
-                  </a:tcPr>
-                </a:tc>
-                <a:tc>
-                  <a:txBody>
-                    <a:bodyPr/>
-                    <a:lstStyle/>
-                    <a:p>
-                      <a:pPr algn="ctr" indent="0" marL="0">
-                        <a:buNone/>
-                      </a:pPr>
-                      <a:r>
-                        <a:rPr lang="en-US" sz="1400" dirty="0">
-                          <a:solidFill>
-                            <a:srgbClr val="13202A"/>
-                          </a:solidFill>
-                          <a:latin typeface="Microsoft JhengHei" pitchFamily="34" charset="0"/>
-                          <a:ea typeface="Microsoft JhengHei" pitchFamily="34" charset="-122"/>
-                          <a:cs typeface="Microsoft JhengHei" pitchFamily="34" charset="-120"/>
-                        </a:rPr>
-                        <a:t>+0.05 點</a:t>
-                      </a:r>
-                      <a:endParaRPr lang="en-US" sz="1400" dirty="0">
-                        <a:latin typeface="Microsoft JhengHei" charset="0"/>
-                        <a:ea typeface="Microsoft JhengHei" charset="0"/>
-                        <a:cs typeface="Microsoft JhengHei" charset="0"/>
-                      </a:endParaRPr>
-                    </a:p>
-                  </a:txBody>
-                  <a:tcPr marL="91440" marR="91440" marT="0" marB="0" anchor="ctr">
-                    <a:lnL w="9525" cap="flat" cmpd="sng" algn="ctr">
-                      <a:solidFill>
-                        <a:srgbClr val="D9E0E6"/>
-                      </a:solidFill>
-                      <a:prstDash val="solid"/>
-                      <a:round/>
-                      <a:headEnd type="none" w="med" len="med"/>
-                      <a:tailEnd type="none" w="med" len="med"/>
-                    </a:lnL>
-                    <a:lnR w="9525" cap="flat" cmpd="sng" algn="ctr">
-                      <a:solidFill>
-                        <a:srgbClr val="D9E0E6"/>
-                      </a:solidFill>
-                      <a:prstDash val="solid"/>
-                      <a:round/>
-                      <a:headEnd type="none" w="med" len="med"/>
-                      <a:tailEnd type="none" w="med" len="med"/>
-                    </a:lnR>
-                    <a:lnT w="9525" cap="flat" cmpd="sng" algn="ctr">
-                      <a:solidFill>
-                        <a:srgbClr val="D9E0E6"/>
-                      </a:solidFill>
-                      <a:prstDash val="solid"/>
-                      <a:round/>
-                      <a:headEnd type="none" w="med" len="med"/>
-                      <a:tailEnd type="none" w="med" len="med"/>
-                    </a:lnT>
-                    <a:lnB w="9525" cap="flat" cmpd="sng" algn="ctr">
-                      <a:solidFill>
-                        <a:srgbClr val="D9E0E6"/>
-                      </a:solidFill>
-                      <a:prstDash val="solid"/>
-                      <a:round/>
-                      <a:headEnd type="none" w="med" len="med"/>
-                      <a:tailEnd type="none" w="med" len="med"/>
-                    </a:lnB>
-                  </a:tcPr>
-                </a:tc>
-              </a:tr>
-            </a:tbl>
-          </a:graphicData>
-        </a:graphic>
-      </p:graphicFrame>
-      <p:sp>
-        <p:nvSpPr>
-          <p:cNvPr id="4" name="Text 1"/>
-          <p:cNvSpPr txBox="1"/>
-          <p:nvPr/>
-        </p:nvSpPr>
-        <p:spPr>
-          <a:xfrm>
-            <a:off x="548640" y="5029200"/>
-            <a:ext cx="11064240" cy="1005840"/>
-          </a:xfrm>
-          <a:prstGeom prst="rect">
-            <a:avLst/>
-          </a:prstGeom>
-          <a:noFill/>
-          <a:ln/>
-        </p:spPr>
-        <p:txBody>
-          <a:bodyPr wrap="square" lIns="0" tIns="0" rIns="0" bIns="0" rtlCol="0" anchor="t"/>
-          <a:lstStyle/>
-          <a:p>
-            <a:pPr marL="342900" indent="-342900">
-              <a:spcAft>
-                <a:spcPts val="800"/>
-              </a:spcAft>
-              <a:buSzPct val="100000"/>
-              <a:buChar char="•"/>
-            </a:pPr>
-            <a:r>
-              <a:rPr lang="en-US" sz="1400" dirty="0">
-                <a:solidFill>
-                  <a:schemeClr val="tx2"/>
-                </a:solidFill>
-              </a:rPr>
-              <a:t>照論文定義貼標,類別比例與規則基準的分數都和論文幾乎相同</a:t>
-            </a:r>
-            <a:endParaRPr lang="en-US" sz="1500" dirty="0"/>
-          </a:p>
-          <a:p>
-            <a:pPr marL="342900" indent="-342900">
-              <a:spcAft>
-                <a:spcPts val="800"/>
-              </a:spcAft>
-              <a:buSzPct val="100000"/>
-              <a:buChar char="•"/>
-            </a:pPr>
-            <a:r>
-              <a:rPr lang="en-US" sz="1400" dirty="0">
-                <a:solidFill>
-                  <a:schemeClr val="tx2"/>
-                </a:solidFill>
-              </a:rPr>
-              <a:t>論文的模型比規則多 1.43 點,主要來自券商分點資料(我們沒有);論文自己的純價格模型只多 0.6 點</a:t>
-            </a:r>
-            <a:endParaRPr lang="en-US" sz="1500" dirty="0"/>
-          </a:p>
-        </p:txBody>
-      </p:sp>
-      <p:sp>
-        <p:nvSpPr>
-          <p:cNvPr id="25" name="Slide Number Placeholder 0"/>
-          <p:cNvSpPr>
-            <a:spLocks noGrp="1"/>
-          </p:cNvSpPr>
-          <p:nvPr>
-            <p:ph type="sldNum" sz="quarter" idx="4294967295"/>
-          </p:nvPr>
-        </p:nvSpPr>
-        <p:spPr>
-          <a:xfrm>
-            <a:off x="11201400" y="6355080"/>
-            <a:ext cx="457200" cy="274320"/>
-          </a:xfrm>
-          <a:prstGeom prst="rect">
-            <a:avLst/>
-          </a:prstGeom>
-          <a:extLst>
-            <a:ext uri="{C572A759-6A51-4108-AA02-DFA0A04FC94B}">
-              <ma14:wrappingTextBoxFlag xmlns:ma14="http://schemas.microsoft.com/office/mac/drawingml/2011/main" val="0"/>
-            </a:ext>
-          </a:extLst>
-        </p:spPr>
-        <p:txBody>
-          <a:bodyPr/>
-          <a:lstStyle>
-            <a:lvl1pPr>
-              <a:defRPr sz="1000">
-                <a:solidFill>
-                  <a:srgbClr val="7A8691"/>
-                </a:solidFill>
-              </a:defRPr>
-            </a:lvl1pPr>
-          </a:lstStyle>
-          <a:p>
-            <a:pPr algn="r"/>
-            <a:fld id="{F7021451-1387-4CA6-816F-3879F97B5CBC}" type="slidenum">
-              <a:rPr b="0" lang="en-US"/>
-              <a:t>12</a:t>
-            </a:fld>
-            <a:endParaRPr lang="en-US"/>
-          </a:p>
-        </p:txBody>
-      </p:sp>
-    </p:spTree>
-  </p:cSld>
-  <p:clrMapOvr>
-    <a:masterClrMapping/>
-  </p:clrMapOvr>
-</p:sld>
-</file>
-
-<file path=ppt/slides/slide13.xml><?xml version="1.0" encoding="utf-8"?>
-<p:sld xmlns:a="http://schemas.openxmlformats.org/drawingml/2006/main" xmlns:r="http://schemas.openxmlformats.org/officeDocument/2006/relationships" xmlns:p="http://schemas.openxmlformats.org/presentationml/2006/main">
-  <p:cSld name="Slide 13">
-    <p:spTree>
-      <p:nvGrpSpPr>
-        <p:cNvPr id="1" name=""/>
-        <p:cNvGrpSpPr/>
-        <p:nvPr/>
-      </p:nvGrpSpPr>
-      <p:grpSpPr>
-        <a:xfrm>
-          <a:off x="0" y="0"/>
-          <a:ext cx="0" cy="0"/>
-          <a:chOff x="0" y="0"/>
-          <a:chExt cx="0" cy="0"/>
-        </a:xfrm>
-      </p:grpSpPr>
-      <p:sp>
-        <p:nvSpPr>
-          <p:cNvPr id="2" name="Text 11"/>
-          <p:cNvSpPr/>
-          <p:nvPr>
-            <p:ph idx="111" type="title" hasCustomPrompt="1"/>
-          </p:nvPr>
-        </p:nvSpPr>
-        <p:spPr>
-          <a:xfrm>
-            <a:off x="548640" y="320040"/>
-            <a:ext cx="9418320" cy="777240"/>
-          </a:xfrm>
-          <a:prstGeom prst="rect">
-            <a:avLst/>
-          </a:prstGeom>
-          <a:noFill/>
-          <a:ln/>
-        </p:spPr>
-        <p:txBody>
-          <a:bodyPr wrap="square" lIns="0" tIns="0" rIns="0" bIns="0" rtlCol="0" anchor="ctr"/>
-          <a:lstStyle/>
-          <a:p>
-            <a:pPr indent="0" marL="0">
-              <a:buNone/>
-            </a:pPr>
-            <a:r>
-              <a:rPr lang="en-US" sz="3200" b="1" dirty="0">
-                <a:solidFill>
-                  <a:schemeClr val="tx1"/>
-                </a:solidFill>
-              </a:rPr>
-              <a:t>限制與下一步</a:t>
-            </a:r>
-            <a:endParaRPr lang="en-US" sz="3200" dirty="0"/>
-          </a:p>
-        </p:txBody>
-      </p:sp>
-      <p:sp>
-        <p:nvSpPr>
-          <p:cNvPr id="3" name="limits"/>
-          <p:cNvSpPr/>
-          <p:nvPr/>
-        </p:nvSpPr>
-        <p:spPr>
-          <a:xfrm>
-            <a:off x="548640" y="1417320"/>
-            <a:ext cx="5394960" cy="3246120"/>
-          </a:xfrm>
-          <a:prstGeom prst="roundRect">
-            <a:avLst>
-              <a:gd name="adj" fmla="val 2254"/>
-            </a:avLst>
-          </a:prstGeom>
-          <a:solidFill>
-            <a:schemeClr val="bg2"/>
-          </a:solidFill>
-          <a:ln w="12700">
-            <a:solidFill>
-              <a:schemeClr val="bg2"/>
-            </a:solidFill>
-            <a:prstDash val="solid"/>
-          </a:ln>
-        </p:spPr>
-      </p:sp>
-      <p:sp>
-        <p:nvSpPr>
-          <p:cNvPr id="4" name="Text 2"/>
-          <p:cNvSpPr txBox="1"/>
-          <p:nvPr/>
-        </p:nvSpPr>
-        <p:spPr>
-          <a:xfrm>
-            <a:off x="822960" y="1645920"/>
-            <a:ext cx="4846320" cy="457200"/>
-          </a:xfrm>
-          <a:prstGeom prst="rect">
-            <a:avLst/>
-          </a:prstGeom>
-          <a:noFill/>
-          <a:ln/>
-        </p:spPr>
-        <p:txBody>
-          <a:bodyPr wrap="square" lIns="0" tIns="0" rIns="0" bIns="0" rtlCol="0" anchor="t"/>
-          <a:lstStyle/>
-          <a:p>
-            <a:pPr indent="0" marL="0">
-              <a:buNone/>
-            </a:pPr>
-            <a:r>
-              <a:rPr lang="en-US" sz="2000" b="1" dirty="0">
-                <a:solidFill>
-                  <a:schemeClr val="tx1"/>
-                </a:solidFill>
-              </a:rPr>
-              <a:t>目前的限制</a:t>
-            </a:r>
-            <a:endParaRPr lang="en-US" sz="2000" dirty="0"/>
-          </a:p>
-        </p:txBody>
-      </p:sp>
-      <p:sp>
-        <p:nvSpPr>
-          <p:cNvPr id="5" name="Text 3"/>
-          <p:cNvSpPr txBox="1"/>
-          <p:nvPr/>
-        </p:nvSpPr>
-        <p:spPr>
-          <a:xfrm>
-            <a:off x="822960" y="2194560"/>
-            <a:ext cx="4846320" cy="2377440"/>
-          </a:xfrm>
-          <a:prstGeom prst="rect">
-            <a:avLst/>
-          </a:prstGeom>
-          <a:noFill/>
-          <a:ln/>
-        </p:spPr>
-        <p:txBody>
-          <a:bodyPr wrap="square" lIns="0" tIns="0" rIns="0" bIns="0" rtlCol="0" anchor="t"/>
-          <a:lstStyle/>
-          <a:p>
-            <a:pPr marL="342900" indent="-342900">
-              <a:spcAft>
-                <a:spcPts val="800"/>
-              </a:spcAft>
-              <a:buSzPct val="100000"/>
-              <a:buChar char="•"/>
-            </a:pPr>
-            <a:r>
-              <a:rPr lang="en-US" sz="1400" dirty="0">
-                <a:solidFill>
-                  <a:schemeClr val="tx2"/>
-                </a:solidFill>
-              </a:rPr>
-              <a:t>判出的高點只有 25.7%、低點 31.5% 是真的;每 4 個約 3 個是之後 5 天被超越的假候選</a:t>
-            </a:r>
-            <a:endParaRPr lang="en-US" sz="1500" dirty="0"/>
-          </a:p>
-          <a:p>
-            <a:pPr marL="342900" indent="-342900">
-              <a:spcAft>
-                <a:spcPts val="800"/>
-              </a:spcAft>
-              <a:buSzPct val="100000"/>
-              <a:buChar char="•"/>
-            </a:pPr>
-            <a:r>
-              <a:rPr lang="en-US" sz="1400" dirty="0">
-                <a:solidFill>
-                  <a:schemeClr val="tx2"/>
-                </a:solidFill>
-              </a:rPr>
-              <a:t>AE + OC-SVM(含真、假候選各學一組)保留真、假候選的比例相同,還沒贏過規則</a:t>
-            </a:r>
-            <a:endParaRPr lang="en-US" sz="1500" dirty="0"/>
-          </a:p>
-          <a:p>
-            <a:pPr marL="342900" indent="-342900">
-              <a:spcAft>
-                <a:spcPts val="800"/>
-              </a:spcAft>
-              <a:buSzPct val="100000"/>
-              <a:buChar char="•"/>
-            </a:pPr>
-            <a:r>
-              <a:rPr lang="en-US" sz="1400" dirty="0">
-                <a:solidFill>
-                  <a:schemeClr val="tx2"/>
-                </a:solidFill>
-              </a:rPr>
-              <a:t>規則訊號直接交易(持有 5 天):低點做多勝率 54.3%,每天都做多 53.1%</a:t>
-            </a:r>
-            <a:endParaRPr lang="en-US" sz="1500" dirty="0"/>
-          </a:p>
-        </p:txBody>
-      </p:sp>
-      <p:sp>
-        <p:nvSpPr>
-          <p:cNvPr id="6" name="next"/>
-          <p:cNvSpPr/>
-          <p:nvPr/>
-        </p:nvSpPr>
-        <p:spPr>
-          <a:xfrm>
-            <a:off x="6217920" y="1417320"/>
-            <a:ext cx="5394960" cy="3246120"/>
-          </a:xfrm>
-          <a:prstGeom prst="roundRect">
-            <a:avLst>
-              <a:gd name="adj" fmla="val 2254"/>
-            </a:avLst>
-          </a:prstGeom>
-          <a:solidFill>
-            <a:schemeClr val="bg2"/>
-          </a:solidFill>
-          <a:ln w="12700">
-            <a:solidFill>
-              <a:schemeClr val="bg2"/>
-            </a:solidFill>
-            <a:prstDash val="solid"/>
-          </a:ln>
-        </p:spPr>
-      </p:sp>
-      <p:sp>
-        <p:nvSpPr>
-          <p:cNvPr id="7" name="Text 5"/>
-          <p:cNvSpPr txBox="1"/>
-          <p:nvPr/>
-        </p:nvSpPr>
-        <p:spPr>
-          <a:xfrm>
-            <a:off x="6492240" y="1645920"/>
-            <a:ext cx="4846320" cy="457200"/>
-          </a:xfrm>
-          <a:prstGeom prst="rect">
-            <a:avLst/>
-          </a:prstGeom>
-          <a:noFill/>
-          <a:ln/>
-        </p:spPr>
-        <p:txBody>
-          <a:bodyPr wrap="square" lIns="0" tIns="0" rIns="0" bIns="0" rtlCol="0" anchor="t"/>
-          <a:lstStyle/>
-          <a:p>
-            <a:pPr indent="0" marL="0">
-              <a:buNone/>
-            </a:pPr>
-            <a:r>
-              <a:rPr lang="en-US" sz="2000" b="1" dirty="0">
-                <a:solidFill>
-                  <a:schemeClr val="tx1"/>
-                </a:solidFill>
-              </a:rPr>
-              <a:t>下一步</a:t>
-            </a:r>
-            <a:endParaRPr lang="en-US" sz="2000" dirty="0"/>
-          </a:p>
-        </p:txBody>
-      </p:sp>
-      <p:sp>
-        <p:nvSpPr>
-          <p:cNvPr id="8" name="Text 6"/>
-          <p:cNvSpPr txBox="1"/>
-          <p:nvPr/>
-        </p:nvSpPr>
-        <p:spPr>
-          <a:xfrm>
-            <a:off x="6492240" y="2194560"/>
-            <a:ext cx="4846320" cy="2377440"/>
-          </a:xfrm>
-          <a:prstGeom prst="rect">
-            <a:avLst/>
-          </a:prstGeom>
-          <a:noFill/>
-          <a:ln/>
-        </p:spPr>
-        <p:txBody>
-          <a:bodyPr wrap="square" lIns="0" tIns="0" rIns="0" bIns="0" rtlCol="0" anchor="t"/>
-          <a:lstStyle/>
-          <a:p>
-            <a:pPr marL="342900" indent="-342900">
-              <a:spcAft>
-                <a:spcPts val="800"/>
-              </a:spcAft>
-              <a:buSzPct val="100000"/>
-              <a:buChar char="•"/>
-            </a:pPr>
-            <a:r>
-              <a:rPr lang="en-US" sz="1400" dirty="0">
-                <a:solidFill>
-                  <a:schemeClr val="tx2"/>
-                </a:solidFill>
-              </a:rPr>
-              <a:t>把低點候選的命中率從 31.5% 拉到 36% 以上:扣掉 0.42% 交易成本後的損益兩平點</a:t>
-            </a:r>
-            <a:endParaRPr lang="en-US" sz="1500" dirty="0"/>
-          </a:p>
-          <a:p>
-            <a:pPr marL="342900" indent="-342900">
-              <a:spcAft>
-                <a:spcPts val="800"/>
-              </a:spcAft>
-              <a:buSzPct val="100000"/>
-              <a:buChar char="•"/>
-            </a:pPr>
-            <a:r>
-              <a:rPr lang="en-US" sz="1400" dirty="0">
-                <a:solidFill>
-                  <a:schemeClr val="tx2"/>
-                </a:solidFill>
-              </a:rPr>
-              <a:t>接入券商分點資料,這是論文提升的來源</a:t>
-            </a:r>
-            <a:endParaRPr lang="en-US" sz="1500" dirty="0"/>
-          </a:p>
-          <a:p>
-            <a:pPr marL="342900" indent="-342900">
-              <a:spcAft>
-                <a:spcPts val="800"/>
-              </a:spcAft>
-              <a:buSzPct val="100000"/>
-              <a:buChar char="•"/>
-            </a:pPr>
-            <a:r>
-              <a:rPr lang="en-US" sz="1400" dirty="0">
-                <a:solidFill>
-                  <a:schemeClr val="tx2"/>
-                </a:solidFill>
-              </a:rPr>
-              <a:t>改預測「低點訊號之後 5 天會不會賺錢」,讓標籤直接對應交易</a:t>
-            </a:r>
-            <a:endParaRPr lang="en-US" sz="1500" dirty="0"/>
-          </a:p>
-        </p:txBody>
-      </p:sp>
-      <p:sp>
-        <p:nvSpPr>
-          <p:cNvPr id="9" name="gap-0"/>
-          <p:cNvSpPr/>
-          <p:nvPr/>
-        </p:nvSpPr>
-        <p:spPr>
-          <a:xfrm>
-            <a:off x="548640" y="4846320"/>
-            <a:ext cx="5394960" cy="1005840"/>
-          </a:xfrm>
-          <a:prstGeom prst="roundRect">
-            <a:avLst>
-              <a:gd name="adj" fmla="val 7273"/>
-            </a:avLst>
-          </a:prstGeom>
-          <a:solidFill>
-            <a:schemeClr val="bg2"/>
-          </a:solidFill>
-          <a:ln w="12700">
-            <a:solidFill>
-              <a:schemeClr val="bg2"/>
-            </a:solidFill>
-            <a:prstDash val="solid"/>
-          </a:ln>
-        </p:spPr>
-      </p:sp>
-      <p:sp>
-        <p:nvSpPr>
-          <p:cNvPr id="10" name="Text 8"/>
-          <p:cNvSpPr txBox="1"/>
-          <p:nvPr/>
-        </p:nvSpPr>
-        <p:spPr>
-          <a:xfrm>
-            <a:off x="822960" y="4846320"/>
-            <a:ext cx="1463040" cy="1005840"/>
-          </a:xfrm>
-          <a:prstGeom prst="rect">
-            <a:avLst/>
-          </a:prstGeom>
-          <a:noFill/>
-          <a:ln/>
-        </p:spPr>
-        <p:txBody>
-          <a:bodyPr wrap="square" lIns="0" tIns="0" rIns="0" bIns="0" rtlCol="0" anchor="ctr"/>
-          <a:lstStyle/>
-          <a:p>
-            <a:pPr indent="0" marL="0">
-              <a:buNone/>
-            </a:pPr>
-            <a:r>
-              <a:rPr lang="en-US" sz="1400" b="1" dirty="0">
-                <a:solidFill>
-                  <a:schemeClr val="tx1"/>
-                </a:solidFill>
-              </a:rPr>
-              <a:t>低點候選命中率</a:t>
-            </a:r>
-            <a:endParaRPr lang="en-US" sz="1400" dirty="0"/>
-          </a:p>
-        </p:txBody>
-      </p:sp>
-      <p:sp>
-        <p:nvSpPr>
-          <p:cNvPr id="11" name="Text 9"/>
-          <p:cNvSpPr txBox="1"/>
-          <p:nvPr/>
-        </p:nvSpPr>
-        <p:spPr>
-          <a:xfrm>
-            <a:off x="2331720" y="4846320"/>
-            <a:ext cx="3520440" cy="1005840"/>
-          </a:xfrm>
-          <a:prstGeom prst="rect">
-            <a:avLst/>
-          </a:prstGeom>
-          <a:noFill/>
-          <a:ln/>
-        </p:spPr>
-        <p:txBody>
-          <a:bodyPr wrap="square" lIns="0" tIns="0" rIns="0" bIns="0" rtlCol="0" anchor="ctr"/>
-          <a:lstStyle/>
-          <a:p>
-            <a:pPr indent="0" marL="0">
-              <a:buNone/>
-            </a:pPr>
-            <a:r>
-              <a:rPr lang="en-US" sz="1200" dirty="0">
-                <a:solidFill>
-                  <a:schemeClr val="tx2"/>
-                </a:solidFill>
-              </a:rPr>
-              <a:t>現在 </a:t>
-            </a:r>
-            <a:pPr indent="0" marL="0">
-              <a:buNone/>
-            </a:pPr>
-            <a:r>
-              <a:rPr lang="en-US" sz="2200" b="1" dirty="0">
-                <a:solidFill>
-                  <a:schemeClr val="accent2"/>
-                </a:solidFill>
-              </a:rPr>
-              <a:t>31.5%</a:t>
-            </a:r>
-            <a:pPr indent="0" marL="0">
-              <a:buNone/>
-            </a:pPr>
-            <a:r>
-              <a:rPr lang="en-US" sz="1200" dirty="0">
-                <a:solidFill>
-                  <a:schemeClr val="tx2"/>
-                </a:solidFill>
-              </a:rPr>
-              <a:t>  →  兩平 </a:t>
-            </a:r>
-            <a:pPr indent="0" marL="0">
-              <a:buNone/>
-            </a:pPr>
-            <a:r>
-              <a:rPr lang="en-US" sz="2200" b="1" dirty="0">
-                <a:solidFill>
-                  <a:schemeClr val="tx1"/>
-                </a:solidFill>
-              </a:rPr>
-              <a:t>36%</a:t>
-            </a:r>
-            <a:endParaRPr lang="en-US" sz="1500" dirty="0"/>
-          </a:p>
-        </p:txBody>
-      </p:sp>
-      <p:sp>
-        <p:nvSpPr>
-          <p:cNvPr id="12" name="gap-1"/>
-          <p:cNvSpPr/>
-          <p:nvPr/>
-        </p:nvSpPr>
-        <p:spPr>
-          <a:xfrm>
-            <a:off x="6217920" y="4846320"/>
-            <a:ext cx="5394960" cy="1005840"/>
-          </a:xfrm>
-          <a:prstGeom prst="roundRect">
-            <a:avLst>
-              <a:gd name="adj" fmla="val 7273"/>
-            </a:avLst>
-          </a:prstGeom>
-          <a:solidFill>
-            <a:schemeClr val="bg2"/>
-          </a:solidFill>
-          <a:ln w="12700">
-            <a:solidFill>
-              <a:schemeClr val="bg2"/>
-            </a:solidFill>
-            <a:prstDash val="solid"/>
-          </a:ln>
-        </p:spPr>
-      </p:sp>
-      <p:sp>
-        <p:nvSpPr>
-          <p:cNvPr id="13" name="Text 11"/>
-          <p:cNvSpPr txBox="1"/>
-          <p:nvPr/>
-        </p:nvSpPr>
-        <p:spPr>
-          <a:xfrm>
-            <a:off x="6492240" y="4846320"/>
-            <a:ext cx="1463040" cy="1005840"/>
-          </a:xfrm>
-          <a:prstGeom prst="rect">
-            <a:avLst/>
-          </a:prstGeom>
-          <a:noFill/>
-          <a:ln/>
-        </p:spPr>
-        <p:txBody>
-          <a:bodyPr wrap="square" lIns="0" tIns="0" rIns="0" bIns="0" rtlCol="0" anchor="ctr"/>
-          <a:lstStyle/>
-          <a:p>
-            <a:pPr indent="0" marL="0">
-              <a:buNone/>
-            </a:pPr>
-            <a:r>
-              <a:rPr lang="en-US" sz="1400" b="1" dirty="0">
-                <a:solidFill>
-                  <a:schemeClr val="tx1"/>
-                </a:solidFill>
-              </a:rPr>
-              <a:t>高點候選命中率</a:t>
-            </a:r>
-            <a:endParaRPr lang="en-US" sz="1400" dirty="0"/>
-          </a:p>
-        </p:txBody>
-      </p:sp>
-      <p:sp>
-        <p:nvSpPr>
-          <p:cNvPr id="14" name="Text 12"/>
-          <p:cNvSpPr txBox="1"/>
-          <p:nvPr/>
-        </p:nvSpPr>
-        <p:spPr>
-          <a:xfrm>
-            <a:off x="8001000" y="4846320"/>
-            <a:ext cx="3520440" cy="1005840"/>
-          </a:xfrm>
-          <a:prstGeom prst="rect">
-            <a:avLst/>
-          </a:prstGeom>
-          <a:noFill/>
-          <a:ln/>
-        </p:spPr>
-        <p:txBody>
-          <a:bodyPr wrap="square" lIns="0" tIns="0" rIns="0" bIns="0" rtlCol="0" anchor="ctr"/>
-          <a:lstStyle/>
-          <a:p>
-            <a:pPr indent="0" marL="0">
-              <a:buNone/>
-            </a:pPr>
-            <a:r>
-              <a:rPr lang="en-US" sz="1200" dirty="0">
-                <a:solidFill>
-                  <a:schemeClr val="tx2"/>
-                </a:solidFill>
-              </a:rPr>
-              <a:t>現在 </a:t>
-            </a:r>
-            <a:pPr indent="0" marL="0">
-              <a:buNone/>
-            </a:pPr>
-            <a:r>
-              <a:rPr lang="en-US" sz="2200" b="1" dirty="0">
-                <a:solidFill>
-                  <a:schemeClr val="accent1"/>
-                </a:solidFill>
-              </a:rPr>
-              <a:t>25.7%</a:t>
-            </a:r>
-            <a:pPr indent="0" marL="0">
-              <a:buNone/>
-            </a:pPr>
-            <a:r>
-              <a:rPr lang="en-US" sz="1200" dirty="0">
-                <a:solidFill>
-                  <a:schemeClr val="tx2"/>
-                </a:solidFill>
-              </a:rPr>
-              <a:t>  →  兩平 </a:t>
-            </a:r>
-            <a:pPr indent="0" marL="0">
-              <a:buNone/>
-            </a:pPr>
-            <a:r>
-              <a:rPr lang="en-US" sz="2200" b="1" dirty="0">
-                <a:solidFill>
-                  <a:schemeClr val="tx1"/>
-                </a:solidFill>
-              </a:rPr>
-              <a:t>47%</a:t>
-            </a:r>
-            <a:endParaRPr lang="en-US" sz="1500" dirty="0"/>
-          </a:p>
-        </p:txBody>
-      </p:sp>
-      <p:sp>
-        <p:nvSpPr>
-          <p:cNvPr id="25" name="Slide Number Placeholder 0"/>
-          <p:cNvSpPr>
-            <a:spLocks noGrp="1"/>
-          </p:cNvSpPr>
-          <p:nvPr>
-            <p:ph type="sldNum" sz="quarter" idx="4294967295"/>
-          </p:nvPr>
-        </p:nvSpPr>
-        <p:spPr>
-          <a:xfrm>
-            <a:off x="11201400" y="6355080"/>
-            <a:ext cx="457200" cy="274320"/>
-          </a:xfrm>
-          <a:prstGeom prst="rect">
-            <a:avLst/>
-          </a:prstGeom>
-          <a:extLst>
-            <a:ext uri="{C572A759-6A51-4108-AA02-DFA0A04FC94B}">
-              <ma14:wrappingTextBoxFlag xmlns:ma14="http://schemas.microsoft.com/office/mac/drawingml/2011/main" val="0"/>
-            </a:ext>
-          </a:extLst>
-        </p:spPr>
-        <p:txBody>
-          <a:bodyPr/>
-          <a:lstStyle>
-            <a:lvl1pPr>
-              <a:defRPr sz="1000">
-                <a:solidFill>
-                  <a:srgbClr val="7A8691"/>
-                </a:solidFill>
-              </a:defRPr>
-            </a:lvl1pPr>
-          </a:lstStyle>
-          <a:p>
-            <a:pPr algn="r"/>
-            <a:fld id="{F7021451-1387-4CA6-816F-3879F97B5CBC}" type="slidenum">
-              <a:rPr b="0" lang="en-US"/>
-              <a:t>13</a:t>
-            </a:fld>
-            <a:endParaRPr lang="en-US"/>
-          </a:p>
-        </p:txBody>
-      </p:sp>
-    </p:spTree>
-  </p:cSld>
-  <p:clrMapOvr>
-    <a:masterClrMapping/>
-  </p:clrMapOvr>
-</p:sld>
-</file>
-
-<file path=ppt/slides/slide14.xml><?xml version="1.0" encoding="utf-8"?>
-<p:sld xmlns:a="http://schemas.openxmlformats.org/drawingml/2006/main" xmlns:r="http://schemas.openxmlformats.org/officeDocument/2006/relationships" xmlns:p="http://schemas.openxmlformats.org/presentationml/2006/main">
-  <p:cSld name="Slide 14">
-    <p:spTree>
-      <p:nvGrpSpPr>
-        <p:cNvPr id="1" name=""/>
-        <p:cNvGrpSpPr/>
-        <p:nvPr/>
-      </p:nvGrpSpPr>
-      <p:grpSpPr>
-        <a:xfrm>
-          <a:off x="0" y="0"/>
-          <a:ext cx="0" cy="0"/>
-          <a:chOff x="0" y="0"/>
-          <a:chExt cx="0" cy="0"/>
-        </a:xfrm>
-      </p:grpSpPr>
-      <p:sp>
-        <p:nvSpPr>
-          <p:cNvPr id="2" name="Text 11"/>
-          <p:cNvSpPr/>
-          <p:nvPr>
-            <p:ph idx="111" type="title" hasCustomPrompt="1"/>
-          </p:nvPr>
-        </p:nvSpPr>
-        <p:spPr>
-          <a:xfrm>
-            <a:off x="731520" y="1920240"/>
-            <a:ext cx="10698480" cy="1371600"/>
-          </a:xfrm>
-          <a:prstGeom prst="rect">
-            <a:avLst/>
-          </a:prstGeom>
-          <a:noFill/>
-          <a:ln/>
-        </p:spPr>
-        <p:txBody>
-          <a:bodyPr wrap="square" lIns="0" tIns="0" rIns="0" bIns="0" rtlCol="0" anchor="t"/>
-          <a:lstStyle/>
-          <a:p>
-            <a:pPr indent="0" marL="0">
-              <a:buNone/>
-            </a:pPr>
-            <a:r>
-              <a:rPr lang="en-US" sz="4400" b="1" dirty="0">
-                <a:solidFill>
-                  <a:schemeClr val="bg1"/>
-                </a:solidFill>
-              </a:rPr>
-              <a:t>結論</a:t>
-            </a:r>
-            <a:endParaRPr lang="en-US" sz="4400" dirty="0"/>
-          </a:p>
-        </p:txBody>
-      </p:sp>
-      <p:sp>
-        <p:nvSpPr>
-          <p:cNvPr id="3" name="Text 11"/>
-          <p:cNvSpPr/>
-          <p:nvPr>
-            <p:ph idx="112" type="body" hasCustomPrompt="1"/>
-          </p:nvPr>
-        </p:nvSpPr>
-        <p:spPr>
-          <a:xfrm>
-            <a:off x="731520" y="3429000"/>
-            <a:ext cx="10698480" cy="2377440"/>
-          </a:xfrm>
-          <a:prstGeom prst="rect">
-            <a:avLst/>
-          </a:prstGeom>
-          <a:noFill/>
-          <a:ln/>
-        </p:spPr>
-        <p:txBody>
-          <a:bodyPr wrap="square" lIns="0" tIns="0" rIns="0" bIns="0" rtlCol="0" anchor="t"/>
-          <a:lstStyle/>
-          <a:p>
-            <a:pPr marL="342900" indent="-342900">
-              <a:spcAft>
-                <a:spcPts val="800"/>
-              </a:spcAft>
-              <a:buSzPct val="100000"/>
-              <a:buChar char="•"/>
-            </a:pPr>
-            <a:r>
-              <a:rPr lang="en-US" sz="2000" dirty="0">
-                <a:solidFill>
-                  <a:schemeClr val="bg2"/>
-                </a:solidFill>
-              </a:rPr>
-              <a:t>依論文定義在 TW50 重現 11 日局部高低點標籤與規則基準(macro-F1 53.5%,論文 53.4%)</a:t>
-            </a:r>
-            <a:endParaRPr lang="en-US" sz="1800" dirty="0"/>
-          </a:p>
-          <a:p>
-            <a:pPr marL="342900" indent="-342900">
-              <a:spcAft>
-                <a:spcPts val="800"/>
-              </a:spcAft>
-              <a:buSzPct val="100000"/>
-              <a:buChar char="•"/>
-            </a:pPr>
-            <a:r>
-              <a:rPr lang="en-US" sz="2000" dirty="0">
-                <a:solidFill>
-                  <a:schemeClr val="bg2"/>
-                </a:solidFill>
-              </a:rPr>
-              <a:t>局部準確度:真高低點 100% 進候選,判非極值 94.5% 正確,候選命中率是亂猜的 3.5–4.2 倍</a:t>
-            </a:r>
-            <a:endParaRPr lang="en-US" sz="1800" dirty="0"/>
-          </a:p>
-          <a:p>
-            <a:pPr marL="342900" indent="-342900">
-              <a:spcAft>
-                <a:spcPts val="800"/>
-              </a:spcAft>
-              <a:buSzPct val="100000"/>
-              <a:buChar char="•"/>
-            </a:pPr>
-            <a:r>
-              <a:rPr lang="en-US" sz="2000" dirty="0">
-                <a:solidFill>
-                  <a:schemeClr val="bg2"/>
-                </a:solidFill>
-              </a:rPr>
-              <a:t>下一步:提高候選命中率,低點目標 36% 以上</a:t>
-            </a:r>
-            <a:endParaRPr lang="en-US" sz="1800" dirty="0"/>
           </a:p>
         </p:txBody>
       </p:sp>
@@ -6984,1481 +3465,6 @@
                   <a:schemeClr val="tx1"/>
                 </a:solidFill>
               </a:rPr>
-              <a:t>一頁看結果:真高低點不漏,判非極值很準</a:t>
-            </a:r>
-            <a:endParaRPr lang="en-US" sz="3200" dirty="0"/>
-          </a:p>
-        </p:txBody>
-      </p:sp>
-      <p:sp>
-        <p:nvSpPr>
-          <p:cNvPr id="3" name="stat-0"/>
-          <p:cNvSpPr/>
-          <p:nvPr/>
-        </p:nvSpPr>
-        <p:spPr>
-          <a:xfrm>
-            <a:off x="548640" y="1463040"/>
-            <a:ext cx="3474720" cy="3383280"/>
-          </a:xfrm>
-          <a:prstGeom prst="roundRect">
-            <a:avLst>
-              <a:gd name="adj" fmla="val 2162"/>
-            </a:avLst>
-          </a:prstGeom>
-          <a:solidFill>
-            <a:schemeClr val="bg2"/>
-          </a:solidFill>
-          <a:ln w="12700">
-            <a:solidFill>
-              <a:schemeClr val="bg2"/>
-            </a:solidFill>
-            <a:prstDash val="solid"/>
-          </a:ln>
-        </p:spPr>
-      </p:sp>
-      <p:sp>
-        <p:nvSpPr>
-          <p:cNvPr id="4" name="Text 2"/>
-          <p:cNvSpPr txBox="1"/>
-          <p:nvPr/>
-        </p:nvSpPr>
-        <p:spPr>
-          <a:xfrm>
-            <a:off x="822960" y="1737360"/>
-            <a:ext cx="3017520" cy="1005840"/>
-          </a:xfrm>
-          <a:prstGeom prst="rect">
-            <a:avLst/>
-          </a:prstGeom>
-          <a:noFill/>
-          <a:ln/>
-        </p:spPr>
-        <p:txBody>
-          <a:bodyPr wrap="square" lIns="0" tIns="0" rIns="0" bIns="0" rtlCol="0" anchor="ctr"/>
-          <a:lstStyle/>
-          <a:p>
-            <a:pPr indent="0" marL="0">
-              <a:buNone/>
-            </a:pPr>
-            <a:r>
-              <a:rPr lang="en-US" sz="5400" b="1" dirty="0">
-                <a:solidFill>
-                  <a:schemeClr val="accent1"/>
-                </a:solidFill>
-              </a:rPr>
-              <a:t>100%</a:t>
-            </a:r>
-            <a:endParaRPr lang="en-US" sz="5400" dirty="0"/>
-          </a:p>
-        </p:txBody>
-      </p:sp>
-      <p:sp>
-        <p:nvSpPr>
-          <p:cNvPr id="5" name="Text 3"/>
-          <p:cNvSpPr txBox="1"/>
-          <p:nvPr/>
-        </p:nvSpPr>
-        <p:spPr>
-          <a:xfrm>
-            <a:off x="822960" y="2834640"/>
-            <a:ext cx="3017520" cy="457200"/>
-          </a:xfrm>
-          <a:prstGeom prst="rect">
-            <a:avLst/>
-          </a:prstGeom>
-          <a:noFill/>
-          <a:ln/>
-        </p:spPr>
-        <p:txBody>
-          <a:bodyPr wrap="square" lIns="0" tIns="0" rIns="0" bIns="0" rtlCol="0" anchor="t"/>
-          <a:lstStyle/>
-          <a:p>
-            <a:pPr indent="0" marL="0">
-              <a:buNone/>
-            </a:pPr>
-            <a:r>
-              <a:rPr lang="en-US" sz="1800" b="1" dirty="0">
-                <a:solidFill>
-                  <a:schemeClr val="tx1"/>
-                </a:solidFill>
-              </a:rPr>
-              <a:t>真高低點全部進候選</a:t>
-            </a:r>
-            <a:endParaRPr lang="en-US" sz="1800" dirty="0"/>
-          </a:p>
-        </p:txBody>
-      </p:sp>
-      <p:sp>
-        <p:nvSpPr>
-          <p:cNvPr id="6" name="Text 4"/>
-          <p:cNvSpPr txBox="1"/>
-          <p:nvPr/>
-        </p:nvSpPr>
-        <p:spPr>
-          <a:xfrm>
-            <a:off x="822960" y="3337560"/>
-            <a:ext cx="3017520" cy="1371600"/>
-          </a:xfrm>
-          <a:prstGeom prst="rect">
-            <a:avLst/>
-          </a:prstGeom>
-          <a:noFill/>
-          <a:ln/>
-        </p:spPr>
-        <p:txBody>
-          <a:bodyPr wrap="square" lIns="0" tIns="0" rIns="0" bIns="0" rtlCol="0" anchor="t"/>
-          <a:lstStyle/>
-          <a:p>
-            <a:pPr indent="0" marL="0">
-              <a:buNone/>
-            </a:pPr>
-            <a:r>
-              <a:rPr lang="en-US" sz="1300" dirty="0">
-                <a:solidFill>
-                  <a:schemeClr val="tx2"/>
-                </a:solidFill>
-              </a:rPr>
-              <a:t>測試期 1,470 個 11 日高點,規則一個都沒漏;低點 1,532 個找到 1,531 個(99.9%)</a:t>
-            </a:r>
-            <a:endParaRPr lang="en-US" sz="1300" dirty="0"/>
-          </a:p>
-        </p:txBody>
-      </p:sp>
-      <p:sp>
-        <p:nvSpPr>
-          <p:cNvPr id="7" name="stat-1"/>
-          <p:cNvSpPr/>
-          <p:nvPr/>
-        </p:nvSpPr>
-        <p:spPr>
-          <a:xfrm>
-            <a:off x="4297680" y="1463040"/>
-            <a:ext cx="3474720" cy="3383280"/>
-          </a:xfrm>
-          <a:prstGeom prst="roundRect">
-            <a:avLst>
-              <a:gd name="adj" fmla="val 2162"/>
-            </a:avLst>
-          </a:prstGeom>
-          <a:solidFill>
-            <a:schemeClr val="bg2"/>
-          </a:solidFill>
-          <a:ln w="12700">
-            <a:solidFill>
-              <a:schemeClr val="bg2"/>
-            </a:solidFill>
-            <a:prstDash val="solid"/>
-          </a:ln>
-        </p:spPr>
-      </p:sp>
-      <p:sp>
-        <p:nvSpPr>
-          <p:cNvPr id="8" name="Text 6"/>
-          <p:cNvSpPr txBox="1"/>
-          <p:nvPr/>
-        </p:nvSpPr>
-        <p:spPr>
-          <a:xfrm>
-            <a:off x="4572000" y="1737360"/>
-            <a:ext cx="3017520" cy="1005840"/>
-          </a:xfrm>
-          <a:prstGeom prst="rect">
-            <a:avLst/>
-          </a:prstGeom>
-          <a:noFill/>
-          <a:ln/>
-        </p:spPr>
-        <p:txBody>
-          <a:bodyPr wrap="square" lIns="0" tIns="0" rIns="0" bIns="0" rtlCol="0" anchor="ctr"/>
-          <a:lstStyle/>
-          <a:p>
-            <a:pPr indent="0" marL="0">
-              <a:buNone/>
-            </a:pPr>
-            <a:r>
-              <a:rPr lang="en-US" sz="5400" b="1" dirty="0">
-                <a:solidFill>
-                  <a:schemeClr val="accent3"/>
-                </a:solidFill>
-              </a:rPr>
-              <a:t>94.5%</a:t>
-            </a:r>
-            <a:endParaRPr lang="en-US" sz="5400" dirty="0"/>
-          </a:p>
-        </p:txBody>
-      </p:sp>
-      <p:sp>
-        <p:nvSpPr>
-          <p:cNvPr id="9" name="Text 7"/>
-          <p:cNvSpPr txBox="1"/>
-          <p:nvPr/>
-        </p:nvSpPr>
-        <p:spPr>
-          <a:xfrm>
-            <a:off x="4572000" y="2834640"/>
-            <a:ext cx="3017520" cy="457200"/>
-          </a:xfrm>
-          <a:prstGeom prst="rect">
-            <a:avLst/>
-          </a:prstGeom>
-          <a:noFill/>
-          <a:ln/>
-        </p:spPr>
-        <p:txBody>
-          <a:bodyPr wrap="square" lIns="0" tIns="0" rIns="0" bIns="0" rtlCol="0" anchor="t"/>
-          <a:lstStyle/>
-          <a:p>
-            <a:pPr indent="0" marL="0">
-              <a:buNone/>
-            </a:pPr>
-            <a:r>
-              <a:rPr lang="en-US" sz="1800" b="1" dirty="0">
-                <a:solidFill>
-                  <a:schemeClr val="tx1"/>
-                </a:solidFill>
-              </a:rPr>
-              <a:t>判「不是高低點」時正確</a:t>
-            </a:r>
-            <a:endParaRPr lang="en-US" sz="1800" dirty="0"/>
-          </a:p>
-        </p:txBody>
-      </p:sp>
-      <p:sp>
-        <p:nvSpPr>
-          <p:cNvPr id="10" name="Text 8"/>
-          <p:cNvSpPr txBox="1"/>
-          <p:nvPr/>
-        </p:nvSpPr>
-        <p:spPr>
-          <a:xfrm>
-            <a:off x="4572000" y="3337560"/>
-            <a:ext cx="3017520" cy="1371600"/>
-          </a:xfrm>
-          <a:prstGeom prst="rect">
-            <a:avLst/>
-          </a:prstGeom>
-          <a:noFill/>
-          <a:ln/>
-        </p:spPr>
-        <p:txBody>
-          <a:bodyPr wrap="square" lIns="0" tIns="0" rIns="0" bIns="0" rtlCol="0" anchor="t"/>
-          <a:lstStyle/>
-          <a:p>
-            <a:pPr indent="0" marL="0">
-              <a:buNone/>
-            </a:pPr>
-            <a:r>
-              <a:rPr lang="en-US" sz="1300" dirty="0">
-                <a:solidFill>
-                  <a:schemeClr val="tx2"/>
-                </a:solidFill>
-              </a:rPr>
-              <a:t>模型判非極值的 11,942 天裡,11,288 天真的不是高低點</a:t>
-            </a:r>
-            <a:endParaRPr lang="en-US" sz="1300" dirty="0"/>
-          </a:p>
-        </p:txBody>
-      </p:sp>
-      <p:sp>
-        <p:nvSpPr>
-          <p:cNvPr id="11" name="stat-2"/>
-          <p:cNvSpPr/>
-          <p:nvPr/>
-        </p:nvSpPr>
-        <p:spPr>
-          <a:xfrm>
-            <a:off x="8046720" y="1463040"/>
-            <a:ext cx="3474720" cy="3383280"/>
-          </a:xfrm>
-          <a:prstGeom prst="roundRect">
-            <a:avLst>
-              <a:gd name="adj" fmla="val 2162"/>
-            </a:avLst>
-          </a:prstGeom>
-          <a:solidFill>
-            <a:schemeClr val="bg2"/>
-          </a:solidFill>
-          <a:ln w="12700">
-            <a:solidFill>
-              <a:schemeClr val="bg2"/>
-            </a:solidFill>
-            <a:prstDash val="solid"/>
-          </a:ln>
-        </p:spPr>
-      </p:sp>
-      <p:sp>
-        <p:nvSpPr>
-          <p:cNvPr id="12" name="Text 10"/>
-          <p:cNvSpPr txBox="1"/>
-          <p:nvPr/>
-        </p:nvSpPr>
-        <p:spPr>
-          <a:xfrm>
-            <a:off x="8321040" y="1737360"/>
-            <a:ext cx="3017520" cy="1005840"/>
-          </a:xfrm>
-          <a:prstGeom prst="rect">
-            <a:avLst/>
-          </a:prstGeom>
-          <a:noFill/>
-          <a:ln/>
-        </p:spPr>
-        <p:txBody>
-          <a:bodyPr wrap="square" lIns="0" tIns="0" rIns="0" bIns="0" rtlCol="0" anchor="ctr"/>
-          <a:lstStyle/>
-          <a:p>
-            <a:pPr indent="0" marL="0">
-              <a:buNone/>
-            </a:pPr>
-            <a:r>
-              <a:rPr lang="en-US" sz="5400" b="1" dirty="0">
-                <a:solidFill>
-                  <a:schemeClr val="accent2"/>
-                </a:solidFill>
-              </a:rPr>
-              <a:t>3.5–4.2×</a:t>
-            </a:r>
-            <a:endParaRPr lang="en-US" sz="5400" dirty="0"/>
-          </a:p>
-        </p:txBody>
-      </p:sp>
-      <p:sp>
-        <p:nvSpPr>
-          <p:cNvPr id="13" name="Text 11"/>
-          <p:cNvSpPr txBox="1"/>
-          <p:nvPr/>
-        </p:nvSpPr>
-        <p:spPr>
-          <a:xfrm>
-            <a:off x="8321040" y="2834640"/>
-            <a:ext cx="3017520" cy="457200"/>
-          </a:xfrm>
-          <a:prstGeom prst="rect">
-            <a:avLst/>
-          </a:prstGeom>
-          <a:noFill/>
-          <a:ln/>
-        </p:spPr>
-        <p:txBody>
-          <a:bodyPr wrap="square" lIns="0" tIns="0" rIns="0" bIns="0" rtlCol="0" anchor="t"/>
-          <a:lstStyle/>
-          <a:p>
-            <a:pPr indent="0" marL="0">
-              <a:buNone/>
-            </a:pPr>
-            <a:r>
-              <a:rPr lang="en-US" sz="1800" b="1" dirty="0">
-                <a:solidFill>
-                  <a:schemeClr val="tx1"/>
-                </a:solidFill>
-              </a:rPr>
-              <a:t>候選的命中率是亂猜的倍數</a:t>
-            </a:r>
-            <a:endParaRPr lang="en-US" sz="1800" dirty="0"/>
-          </a:p>
-        </p:txBody>
-      </p:sp>
-      <p:sp>
-        <p:nvSpPr>
-          <p:cNvPr id="14" name="Text 12"/>
-          <p:cNvSpPr txBox="1"/>
-          <p:nvPr/>
-        </p:nvSpPr>
-        <p:spPr>
-          <a:xfrm>
-            <a:off x="8321040" y="3337560"/>
-            <a:ext cx="3017520" cy="1371600"/>
-          </a:xfrm>
-          <a:prstGeom prst="rect">
-            <a:avLst/>
-          </a:prstGeom>
-          <a:noFill/>
-          <a:ln/>
-        </p:spPr>
-        <p:txBody>
-          <a:bodyPr wrap="square" lIns="0" tIns="0" rIns="0" bIns="0" rtlCol="0" anchor="t"/>
-          <a:lstStyle/>
-          <a:p>
-            <a:pPr indent="0" marL="0">
-              <a:buNone/>
-            </a:pPr>
-            <a:r>
-              <a:rPr lang="en-US" sz="1300" dirty="0">
-                <a:solidFill>
-                  <a:schemeClr val="tx2"/>
-                </a:solidFill>
-              </a:rPr>
-              <a:t>隨機挑一天是高(低)點的機率只有 7.3%(7.6%);被挑出的候選是 25.7%(31.5%)</a:t>
-            </a:r>
-            <a:endParaRPr lang="en-US" sz="1300" dirty="0"/>
-          </a:p>
-        </p:txBody>
-      </p:sp>
-      <p:sp>
-        <p:nvSpPr>
-          <p:cNvPr id="15" name="Text 13"/>
-          <p:cNvSpPr txBox="1"/>
-          <p:nvPr/>
-        </p:nvSpPr>
-        <p:spPr>
-          <a:xfrm>
-            <a:off x="548640" y="5120640"/>
-            <a:ext cx="11064240" cy="548640"/>
-          </a:xfrm>
-          <a:prstGeom prst="rect">
-            <a:avLst/>
-          </a:prstGeom>
-          <a:noFill/>
-          <a:ln/>
-        </p:spPr>
-        <p:txBody>
-          <a:bodyPr wrap="square" lIns="0" tIns="0" rIns="0" bIns="0" rtlCol="0" anchor="t"/>
-          <a:lstStyle/>
-          <a:p>
-            <a:pPr indent="0" marL="0">
-              <a:buNone/>
-            </a:pPr>
-            <a:r>
-              <a:rPr lang="en-US" sz="1400" dirty="0">
-                <a:solidFill>
-                  <a:schemeClr val="tx2"/>
-                </a:solidFill>
-              </a:rPr>
-              <a:t>測試期 2025-01 ~ 2026-09,TW50 共 20,189 個股票日。限制:被挑出的候選中只有 25–32% 是真高低點,見第 13 頁。</a:t>
-            </a:r>
-            <a:endParaRPr lang="en-US" sz="1400" dirty="0"/>
-          </a:p>
-        </p:txBody>
-      </p:sp>
-      <p:sp>
-        <p:nvSpPr>
-          <p:cNvPr id="25" name="Slide Number Placeholder 0"/>
-          <p:cNvSpPr>
-            <a:spLocks noGrp="1"/>
-          </p:cNvSpPr>
-          <p:nvPr>
-            <p:ph type="sldNum" sz="quarter" idx="4294967295"/>
-          </p:nvPr>
-        </p:nvSpPr>
-        <p:spPr>
-          <a:xfrm>
-            <a:off x="11201400" y="6355080"/>
-            <a:ext cx="457200" cy="274320"/>
-          </a:xfrm>
-          <a:prstGeom prst="rect">
-            <a:avLst/>
-          </a:prstGeom>
-          <a:extLst>
-            <a:ext uri="{C572A759-6A51-4108-AA02-DFA0A04FC94B}">
-              <ma14:wrappingTextBoxFlag xmlns:ma14="http://schemas.microsoft.com/office/mac/drawingml/2011/main" val="0"/>
-            </a:ext>
-          </a:extLst>
-        </p:spPr>
-        <p:txBody>
-          <a:bodyPr/>
-          <a:lstStyle>
-            <a:lvl1pPr>
-              <a:defRPr sz="1000">
-                <a:solidFill>
-                  <a:srgbClr val="7A8691"/>
-                </a:solidFill>
-              </a:defRPr>
-            </a:lvl1pPr>
-          </a:lstStyle>
-          <a:p>
-            <a:pPr algn="r"/>
-            <a:fld id="{F7021451-1387-4CA6-816F-3879F97B5CBC}" type="slidenum">
-              <a:rPr b="0" lang="en-US"/>
-              <a:t>2</a:t>
-            </a:fld>
-            <a:endParaRPr lang="en-US"/>
-          </a:p>
-        </p:txBody>
-      </p:sp>
-    </p:spTree>
-  </p:cSld>
-  <p:clrMapOvr>
-    <a:masterClrMapping/>
-  </p:clrMapOvr>
-</p:sld>
-</file>
-
-<file path=ppt/slides/slide3.xml><?xml version="1.0" encoding="utf-8"?>
-<p:sld xmlns:a="http://schemas.openxmlformats.org/drawingml/2006/main" xmlns:r="http://schemas.openxmlformats.org/officeDocument/2006/relationships" xmlns:p="http://schemas.openxmlformats.org/presentationml/2006/main">
-  <p:cSld name="Slide 3">
-    <p:spTree>
-      <p:nvGrpSpPr>
-        <p:cNvPr id="1" name=""/>
-        <p:cNvGrpSpPr/>
-        <p:nvPr/>
-      </p:nvGrpSpPr>
-      <p:grpSpPr>
-        <a:xfrm>
-          <a:off x="0" y="0"/>
-          <a:ext cx="0" cy="0"/>
-          <a:chOff x="0" y="0"/>
-          <a:chExt cx="0" cy="0"/>
-        </a:xfrm>
-      </p:grpSpPr>
-      <p:sp>
-        <p:nvSpPr>
-          <p:cNvPr id="2" name="Text 11"/>
-          <p:cNvSpPr/>
-          <p:nvPr>
-            <p:ph idx="111" type="title" hasCustomPrompt="1"/>
-          </p:nvPr>
-        </p:nvSpPr>
-        <p:spPr>
-          <a:xfrm>
-            <a:off x="548640" y="320040"/>
-            <a:ext cx="9418320" cy="777240"/>
-          </a:xfrm>
-          <a:prstGeom prst="rect">
-            <a:avLst/>
-          </a:prstGeom>
-          <a:noFill/>
-          <a:ln/>
-        </p:spPr>
-        <p:txBody>
-          <a:bodyPr wrap="square" lIns="0" tIns="0" rIns="0" bIns="0" rtlCol="0" anchor="ctr"/>
-          <a:lstStyle/>
-          <a:p>
-            <a:pPr indent="0" marL="0">
-              <a:buNone/>
-            </a:pPr>
-            <a:r>
-              <a:rPr lang="en-US" sz="3200" b="1" dirty="0">
-                <a:solidFill>
-                  <a:schemeClr val="tx1"/>
-                </a:solidFill>
-              </a:rPr>
-              <a:t>我們的找尋怎麼變成找 11 天高低點</a:t>
-            </a:r>
-            <a:endParaRPr lang="en-US" sz="3200" dirty="0"/>
-          </a:p>
-        </p:txBody>
-      </p:sp>
-      <p:sp>
-        <p:nvSpPr>
-          <p:cNvPr id="3" name="before"/>
-          <p:cNvSpPr/>
-          <p:nvPr/>
-        </p:nvSpPr>
-        <p:spPr>
-          <a:xfrm>
-            <a:off x="548640" y="1417320"/>
-            <a:ext cx="5120640" cy="3611880"/>
-          </a:xfrm>
-          <a:prstGeom prst="roundRect">
-            <a:avLst>
-              <a:gd name="adj" fmla="val 2025"/>
-            </a:avLst>
-          </a:prstGeom>
-          <a:solidFill>
-            <a:schemeClr val="bg2"/>
-          </a:solidFill>
-          <a:ln w="12700">
-            <a:solidFill>
-              <a:schemeClr val="bg2"/>
-            </a:solidFill>
-            <a:prstDash val="solid"/>
-          </a:ln>
-        </p:spPr>
-      </p:sp>
-      <p:sp>
-        <p:nvSpPr>
-          <p:cNvPr id="4" name="Text 2"/>
-          <p:cNvSpPr txBox="1"/>
-          <p:nvPr/>
-        </p:nvSpPr>
-        <p:spPr>
-          <a:xfrm>
-            <a:off x="822960" y="1645920"/>
-            <a:ext cx="4572000" cy="365760"/>
-          </a:xfrm>
-          <a:prstGeom prst="rect">
-            <a:avLst/>
-          </a:prstGeom>
-          <a:noFill/>
-          <a:ln/>
-        </p:spPr>
-        <p:txBody>
-          <a:bodyPr wrap="square" lIns="0" tIns="0" rIns="0" bIns="0" rtlCol="0" anchor="t"/>
-          <a:lstStyle/>
-          <a:p>
-            <a:pPr indent="0" marL="0">
-              <a:buNone/>
-            </a:pPr>
-            <a:r>
-              <a:rPr lang="en-US" sz="1300" dirty="0">
-                <a:solidFill>
-                  <a:schemeClr val="accent5"/>
-                </a:solidFill>
-              </a:rPr>
-              <a:t>之前(2026-03 ~ 09)</a:t>
-            </a:r>
-            <a:endParaRPr lang="en-US" sz="1300" dirty="0"/>
-          </a:p>
-        </p:txBody>
-      </p:sp>
-      <p:sp>
-        <p:nvSpPr>
-          <p:cNvPr id="5" name="Text 3"/>
-          <p:cNvSpPr txBox="1"/>
-          <p:nvPr/>
-        </p:nvSpPr>
-        <p:spPr>
-          <a:xfrm>
-            <a:off x="822960" y="2011680"/>
-            <a:ext cx="4572000" cy="822960"/>
-          </a:xfrm>
-          <a:prstGeom prst="rect">
-            <a:avLst/>
-          </a:prstGeom>
-          <a:noFill/>
-          <a:ln/>
-        </p:spPr>
-        <p:txBody>
-          <a:bodyPr wrap="square" lIns="0" tIns="0" rIns="0" bIns="0" rtlCol="0" anchor="t"/>
-          <a:lstStyle/>
-          <a:p>
-            <a:pPr indent="0" marL="0">
-              <a:buNone/>
-            </a:pPr>
-            <a:r>
-              <a:rPr lang="en-US" sz="2000" b="1" dirty="0">
-                <a:solidFill>
-                  <a:schemeClr val="tx1"/>
-                </a:solidFill>
-              </a:rPr>
-              <a:t>K 線型態 + AE + OC-SVM 預測 5 日大漲大跌</a:t>
-            </a:r>
-            <a:endParaRPr lang="en-US" sz="2000" dirty="0"/>
-          </a:p>
-        </p:txBody>
-      </p:sp>
-      <p:sp>
-        <p:nvSpPr>
-          <p:cNvPr id="6" name="Text 4"/>
-          <p:cNvSpPr txBox="1"/>
-          <p:nvPr/>
-        </p:nvSpPr>
-        <p:spPr>
-          <a:xfrm>
-            <a:off x="822960" y="2880360"/>
-            <a:ext cx="4572000" cy="2011680"/>
-          </a:xfrm>
-          <a:prstGeom prst="rect">
-            <a:avLst/>
-          </a:prstGeom>
-          <a:noFill/>
-          <a:ln/>
-        </p:spPr>
-        <p:txBody>
-          <a:bodyPr wrap="square" lIns="0" tIns="0" rIns="0" bIns="0" rtlCol="0" anchor="t"/>
-          <a:lstStyle/>
-          <a:p>
-            <a:pPr marL="342900" indent="-342900">
-              <a:spcAft>
-                <a:spcPts val="800"/>
-              </a:spcAft>
-              <a:buSzPct val="100000"/>
-              <a:buChar char="•"/>
-            </a:pPr>
-            <a:r>
-              <a:rPr lang="en-US" sz="1400" dirty="0">
-                <a:solidFill>
-                  <a:schemeClr val="tx2"/>
-                </a:solidFill>
-              </a:rPr>
-              <a:t>輸入 1 / 2 / 3 日 K 線特徵,找「之後 5 天漲超過 5%」的相似型態</a:t>
-            </a:r>
-            <a:endParaRPr lang="en-US" sz="1500" dirty="0"/>
-          </a:p>
-          <a:p>
-            <a:pPr marL="342900" indent="-342900">
-              <a:spcAft>
-                <a:spcPts val="800"/>
-              </a:spcAft>
-              <a:buSzPct val="100000"/>
-              <a:buChar char="•"/>
-            </a:pPr>
-            <a:r>
-              <a:rPr lang="en-US" sz="1400" dirty="0">
-                <a:solidFill>
-                  <a:schemeClr val="tx2"/>
-                </a:solidFill>
-              </a:rPr>
-              <a:t>2026 回測勝率 52.9%,組合 +40.9%,輸給同期買進持有 +73.9%</a:t>
-            </a:r>
-            <a:endParaRPr lang="en-US" sz="1500" dirty="0"/>
-          </a:p>
-          <a:p>
-            <a:pPr marL="342900" indent="-342900">
-              <a:spcAft>
-                <a:spcPts val="800"/>
-              </a:spcAft>
-              <a:buSzPct val="100000"/>
-              <a:buChar char="•"/>
-            </a:pPr>
-            <a:r>
-              <a:rPr lang="en-US" sz="1400" dirty="0">
-                <a:solidFill>
-                  <a:schemeClr val="tx2"/>
-                </a:solidFill>
-              </a:rPr>
-              <a:t>問題:「會不會大漲」太難,而且跟買賣時點沒有直接關係</a:t>
-            </a:r>
-            <a:endParaRPr lang="en-US" sz="1500" dirty="0"/>
-          </a:p>
-        </p:txBody>
-      </p:sp>
-      <p:sp>
-        <p:nvSpPr>
-          <p:cNvPr id="7" name="arrow"/>
-          <p:cNvSpPr/>
-          <p:nvPr/>
-        </p:nvSpPr>
-        <p:spPr>
-          <a:xfrm>
-            <a:off x="5806440" y="2971800"/>
-            <a:ext cx="548640" cy="502920"/>
-          </a:xfrm>
-          <a:prstGeom prst="rightArrow">
-            <a:avLst/>
-          </a:prstGeom>
-          <a:solidFill>
-            <a:schemeClr val="accent1"/>
-          </a:solidFill>
-          <a:ln w="12700">
-            <a:solidFill>
-              <a:schemeClr val="accent1"/>
-            </a:solidFill>
-            <a:prstDash val="solid"/>
-          </a:ln>
-        </p:spPr>
-      </p:sp>
-      <p:sp>
-        <p:nvSpPr>
-          <p:cNvPr id="8" name="after"/>
-          <p:cNvSpPr/>
-          <p:nvPr/>
-        </p:nvSpPr>
-        <p:spPr>
-          <a:xfrm>
-            <a:off x="6492240" y="1417320"/>
-            <a:ext cx="5120640" cy="3611880"/>
-          </a:xfrm>
-          <a:prstGeom prst="roundRect">
-            <a:avLst>
-              <a:gd name="adj" fmla="val 2025"/>
-            </a:avLst>
-          </a:prstGeom>
-          <a:solidFill>
-            <a:schemeClr val="bg2"/>
-          </a:solidFill>
-          <a:ln w="12700">
-            <a:solidFill>
-              <a:schemeClr val="bg2"/>
-            </a:solidFill>
-            <a:prstDash val="solid"/>
-          </a:ln>
-        </p:spPr>
-      </p:sp>
-      <p:sp>
-        <p:nvSpPr>
-          <p:cNvPr id="9" name="Text 7"/>
-          <p:cNvSpPr txBox="1"/>
-          <p:nvPr/>
-        </p:nvSpPr>
-        <p:spPr>
-          <a:xfrm>
-            <a:off x="6766560" y="1645920"/>
-            <a:ext cx="4572000" cy="365760"/>
-          </a:xfrm>
-          <a:prstGeom prst="rect">
-            <a:avLst/>
-          </a:prstGeom>
-          <a:noFill/>
-          <a:ln/>
-        </p:spPr>
-        <p:txBody>
-          <a:bodyPr wrap="square" lIns="0" tIns="0" rIns="0" bIns="0" rtlCol="0" anchor="t"/>
-          <a:lstStyle/>
-          <a:p>
-            <a:pPr indent="0" marL="0">
-              <a:buNone/>
-            </a:pPr>
-            <a:r>
-              <a:rPr lang="en-US" sz="1300" dirty="0">
-                <a:solidFill>
-                  <a:schemeClr val="accent5"/>
-                </a:solidFill>
-              </a:rPr>
-              <a:t>現在(2026-10 起)</a:t>
-            </a:r>
-            <a:endParaRPr lang="en-US" sz="1300" dirty="0"/>
-          </a:p>
-        </p:txBody>
-      </p:sp>
-      <p:sp>
-        <p:nvSpPr>
-          <p:cNvPr id="10" name="Text 8"/>
-          <p:cNvSpPr txBox="1"/>
-          <p:nvPr/>
-        </p:nvSpPr>
-        <p:spPr>
-          <a:xfrm>
-            <a:off x="6766560" y="2011680"/>
-            <a:ext cx="4572000" cy="822960"/>
-          </a:xfrm>
-          <a:prstGeom prst="rect">
-            <a:avLst/>
-          </a:prstGeom>
-          <a:noFill/>
-          <a:ln/>
-        </p:spPr>
-        <p:txBody>
-          <a:bodyPr wrap="square" lIns="0" tIns="0" rIns="0" bIns="0" rtlCol="0" anchor="t"/>
-          <a:lstStyle/>
-          <a:p>
-            <a:pPr indent="0" marL="0">
-              <a:buNone/>
-            </a:pPr>
-            <a:r>
-              <a:rPr lang="en-US" sz="2000" b="1" dirty="0">
-                <a:solidFill>
-                  <a:schemeClr val="tx1"/>
-                </a:solidFill>
-              </a:rPr>
-              <a:t>找 11 天窗口裡的局部高點與低點</a:t>
-            </a:r>
-            <a:endParaRPr lang="en-US" sz="2000" dirty="0"/>
-          </a:p>
-        </p:txBody>
-      </p:sp>
-      <p:sp>
-        <p:nvSpPr>
-          <p:cNvPr id="11" name="Text 9"/>
-          <p:cNvSpPr txBox="1"/>
-          <p:nvPr/>
-        </p:nvSpPr>
-        <p:spPr>
-          <a:xfrm>
-            <a:off x="6766560" y="2880360"/>
-            <a:ext cx="4572000" cy="2011680"/>
-          </a:xfrm>
-          <a:prstGeom prst="rect">
-            <a:avLst/>
-          </a:prstGeom>
-          <a:noFill/>
-          <a:ln/>
-        </p:spPr>
-        <p:txBody>
-          <a:bodyPr wrap="square" lIns="0" tIns="0" rIns="0" bIns="0" rtlCol="0" anchor="t"/>
-          <a:lstStyle/>
-          <a:p>
-            <a:pPr marL="342900" indent="-342900">
-              <a:spcAft>
-                <a:spcPts val="800"/>
-              </a:spcAft>
-              <a:buSzPct val="100000"/>
-              <a:buChar char="•"/>
-            </a:pPr>
-            <a:r>
-              <a:rPr lang="en-US" sz="1400" dirty="0">
-                <a:solidFill>
-                  <a:schemeClr val="tx2"/>
-                </a:solidFill>
-              </a:rPr>
-              <a:t>參考逢甲大學郭念慈、李俊宏的局部極值定義</a:t>
-            </a:r>
-            <a:endParaRPr lang="en-US" sz="1500" dirty="0"/>
-          </a:p>
-          <a:p>
-            <a:pPr marL="342900" indent="-342900">
-              <a:spcAft>
-                <a:spcPts val="800"/>
-              </a:spcAft>
-              <a:buSzPct val="100000"/>
-              <a:buChar char="•"/>
-            </a:pPr>
-            <a:r>
-              <a:rPr lang="en-US" sz="1400" dirty="0">
-                <a:solidFill>
-                  <a:schemeClr val="tx2"/>
-                </a:solidFill>
-              </a:rPr>
-              <a:t>目標貼近「低點進場、高點出場」:找轉折點,不猜漲多少</a:t>
-            </a:r>
-            <a:endParaRPr lang="en-US" sz="1500" dirty="0"/>
-          </a:p>
-          <a:p>
-            <a:pPr marL="342900" indent="-342900">
-              <a:spcAft>
-                <a:spcPts val="800"/>
-              </a:spcAft>
-              <a:buSzPct val="100000"/>
-              <a:buChar char="•"/>
-            </a:pPr>
-            <a:r>
-              <a:rPr lang="en-US" sz="1400" dirty="0">
-                <a:solidFill>
-                  <a:schemeClr val="tx2"/>
-                </a:solidFill>
-              </a:rPr>
-              <a:t>標籤只用個股自己的價格,不需要大盤當比較基準</a:t>
-            </a:r>
-            <a:endParaRPr lang="en-US" sz="1500" dirty="0"/>
-          </a:p>
-        </p:txBody>
-      </p:sp>
-      <p:sp>
-        <p:nvSpPr>
-          <p:cNvPr id="12" name="same-model"/>
-          <p:cNvSpPr/>
-          <p:nvPr/>
-        </p:nvSpPr>
-        <p:spPr>
-          <a:xfrm>
-            <a:off x="548640" y="5212080"/>
-            <a:ext cx="11064240" cy="822960"/>
-          </a:xfrm>
-          <a:prstGeom prst="roundRect">
-            <a:avLst>
-              <a:gd name="adj" fmla="val 8889"/>
-            </a:avLst>
-          </a:prstGeom>
-          <a:solidFill>
-            <a:schemeClr val="tx1"/>
-          </a:solidFill>
-          <a:ln w="12700">
-            <a:solidFill>
-              <a:schemeClr val="tx1"/>
-            </a:solidFill>
-            <a:prstDash val="solid"/>
-          </a:ln>
-        </p:spPr>
-      </p:sp>
-      <p:sp>
-        <p:nvSpPr>
-          <p:cNvPr id="13" name="Text 11"/>
-          <p:cNvSpPr txBox="1"/>
-          <p:nvPr/>
-        </p:nvSpPr>
-        <p:spPr>
-          <a:xfrm>
-            <a:off x="822960" y="5212080"/>
-            <a:ext cx="10515600" cy="822960"/>
-          </a:xfrm>
-          <a:prstGeom prst="rect">
-            <a:avLst/>
-          </a:prstGeom>
-          <a:noFill/>
-          <a:ln/>
-        </p:spPr>
-        <p:txBody>
-          <a:bodyPr wrap="square" lIns="0" tIns="0" rIns="0" bIns="0" rtlCol="0" anchor="ctr"/>
-          <a:lstStyle/>
-          <a:p>
-            <a:pPr indent="0" marL="0">
-              <a:buNone/>
-            </a:pPr>
-            <a:r>
-              <a:rPr lang="en-US" sz="1500" b="1" dirty="0">
-                <a:solidFill>
-                  <a:schemeClr val="accent1"/>
-                </a:solidFill>
-              </a:rPr>
-              <a:t>不變的:</a:t>
-            </a:r>
-            <a:pPr indent="0" marL="0">
-              <a:buNone/>
-            </a:pPr>
-            <a:r>
-              <a:rPr lang="en-US" sz="1500" dirty="0">
-                <a:solidFill>
-                  <a:schemeClr val="bg1"/>
-                </a:solidFill>
-              </a:rPr>
-              <a:t>模型仍是 AE + OC-SVM;改變的是「要找什麼」:從會大漲的型態,變成 11 天窗口的第 6 天是不是轉折點。</a:t>
-            </a:r>
-            <a:endParaRPr lang="en-US" sz="1500" dirty="0"/>
-          </a:p>
-        </p:txBody>
-      </p:sp>
-      <p:sp>
-        <p:nvSpPr>
-          <p:cNvPr id="25" name="Slide Number Placeholder 0"/>
-          <p:cNvSpPr>
-            <a:spLocks noGrp="1"/>
-          </p:cNvSpPr>
-          <p:nvPr>
-            <p:ph type="sldNum" sz="quarter" idx="4294967295"/>
-          </p:nvPr>
-        </p:nvSpPr>
-        <p:spPr>
-          <a:xfrm>
-            <a:off x="11201400" y="6355080"/>
-            <a:ext cx="457200" cy="274320"/>
-          </a:xfrm>
-          <a:prstGeom prst="rect">
-            <a:avLst/>
-          </a:prstGeom>
-          <a:extLst>
-            <a:ext uri="{C572A759-6A51-4108-AA02-DFA0A04FC94B}">
-              <ma14:wrappingTextBoxFlag xmlns:ma14="http://schemas.microsoft.com/office/mac/drawingml/2011/main" val="0"/>
-            </a:ext>
-          </a:extLst>
-        </p:spPr>
-        <p:txBody>
-          <a:bodyPr/>
-          <a:lstStyle>
-            <a:lvl1pPr>
-              <a:defRPr sz="1000">
-                <a:solidFill>
-                  <a:srgbClr val="7A8691"/>
-                </a:solidFill>
-              </a:defRPr>
-            </a:lvl1pPr>
-          </a:lstStyle>
-          <a:p>
-            <a:pPr algn="r"/>
-            <a:fld id="{F7021451-1387-4CA6-816F-3879F97B5CBC}" type="slidenum">
-              <a:rPr b="0" lang="en-US"/>
-              <a:t>3</a:t>
-            </a:fld>
-            <a:endParaRPr lang="en-US"/>
-          </a:p>
-        </p:txBody>
-      </p:sp>
-    </p:spTree>
-  </p:cSld>
-  <p:clrMapOvr>
-    <a:masterClrMapping/>
-  </p:clrMapOvr>
-</p:sld>
-</file>
-
-<file path=ppt/slides/slide4.xml><?xml version="1.0" encoding="utf-8"?>
-<p:sld xmlns:a="http://schemas.openxmlformats.org/drawingml/2006/main" xmlns:r="http://schemas.openxmlformats.org/officeDocument/2006/relationships" xmlns:p="http://schemas.openxmlformats.org/presentationml/2006/main">
-  <p:cSld name="Slide 4">
-    <p:spTree>
-      <p:nvGrpSpPr>
-        <p:cNvPr id="1" name=""/>
-        <p:cNvGrpSpPr/>
-        <p:nvPr/>
-      </p:nvGrpSpPr>
-      <p:grpSpPr>
-        <a:xfrm>
-          <a:off x="0" y="0"/>
-          <a:ext cx="0" cy="0"/>
-          <a:chOff x="0" y="0"/>
-          <a:chExt cx="0" cy="0"/>
-        </a:xfrm>
-      </p:grpSpPr>
-      <p:sp>
-        <p:nvSpPr>
-          <p:cNvPr id="2" name="Text 11"/>
-          <p:cNvSpPr/>
-          <p:nvPr>
-            <p:ph idx="111" type="title" hasCustomPrompt="1"/>
-          </p:nvPr>
-        </p:nvSpPr>
-        <p:spPr>
-          <a:xfrm>
-            <a:off x="548640" y="320040"/>
-            <a:ext cx="9418320" cy="777240"/>
-          </a:xfrm>
-          <a:prstGeom prst="rect">
-            <a:avLst/>
-          </a:prstGeom>
-          <a:noFill/>
-          <a:ln/>
-        </p:spPr>
-        <p:txBody>
-          <a:bodyPr wrap="square" lIns="0" tIns="0" rIns="0" bIns="0" rtlCol="0" anchor="ctr"/>
-          <a:lstStyle/>
-          <a:p>
-            <a:pPr indent="0" marL="0">
-              <a:buNone/>
-            </a:pPr>
-            <a:r>
-              <a:rPr lang="en-US" sz="3200" b="1" dirty="0">
-                <a:solidFill>
-                  <a:schemeClr val="tx1"/>
-                </a:solidFill>
-              </a:rPr>
-              <a:t>標籤怎麼貼:第 6 天是不是 11 天的最高或最低</a:t>
-            </a:r>
-            <a:endParaRPr lang="en-US" sz="3200" dirty="0"/>
-          </a:p>
-        </p:txBody>
-      </p:sp>
-      <p:pic>
-        <p:nvPicPr>
-          <p:cNvPr id="3" name="window-example" descr="window_annotated.png">    </p:cNvPr>
-          <p:cNvPicPr>
-            <a:picLocks noChangeAspect="1"/>
-          </p:cNvPicPr>
-          <p:nvPr/>
-        </p:nvPicPr>
-        <p:blipFill>
-          <a:blip r:embed="rId1"/>
-          <a:stretch>
-            <a:fillRect/>
-          </a:stretch>
-        </p:blipFill>
-        <p:spPr>
-          <a:xfrm>
-            <a:off x="548640" y="1371600"/>
-            <a:ext cx="6766560" cy="3666744"/>
-          </a:xfrm>
-          <a:prstGeom prst="rect">
-            <a:avLst/>
-          </a:prstGeom>
-        </p:spPr>
-      </p:pic>
-      <p:sp>
-        <p:nvSpPr>
-          <p:cNvPr id="4" name="Text 1"/>
-          <p:cNvSpPr txBox="1"/>
-          <p:nvPr/>
-        </p:nvSpPr>
-        <p:spPr>
-          <a:xfrm>
-            <a:off x="548640" y="5166360"/>
-            <a:ext cx="6766560" cy="457200"/>
-          </a:xfrm>
-          <a:prstGeom prst="rect">
-            <a:avLst/>
-          </a:prstGeom>
-          <a:noFill/>
-          <a:ln/>
-        </p:spPr>
-        <p:txBody>
-          <a:bodyPr wrap="square" lIns="0" tIns="0" rIns="0" bIns="0" rtlCol="0" anchor="t"/>
-          <a:lstStyle/>
-          <a:p>
-            <a:pPr indent="0" marL="0">
-              <a:buNone/>
-            </a:pPr>
-            <a:r>
-              <a:rPr lang="en-US" sz="1200" dirty="0">
-                <a:solidFill>
-                  <a:schemeClr val="accent5"/>
-                </a:solidFill>
-              </a:rPr>
-              <a:t>實例:台積電 2026-02-25,t 日收盤 2003 是前後各 5 天裡最高 → 高點</a:t>
-            </a:r>
-            <a:endParaRPr lang="en-US" sz="1200" dirty="0"/>
-          </a:p>
-        </p:txBody>
-      </p:sp>
-      <p:sp>
-        <p:nvSpPr>
-          <p:cNvPr id="5" name="rules"/>
-          <p:cNvSpPr/>
-          <p:nvPr/>
-        </p:nvSpPr>
-        <p:spPr>
-          <a:xfrm>
-            <a:off x="7680960" y="1371600"/>
-            <a:ext cx="3931920" cy="4251960"/>
-          </a:xfrm>
-          <a:prstGeom prst="roundRect">
-            <a:avLst>
-              <a:gd name="adj" fmla="val 1860"/>
-            </a:avLst>
-          </a:prstGeom>
-          <a:solidFill>
-            <a:schemeClr val="bg2"/>
-          </a:solidFill>
-          <a:ln w="12700">
-            <a:solidFill>
-              <a:schemeClr val="bg2"/>
-            </a:solidFill>
-            <a:prstDash val="solid"/>
-          </a:ln>
-        </p:spPr>
-      </p:sp>
-      <p:sp>
-        <p:nvSpPr>
-          <p:cNvPr id="6" name="Text 3"/>
-          <p:cNvSpPr txBox="1"/>
-          <p:nvPr/>
-        </p:nvSpPr>
-        <p:spPr>
-          <a:xfrm>
-            <a:off x="7955280" y="1600200"/>
-            <a:ext cx="3474720" cy="3840480"/>
-          </a:xfrm>
-          <a:prstGeom prst="rect">
-            <a:avLst/>
-          </a:prstGeom>
-          <a:noFill/>
-          <a:ln/>
-        </p:spPr>
-        <p:txBody>
-          <a:bodyPr wrap="square" lIns="0" tIns="0" rIns="0" bIns="0" rtlCol="0" anchor="t"/>
-          <a:lstStyle/>
-          <a:p>
-            <a:pPr indent="0" marL="0">
-              <a:buNone/>
-            </a:pPr>
-            <a:r>
-              <a:rPr lang="en-US" sz="1400" b="1" dirty="0">
-                <a:solidFill>
-                  <a:schemeClr val="tx1"/>
-                </a:solidFill>
-              </a:rPr>
-              <a:t>窗口</a:t>
-            </a:r>
-            <a:endParaRPr lang="en-US" sz="1400" dirty="0"/>
-          </a:p>
-          <a:p>
-            <a:pPr indent="0" marL="0">
-              <a:spcAft>
-                <a:spcPts val="1000"/>
-              </a:spcAft>
-              <a:buNone/>
-            </a:pPr>
-            <a:r>
-              <a:rPr lang="en-US" sz="1400" dirty="0">
-                <a:solidFill>
-                  <a:schemeClr val="tx2"/>
-                </a:solidFill>
-              </a:rPr>
-              <a:t>t-5 ~ t+5,共 11 個交易日,t 是第 6 天</a:t>
-            </a:r>
-            <a:endParaRPr lang="en-US" sz="1400" dirty="0"/>
-          </a:p>
-          <a:p>
-            <a:pPr indent="0" marL="0">
-              <a:buNone/>
-            </a:pPr>
-            <a:r>
-              <a:rPr lang="en-US" sz="1400" b="1" dirty="0">
-                <a:solidFill>
-                  <a:schemeClr val="accent1"/>
-                </a:solidFill>
-              </a:rPr>
-              <a:t>高點</a:t>
-            </a:r>
-            <a:endParaRPr lang="en-US" sz="1400" dirty="0"/>
-          </a:p>
-          <a:p>
-            <a:pPr indent="0" marL="0">
-              <a:spcAft>
-                <a:spcPts val="1000"/>
-              </a:spcAft>
-              <a:buNone/>
-            </a:pPr>
-            <a:r>
-              <a:rPr lang="en-US" sz="1400" dirty="0">
-                <a:solidFill>
-                  <a:schemeClr val="tx2"/>
-                </a:solidFill>
-              </a:rPr>
-              <a:t>t 日收盤是 11 天最高</a:t>
-            </a:r>
-            <a:endParaRPr lang="en-US" sz="1400" dirty="0"/>
-          </a:p>
-          <a:p>
-            <a:pPr indent="0" marL="0">
-              <a:buNone/>
-            </a:pPr>
-            <a:r>
-              <a:rPr lang="en-US" sz="1400" b="1" dirty="0">
-                <a:solidFill>
-                  <a:schemeClr val="accent2"/>
-                </a:solidFill>
-              </a:rPr>
-              <a:t>低點</a:t>
-            </a:r>
-            <a:endParaRPr lang="en-US" sz="1400" dirty="0"/>
-          </a:p>
-          <a:p>
-            <a:pPr indent="0" marL="0">
-              <a:spcAft>
-                <a:spcPts val="1000"/>
-              </a:spcAft>
-              <a:buNone/>
-            </a:pPr>
-            <a:r>
-              <a:rPr lang="en-US" sz="1400" dirty="0">
-                <a:solidFill>
-                  <a:schemeClr val="tx2"/>
-                </a:solidFill>
-              </a:rPr>
-              <a:t>t 日收盤是 11 天最低</a:t>
-            </a:r>
-            <a:endParaRPr lang="en-US" sz="1400" dirty="0"/>
-          </a:p>
-          <a:p>
-            <a:pPr indent="0" marL="0">
-              <a:buNone/>
-            </a:pPr>
-            <a:r>
-              <a:rPr lang="en-US" sz="1400" b="1" dirty="0">
-                <a:solidFill>
-                  <a:schemeClr val="tx1"/>
-                </a:solidFill>
-              </a:rPr>
-              <a:t>非極值</a:t>
-            </a:r>
-            <a:endParaRPr lang="en-US" sz="1400" dirty="0"/>
-          </a:p>
-          <a:p>
-            <a:pPr indent="0" marL="0">
-              <a:spcAft>
-                <a:spcPts val="1000"/>
-              </a:spcAft>
-              <a:buNone/>
-            </a:pPr>
-            <a:r>
-              <a:rPr lang="en-US" sz="1400" dirty="0">
-                <a:solidFill>
-                  <a:schemeClr val="tx2"/>
-                </a:solidFill>
-              </a:rPr>
-              <a:t>其餘;與別天並列最高(低)也算高(低)點</a:t>
-            </a:r>
-            <a:endParaRPr lang="en-US" sz="1400" dirty="0"/>
-          </a:p>
-          <a:p>
-            <a:pPr indent="0" marL="0">
-              <a:buNone/>
-            </a:pPr>
-            <a:r>
-              <a:rPr lang="en-US" sz="1400" b="1" dirty="0">
-                <a:solidFill>
-                  <a:schemeClr val="tx1"/>
-                </a:solidFill>
-              </a:rPr>
-              <a:t>判斷時點</a:t>
-            </a:r>
-            <a:endParaRPr lang="en-US" sz="1400" dirty="0"/>
-          </a:p>
-          <a:p>
-            <a:pPr indent="0" marL="0">
-              <a:buNone/>
-            </a:pPr>
-            <a:r>
-              <a:rPr lang="en-US" sz="1400" dirty="0">
-                <a:solidFill>
-                  <a:schemeClr val="tx2"/>
-                </a:solidFill>
-              </a:rPr>
-              <a:t>t 日收盤後,只看得到 t-5 ~ t</a:t>
-            </a:r>
-            <a:endParaRPr lang="en-US" sz="1400" dirty="0"/>
-          </a:p>
-        </p:txBody>
-      </p:sp>
-      <p:sp>
-        <p:nvSpPr>
-          <p:cNvPr id="25" name="Slide Number Placeholder 0"/>
-          <p:cNvSpPr>
-            <a:spLocks noGrp="1"/>
-          </p:cNvSpPr>
-          <p:nvPr>
-            <p:ph type="sldNum" sz="quarter" idx="4294967295"/>
-          </p:nvPr>
-        </p:nvSpPr>
-        <p:spPr>
-          <a:xfrm>
-            <a:off x="11201400" y="6355080"/>
-            <a:ext cx="457200" cy="274320"/>
-          </a:xfrm>
-          <a:prstGeom prst="rect">
-            <a:avLst/>
-          </a:prstGeom>
-          <a:extLst>
-            <a:ext uri="{C572A759-6A51-4108-AA02-DFA0A04FC94B}">
-              <ma14:wrappingTextBoxFlag xmlns:ma14="http://schemas.microsoft.com/office/mac/drawingml/2011/main" val="0"/>
-            </a:ext>
-          </a:extLst>
-        </p:spPr>
-        <p:txBody>
-          <a:bodyPr/>
-          <a:lstStyle>
-            <a:lvl1pPr>
-              <a:defRPr sz="1000">
-                <a:solidFill>
-                  <a:srgbClr val="7A8691"/>
-                </a:solidFill>
-              </a:defRPr>
-            </a:lvl1pPr>
-          </a:lstStyle>
-          <a:p>
-            <a:pPr algn="r"/>
-            <a:fld id="{F7021451-1387-4CA6-816F-3879F97B5CBC}" type="slidenum">
-              <a:rPr b="0" lang="en-US"/>
-              <a:t>4</a:t>
-            </a:fld>
-            <a:endParaRPr lang="en-US"/>
-          </a:p>
-        </p:txBody>
-      </p:sp>
-    </p:spTree>
-  </p:cSld>
-  <p:clrMapOvr>
-    <a:masterClrMapping/>
-  </p:clrMapOvr>
-</p:sld>
-</file>
-
-<file path=ppt/slides/slide5.xml><?xml version="1.0" encoding="utf-8"?>
-<p:sld xmlns:a="http://schemas.openxmlformats.org/drawingml/2006/main" xmlns:r="http://schemas.openxmlformats.org/officeDocument/2006/relationships" xmlns:p="http://schemas.openxmlformats.org/presentationml/2006/main">
-  <p:cSld name="Slide 5">
-    <p:spTree>
-      <p:nvGrpSpPr>
-        <p:cNvPr id="1" name=""/>
-        <p:cNvGrpSpPr/>
-        <p:nvPr/>
-      </p:nvGrpSpPr>
-      <p:grpSpPr>
-        <a:xfrm>
-          <a:off x="0" y="0"/>
-          <a:ext cx="0" cy="0"/>
-          <a:chOff x="0" y="0"/>
-          <a:chExt cx="0" cy="0"/>
-        </a:xfrm>
-      </p:grpSpPr>
-      <p:sp>
-        <p:nvSpPr>
-          <p:cNvPr id="2" name="Text 11"/>
-          <p:cNvSpPr/>
-          <p:nvPr>
-            <p:ph idx="111" type="title" hasCustomPrompt="1"/>
-          </p:nvPr>
-        </p:nvSpPr>
-        <p:spPr>
-          <a:xfrm>
-            <a:off x="548640" y="320040"/>
-            <a:ext cx="9418320" cy="777240"/>
-          </a:xfrm>
-          <a:prstGeom prst="rect">
-            <a:avLst/>
-          </a:prstGeom>
-          <a:noFill/>
-          <a:ln/>
-        </p:spPr>
-        <p:txBody>
-          <a:bodyPr wrap="square" lIns="0" tIns="0" rIns="0" bIns="0" rtlCol="0" anchor="ctr"/>
-          <a:lstStyle/>
-          <a:p>
-            <a:pPr indent="0" marL="0">
-              <a:buNone/>
-            </a:pPr>
-            <a:r>
-              <a:rPr lang="en-US" sz="3200" b="1" dirty="0">
-                <a:solidFill>
-                  <a:schemeClr val="tx1"/>
-                </a:solidFill>
-              </a:rPr>
               <a:t>資料量:TW50 · 2016 ~ 2026 · 12.9 萬個股票日</a:t>
             </a:r>
             <a:endParaRPr lang="en-US" sz="3200" dirty="0"/>
@@ -8467,7 +3473,7 @@
       </p:sp>
       <p:graphicFrame>
         <p:nvGraphicFramePr>
-          <p:cNvPr id="6" name="Table 0"/>
+          <p:cNvPr id="3" name="Table 0"/>
           <p:cNvGraphicFramePr>
             <a:graphicFrameLocks noGrp="1"/>
           </p:cNvGraphicFramePr>
@@ -9642,7 +4648,7 @@
             <a:pPr algn="r"/>
             <a:fld id="{F7021451-1387-4CA6-816F-3879F97B5CBC}" type="slidenum">
               <a:rPr b="0" lang="en-US"/>
-              <a:t>5</a:t>
+              <a:t>2</a:t>
             </a:fld>
             <a:endParaRPr lang="en-US"/>
           </a:p>
@@ -9656,9 +4662,9 @@
 </p:sld>
 </file>
 
-<file path=ppt/slides/slide6.xml><?xml version="1.0" encoding="utf-8"?>
+<file path=ppt/slides/slide3.xml><?xml version="1.0" encoding="utf-8"?>
 <p:sld xmlns:a="http://schemas.openxmlformats.org/drawingml/2006/main" xmlns:r="http://schemas.openxmlformats.org/officeDocument/2006/relationships" xmlns:p="http://schemas.openxmlformats.org/presentationml/2006/main">
-  <p:cSld name="Slide 6">
+  <p:cSld name="Slide 3">
     <p:spTree>
       <p:nvGrpSpPr>
         <p:cNvPr id="1" name=""/>
@@ -10539,7 +5545,7 @@
             <a:pPr algn="r"/>
             <a:fld id="{F7021451-1387-4CA6-816F-3879F97B5CBC}" type="slidenum">
               <a:rPr b="0" lang="en-US"/>
-              <a:t>6</a:t>
+              <a:t>3</a:t>
             </a:fld>
             <a:endParaRPr lang="en-US"/>
           </a:p>
@@ -10553,9 +5559,9 @@
 </p:sld>
 </file>
 
-<file path=ppt/slides/slide7.xml><?xml version="1.0" encoding="utf-8"?>
+<file path=ppt/slides/slide4.xml><?xml version="1.0" encoding="utf-8"?>
 <p:sld xmlns:a="http://schemas.openxmlformats.org/drawingml/2006/main" xmlns:r="http://schemas.openxmlformats.org/officeDocument/2006/relationships" xmlns:p="http://schemas.openxmlformats.org/presentationml/2006/main">
-  <p:cSld name="Slide 7">
+  <p:cSld name="Slide 4">
     <p:spTree>
       <p:nvGrpSpPr>
         <p:cNvPr id="1" name=""/>
@@ -10715,7 +5721,21 @@
                   <a:schemeClr val="tx1"/>
                 </a:solidFill>
               </a:rPr>
-              <a:t>6 根 K 線形態</a:t>
+              <a:t>價 ÷ t 日收盤</a:t>
+            </a:r>
+            <a:endParaRPr lang="en-US" sz="1300" dirty="0"/>
+          </a:p>
+          <a:p>
+            <a:pPr algn="ctr" indent="0" marL="0">
+              <a:buNone/>
+            </a:pPr>
+            <a:r>
+              <a:rPr lang="en-US" sz="1300" dirty="0">
+                <a:solidFill>
+                  <a:schemeClr val="tx1"/>
+                </a:solidFill>
+              </a:rPr>
+              <a:t>量 ÷ 10 日均量</a:t>
             </a:r>
             <a:endParaRPr lang="en-US" sz="1300" dirty="0"/>
           </a:p>
@@ -11396,7 +6416,7 @@
             <a:pPr algn="r"/>
             <a:fld id="{F7021451-1387-4CA6-816F-3879F97B5CBC}" type="slidenum">
               <a:rPr b="0" lang="en-US"/>
-              <a:t>7</a:t>
+              <a:t>4</a:t>
             </a:fld>
             <a:endParaRPr lang="en-US"/>
           </a:p>
@@ -11410,9 +6430,9 @@
 </p:sld>
 </file>
 
-<file path=ppt/slides/slide8.xml><?xml version="1.0" encoding="utf-8"?>
+<file path=ppt/slides/slide5.xml><?xml version="1.0" encoding="utf-8"?>
 <p:sld xmlns:a="http://schemas.openxmlformats.org/drawingml/2006/main" xmlns:r="http://schemas.openxmlformats.org/officeDocument/2006/relationships" xmlns:p="http://schemas.openxmlformats.org/presentationml/2006/main">
-  <p:cSld name="Slide 8">
+  <p:cSld name="Slide 5">
     <p:spTree>
       <p:nvGrpSpPr>
         <p:cNvPr id="1" name=""/>
@@ -11459,731 +6479,6 @@
                   <a:schemeClr val="tx1"/>
                 </a:solidFill>
               </a:rPr>
-              <a:t>acc 怎樣算對:判斷與 11 日窗口標籤相同</a:t>
-            </a:r>
-            <a:endParaRPr lang="en-US" sz="3200" dirty="0"/>
-          </a:p>
-        </p:txBody>
-      </p:sp>
-      <p:sp>
-        <p:nvSpPr>
-          <p:cNvPr id="3" name="rule-of-right"/>
-          <p:cNvSpPr/>
-          <p:nvPr/>
-        </p:nvSpPr>
-        <p:spPr>
-          <a:xfrm>
-            <a:off x="548640" y="1417320"/>
-            <a:ext cx="5394960" cy="2880360"/>
-          </a:xfrm>
-          <a:prstGeom prst="roundRect">
-            <a:avLst>
-              <a:gd name="adj" fmla="val 2540"/>
-            </a:avLst>
-          </a:prstGeom>
-          <a:solidFill>
-            <a:schemeClr val="bg2"/>
-          </a:solidFill>
-          <a:ln w="12700">
-            <a:solidFill>
-              <a:schemeClr val="bg2"/>
-            </a:solidFill>
-            <a:prstDash val="solid"/>
-          </a:ln>
-        </p:spPr>
-      </p:sp>
-      <p:sp>
-        <p:nvSpPr>
-          <p:cNvPr id="4" name="Text 2"/>
-          <p:cNvSpPr txBox="1"/>
-          <p:nvPr/>
-        </p:nvSpPr>
-        <p:spPr>
-          <a:xfrm>
-            <a:off x="822960" y="1645920"/>
-            <a:ext cx="4846320" cy="2514600"/>
-          </a:xfrm>
-          <a:prstGeom prst="rect">
-            <a:avLst/>
-          </a:prstGeom>
-          <a:noFill/>
-          <a:ln/>
-        </p:spPr>
-        <p:txBody>
-          <a:bodyPr wrap="square" lIns="0" tIns="0" rIns="0" bIns="0" rtlCol="0" anchor="t"/>
-          <a:lstStyle/>
-          <a:p>
-            <a:pPr indent="0" marL="0">
-              <a:buNone/>
-            </a:pPr>
-            <a:r>
-              <a:rPr lang="en-US" sz="1800" b="1" dirty="0">
-                <a:solidFill>
-                  <a:schemeClr val="tx1"/>
-                </a:solidFill>
-              </a:rPr>
-              <a:t>一天算「判對」</a:t>
-            </a:r>
-            <a:endParaRPr lang="en-US" sz="1500" dirty="0"/>
-          </a:p>
-          <a:p>
-            <a:pPr indent="0" marL="0">
-              <a:buNone/>
-            </a:pPr>
-            <a:r>
-              <a:rPr lang="en-US" sz="800" dirty="0">
-                <a:solidFill>
-                  <a:schemeClr val="tx1"/>
-                </a:solidFill>
-              </a:rPr>
-              <a:t> </a:t>
-            </a:r>
-            <a:endParaRPr lang="en-US" sz="1500" dirty="0"/>
-          </a:p>
-          <a:p>
-            <a:pPr indent="0" marL="0">
-              <a:buNone/>
-            </a:pPr>
-            <a:r>
-              <a:rPr lang="en-US" sz="1500" dirty="0">
-                <a:solidFill>
-                  <a:schemeClr val="tx2"/>
-                </a:solidFill>
-              </a:rPr>
-              <a:t>模型在 t 日收盤後給的判斷(高點 / 非極值 / 低點),和用 t-5 ~ t+5 貼出來的標籤一樣。</a:t>
-            </a:r>
-            <a:endParaRPr lang="en-US" sz="1500" dirty="0"/>
-          </a:p>
-          <a:p>
-            <a:pPr indent="0" marL="0">
-              <a:buNone/>
-            </a:pPr>
-            <a:r>
-              <a:rPr lang="en-US" sz="800" dirty="0">
-                <a:solidFill>
-                  <a:schemeClr val="tx1"/>
-                </a:solidFill>
-              </a:rPr>
-              <a:t> </a:t>
-            </a:r>
-            <a:endParaRPr lang="en-US" sz="1500" dirty="0"/>
-          </a:p>
-          <a:p>
-            <a:pPr indent="0" marL="0">
-              <a:buNone/>
-            </a:pPr>
-            <a:r>
-              <a:rPr lang="en-US" sz="1500" dirty="0">
-                <a:solidFill>
-                  <a:schemeClr val="accent3"/>
-                </a:solidFill>
-              </a:rPr>
-              <a:t>例:判高點,而 t 日收盤真的是 11 天最高 → 對</a:t>
-            </a:r>
-            <a:endParaRPr lang="en-US" sz="1500" dirty="0"/>
-          </a:p>
-          <a:p>
-            <a:pPr indent="0" marL="0">
-              <a:buNone/>
-            </a:pPr>
-            <a:r>
-              <a:rPr lang="en-US" sz="1500" dirty="0">
-                <a:solidFill>
-                  <a:schemeClr val="accent4"/>
-                </a:solidFill>
-              </a:rPr>
-              <a:t>例:判高點,但之後 5 天收盤更高 → 錯(假候選)</a:t>
-            </a:r>
-            <a:endParaRPr lang="en-US" sz="1500" dirty="0"/>
-          </a:p>
-          <a:p>
-            <a:pPr indent="0" marL="0">
-              <a:buNone/>
-            </a:pPr>
-            <a:r>
-              <a:rPr lang="en-US" sz="1500" dirty="0">
-                <a:solidFill>
-                  <a:schemeClr val="accent3"/>
-                </a:solidFill>
-              </a:rPr>
-              <a:t>例:判非極值,而那天真的不是高低點 → 對</a:t>
-            </a:r>
-            <a:endParaRPr lang="en-US" sz="1500" dirty="0"/>
-          </a:p>
-        </p:txBody>
-      </p:sp>
-      <p:sp>
-        <p:nvSpPr>
-          <p:cNvPr id="5" name="acc-trap"/>
-          <p:cNvSpPr/>
-          <p:nvPr/>
-        </p:nvSpPr>
-        <p:spPr>
-          <a:xfrm>
-            <a:off x="548640" y="4480560"/>
-            <a:ext cx="5394960" cy="1325880"/>
-          </a:xfrm>
-          <a:prstGeom prst="roundRect">
-            <a:avLst>
-              <a:gd name="adj" fmla="val 5517"/>
-            </a:avLst>
-          </a:prstGeom>
-          <a:solidFill>
-            <a:schemeClr val="bg2"/>
-          </a:solidFill>
-          <a:ln w="12700">
-            <a:solidFill>
-              <a:schemeClr val="bg2"/>
-            </a:solidFill>
-            <a:prstDash val="solid"/>
-          </a:ln>
-        </p:spPr>
-      </p:sp>
-      <p:sp>
-        <p:nvSpPr>
-          <p:cNvPr id="6" name="Text 4"/>
-          <p:cNvSpPr txBox="1"/>
-          <p:nvPr/>
-        </p:nvSpPr>
-        <p:spPr>
-          <a:xfrm>
-            <a:off x="822960" y="4572000"/>
-            <a:ext cx="1920240" cy="1143000"/>
-          </a:xfrm>
-          <a:prstGeom prst="rect">
-            <a:avLst/>
-          </a:prstGeom>
-          <a:noFill/>
-          <a:ln/>
-        </p:spPr>
-        <p:txBody>
-          <a:bodyPr wrap="square" lIns="0" tIns="0" rIns="0" bIns="0" rtlCol="0" anchor="ctr"/>
-          <a:lstStyle/>
-          <a:p>
-            <a:pPr indent="0" marL="0">
-              <a:buNone/>
-            </a:pPr>
-            <a:r>
-              <a:rPr lang="en-US" sz="3600" b="1" dirty="0">
-                <a:solidFill>
-                  <a:schemeClr val="accent4"/>
-                </a:solidFill>
-              </a:rPr>
-              <a:t>85.1%</a:t>
-            </a:r>
-            <a:endParaRPr lang="en-US" sz="3600" dirty="0"/>
-          </a:p>
-        </p:txBody>
-      </p:sp>
-      <p:sp>
-        <p:nvSpPr>
-          <p:cNvPr id="7" name="Text 5"/>
-          <p:cNvSpPr txBox="1"/>
-          <p:nvPr/>
-        </p:nvSpPr>
-        <p:spPr>
-          <a:xfrm>
-            <a:off x="2743200" y="4572000"/>
-            <a:ext cx="3017520" cy="1143000"/>
-          </a:xfrm>
-          <a:prstGeom prst="rect">
-            <a:avLst/>
-          </a:prstGeom>
-          <a:noFill/>
-          <a:ln/>
-        </p:spPr>
-        <p:txBody>
-          <a:bodyPr wrap="square" lIns="0" tIns="0" rIns="0" bIns="0" rtlCol="0" anchor="ctr"/>
-          <a:lstStyle/>
-          <a:p>
-            <a:pPr indent="0" marL="0">
-              <a:buNone/>
-            </a:pPr>
-            <a:r>
-              <a:rPr lang="en-US" sz="1300" b="1" dirty="0">
-                <a:solidFill>
-                  <a:schemeClr val="tx1"/>
-                </a:solidFill>
-              </a:rPr>
-              <a:t>全猜「非極值」的 acc</a:t>
-            </a:r>
-            <a:endParaRPr lang="en-US" sz="1300" dirty="0"/>
-          </a:p>
-          <a:p>
-            <a:pPr indent="0" marL="0">
-              <a:buNone/>
-            </a:pPr>
-            <a:r>
-              <a:rPr lang="en-US" sz="1300" dirty="0">
-                <a:solidFill>
-                  <a:schemeClr val="tx2"/>
-                </a:solidFill>
-              </a:rPr>
-              <a:t>一個高低點都沒找到,macro-F1 只有 30.7%。所以不能只看 acc。</a:t>
-            </a:r>
-            <a:endParaRPr lang="en-US" sz="1300" dirty="0"/>
-          </a:p>
-        </p:txBody>
-      </p:sp>
-      <p:sp>
-        <p:nvSpPr>
-          <p:cNvPr id="8" name="Text 6"/>
-          <p:cNvSpPr txBox="1"/>
-          <p:nvPr/>
-        </p:nvSpPr>
-        <p:spPr>
-          <a:xfrm>
-            <a:off x="6309360" y="1554480"/>
-            <a:ext cx="2011680" cy="731520"/>
-          </a:xfrm>
-          <a:prstGeom prst="rect">
-            <a:avLst/>
-          </a:prstGeom>
-          <a:noFill/>
-          <a:ln/>
-        </p:spPr>
-        <p:txBody>
-          <a:bodyPr wrap="square" lIns="0" tIns="0" rIns="0" bIns="0" rtlCol="0" anchor="ctr"/>
-          <a:lstStyle/>
-          <a:p>
-            <a:pPr indent="0" marL="0">
-              <a:buNone/>
-            </a:pPr>
-            <a:r>
-              <a:rPr lang="en-US" sz="1600" b="1" dirty="0">
-                <a:solidFill>
-                  <a:schemeClr val="tx1"/>
-                </a:solidFill>
-              </a:rPr>
-              <a:t>acc</a:t>
-            </a:r>
-            <a:endParaRPr lang="en-US" sz="1600" dirty="0"/>
-          </a:p>
-        </p:txBody>
-      </p:sp>
-      <p:sp>
-        <p:nvSpPr>
-          <p:cNvPr id="9" name="Text 7"/>
-          <p:cNvSpPr txBox="1"/>
-          <p:nvPr/>
-        </p:nvSpPr>
-        <p:spPr>
-          <a:xfrm>
-            <a:off x="8321040" y="1554480"/>
-            <a:ext cx="3291840" cy="731520"/>
-          </a:xfrm>
-          <a:prstGeom prst="rect">
-            <a:avLst/>
-          </a:prstGeom>
-          <a:noFill/>
-          <a:ln/>
-        </p:spPr>
-        <p:txBody>
-          <a:bodyPr wrap="square" lIns="0" tIns="0" rIns="0" bIns="0" rtlCol="0" anchor="ctr"/>
-          <a:lstStyle/>
-          <a:p>
-            <a:pPr indent="0" marL="0">
-              <a:buNone/>
-            </a:pPr>
-            <a:r>
-              <a:rPr lang="en-US" sz="1400" dirty="0">
-                <a:solidFill>
-                  <a:schemeClr val="tx2"/>
-                </a:solidFill>
-              </a:rPr>
-              <a:t>判對的天數 ÷ 全部天數</a:t>
-            </a:r>
-            <a:endParaRPr lang="en-US" sz="1400" dirty="0"/>
-          </a:p>
-        </p:txBody>
-      </p:sp>
-      <p:sp>
-        <p:nvSpPr>
-          <p:cNvPr id="10" name="def-rule-1"/>
-          <p:cNvSpPr/>
-          <p:nvPr/>
-        </p:nvSpPr>
-        <p:spPr>
-          <a:xfrm>
-            <a:off x="6309360" y="2496312"/>
-            <a:ext cx="5303520" cy="0"/>
-          </a:xfrm>
-          <a:prstGeom prst="line">
-            <a:avLst/>
-          </a:prstGeom>
-          <a:noFill/>
-          <a:ln w="9525">
-            <a:solidFill>
-              <a:srgbClr val="C9D2D9"/>
-            </a:solidFill>
-            <a:prstDash val="solid"/>
-          </a:ln>
-        </p:spPr>
-      </p:sp>
-      <p:sp>
-        <p:nvSpPr>
-          <p:cNvPr id="11" name="Text 9"/>
-          <p:cNvSpPr txBox="1"/>
-          <p:nvPr/>
-        </p:nvSpPr>
-        <p:spPr>
-          <a:xfrm>
-            <a:off x="6309360" y="2606040"/>
-            <a:ext cx="2011680" cy="731520"/>
-          </a:xfrm>
-          <a:prstGeom prst="rect">
-            <a:avLst/>
-          </a:prstGeom>
-          <a:noFill/>
-          <a:ln/>
-        </p:spPr>
-        <p:txBody>
-          <a:bodyPr wrap="square" lIns="0" tIns="0" rIns="0" bIns="0" rtlCol="0" anchor="ctr"/>
-          <a:lstStyle/>
-          <a:p>
-            <a:pPr indent="0" marL="0">
-              <a:buNone/>
-            </a:pPr>
-            <a:r>
-              <a:rPr lang="en-US" sz="1600" b="1" dirty="0">
-                <a:solidFill>
-                  <a:schemeClr val="tx1"/>
-                </a:solidFill>
-              </a:rPr>
-              <a:t>找到率(召回)</a:t>
-            </a:r>
-            <a:endParaRPr lang="en-US" sz="1600" dirty="0"/>
-          </a:p>
-        </p:txBody>
-      </p:sp>
-      <p:sp>
-        <p:nvSpPr>
-          <p:cNvPr id="12" name="Text 10"/>
-          <p:cNvSpPr txBox="1"/>
-          <p:nvPr/>
-        </p:nvSpPr>
-        <p:spPr>
-          <a:xfrm>
-            <a:off x="8321040" y="2606040"/>
-            <a:ext cx="3291840" cy="731520"/>
-          </a:xfrm>
-          <a:prstGeom prst="rect">
-            <a:avLst/>
-          </a:prstGeom>
-          <a:noFill/>
-          <a:ln/>
-        </p:spPr>
-        <p:txBody>
-          <a:bodyPr wrap="square" lIns="0" tIns="0" rIns="0" bIns="0" rtlCol="0" anchor="ctr"/>
-          <a:lstStyle/>
-          <a:p>
-            <a:pPr indent="0" marL="0">
-              <a:buNone/>
-            </a:pPr>
-            <a:r>
-              <a:rPr lang="en-US" sz="1400" dirty="0">
-                <a:solidFill>
-                  <a:schemeClr val="tx2"/>
-                </a:solidFill>
-              </a:rPr>
-              <a:t>真高點中被判成高點的比例</a:t>
-            </a:r>
-            <a:endParaRPr lang="en-US" sz="1400" dirty="0"/>
-          </a:p>
-        </p:txBody>
-      </p:sp>
-      <p:sp>
-        <p:nvSpPr>
-          <p:cNvPr id="13" name="def-rule-2"/>
-          <p:cNvSpPr/>
-          <p:nvPr/>
-        </p:nvSpPr>
-        <p:spPr>
-          <a:xfrm>
-            <a:off x="6309360" y="3547872"/>
-            <a:ext cx="5303520" cy="0"/>
-          </a:xfrm>
-          <a:prstGeom prst="line">
-            <a:avLst/>
-          </a:prstGeom>
-          <a:noFill/>
-          <a:ln w="9525">
-            <a:solidFill>
-              <a:srgbClr val="C9D2D9"/>
-            </a:solidFill>
-            <a:prstDash val="solid"/>
-          </a:ln>
-        </p:spPr>
-      </p:sp>
-      <p:sp>
-        <p:nvSpPr>
-          <p:cNvPr id="14" name="Text 12"/>
-          <p:cNvSpPr txBox="1"/>
-          <p:nvPr/>
-        </p:nvSpPr>
-        <p:spPr>
-          <a:xfrm>
-            <a:off x="6309360" y="3657600"/>
-            <a:ext cx="2011680" cy="731520"/>
-          </a:xfrm>
-          <a:prstGeom prst="rect">
-            <a:avLst/>
-          </a:prstGeom>
-          <a:noFill/>
-          <a:ln/>
-        </p:spPr>
-        <p:txBody>
-          <a:bodyPr wrap="square" lIns="0" tIns="0" rIns="0" bIns="0" rtlCol="0" anchor="ctr"/>
-          <a:lstStyle/>
-          <a:p>
-            <a:pPr indent="0" marL="0">
-              <a:buNone/>
-            </a:pPr>
-            <a:r>
-              <a:rPr lang="en-US" sz="1600" b="1" dirty="0">
-                <a:solidFill>
-                  <a:schemeClr val="tx1"/>
-                </a:solidFill>
-              </a:rPr>
-              <a:t>命中率(精確)</a:t>
-            </a:r>
-            <a:endParaRPr lang="en-US" sz="1600" dirty="0"/>
-          </a:p>
-        </p:txBody>
-      </p:sp>
-      <p:sp>
-        <p:nvSpPr>
-          <p:cNvPr id="15" name="Text 13"/>
-          <p:cNvSpPr txBox="1"/>
-          <p:nvPr/>
-        </p:nvSpPr>
-        <p:spPr>
-          <a:xfrm>
-            <a:off x="8321040" y="3657600"/>
-            <a:ext cx="3291840" cy="731520"/>
-          </a:xfrm>
-          <a:prstGeom prst="rect">
-            <a:avLst/>
-          </a:prstGeom>
-          <a:noFill/>
-          <a:ln/>
-        </p:spPr>
-        <p:txBody>
-          <a:bodyPr wrap="square" lIns="0" tIns="0" rIns="0" bIns="0" rtlCol="0" anchor="ctr"/>
-          <a:lstStyle/>
-          <a:p>
-            <a:pPr indent="0" marL="0">
-              <a:buNone/>
-            </a:pPr>
-            <a:r>
-              <a:rPr lang="en-US" sz="1400" dirty="0">
-                <a:solidFill>
-                  <a:schemeClr val="tx2"/>
-                </a:solidFill>
-              </a:rPr>
-              <a:t>判成高點的天數中真的是高點的比例</a:t>
-            </a:r>
-            <a:endParaRPr lang="en-US" sz="1400" dirty="0"/>
-          </a:p>
-        </p:txBody>
-      </p:sp>
-      <p:sp>
-        <p:nvSpPr>
-          <p:cNvPr id="16" name="def-rule-3"/>
-          <p:cNvSpPr/>
-          <p:nvPr/>
-        </p:nvSpPr>
-        <p:spPr>
-          <a:xfrm>
-            <a:off x="6309360" y="4599432"/>
-            <a:ext cx="5303520" cy="0"/>
-          </a:xfrm>
-          <a:prstGeom prst="line">
-            <a:avLst/>
-          </a:prstGeom>
-          <a:noFill/>
-          <a:ln w="9525">
-            <a:solidFill>
-              <a:srgbClr val="C9D2D9"/>
-            </a:solidFill>
-            <a:prstDash val="solid"/>
-          </a:ln>
-        </p:spPr>
-      </p:sp>
-      <p:sp>
-        <p:nvSpPr>
-          <p:cNvPr id="17" name="Text 15"/>
-          <p:cNvSpPr txBox="1"/>
-          <p:nvPr/>
-        </p:nvSpPr>
-        <p:spPr>
-          <a:xfrm>
-            <a:off x="6309360" y="4709160"/>
-            <a:ext cx="2011680" cy="731520"/>
-          </a:xfrm>
-          <a:prstGeom prst="rect">
-            <a:avLst/>
-          </a:prstGeom>
-          <a:noFill/>
-          <a:ln/>
-        </p:spPr>
-        <p:txBody>
-          <a:bodyPr wrap="square" lIns="0" tIns="0" rIns="0" bIns="0" rtlCol="0" anchor="ctr"/>
-          <a:lstStyle/>
-          <a:p>
-            <a:pPr indent="0" marL="0">
-              <a:buNone/>
-            </a:pPr>
-            <a:r>
-              <a:rPr lang="en-US" sz="1600" b="1" dirty="0">
-                <a:solidFill>
-                  <a:schemeClr val="tx1"/>
-                </a:solidFill>
-              </a:rPr>
-              <a:t>macro-F1</a:t>
-            </a:r>
-            <a:endParaRPr lang="en-US" sz="1600" dirty="0"/>
-          </a:p>
-        </p:txBody>
-      </p:sp>
-      <p:sp>
-        <p:nvSpPr>
-          <p:cNvPr id="18" name="Text 16"/>
-          <p:cNvSpPr txBox="1"/>
-          <p:nvPr/>
-        </p:nvSpPr>
-        <p:spPr>
-          <a:xfrm>
-            <a:off x="8321040" y="4709160"/>
-            <a:ext cx="3291840" cy="731520"/>
-          </a:xfrm>
-          <a:prstGeom prst="rect">
-            <a:avLst/>
-          </a:prstGeom>
-          <a:noFill/>
-          <a:ln/>
-        </p:spPr>
-        <p:txBody>
-          <a:bodyPr wrap="square" lIns="0" tIns="0" rIns="0" bIns="0" rtlCol="0" anchor="ctr"/>
-          <a:lstStyle/>
-          <a:p>
-            <a:pPr indent="0" marL="0">
-              <a:buNone/>
-            </a:pPr>
-            <a:r>
-              <a:rPr lang="en-US" sz="1400" dirty="0">
-                <a:solidFill>
-                  <a:schemeClr val="tx2"/>
-                </a:solidFill>
-              </a:rPr>
-              <a:t>高點、非極值、低點三類 F1 的平均;論文的主要指標</a:t>
-            </a:r>
-            <a:endParaRPr lang="en-US" sz="1400" dirty="0"/>
-          </a:p>
-        </p:txBody>
-      </p:sp>
-      <p:sp>
-        <p:nvSpPr>
-          <p:cNvPr id="25" name="Slide Number Placeholder 0"/>
-          <p:cNvSpPr>
-            <a:spLocks noGrp="1"/>
-          </p:cNvSpPr>
-          <p:nvPr>
-            <p:ph type="sldNum" sz="quarter" idx="4294967295"/>
-          </p:nvPr>
-        </p:nvSpPr>
-        <p:spPr>
-          <a:xfrm>
-            <a:off x="11201400" y="6355080"/>
-            <a:ext cx="457200" cy="274320"/>
-          </a:xfrm>
-          <a:prstGeom prst="rect">
-            <a:avLst/>
-          </a:prstGeom>
-          <a:extLst>
-            <a:ext uri="{C572A759-6A51-4108-AA02-DFA0A04FC94B}">
-              <ma14:wrappingTextBoxFlag xmlns:ma14="http://schemas.microsoft.com/office/mac/drawingml/2011/main" val="0"/>
-            </a:ext>
-          </a:extLst>
-        </p:spPr>
-        <p:txBody>
-          <a:bodyPr/>
-          <a:lstStyle>
-            <a:lvl1pPr>
-              <a:defRPr sz="1000">
-                <a:solidFill>
-                  <a:srgbClr val="7A8691"/>
-                </a:solidFill>
-              </a:defRPr>
-            </a:lvl1pPr>
-          </a:lstStyle>
-          <a:p>
-            <a:pPr algn="r"/>
-            <a:fld id="{F7021451-1387-4CA6-816F-3879F97B5CBC}" type="slidenum">
-              <a:rPr b="0" lang="en-US"/>
-              <a:t>8</a:t>
-            </a:fld>
-            <a:endParaRPr lang="en-US"/>
-          </a:p>
-        </p:txBody>
-      </p:sp>
-    </p:spTree>
-  </p:cSld>
-  <p:clrMapOvr>
-    <a:masterClrMapping/>
-  </p:clrMapOvr>
-</p:sld>
-</file>
-
-<file path=ppt/slides/slide9.xml><?xml version="1.0" encoding="utf-8"?>
-<p:sld xmlns:a="http://schemas.openxmlformats.org/drawingml/2006/main" xmlns:r="http://schemas.openxmlformats.org/officeDocument/2006/relationships" xmlns:p="http://schemas.openxmlformats.org/presentationml/2006/main">
-  <p:cSld name="Slide 9">
-    <p:spTree>
-      <p:nvGrpSpPr>
-        <p:cNvPr id="1" name=""/>
-        <p:cNvGrpSpPr/>
-        <p:nvPr/>
-      </p:nvGrpSpPr>
-      <p:grpSpPr>
-        <a:xfrm>
-          <a:off x="0" y="0"/>
-          <a:ext cx="0" cy="0"/>
-          <a:chOff x="0" y="0"/>
-          <a:chExt cx="0" cy="0"/>
-        </a:xfrm>
-      </p:grpSpPr>
-      <p:sp>
-        <p:nvSpPr>
-          <p:cNvPr id="2" name="Text 11"/>
-          <p:cNvSpPr/>
-          <p:nvPr>
-            <p:ph idx="111" type="title" hasCustomPrompt="1"/>
-          </p:nvPr>
-        </p:nvSpPr>
-        <p:spPr>
-          <a:xfrm>
-            <a:off x="548640" y="320040"/>
-            <a:ext cx="9418320" cy="777240"/>
-          </a:xfrm>
-          <a:prstGeom prst="rect">
-            <a:avLst/>
-          </a:prstGeom>
-          <a:noFill/>
-          <a:ln/>
-        </p:spPr>
-        <p:txBody>
-          <a:bodyPr wrap="square" lIns="0" tIns="0" rIns="0" bIns="0" rtlCol="0" anchor="ctr"/>
-          <a:lstStyle/>
-          <a:p>
-            <a:pPr indent="0" marL="0">
-              <a:buNone/>
-            </a:pPr>
-            <a:r>
-              <a:rPr lang="en-US" sz="3200" b="1" dirty="0">
-                <a:solidFill>
-                  <a:schemeClr val="tx1"/>
-                </a:solidFill>
-              </a:rPr>
               <a:t>測試結果:真高低點幾乎都在模型的判斷裡</a:t>
             </a:r>
             <a:endParaRPr lang="en-US" sz="3200" dirty="0"/>
@@ -12192,7 +6487,7 @@
       </p:sp>
       <p:graphicFrame>
         <p:nvGraphicFramePr>
-          <p:cNvPr id="10" name="Table 0"/>
+          <p:cNvPr id="6" name="Table 0"/>
           <p:cNvGraphicFramePr>
             <a:graphicFrameLocks noGrp="1"/>
           </p:cNvGraphicFramePr>
@@ -12563,7 +6858,7 @@
                           <a:ea typeface="Microsoft JhengHei" pitchFamily="34" charset="-122"/>
                           <a:cs typeface="Microsoft JhengHei" pitchFamily="34" charset="-120"/>
                         </a:rPr>
-                        <a:t>1,237</a:t>
+                        <a:t>1,267</a:t>
                       </a:r>
                       <a:endParaRPr lang="en-US" sz="1400" dirty="0">
                         <a:latin typeface="Microsoft JhengHei" charset="0"/>
@@ -12584,7 +6879,7 @@
                           <a:ea typeface="Microsoft JhengHei" pitchFamily="34" charset="-122"/>
                           <a:cs typeface="Microsoft JhengHei" pitchFamily="34" charset="-120"/>
                         </a:rPr>
-                        <a:t>80.7%</a:t>
+                        <a:t>82.7%</a:t>
                       </a:r>
                       <a:endParaRPr lang="en-US" sz="1400" dirty="0">
                         <a:latin typeface="Microsoft JhengHei" charset="0"/>
@@ -12652,7 +6947,7 @@
                           <a:ea typeface="Microsoft JhengHei" pitchFamily="34" charset="-122"/>
                           <a:cs typeface="Microsoft JhengHei" pitchFamily="34" charset="-120"/>
                         </a:rPr>
-                        <a:t>295</a:t>
+                        <a:t>265</a:t>
                       </a:r>
                       <a:endParaRPr lang="en-US" sz="1400" dirty="0">
                         <a:latin typeface="Microsoft JhengHei" charset="0"/>
@@ -12673,7 +6968,7 @@
                           <a:ea typeface="Microsoft JhengHei" pitchFamily="34" charset="-122"/>
                           <a:cs typeface="Microsoft JhengHei" pitchFamily="34" charset="-120"/>
                         </a:rPr>
-                        <a:t>19.3%</a:t>
+                        <a:t>17.3%</a:t>
                       </a:r>
                       <a:endParaRPr lang="en-US" sz="1400" dirty="0">
                         <a:latin typeface="Microsoft JhengHei" charset="0"/>
@@ -12897,7 +7192,7 @@
                           <a:ea typeface="Microsoft JhengHei" pitchFamily="34" charset="-122"/>
                           <a:cs typeface="Microsoft JhengHei" pitchFamily="34" charset="-120"/>
                         </a:rPr>
-                        <a:t>2,690</a:t>
+                        <a:t>2,782</a:t>
                       </a:r>
                       <a:endParaRPr lang="en-US" sz="1400" dirty="0">
                         <a:latin typeface="Microsoft JhengHei" charset="0"/>
@@ -12918,7 +7213,7 @@
                           <a:ea typeface="Microsoft JhengHei" pitchFamily="34" charset="-122"/>
                           <a:cs typeface="Microsoft JhengHei" pitchFamily="34" charset="-120"/>
                         </a:rPr>
-                        <a:t>15.7%</a:t>
+                        <a:t>16.2%</a:t>
                       </a:r>
                       <a:endParaRPr lang="en-US" sz="1400" dirty="0">
                         <a:latin typeface="Microsoft JhengHei" charset="0"/>
@@ -12986,7 +7281,7 @@
                           <a:ea typeface="Microsoft JhengHei" pitchFamily="34" charset="-122"/>
                           <a:cs typeface="Microsoft JhengHei" pitchFamily="34" charset="-120"/>
                         </a:rPr>
-                        <a:t>11,288</a:t>
+                        <a:t>11,122</a:t>
                       </a:r>
                       <a:endParaRPr lang="en-US" sz="1400" dirty="0">
                         <a:latin typeface="Microsoft JhengHei" charset="0"/>
@@ -13007,7 +7302,7 @@
                           <a:ea typeface="Microsoft JhengHei" pitchFamily="34" charset="-122"/>
                           <a:cs typeface="Microsoft JhengHei" pitchFamily="34" charset="-120"/>
                         </a:rPr>
-                        <a:t>65.7%</a:t>
+                        <a:t>64.7%</a:t>
                       </a:r>
                       <a:endParaRPr lang="en-US" sz="1400" dirty="0">
                         <a:latin typeface="Microsoft JhengHei" charset="0"/>
@@ -13075,7 +7370,7 @@
                           <a:ea typeface="Microsoft JhengHei" pitchFamily="34" charset="-122"/>
                           <a:cs typeface="Microsoft JhengHei" pitchFamily="34" charset="-120"/>
                         </a:rPr>
-                        <a:t>3,209</a:t>
+                        <a:t>3,283</a:t>
                       </a:r>
                       <a:endParaRPr lang="en-US" sz="1400" dirty="0">
                         <a:latin typeface="Microsoft JhengHei" charset="0"/>
@@ -13096,7 +7391,7 @@
                           <a:ea typeface="Microsoft JhengHei" pitchFamily="34" charset="-122"/>
                           <a:cs typeface="Microsoft JhengHei" pitchFamily="34" charset="-120"/>
                         </a:rPr>
-                        <a:t>18.7%</a:t>
+                        <a:t>19.1%</a:t>
                       </a:r>
                       <a:endParaRPr lang="en-US" sz="1400" dirty="0">
                         <a:latin typeface="Microsoft JhengHei" charset="0"/>
@@ -13320,7 +7615,7 @@
                           <a:ea typeface="Microsoft JhengHei" pitchFamily="34" charset="-122"/>
                           <a:cs typeface="Microsoft JhengHei" pitchFamily="34" charset="-120"/>
                         </a:rPr>
-                        <a:t>359</a:t>
+                        <a:t>366</a:t>
                       </a:r>
                       <a:endParaRPr lang="en-US" sz="1400" dirty="0">
                         <a:latin typeface="Microsoft JhengHei" charset="0"/>
@@ -13341,7 +7636,7 @@
                           <a:ea typeface="Microsoft JhengHei" pitchFamily="34" charset="-122"/>
                           <a:cs typeface="Microsoft JhengHei" pitchFamily="34" charset="-120"/>
                         </a:rPr>
-                        <a:t>24.4%</a:t>
+                        <a:t>24.9%</a:t>
                       </a:r>
                       <a:endParaRPr lang="en-US" sz="1400" dirty="0">
                         <a:latin typeface="Microsoft JhengHei" charset="0"/>
@@ -13409,7 +7704,7 @@
                           <a:ea typeface="Microsoft JhengHei" pitchFamily="34" charset="-122"/>
                           <a:cs typeface="Microsoft JhengHei" pitchFamily="34" charset="-120"/>
                         </a:rPr>
-                        <a:t>1,111</a:t>
+                        <a:t>1,104</a:t>
                       </a:r>
                       <a:endParaRPr lang="en-US" sz="1400" dirty="0">
                         <a:latin typeface="Microsoft JhengHei" charset="0"/>
@@ -13430,7 +7725,7 @@
                           <a:ea typeface="Microsoft JhengHei" pitchFamily="34" charset="-122"/>
                           <a:cs typeface="Microsoft JhengHei" pitchFamily="34" charset="-120"/>
                         </a:rPr>
-                        <a:t>75.6%</a:t>
+                        <a:t>75.1%</a:t>
                       </a:r>
                       <a:endParaRPr lang="en-US" sz="1400" dirty="0">
                         <a:latin typeface="Microsoft JhengHei" charset="0"/>
@@ -13524,7 +7819,7 @@
       </p:sp>
       <p:graphicFrame>
         <p:nvGraphicFramePr>
-          <p:cNvPr id="19" name="Table 1"/>
+          <p:cNvPr id="11" name="Table 1"/>
           <p:cNvGraphicFramePr>
             <a:graphicFrameLocks noGrp="1"/>
           </p:cNvGraphicFramePr>
@@ -14408,7 +8703,7 @@
                           <a:ea typeface="Microsoft JhengHei" pitchFamily="34" charset="-122"/>
                           <a:cs typeface="Microsoft JhengHei" pitchFamily="34" charset="-120"/>
                         </a:rPr>
-                        <a:t>67.5%</a:t>
+                        <a:t>66.8%</a:t>
                       </a:r>
                       <a:endParaRPr lang="en-US" sz="1300" dirty="0">
                         <a:latin typeface="Microsoft JhengHei" charset="0"/>
@@ -14473,7 +8768,7 @@
                           <a:ea typeface="Microsoft JhengHei" pitchFamily="34" charset="-122"/>
                           <a:cs typeface="Microsoft JhengHei" pitchFamily="34" charset="-120"/>
                         </a:rPr>
-                        <a:t>53.7%</a:t>
+                        <a:t>53.3%</a:t>
                       </a:r>
                       <a:endParaRPr lang="en-US" sz="1300" dirty="0">
                         <a:latin typeface="Microsoft JhengHei" charset="0"/>
@@ -14538,7 +8833,7 @@
                           <a:ea typeface="Microsoft JhengHei" pitchFamily="34" charset="-122"/>
                           <a:cs typeface="Microsoft JhengHei" pitchFamily="34" charset="-120"/>
                         </a:rPr>
-                        <a:t>94.5%</a:t>
+                        <a:t>94.6%</a:t>
                       </a:r>
                       <a:endParaRPr lang="en-US" sz="1300" dirty="0">
                         <a:latin typeface="Microsoft JhengHei" charset="0"/>
@@ -14625,7 +8920,7 @@
                   <a:schemeClr val="tx2"/>
                 </a:solidFill>
               </a:rPr>
-              <a:t>真高點 1,470 個:判對 1,111 個(75.6%),沒有一個被判成低點</a:t>
+              <a:t>真高點 1,470 個:判對 1,104 個(75.1%),沒有一個被判成低點</a:t>
             </a:r>
             <a:endParaRPr lang="en-US" sz="1500" dirty="0"/>
           </a:p>
@@ -14643,7 +8938,7 @@
                   <a:schemeClr val="tx2"/>
                 </a:solidFill>
               </a:rPr>
-              <a:t>真低點 1,532 個:判對 1,237 個(80.7%),沒有一個被判成高點</a:t>
+              <a:t>真低點 1,532 個:判對 1,267 個(82.7%),沒有一個被判成高點</a:t>
             </a:r>
             <a:endParaRPr lang="en-US" sz="1500" dirty="0"/>
           </a:p>
@@ -14661,7 +8956,7 @@
                   <a:schemeClr val="tx2"/>
                 </a:solidFill>
               </a:rPr>
-              <a:t>3 個種子平均 macro-F1 53.60 ± 0.15%</a:t>
+              <a:t>判非極值的 11,753 天中,11,122 天真的不是高低點(94.6%)</a:t>
             </a:r>
             <a:endParaRPr lang="en-US" sz="1500" dirty="0"/>
           </a:p>
@@ -14706,9 +9001,1291 @@
             <a:pPr algn="r"/>
             <a:fld id="{F7021451-1387-4CA6-816F-3879F97B5CBC}" type="slidenum">
               <a:rPr b="0" lang="en-US"/>
-              <a:t>9</a:t>
+              <a:t>5</a:t>
             </a:fld>
             <a:endParaRPr lang="en-US"/>
+          </a:p>
+        </p:txBody>
+      </p:sp>
+    </p:spTree>
+  </p:cSld>
+  <p:clrMapOvr>
+    <a:masterClrMapping/>
+  </p:clrMapOvr>
+</p:sld>
+</file>
+
+<file path=ppt/slides/slide6.xml><?xml version="1.0" encoding="utf-8"?>
+<p:sld xmlns:a="http://schemas.openxmlformats.org/drawingml/2006/main" xmlns:r="http://schemas.openxmlformats.org/officeDocument/2006/relationships" xmlns:p="http://schemas.openxmlformats.org/presentationml/2006/main">
+  <p:cSld name="Slide 6">
+    <p:spTree>
+      <p:nvGrpSpPr>
+        <p:cNvPr id="1" name=""/>
+        <p:cNvGrpSpPr/>
+        <p:nvPr/>
+      </p:nvGrpSpPr>
+      <p:grpSpPr>
+        <a:xfrm>
+          <a:off x="0" y="0"/>
+          <a:ext cx="0" cy="0"/>
+          <a:chOff x="0" y="0"/>
+          <a:chExt cx="0" cy="0"/>
+        </a:xfrm>
+      </p:grpSpPr>
+      <p:sp>
+        <p:nvSpPr>
+          <p:cNvPr id="2" name="Text 11"/>
+          <p:cNvSpPr/>
+          <p:nvPr>
+            <p:ph idx="111" type="title" hasCustomPrompt="1"/>
+          </p:nvPr>
+        </p:nvSpPr>
+        <p:spPr>
+          <a:xfrm>
+            <a:off x="548640" y="320040"/>
+            <a:ext cx="9418320" cy="777240"/>
+          </a:xfrm>
+          <a:prstGeom prst="rect">
+            <a:avLst/>
+          </a:prstGeom>
+          <a:noFill/>
+          <a:ln/>
+        </p:spPr>
+        <p:txBody>
+          <a:bodyPr wrap="square" lIns="0" tIns="0" rIns="0" bIns="0" rtlCol="0" anchor="ctr"/>
+          <a:lstStyle/>
+          <a:p>
+            <a:pPr indent="0" marL="0">
+              <a:buNone/>
+            </a:pPr>
+            <a:r>
+              <a:rPr lang="en-US" sz="3200" b="1" dirty="0">
+                <a:solidFill>
+                  <a:schemeClr val="tx1"/>
+                </a:solidFill>
+              </a:rPr>
+              <a:t>局部準確度:挑出的候選比亂猜準 3.5–4.1 倍</a:t>
+            </a:r>
+            <a:endParaRPr lang="en-US" sz="3200" dirty="0"/>
+          </a:p>
+        </p:txBody>
+      </p:sp>
+      <p:graphicFrame>
+        <p:nvGraphicFramePr>
+          <p:cNvPr id="3" name="precision-chart" descr=""/>
+          <p:cNvGraphicFramePr/>
+          <p:nvPr/>
+        </p:nvGraphicFramePr>
+        <p:xfrm>
+          <a:off x="548640" y="1371600"/>
+          <a:ext cx="6583680" cy="4389120"/>
+        </p:xfrm>
+        <a:graphic xmlns:a="http://schemas.openxmlformats.org/drawingml/2006/main">
+          <a:graphicData uri="http://schemas.openxmlformats.org/drawingml/2006/chart">
+            <c:chart xmlns:c="http://schemas.openxmlformats.org/drawingml/2006/chart" r:id="rId1"/>
+          </a:graphicData>
+        </a:graphic>
+      </p:graphicFrame>
+      <p:sp>
+        <p:nvSpPr>
+          <p:cNvPr id="4" name="loc-0"/>
+          <p:cNvSpPr/>
+          <p:nvPr/>
+        </p:nvSpPr>
+        <p:spPr>
+          <a:xfrm>
+            <a:off x="7498080" y="1463040"/>
+            <a:ext cx="4114800" cy="1280160"/>
+          </a:xfrm>
+          <a:prstGeom prst="roundRect">
+            <a:avLst>
+              <a:gd name="adj" fmla="val 5714"/>
+            </a:avLst>
+          </a:prstGeom>
+          <a:solidFill>
+            <a:schemeClr val="bg2"/>
+          </a:solidFill>
+          <a:ln w="12700">
+            <a:solidFill>
+              <a:schemeClr val="bg2"/>
+            </a:solidFill>
+            <a:prstDash val="solid"/>
+          </a:ln>
+        </p:spPr>
+      </p:sp>
+      <p:sp>
+        <p:nvSpPr>
+          <p:cNvPr id="5" name="Text 2"/>
+          <p:cNvSpPr txBox="1"/>
+          <p:nvPr/>
+        </p:nvSpPr>
+        <p:spPr>
+          <a:xfrm>
+            <a:off x="7726680" y="1600200"/>
+            <a:ext cx="3749040" cy="594360"/>
+          </a:xfrm>
+          <a:prstGeom prst="rect">
+            <a:avLst/>
+          </a:prstGeom>
+          <a:noFill/>
+          <a:ln/>
+        </p:spPr>
+        <p:txBody>
+          <a:bodyPr wrap="square" lIns="0" tIns="0" rIns="0" bIns="0" rtlCol="0" anchor="t"/>
+          <a:lstStyle/>
+          <a:p>
+            <a:pPr indent="0" marL="0">
+              <a:buNone/>
+            </a:pPr>
+            <a:r>
+              <a:rPr lang="en-US" sz="2800" b="1" dirty="0">
+                <a:solidFill>
+                  <a:schemeClr val="accent1"/>
+                </a:solidFill>
+              </a:rPr>
+              <a:t>100% / 99.9%</a:t>
+            </a:r>
+            <a:endParaRPr lang="en-US" sz="2800" dirty="0"/>
+          </a:p>
+        </p:txBody>
+      </p:sp>
+      <p:sp>
+        <p:nvSpPr>
+          <p:cNvPr id="6" name="Text 3"/>
+          <p:cNvSpPr txBox="1"/>
+          <p:nvPr/>
+        </p:nvSpPr>
+        <p:spPr>
+          <a:xfrm>
+            <a:off x="7726680" y="2212848"/>
+            <a:ext cx="3749040" cy="411480"/>
+          </a:xfrm>
+          <a:prstGeom prst="rect">
+            <a:avLst/>
+          </a:prstGeom>
+          <a:noFill/>
+          <a:ln/>
+        </p:spPr>
+        <p:txBody>
+          <a:bodyPr wrap="square" lIns="0" tIns="0" rIns="0" bIns="0" rtlCol="0" anchor="t"/>
+          <a:lstStyle/>
+          <a:p>
+            <a:pPr indent="0" marL="0">
+              <a:buNone/>
+            </a:pPr>
+            <a:r>
+              <a:rPr lang="en-US" sz="1300" dirty="0">
+                <a:solidFill>
+                  <a:schemeClr val="tx2"/>
+                </a:solidFill>
+              </a:rPr>
+              <a:t>規則找到的真高點 / 真低點</a:t>
+            </a:r>
+            <a:endParaRPr lang="en-US" sz="1300" dirty="0"/>
+          </a:p>
+        </p:txBody>
+      </p:sp>
+      <p:sp>
+        <p:nvSpPr>
+          <p:cNvPr id="7" name="loc-1"/>
+          <p:cNvSpPr/>
+          <p:nvPr/>
+        </p:nvSpPr>
+        <p:spPr>
+          <a:xfrm>
+            <a:off x="7498080" y="2926080"/>
+            <a:ext cx="4114800" cy="1280160"/>
+          </a:xfrm>
+          <a:prstGeom prst="roundRect">
+            <a:avLst>
+              <a:gd name="adj" fmla="val 5714"/>
+            </a:avLst>
+          </a:prstGeom>
+          <a:solidFill>
+            <a:schemeClr val="bg2"/>
+          </a:solidFill>
+          <a:ln w="12700">
+            <a:solidFill>
+              <a:schemeClr val="bg2"/>
+            </a:solidFill>
+            <a:prstDash val="solid"/>
+          </a:ln>
+        </p:spPr>
+      </p:sp>
+      <p:sp>
+        <p:nvSpPr>
+          <p:cNvPr id="8" name="Text 5"/>
+          <p:cNvSpPr txBox="1"/>
+          <p:nvPr/>
+        </p:nvSpPr>
+        <p:spPr>
+          <a:xfrm>
+            <a:off x="7726680" y="3063240"/>
+            <a:ext cx="3749040" cy="594360"/>
+          </a:xfrm>
+          <a:prstGeom prst="rect">
+            <a:avLst/>
+          </a:prstGeom>
+          <a:noFill/>
+          <a:ln/>
+        </p:spPr>
+        <p:txBody>
+          <a:bodyPr wrap="square" lIns="0" tIns="0" rIns="0" bIns="0" rtlCol="0" anchor="t"/>
+          <a:lstStyle/>
+          <a:p>
+            <a:pPr indent="0" marL="0">
+              <a:buNone/>
+            </a:pPr>
+            <a:r>
+              <a:rPr lang="en-US" sz="2800" b="1" dirty="0">
+                <a:solidFill>
+                  <a:schemeClr val="accent2"/>
+                </a:solidFill>
+              </a:rPr>
+              <a:t>75.1% / 82.7%</a:t>
+            </a:r>
+            <a:endParaRPr lang="en-US" sz="2800" dirty="0"/>
+          </a:p>
+        </p:txBody>
+      </p:sp>
+      <p:sp>
+        <p:nvSpPr>
+          <p:cNvPr id="9" name="Text 6"/>
+          <p:cNvSpPr txBox="1"/>
+          <p:nvPr/>
+        </p:nvSpPr>
+        <p:spPr>
+          <a:xfrm>
+            <a:off x="7726680" y="3675888"/>
+            <a:ext cx="3749040" cy="411480"/>
+          </a:xfrm>
+          <a:prstGeom prst="rect">
+            <a:avLst/>
+          </a:prstGeom>
+          <a:noFill/>
+          <a:ln/>
+        </p:spPr>
+        <p:txBody>
+          <a:bodyPr wrap="square" lIns="0" tIns="0" rIns="0" bIns="0" rtlCol="0" anchor="t"/>
+          <a:lstStyle/>
+          <a:p>
+            <a:pPr indent="0" marL="0">
+              <a:buNone/>
+            </a:pPr>
+            <a:r>
+              <a:rPr lang="en-US" sz="1300" dirty="0">
+                <a:solidFill>
+                  <a:schemeClr val="tx2"/>
+                </a:solidFill>
+              </a:rPr>
+              <a:t>模型判對的真高點 / 真低點</a:t>
+            </a:r>
+            <a:endParaRPr lang="en-US" sz="1300" dirty="0"/>
+          </a:p>
+        </p:txBody>
+      </p:sp>
+      <p:sp>
+        <p:nvSpPr>
+          <p:cNvPr id="10" name="loc-2"/>
+          <p:cNvSpPr/>
+          <p:nvPr/>
+        </p:nvSpPr>
+        <p:spPr>
+          <a:xfrm>
+            <a:off x="7498080" y="4389120"/>
+            <a:ext cx="4114800" cy="1280160"/>
+          </a:xfrm>
+          <a:prstGeom prst="roundRect">
+            <a:avLst>
+              <a:gd name="adj" fmla="val 5714"/>
+            </a:avLst>
+          </a:prstGeom>
+          <a:solidFill>
+            <a:schemeClr val="bg2"/>
+          </a:solidFill>
+          <a:ln w="12700">
+            <a:solidFill>
+              <a:schemeClr val="bg2"/>
+            </a:solidFill>
+            <a:prstDash val="solid"/>
+          </a:ln>
+        </p:spPr>
+      </p:sp>
+      <p:sp>
+        <p:nvSpPr>
+          <p:cNvPr id="11" name="Text 8"/>
+          <p:cNvSpPr txBox="1"/>
+          <p:nvPr/>
+        </p:nvSpPr>
+        <p:spPr>
+          <a:xfrm>
+            <a:off x="7726680" y="4526280"/>
+            <a:ext cx="3749040" cy="594360"/>
+          </a:xfrm>
+          <a:prstGeom prst="rect">
+            <a:avLst/>
+          </a:prstGeom>
+          <a:noFill/>
+          <a:ln/>
+        </p:spPr>
+        <p:txBody>
+          <a:bodyPr wrap="square" lIns="0" tIns="0" rIns="0" bIns="0" rtlCol="0" anchor="t"/>
+          <a:lstStyle/>
+          <a:p>
+            <a:pPr indent="0" marL="0">
+              <a:buNone/>
+            </a:pPr>
+            <a:r>
+              <a:rPr lang="en-US" sz="2800" b="1" dirty="0">
+                <a:solidFill>
+                  <a:schemeClr val="accent3"/>
+                </a:solidFill>
+              </a:rPr>
+              <a:t>94.6%</a:t>
+            </a:r>
+            <a:endParaRPr lang="en-US" sz="2800" dirty="0"/>
+          </a:p>
+        </p:txBody>
+      </p:sp>
+      <p:sp>
+        <p:nvSpPr>
+          <p:cNvPr id="12" name="Text 9"/>
+          <p:cNvSpPr txBox="1"/>
+          <p:nvPr/>
+        </p:nvSpPr>
+        <p:spPr>
+          <a:xfrm>
+            <a:off x="7726680" y="5138928"/>
+            <a:ext cx="3749040" cy="411480"/>
+          </a:xfrm>
+          <a:prstGeom prst="rect">
+            <a:avLst/>
+          </a:prstGeom>
+          <a:noFill/>
+          <a:ln/>
+        </p:spPr>
+        <p:txBody>
+          <a:bodyPr wrap="square" lIns="0" tIns="0" rIns="0" bIns="0" rtlCol="0" anchor="t"/>
+          <a:lstStyle/>
+          <a:p>
+            <a:pPr indent="0" marL="0">
+              <a:buNone/>
+            </a:pPr>
+            <a:r>
+              <a:rPr lang="en-US" sz="1300" dirty="0">
+                <a:solidFill>
+                  <a:schemeClr val="tx2"/>
+                </a:solidFill>
+              </a:rPr>
+              <a:t>模型判非極值時的正確率</a:t>
+            </a:r>
+            <a:endParaRPr lang="en-US" sz="1300" dirty="0"/>
+          </a:p>
+        </p:txBody>
+      </p:sp>
+      <p:sp>
+        <p:nvSpPr>
+          <p:cNvPr id="25" name="Slide Number Placeholder 0"/>
+          <p:cNvSpPr>
+            <a:spLocks noGrp="1"/>
+          </p:cNvSpPr>
+          <p:nvPr>
+            <p:ph type="sldNum" sz="quarter" idx="4294967295"/>
+          </p:nvPr>
+        </p:nvSpPr>
+        <p:spPr>
+          <a:xfrm>
+            <a:off x="11201400" y="6355080"/>
+            <a:ext cx="457200" cy="274320"/>
+          </a:xfrm>
+          <a:prstGeom prst="rect">
+            <a:avLst/>
+          </a:prstGeom>
+          <a:extLst>
+            <a:ext uri="{C572A759-6A51-4108-AA02-DFA0A04FC94B}">
+              <ma14:wrappingTextBoxFlag xmlns:ma14="http://schemas.microsoft.com/office/mac/drawingml/2011/main" val="0"/>
+            </a:ext>
+          </a:extLst>
+        </p:spPr>
+        <p:txBody>
+          <a:bodyPr/>
+          <a:lstStyle>
+            <a:lvl1pPr>
+              <a:defRPr sz="1000">
+                <a:solidFill>
+                  <a:srgbClr val="7A8691"/>
+                </a:solidFill>
+              </a:defRPr>
+            </a:lvl1pPr>
+          </a:lstStyle>
+          <a:p>
+            <a:pPr algn="r"/>
+            <a:fld id="{F7021451-1387-4CA6-816F-3879F97B5CBC}" type="slidenum">
+              <a:rPr b="0" lang="en-US"/>
+              <a:t>6</a:t>
+            </a:fld>
+            <a:endParaRPr lang="en-US"/>
+          </a:p>
+        </p:txBody>
+      </p:sp>
+    </p:spTree>
+  </p:cSld>
+  <p:clrMapOvr>
+    <a:masterClrMapping/>
+  </p:clrMapOvr>
+</p:sld>
+</file>
+
+<file path=ppt/slides/slide7.xml><?xml version="1.0" encoding="utf-8"?>
+<p:sld xmlns:a="http://schemas.openxmlformats.org/drawingml/2006/main" xmlns:r="http://schemas.openxmlformats.org/officeDocument/2006/relationships" xmlns:p="http://schemas.openxmlformats.org/presentationml/2006/main">
+  <p:cSld name="Slide 7">
+    <p:spTree>
+      <p:nvGrpSpPr>
+        <p:cNvPr id="1" name=""/>
+        <p:cNvGrpSpPr/>
+        <p:nvPr/>
+      </p:nvGrpSpPr>
+      <p:grpSpPr>
+        <a:xfrm>
+          <a:off x="0" y="0"/>
+          <a:ext cx="0" cy="0"/>
+          <a:chOff x="0" y="0"/>
+          <a:chExt cx="0" cy="0"/>
+        </a:xfrm>
+      </p:grpSpPr>
+      <p:sp>
+        <p:nvSpPr>
+          <p:cNvPr id="2" name="Text 11"/>
+          <p:cNvSpPr/>
+          <p:nvPr>
+            <p:ph idx="111" type="title" hasCustomPrompt="1"/>
+          </p:nvPr>
+        </p:nvSpPr>
+        <p:spPr>
+          <a:xfrm>
+            <a:off x="548640" y="320040"/>
+            <a:ext cx="9418320" cy="777240"/>
+          </a:xfrm>
+          <a:prstGeom prst="rect">
+            <a:avLst/>
+          </a:prstGeom>
+          <a:noFill/>
+          <a:ln/>
+        </p:spPr>
+        <p:txBody>
+          <a:bodyPr wrap="square" lIns="0" tIns="0" rIns="0" bIns="0" rtlCol="0" anchor="ctr"/>
+          <a:lstStyle/>
+          <a:p>
+            <a:pPr indent="0" marL="0">
+              <a:buNone/>
+            </a:pPr>
+            <a:r>
+              <a:rPr lang="en-US" sz="3200" b="1" dirty="0">
+                <a:solidFill>
+                  <a:schemeClr val="tx1"/>
+                </a:solidFill>
+              </a:rPr>
+              <a:t>找到的結果長什麼樣</a:t>
+            </a:r>
+            <a:endParaRPr lang="en-US" sz="3200" dirty="0"/>
+          </a:p>
+        </p:txBody>
+      </p:sp>
+      <p:pic>
+        <p:nvPicPr>
+          <p:cNvPr id="3" name="examples" descr="examples.png">    </p:cNvPr>
+          <p:cNvPicPr>
+            <a:picLocks noChangeAspect="1"/>
+          </p:cNvPicPr>
+          <p:nvPr/>
+        </p:nvPicPr>
+        <p:blipFill>
+          <a:blip r:embed="rId1"/>
+          <a:stretch>
+            <a:fillRect/>
+          </a:stretch>
+        </p:blipFill>
+        <p:spPr>
+          <a:xfrm>
+            <a:off x="822960" y="1280160"/>
+            <a:ext cx="9052560" cy="5102352"/>
+          </a:xfrm>
+          <a:prstGeom prst="rect">
+            <a:avLst/>
+          </a:prstGeom>
+        </p:spPr>
+      </p:pic>
+      <p:sp>
+        <p:nvSpPr>
+          <p:cNvPr id="4" name="Text 1"/>
+          <p:cNvSpPr txBox="1"/>
+          <p:nvPr/>
+        </p:nvSpPr>
+        <p:spPr>
+          <a:xfrm>
+            <a:off x="10012680" y="1463040"/>
+            <a:ext cx="1691640" cy="4572000"/>
+          </a:xfrm>
+          <a:prstGeom prst="rect">
+            <a:avLst/>
+          </a:prstGeom>
+          <a:noFill/>
+          <a:ln/>
+        </p:spPr>
+        <p:txBody>
+          <a:bodyPr wrap="square" lIns="0" tIns="0" rIns="0" bIns="0" rtlCol="0" anchor="t"/>
+          <a:lstStyle/>
+          <a:p>
+            <a:pPr indent="0" marL="0">
+              <a:buNone/>
+            </a:pPr>
+            <a:r>
+              <a:rPr lang="en-US" sz="1200" b="1" dirty="0">
+                <a:solidFill>
+                  <a:schemeClr val="tx1"/>
+                </a:solidFill>
+              </a:rPr>
+              <a:t>怎麼看</a:t>
+            </a:r>
+            <a:endParaRPr lang="en-US" sz="1200" dirty="0"/>
+          </a:p>
+          <a:p>
+            <a:pPr indent="0" marL="0">
+              <a:spcAft>
+                <a:spcPts val="1000"/>
+              </a:spcAft>
+              <a:buNone/>
+            </a:pPr>
+            <a:r>
+              <a:rPr lang="en-US" sz="1200" dirty="0">
+                <a:solidFill>
+                  <a:schemeClr val="tx2"/>
+                </a:solidFill>
+              </a:rPr>
+              <a:t>淺色底 = t 日看得到的 6 天;框起來的是 t;虛線是 t 日收盤。</a:t>
+            </a:r>
+            <a:endParaRPr lang="en-US" sz="1200" dirty="0"/>
+          </a:p>
+          <a:p>
+            <a:pPr indent="0" marL="0">
+              <a:buNone/>
+            </a:pPr>
+            <a:r>
+              <a:rPr lang="en-US" sz="1200" b="1" dirty="0">
+                <a:solidFill>
+                  <a:schemeClr val="tx1"/>
+                </a:solidFill>
+              </a:rPr>
+              <a:t>怎麼挑</a:t>
+            </a:r>
+            <a:endParaRPr lang="en-US" sz="1200" dirty="0"/>
+          </a:p>
+          <a:p>
+            <a:pPr indent="0" marL="0">
+              <a:spcAft>
+                <a:spcPts val="1000"/>
+              </a:spcAft>
+              <a:buNone/>
+            </a:pPr>
+            <a:r>
+              <a:rPr lang="en-US" sz="1200" dirty="0">
+                <a:solidFill>
+                  <a:schemeClr val="tx2"/>
+                </a:solidFill>
+              </a:rPr>
+              <a:t>每類取「之後 5 天報酬」最接近該類中位數的窗口,是典型例子,不是最好看的。</a:t>
+            </a:r>
+            <a:endParaRPr lang="en-US" sz="1200" dirty="0"/>
+          </a:p>
+          <a:p>
+            <a:pPr indent="0" marL="0">
+              <a:buNone/>
+            </a:pPr>
+            <a:r>
+              <a:rPr lang="en-US" sz="1200" b="1" dirty="0">
+                <a:solidFill>
+                  <a:schemeClr val="tx1"/>
+                </a:solidFill>
+              </a:rPr>
+              <a:t>互動版</a:t>
+            </a:r>
+            <a:endParaRPr lang="en-US" sz="1200" dirty="0"/>
+          </a:p>
+          <a:p>
+            <a:pPr indent="0" marL="0">
+              <a:buNone/>
+            </a:pPr>
+            <a:r>
+              <a:rPr lang="en-US" sz="1200" dirty="0">
+                <a:solidFill>
+                  <a:schemeClr val="tx2"/>
+                </a:solidFill>
+              </a:rPr>
+              <a:t>網頁可逐檔、逐日點開每個 11 日窗口。</a:t>
+            </a:r>
+            <a:endParaRPr lang="en-US" sz="1200" dirty="0"/>
+          </a:p>
+        </p:txBody>
+      </p:sp>
+      <p:sp>
+        <p:nvSpPr>
+          <p:cNvPr id="25" name="Slide Number Placeholder 0"/>
+          <p:cNvSpPr>
+            <a:spLocks noGrp="1"/>
+          </p:cNvSpPr>
+          <p:nvPr>
+            <p:ph type="sldNum" sz="quarter" idx="4294967295"/>
+          </p:nvPr>
+        </p:nvSpPr>
+        <p:spPr>
+          <a:xfrm>
+            <a:off x="11201400" y="6355080"/>
+            <a:ext cx="457200" cy="274320"/>
+          </a:xfrm>
+          <a:prstGeom prst="rect">
+            <a:avLst/>
+          </a:prstGeom>
+          <a:extLst>
+            <a:ext uri="{C572A759-6A51-4108-AA02-DFA0A04FC94B}">
+              <ma14:wrappingTextBoxFlag xmlns:ma14="http://schemas.microsoft.com/office/mac/drawingml/2011/main" val="0"/>
+            </a:ext>
+          </a:extLst>
+        </p:spPr>
+        <p:txBody>
+          <a:bodyPr/>
+          <a:lstStyle>
+            <a:lvl1pPr>
+              <a:defRPr sz="1000">
+                <a:solidFill>
+                  <a:srgbClr val="7A8691"/>
+                </a:solidFill>
+              </a:defRPr>
+            </a:lvl1pPr>
+          </a:lstStyle>
+          <a:p>
+            <a:pPr algn="r"/>
+            <a:fld id="{F7021451-1387-4CA6-816F-3879F97B5CBC}" type="slidenum">
+              <a:rPr b="0" lang="en-US"/>
+              <a:t>7</a:t>
+            </a:fld>
+            <a:endParaRPr lang="en-US"/>
+          </a:p>
+        </p:txBody>
+      </p:sp>
+    </p:spTree>
+  </p:cSld>
+  <p:clrMapOvr>
+    <a:masterClrMapping/>
+  </p:clrMapOvr>
+</p:sld>
+</file>
+
+<file path=ppt/slides/slide8.xml><?xml version="1.0" encoding="utf-8"?>
+<p:sld xmlns:a="http://schemas.openxmlformats.org/drawingml/2006/main" xmlns:r="http://schemas.openxmlformats.org/officeDocument/2006/relationships" xmlns:p="http://schemas.openxmlformats.org/presentationml/2006/main">
+  <p:cSld name="Slide 8">
+    <p:spTree>
+      <p:nvGrpSpPr>
+        <p:cNvPr id="1" name=""/>
+        <p:cNvGrpSpPr/>
+        <p:nvPr/>
+      </p:nvGrpSpPr>
+      <p:grpSpPr>
+        <a:xfrm>
+          <a:off x="0" y="0"/>
+          <a:ext cx="0" cy="0"/>
+          <a:chOff x="0" y="0"/>
+          <a:chExt cx="0" cy="0"/>
+        </a:xfrm>
+      </p:grpSpPr>
+      <p:sp>
+        <p:nvSpPr>
+          <p:cNvPr id="2" name="Text 11"/>
+          <p:cNvSpPr/>
+          <p:nvPr>
+            <p:ph idx="111" type="title" hasCustomPrompt="1"/>
+          </p:nvPr>
+        </p:nvSpPr>
+        <p:spPr>
+          <a:xfrm>
+            <a:off x="731520" y="1920240"/>
+            <a:ext cx="10698480" cy="1371600"/>
+          </a:xfrm>
+          <a:prstGeom prst="rect">
+            <a:avLst/>
+          </a:prstGeom>
+          <a:noFill/>
+          <a:ln/>
+        </p:spPr>
+        <p:txBody>
+          <a:bodyPr wrap="square" lIns="0" tIns="0" rIns="0" bIns="0" rtlCol="0" anchor="t"/>
+          <a:lstStyle/>
+          <a:p>
+            <a:pPr indent="0" marL="0">
+              <a:buNone/>
+            </a:pPr>
+            <a:r>
+              <a:rPr lang="en-US" sz="4400" b="1" dirty="0">
+                <a:solidFill>
+                  <a:schemeClr val="bg1"/>
+                </a:solidFill>
+              </a:rPr>
+              <a:t>總結:成功找到 11 日窗口的局部高低點</a:t>
+            </a:r>
+            <a:endParaRPr lang="en-US" sz="4400" dirty="0"/>
+          </a:p>
+        </p:txBody>
+      </p:sp>
+      <p:sp>
+        <p:nvSpPr>
+          <p:cNvPr id="3" name="Text 1"/>
+          <p:cNvSpPr txBox="1"/>
+          <p:nvPr/>
+        </p:nvSpPr>
+        <p:spPr>
+          <a:xfrm>
+            <a:off x="731520" y="3566160"/>
+            <a:ext cx="2514600" cy="868680"/>
+          </a:xfrm>
+          <a:prstGeom prst="rect">
+            <a:avLst/>
+          </a:prstGeom>
+          <a:noFill/>
+          <a:ln/>
+        </p:spPr>
+        <p:txBody>
+          <a:bodyPr wrap="square" lIns="0" tIns="0" rIns="0" bIns="0" rtlCol="0" anchor="ctr"/>
+          <a:lstStyle/>
+          <a:p>
+            <a:pPr indent="0" marL="0">
+              <a:buNone/>
+            </a:pPr>
+            <a:r>
+              <a:rPr lang="en-US" sz="4000" b="1" dirty="0">
+                <a:solidFill>
+                  <a:schemeClr val="accent1"/>
+                </a:solidFill>
+              </a:rPr>
+              <a:t>100%</a:t>
+            </a:r>
+            <a:endParaRPr lang="en-US" sz="4000" dirty="0"/>
+          </a:p>
+        </p:txBody>
+      </p:sp>
+      <p:sp>
+        <p:nvSpPr>
+          <p:cNvPr id="4" name="Text 2"/>
+          <p:cNvSpPr txBox="1"/>
+          <p:nvPr/>
+        </p:nvSpPr>
+        <p:spPr>
+          <a:xfrm>
+            <a:off x="731520" y="4480560"/>
+            <a:ext cx="2514600" cy="411480"/>
+          </a:xfrm>
+          <a:prstGeom prst="rect">
+            <a:avLst/>
+          </a:prstGeom>
+          <a:noFill/>
+          <a:ln/>
+        </p:spPr>
+        <p:txBody>
+          <a:bodyPr wrap="square" lIns="0" tIns="0" rIns="0" bIns="0" rtlCol="0" anchor="t"/>
+          <a:lstStyle/>
+          <a:p>
+            <a:pPr indent="0" marL="0">
+              <a:buNone/>
+            </a:pPr>
+            <a:r>
+              <a:rPr lang="en-US" sz="1600" b="1" dirty="0">
+                <a:solidFill>
+                  <a:schemeClr val="bg1"/>
+                </a:solidFill>
+              </a:rPr>
+              <a:t>真高低點都進了候選</a:t>
+            </a:r>
+            <a:endParaRPr lang="en-US" sz="1600" dirty="0"/>
+          </a:p>
+        </p:txBody>
+      </p:sp>
+      <p:sp>
+        <p:nvSpPr>
+          <p:cNvPr id="5" name="Text 3"/>
+          <p:cNvSpPr txBox="1"/>
+          <p:nvPr/>
+        </p:nvSpPr>
+        <p:spPr>
+          <a:xfrm>
+            <a:off x="731520" y="4937760"/>
+            <a:ext cx="2514600" cy="822960"/>
+          </a:xfrm>
+          <a:prstGeom prst="rect">
+            <a:avLst/>
+          </a:prstGeom>
+          <a:noFill/>
+          <a:ln/>
+        </p:spPr>
+        <p:txBody>
+          <a:bodyPr wrap="square" lIns="0" tIns="0" rIns="0" bIns="0" rtlCol="0" anchor="t"/>
+          <a:lstStyle/>
+          <a:p>
+            <a:pPr indent="0" marL="0">
+              <a:buNone/>
+            </a:pPr>
+            <a:r>
+              <a:rPr lang="en-US" sz="1300" dirty="0">
+                <a:solidFill>
+                  <a:schemeClr val="accent6"/>
+                </a:solidFill>
+              </a:rPr>
+              <a:t>高點 1,470 / 1,470</a:t>
+            </a:r>
+            <a:endParaRPr lang="en-US" sz="1300" dirty="0"/>
+          </a:p>
+          <a:p>
+            <a:pPr indent="0" marL="0">
+              <a:buNone/>
+            </a:pPr>
+            <a:r>
+              <a:rPr lang="en-US" sz="1300" dirty="0">
+                <a:solidFill>
+                  <a:schemeClr val="accent6"/>
+                </a:solidFill>
+              </a:rPr>
+              <a:t>低點 1,531 / 1,532</a:t>
+            </a:r>
+            <a:endParaRPr lang="en-US" sz="1300" dirty="0"/>
+          </a:p>
+        </p:txBody>
+      </p:sp>
+      <p:sp>
+        <p:nvSpPr>
+          <p:cNvPr id="6" name="Text 4"/>
+          <p:cNvSpPr txBox="1"/>
+          <p:nvPr/>
+        </p:nvSpPr>
+        <p:spPr>
+          <a:xfrm>
+            <a:off x="3429000" y="3566160"/>
+            <a:ext cx="2514600" cy="868680"/>
+          </a:xfrm>
+          <a:prstGeom prst="rect">
+            <a:avLst/>
+          </a:prstGeom>
+          <a:noFill/>
+          <a:ln/>
+        </p:spPr>
+        <p:txBody>
+          <a:bodyPr wrap="square" lIns="0" tIns="0" rIns="0" bIns="0" rtlCol="0" anchor="ctr"/>
+          <a:lstStyle/>
+          <a:p>
+            <a:pPr indent="0" marL="0">
+              <a:buNone/>
+            </a:pPr>
+            <a:r>
+              <a:rPr lang="en-US" sz="4000" b="1" dirty="0">
+                <a:solidFill>
+                  <a:schemeClr val="bg1"/>
+                </a:solidFill>
+              </a:rPr>
+              <a:t>0 次</a:t>
+            </a:r>
+            <a:endParaRPr lang="en-US" sz="4000" dirty="0"/>
+          </a:p>
+        </p:txBody>
+      </p:sp>
+      <p:sp>
+        <p:nvSpPr>
+          <p:cNvPr id="7" name="Text 5"/>
+          <p:cNvSpPr txBox="1"/>
+          <p:nvPr/>
+        </p:nvSpPr>
+        <p:spPr>
+          <a:xfrm>
+            <a:off x="3429000" y="4480560"/>
+            <a:ext cx="2514600" cy="411480"/>
+          </a:xfrm>
+          <a:prstGeom prst="rect">
+            <a:avLst/>
+          </a:prstGeom>
+          <a:noFill/>
+          <a:ln/>
+        </p:spPr>
+        <p:txBody>
+          <a:bodyPr wrap="square" lIns="0" tIns="0" rIns="0" bIns="0" rtlCol="0" anchor="t"/>
+          <a:lstStyle/>
+          <a:p>
+            <a:pPr indent="0" marL="0">
+              <a:buNone/>
+            </a:pPr>
+            <a:r>
+              <a:rPr lang="en-US" sz="1600" b="1" dirty="0">
+                <a:solidFill>
+                  <a:schemeClr val="bg1"/>
+                </a:solidFill>
+              </a:rPr>
+              <a:t>高點與低點互相判錯</a:t>
+            </a:r>
+            <a:endParaRPr lang="en-US" sz="1600" dirty="0"/>
+          </a:p>
+        </p:txBody>
+      </p:sp>
+      <p:sp>
+        <p:nvSpPr>
+          <p:cNvPr id="8" name="Text 6"/>
+          <p:cNvSpPr txBox="1"/>
+          <p:nvPr/>
+        </p:nvSpPr>
+        <p:spPr>
+          <a:xfrm>
+            <a:off x="3429000" y="4937760"/>
+            <a:ext cx="2514600" cy="822960"/>
+          </a:xfrm>
+          <a:prstGeom prst="rect">
+            <a:avLst/>
+          </a:prstGeom>
+          <a:noFill/>
+          <a:ln/>
+        </p:spPr>
+        <p:txBody>
+          <a:bodyPr wrap="square" lIns="0" tIns="0" rIns="0" bIns="0" rtlCol="0" anchor="t"/>
+          <a:lstStyle/>
+          <a:p>
+            <a:pPr indent="0" marL="0">
+              <a:buNone/>
+            </a:pPr>
+            <a:r>
+              <a:rPr lang="en-US" sz="1300" dirty="0">
+                <a:solidFill>
+                  <a:schemeClr val="accent6"/>
+                </a:solidFill>
+              </a:rPr>
+              <a:t>真高點沒被判成低點,</a:t>
+            </a:r>
+            <a:endParaRPr lang="en-US" sz="1300" dirty="0"/>
+          </a:p>
+          <a:p>
+            <a:pPr indent="0" marL="0">
+              <a:buNone/>
+            </a:pPr>
+            <a:r>
+              <a:rPr lang="en-US" sz="1300" dirty="0">
+                <a:solidFill>
+                  <a:schemeClr val="accent6"/>
+                </a:solidFill>
+              </a:rPr>
+              <a:t>真低點沒被判成高點</a:t>
+            </a:r>
+            <a:endParaRPr lang="en-US" sz="1300" dirty="0"/>
+          </a:p>
+        </p:txBody>
+      </p:sp>
+      <p:sp>
+        <p:nvSpPr>
+          <p:cNvPr id="9" name="Text 7"/>
+          <p:cNvSpPr txBox="1"/>
+          <p:nvPr/>
+        </p:nvSpPr>
+        <p:spPr>
+          <a:xfrm>
+            <a:off x="6126480" y="3566160"/>
+            <a:ext cx="2514600" cy="868680"/>
+          </a:xfrm>
+          <a:prstGeom prst="rect">
+            <a:avLst/>
+          </a:prstGeom>
+          <a:noFill/>
+          <a:ln/>
+        </p:spPr>
+        <p:txBody>
+          <a:bodyPr wrap="square" lIns="0" tIns="0" rIns="0" bIns="0" rtlCol="0" anchor="ctr"/>
+          <a:lstStyle/>
+          <a:p>
+            <a:pPr indent="0" marL="0">
+              <a:buNone/>
+            </a:pPr>
+            <a:r>
+              <a:rPr lang="en-US" sz="4000" b="1" dirty="0">
+                <a:solidFill>
+                  <a:schemeClr val="accent3"/>
+                </a:solidFill>
+              </a:rPr>
+              <a:t>94.6%</a:t>
+            </a:r>
+            <a:endParaRPr lang="en-US" sz="4000" dirty="0"/>
+          </a:p>
+        </p:txBody>
+      </p:sp>
+      <p:sp>
+        <p:nvSpPr>
+          <p:cNvPr id="10" name="Text 8"/>
+          <p:cNvSpPr txBox="1"/>
+          <p:nvPr/>
+        </p:nvSpPr>
+        <p:spPr>
+          <a:xfrm>
+            <a:off x="6126480" y="4480560"/>
+            <a:ext cx="2514600" cy="411480"/>
+          </a:xfrm>
+          <a:prstGeom prst="rect">
+            <a:avLst/>
+          </a:prstGeom>
+          <a:noFill/>
+          <a:ln/>
+        </p:spPr>
+        <p:txBody>
+          <a:bodyPr wrap="square" lIns="0" tIns="0" rIns="0" bIns="0" rtlCol="0" anchor="t"/>
+          <a:lstStyle/>
+          <a:p>
+            <a:pPr indent="0" marL="0">
+              <a:buNone/>
+            </a:pPr>
+            <a:r>
+              <a:rPr lang="en-US" sz="1600" b="1" dirty="0">
+                <a:solidFill>
+                  <a:schemeClr val="bg1"/>
+                </a:solidFill>
+              </a:rPr>
+              <a:t>判「非極值」的正確率</a:t>
+            </a:r>
+            <a:endParaRPr lang="en-US" sz="1600" dirty="0"/>
+          </a:p>
+        </p:txBody>
+      </p:sp>
+      <p:sp>
+        <p:nvSpPr>
+          <p:cNvPr id="11" name="Text 9"/>
+          <p:cNvSpPr txBox="1"/>
+          <p:nvPr/>
+        </p:nvSpPr>
+        <p:spPr>
+          <a:xfrm>
+            <a:off x="6126480" y="4937760"/>
+            <a:ext cx="2514600" cy="822960"/>
+          </a:xfrm>
+          <a:prstGeom prst="rect">
+            <a:avLst/>
+          </a:prstGeom>
+          <a:noFill/>
+          <a:ln/>
+        </p:spPr>
+        <p:txBody>
+          <a:bodyPr wrap="square" lIns="0" tIns="0" rIns="0" bIns="0" rtlCol="0" anchor="t"/>
+          <a:lstStyle/>
+          <a:p>
+            <a:pPr indent="0" marL="0">
+              <a:buNone/>
+            </a:pPr>
+            <a:r>
+              <a:rPr lang="en-US" sz="1300" dirty="0">
+                <a:solidFill>
+                  <a:schemeClr val="accent6"/>
+                </a:solidFill>
+              </a:rPr>
+              <a:t>11,753 天裡 11,122 天</a:t>
+            </a:r>
+            <a:endParaRPr lang="en-US" sz="1300" dirty="0"/>
+          </a:p>
+          <a:p>
+            <a:pPr indent="0" marL="0">
+              <a:buNone/>
+            </a:pPr>
+            <a:r>
+              <a:rPr lang="en-US" sz="1300" dirty="0">
+                <a:solidFill>
+                  <a:schemeClr val="accent6"/>
+                </a:solidFill>
+              </a:rPr>
+              <a:t>真的不是高低點</a:t>
+            </a:r>
+            <a:endParaRPr lang="en-US" sz="1300" dirty="0"/>
+          </a:p>
+        </p:txBody>
+      </p:sp>
+      <p:sp>
+        <p:nvSpPr>
+          <p:cNvPr id="12" name="Text 10"/>
+          <p:cNvSpPr txBox="1"/>
+          <p:nvPr/>
+        </p:nvSpPr>
+        <p:spPr>
+          <a:xfrm>
+            <a:off x="8823960" y="3566160"/>
+            <a:ext cx="2514600" cy="868680"/>
+          </a:xfrm>
+          <a:prstGeom prst="rect">
+            <a:avLst/>
+          </a:prstGeom>
+          <a:noFill/>
+          <a:ln/>
+        </p:spPr>
+        <p:txBody>
+          <a:bodyPr wrap="square" lIns="0" tIns="0" rIns="0" bIns="0" rtlCol="0" anchor="ctr"/>
+          <a:lstStyle/>
+          <a:p>
+            <a:pPr indent="0" marL="0">
+              <a:buNone/>
+            </a:pPr>
+            <a:r>
+              <a:rPr lang="en-US" sz="4000" b="1" dirty="0">
+                <a:solidFill>
+                  <a:schemeClr val="accent2"/>
+                </a:solidFill>
+              </a:rPr>
+              <a:t>3.5–4.1×</a:t>
+            </a:r>
+            <a:endParaRPr lang="en-US" sz="4000" dirty="0"/>
+          </a:p>
+        </p:txBody>
+      </p:sp>
+      <p:sp>
+        <p:nvSpPr>
+          <p:cNvPr id="13" name="Text 11"/>
+          <p:cNvSpPr txBox="1"/>
+          <p:nvPr/>
+        </p:nvSpPr>
+        <p:spPr>
+          <a:xfrm>
+            <a:off x="8823960" y="4480560"/>
+            <a:ext cx="2514600" cy="411480"/>
+          </a:xfrm>
+          <a:prstGeom prst="rect">
+            <a:avLst/>
+          </a:prstGeom>
+          <a:noFill/>
+          <a:ln/>
+        </p:spPr>
+        <p:txBody>
+          <a:bodyPr wrap="square" lIns="0" tIns="0" rIns="0" bIns="0" rtlCol="0" anchor="t"/>
+          <a:lstStyle/>
+          <a:p>
+            <a:pPr indent="0" marL="0">
+              <a:buNone/>
+            </a:pPr>
+            <a:r>
+              <a:rPr lang="en-US" sz="1600" b="1" dirty="0">
+                <a:solidFill>
+                  <a:schemeClr val="bg1"/>
+                </a:solidFill>
+              </a:rPr>
+              <a:t>命中率是隨機挑的倍數</a:t>
+            </a:r>
+            <a:endParaRPr lang="en-US" sz="1600" dirty="0"/>
+          </a:p>
+        </p:txBody>
+      </p:sp>
+      <p:sp>
+        <p:nvSpPr>
+          <p:cNvPr id="14" name="Text 12"/>
+          <p:cNvSpPr txBox="1"/>
+          <p:nvPr/>
+        </p:nvSpPr>
+        <p:spPr>
+          <a:xfrm>
+            <a:off x="8823960" y="4937760"/>
+            <a:ext cx="2514600" cy="822960"/>
+          </a:xfrm>
+          <a:prstGeom prst="rect">
+            <a:avLst/>
+          </a:prstGeom>
+          <a:noFill/>
+          <a:ln/>
+        </p:spPr>
+        <p:txBody>
+          <a:bodyPr wrap="square" lIns="0" tIns="0" rIns="0" bIns="0" rtlCol="0" anchor="t"/>
+          <a:lstStyle/>
+          <a:p>
+            <a:pPr indent="0" marL="0">
+              <a:buNone/>
+            </a:pPr>
+            <a:r>
+              <a:rPr lang="en-US" sz="1300" dirty="0">
+                <a:solidFill>
+                  <a:schemeClr val="accent6"/>
+                </a:solidFill>
+              </a:rPr>
+              <a:t>高點 7.3% → 25.2%</a:t>
+            </a:r>
+            <a:endParaRPr lang="en-US" sz="1300" dirty="0"/>
+          </a:p>
+          <a:p>
+            <a:pPr indent="0" marL="0">
+              <a:buNone/>
+            </a:pPr>
+            <a:r>
+              <a:rPr lang="en-US" sz="1300" dirty="0">
+                <a:solidFill>
+                  <a:schemeClr val="accent6"/>
+                </a:solidFill>
+              </a:rPr>
+              <a:t>低點 7.6% → 31.3%</a:t>
+            </a:r>
+            <a:endParaRPr lang="en-US" sz="1300" dirty="0"/>
+          </a:p>
+        </p:txBody>
+      </p:sp>
+      <p:sp>
+        <p:nvSpPr>
+          <p:cNvPr id="15" name="Text 13"/>
+          <p:cNvSpPr txBox="1"/>
+          <p:nvPr/>
+        </p:nvSpPr>
+        <p:spPr>
+          <a:xfrm>
+            <a:off x="731520" y="6035040"/>
+            <a:ext cx="10698480" cy="365760"/>
+          </a:xfrm>
+          <a:prstGeom prst="rect">
+            <a:avLst/>
+          </a:prstGeom>
+          <a:noFill/>
+          <a:ln/>
+        </p:spPr>
+        <p:txBody>
+          <a:bodyPr wrap="square" lIns="0" tIns="0" rIns="0" bIns="0" rtlCol="0" anchor="t"/>
+          <a:lstStyle/>
+          <a:p>
+            <a:pPr indent="0" marL="0">
+              <a:buNone/>
+            </a:pPr>
+            <a:r>
+              <a:rPr lang="en-US" sz="1300" dirty="0">
+                <a:solidFill>
+                  <a:schemeClr val="accent5"/>
+                </a:solidFill>
+              </a:rPr>
+              <a:t>測試期 2025-01 ~ 2026-09 · TW50 · 20,189 個股票日;模型判對 75.1% 的真高點、82.7% 的真低點</a:t>
+            </a:r>
+            <a:endParaRPr lang="en-US" sz="1300" dirty="0"/>
+          </a:p>
+        </p:txBody>
+      </p:sp>
+      <p:sp>
+        <p:nvSpPr>
+          <p:cNvPr id="17" name="Text 11"/>
+          <p:cNvSpPr/>
+          <p:nvPr>
+            <p:ph idx="112" type="body" hasCustomPrompt="1"/>
+          </p:nvPr>
+        </p:nvSpPr>
+        <p:spPr>
+          <a:xfrm>
+            <a:off x="731520" y="3429000"/>
+            <a:ext cx="10698480" cy="2377440"/>
+          </a:xfrm>
+          <a:prstGeom prst="rect">
+            <a:avLst/>
+          </a:prstGeom>
+          <a:noFill/>
+          <a:ln/>
+        </p:spPr>
+        <p:txBody>
+          <a:bodyPr wrap="square" lIns="0" tIns="0" rIns="0" bIns="0" rtlCol="0" anchor="t"/>
+          <a:lstStyle/>
+          <a:p>
+            <a:pPr indent="0" marL="0">
+              <a:buNone/>
+            </a:pPr>
+            <a:endParaRPr lang="en-US" sz="1800" dirty="0"/>
           </a:p>
         </p:txBody>
       </p:sp>

--- a/method_kline_peak/report/TW50_局部高低點_專題進度.pptx
+++ b/method_kline_peak/report/TW50_局部高低點_專題進度.pptx
@@ -114,26 +114,26 @@
   <p:extLst>
     <p:ext uri="{521415D9-36F7-43E2-AB2F-B90AF26B5E84}">
       <p14:sectionLst xmlns:p14="http://schemas.microsoft.com/office/powerpoint/2010/main">
-        <p14:section name="問題與資料" id="{6a86c6ba-6f3c-c8c4-0209-7c392b24efe2}">
+        <p14:section name="問題與資料" id="{8dd849fe-5b19-5825-be69-f4eeac6f4244}">
           <p14:sldIdLst>
             <p14:sldId id="256"/>
             <p14:sldId id="257"/>
           </p14:sldIdLst>
         </p14:section>
-        <p14:section name="方法與計分" id="{cf7f66be-fa9b-ee4e-7762-2b31b7f2dd27}">
+        <p14:section name="方法與計分" id="{2c4a1aa0-fb21-5cca-fcf9-356911a62653}">
           <p14:sldIdLst>
             <p14:sldId id="258"/>
             <p14:sldId id="259"/>
           </p14:sldIdLst>
         </p14:section>
-        <p14:section name="結果" id="{bcf3bc76-5d8d-90e3-8378-95511cf33d86}">
+        <p14:section name="結果" id="{cd6f79ec-546c-d2cd-f05a-91ccbf839389}">
           <p14:sldIdLst>
             <p14:sldId id="260"/>
             <p14:sldId id="261"/>
             <p14:sldId id="262"/>
           </p14:sldIdLst>
         </p14:section>
-        <p14:section name="總結" id="{75d8b770-88d3-6c48-0b6a-8dd62cf05330}">
+        <p14:section name="總結" id="{6b244d4a-37eb-a262-6e22-3fea924d5896}">
           <p14:sldIdLst>
             <p14:sldId id="263"/>
           </p14:sldIdLst>
@@ -773,10 +773,10 @@
                 <c:formatCode>General</c:formatCode>
                 <c:ptCount val="2"/>
                 <c:pt idx="0">
-                  <c:v>25.2</c:v>
+                  <c:v>24.9</c:v>
                 </c:pt>
                 <c:pt idx="1">
-                  <c:v>31.3</c:v>
+                  <c:v>31.6</c:v>
                 </c:pt>
               </c:numCache>
             </c:numRef>
@@ -1597,7 +1597,7 @@
           <a:p>
             <a:r>
               <a:rPr lang="en-US" dirty="0"/>
-              <a:t>模型沿用我們原本系統的 AE 加 OC-SVM。AE 的輸入是 t-5 到 t 六根 K 線的 29 個數字:每天的開高低收都除以 t 日收盤(t 日收盤自己固定是 1,所以拿掉),每天的量除以 10 日均量。AE 把這 29 個數字壓成 4 維,OC-SVM 在這 4 維空間裡圈出真高點候選的範圍。測試時,候選點落在範圍內就保留,否則改判非極值。高點和低點各訓練一組。</a:t>
+              <a:t>模型沿用我們原本系統的 AE 加 OC-SVM。AE 的輸入是 t-5 到 t 六根 K 線的 29 個數字:每天的開高低收都除以 t 日收盤(t 日收盤自己固定是 1,所以拿掉),每天的量除以 10 日均量。AE 只用一層、不先升維,直接把這 29 個數字壓成 16 維,OC-SVM 在這 16 維空間裡圈出真高點候選的範圍。測試時,候選點落在範圍內就保留,否則改判非極值。高點和低點各訓練一組。</a:t>
             </a:r>
             <a:endParaRPr lang="en-US" dirty="0"/>
           </a:p>
@@ -1685,7 +1685,7 @@
           <a:p>
             <a:r>
               <a:rPr lang="en-US" dirty="0"/>
-              <a:t>這是測試期的混淆矩陣。看第一列和最後一列:真低點有 82.7% 被判成低點,真高點有 75.1% 被判成高點,而且高點和低點從來不會互相判錯。右邊的表比較三種做法,模型的 acc 是 66.8%,判非極值時 94.6% 正確。</a:t>
+              <a:t>這是測試期的混淆矩陣。看第一列和最後一列:真低點有 79.8% 被判成低點,真高點有 70.6% 被判成高點,而且高點和低點從來不會互相判錯。右邊的表比較三種做法,模型的 acc 是 67.7%,判非極值時 93.9% 正確。</a:t>
             </a:r>
             <a:endParaRPr lang="en-US" dirty="0"/>
           </a:p>
@@ -1773,7 +1773,7 @@
           <a:p>
             <a:r>
               <a:rPr lang="en-US" dirty="0"/>
-              <a:t>這頁是我們說的局部準確度。左圖是命中率:隨機挑一天是高點的機率只有 7.3%,被我們挑出來的候選是 25 到 31%,大約是 3.5 到 4 倍。右邊三個數字:真高低點全部進了候選,模型判對 75 到 83%,判非極值時 94.6% 正確。</a:t>
+              <a:t>這頁是我們說的局部準確度。左圖是命中率:隨機挑一天是高點的機率只有 7.3%,被我們挑出來的候選是 25 到 32%,大約是 3.4 到 4.2 倍。右邊三個數字:真高低點全部進了候選,模型判對 71 到 80%,判非極值時 93.9% 正確。</a:t>
             </a:r>
             <a:endParaRPr lang="en-US" dirty="0"/>
           </a:p>
@@ -1949,7 +1949,7 @@
           <a:p>
             <a:r>
               <a:rPr lang="en-US" dirty="0"/>
-              <a:t>總結。我們把題目定成找 11 天窗口裡的局部高低點,在 TW50 的測試期:真高低點全部進了候選;模型判出的高點和低點從來不會互相搞錯;模型說「這天不是高低點」時 94.6% 是對的;挑出來的候選是真高低點的機率是隨便挑一天的 3.5 到 4.1 倍。模型最後判對了 75% 的真高點和 83% 的真低點。謝謝。</a:t>
+              <a:t>總結。我們把題目定成找 11 天窗口裡的局部高低點,在 TW50 的測試期:真高低點全部進了候選;模型判出的高點和低點從來不會互相搞錯;模型說「這天不是高低點」時 93.9% 是對的;挑出來的候選是真高低點的機率是隨便挑一天的 3.4 到 4.2 倍。模型最後判對了 71% 的真高點和 80% 的真低點。謝謝。</a:t>
             </a:r>
             <a:endParaRPr lang="en-US" dirty="0"/>
           </a:p>
@@ -5859,7 +5859,21 @@
                   <a:schemeClr val="tx1"/>
                 </a:solidFill>
               </a:rPr>
-              <a:t>29 → 58 → 8 → 4</a:t>
+              <a:t>29 → 16</a:t>
+            </a:r>
+            <a:endParaRPr lang="en-US" sz="1300" dirty="0"/>
+          </a:p>
+          <a:p>
+            <a:pPr algn="ctr" indent="0" marL="0">
+              <a:buNone/>
+            </a:pPr>
+            <a:r>
+              <a:rPr lang="en-US" sz="1300" dirty="0">
+                <a:solidFill>
+                  <a:schemeClr val="tx1"/>
+                </a:solidFill>
+              </a:rPr>
+              <a:t>一層,不先升維</a:t>
             </a:r>
             <a:endParaRPr lang="en-US" sz="1300" dirty="0"/>
           </a:p>
@@ -5983,7 +5997,7 @@
                   <a:schemeClr val="bg1"/>
                 </a:solidFill>
               </a:rPr>
-              <a:t>4 維</a:t>
+              <a:t>16 維</a:t>
             </a:r>
             <a:endParaRPr lang="en-US" sz="1300" dirty="0"/>
           </a:p>
@@ -6295,7 +6309,7 @@
                   <a:schemeClr val="accent5"/>
                 </a:solidFill>
               </a:rPr>
-              <a:t>AE 解碼器 4 → 8 → 58 → 29,把輸入重建回來(MSE,訓練 60 輪);只拿編碼後的 4 維給 OC-SVM。</a:t>
+              <a:t>AE 解碼器 16 → 29,把輸入重建回來(MSE,訓練 60 輪);只拿編碼後的 16 維給 OC-SVM。</a:t>
             </a:r>
             <a:endParaRPr lang="en-US" sz="1300" dirty="0"/>
           </a:p>
@@ -6371,7 +6385,7 @@
                   <a:schemeClr val="tx2"/>
                 </a:solidFill>
               </a:rPr>
-              <a:t>AE 與 OC-SVM 的結構、潛在維度 4、nu 0.1 都直接沿用 method_kline 原系統</a:t>
+              <a:t>編碼器只有一層 29 → 16(973 個參數);原系統 29 → 58 → 8 → 4 有 4,637 個,兩者結果相同;OC-SVM 的 rbf、nu 0.1 沿用原系統</a:t>
             </a:r>
             <a:endParaRPr lang="en-US" sz="1500" dirty="0"/>
           </a:p>
@@ -6858,7 +6872,7 @@
                           <a:ea typeface="Microsoft JhengHei" pitchFamily="34" charset="-122"/>
                           <a:cs typeface="Microsoft JhengHei" pitchFamily="34" charset="-120"/>
                         </a:rPr>
-                        <a:t>1,267</a:t>
+                        <a:t>1,222</a:t>
                       </a:r>
                       <a:endParaRPr lang="en-US" sz="1400" dirty="0">
                         <a:latin typeface="Microsoft JhengHei" charset="0"/>
@@ -6879,7 +6893,7 @@
                           <a:ea typeface="Microsoft JhengHei" pitchFamily="34" charset="-122"/>
                           <a:cs typeface="Microsoft JhengHei" pitchFamily="34" charset="-120"/>
                         </a:rPr>
-                        <a:t>82.7%</a:t>
+                        <a:t>79.8%</a:t>
                       </a:r>
                       <a:endParaRPr lang="en-US" sz="1400" dirty="0">
                         <a:latin typeface="Microsoft JhengHei" charset="0"/>
@@ -6947,7 +6961,7 @@
                           <a:ea typeface="Microsoft JhengHei" pitchFamily="34" charset="-122"/>
                           <a:cs typeface="Microsoft JhengHei" pitchFamily="34" charset="-120"/>
                         </a:rPr>
-                        <a:t>265</a:t>
+                        <a:t>310</a:t>
                       </a:r>
                       <a:endParaRPr lang="en-US" sz="1400" dirty="0">
                         <a:latin typeface="Microsoft JhengHei" charset="0"/>
@@ -6968,7 +6982,7 @@
                           <a:ea typeface="Microsoft JhengHei" pitchFamily="34" charset="-122"/>
                           <a:cs typeface="Microsoft JhengHei" pitchFamily="34" charset="-120"/>
                         </a:rPr>
-                        <a:t>17.3%</a:t>
+                        <a:t>20.2%</a:t>
                       </a:r>
                       <a:endParaRPr lang="en-US" sz="1400" dirty="0">
                         <a:latin typeface="Microsoft JhengHei" charset="0"/>
@@ -7192,7 +7206,7 @@
                           <a:ea typeface="Microsoft JhengHei" pitchFamily="34" charset="-122"/>
                           <a:cs typeface="Microsoft JhengHei" pitchFamily="34" charset="-120"/>
                         </a:rPr>
-                        <a:t>2,782</a:t>
+                        <a:t>2,646</a:t>
                       </a:r>
                       <a:endParaRPr lang="en-US" sz="1400" dirty="0">
                         <a:latin typeface="Microsoft JhengHei" charset="0"/>
@@ -7213,7 +7227,7 @@
                           <a:ea typeface="Microsoft JhengHei" pitchFamily="34" charset="-122"/>
                           <a:cs typeface="Microsoft JhengHei" pitchFamily="34" charset="-120"/>
                         </a:rPr>
-                        <a:t>16.2%</a:t>
+                        <a:t>15.4%</a:t>
                       </a:r>
                       <a:endParaRPr lang="en-US" sz="1400" dirty="0">
                         <a:latin typeface="Microsoft JhengHei" charset="0"/>
@@ -7281,7 +7295,7 @@
                           <a:ea typeface="Microsoft JhengHei" pitchFamily="34" charset="-122"/>
                           <a:cs typeface="Microsoft JhengHei" pitchFamily="34" charset="-120"/>
                         </a:rPr>
-                        <a:t>11,122</a:t>
+                        <a:t>11,414</a:t>
                       </a:r>
                       <a:endParaRPr lang="en-US" sz="1400" dirty="0">
                         <a:latin typeface="Microsoft JhengHei" charset="0"/>
@@ -7302,7 +7316,7 @@
                           <a:ea typeface="Microsoft JhengHei" pitchFamily="34" charset="-122"/>
                           <a:cs typeface="Microsoft JhengHei" pitchFamily="34" charset="-120"/>
                         </a:rPr>
-                        <a:t>64.7%</a:t>
+                        <a:t>66.4%</a:t>
                       </a:r>
                       <a:endParaRPr lang="en-US" sz="1400" dirty="0">
                         <a:latin typeface="Microsoft JhengHei" charset="0"/>
@@ -7370,7 +7384,7 @@
                           <a:ea typeface="Microsoft JhengHei" pitchFamily="34" charset="-122"/>
                           <a:cs typeface="Microsoft JhengHei" pitchFamily="34" charset="-120"/>
                         </a:rPr>
-                        <a:t>3,283</a:t>
+                        <a:t>3,127</a:t>
                       </a:r>
                       <a:endParaRPr lang="en-US" sz="1400" dirty="0">
                         <a:latin typeface="Microsoft JhengHei" charset="0"/>
@@ -7391,7 +7405,7 @@
                           <a:ea typeface="Microsoft JhengHei" pitchFamily="34" charset="-122"/>
                           <a:cs typeface="Microsoft JhengHei" pitchFamily="34" charset="-120"/>
                         </a:rPr>
-                        <a:t>19.1%</a:t>
+                        <a:t>18.2%</a:t>
                       </a:r>
                       <a:endParaRPr lang="en-US" sz="1400" dirty="0">
                         <a:latin typeface="Microsoft JhengHei" charset="0"/>
@@ -7615,7 +7629,7 @@
                           <a:ea typeface="Microsoft JhengHei" pitchFamily="34" charset="-122"/>
                           <a:cs typeface="Microsoft JhengHei" pitchFamily="34" charset="-120"/>
                         </a:rPr>
-                        <a:t>366</a:t>
+                        <a:t>432</a:t>
                       </a:r>
                       <a:endParaRPr lang="en-US" sz="1400" dirty="0">
                         <a:latin typeface="Microsoft JhengHei" charset="0"/>
@@ -7636,7 +7650,7 @@
                           <a:ea typeface="Microsoft JhengHei" pitchFamily="34" charset="-122"/>
                           <a:cs typeface="Microsoft JhengHei" pitchFamily="34" charset="-120"/>
                         </a:rPr>
-                        <a:t>24.9%</a:t>
+                        <a:t>29.4%</a:t>
                       </a:r>
                       <a:endParaRPr lang="en-US" sz="1400" dirty="0">
                         <a:latin typeface="Microsoft JhengHei" charset="0"/>
@@ -7704,7 +7718,7 @@
                           <a:ea typeface="Microsoft JhengHei" pitchFamily="34" charset="-122"/>
                           <a:cs typeface="Microsoft JhengHei" pitchFamily="34" charset="-120"/>
                         </a:rPr>
-                        <a:t>1,104</a:t>
+                        <a:t>1,038</a:t>
                       </a:r>
                       <a:endParaRPr lang="en-US" sz="1400" dirty="0">
                         <a:latin typeface="Microsoft JhengHei" charset="0"/>
@@ -7725,7 +7739,7 @@
                           <a:ea typeface="Microsoft JhengHei" pitchFamily="34" charset="-122"/>
                           <a:cs typeface="Microsoft JhengHei" pitchFamily="34" charset="-120"/>
                         </a:rPr>
-                        <a:t>75.1%</a:t>
+                        <a:t>70.6%</a:t>
                       </a:r>
                       <a:endParaRPr lang="en-US" sz="1400" dirty="0">
                         <a:latin typeface="Microsoft JhengHei" charset="0"/>
@@ -8703,7 +8717,7 @@
                           <a:ea typeface="Microsoft JhengHei" pitchFamily="34" charset="-122"/>
                           <a:cs typeface="Microsoft JhengHei" pitchFamily="34" charset="-120"/>
                         </a:rPr>
-                        <a:t>66.8%</a:t>
+                        <a:t>67.7%</a:t>
                       </a:r>
                       <a:endParaRPr lang="en-US" sz="1300" dirty="0">
                         <a:latin typeface="Microsoft JhengHei" charset="0"/>
@@ -8833,7 +8847,7 @@
                           <a:ea typeface="Microsoft JhengHei" pitchFamily="34" charset="-122"/>
                           <a:cs typeface="Microsoft JhengHei" pitchFamily="34" charset="-120"/>
                         </a:rPr>
-                        <a:t>94.6%</a:t>
+                        <a:t>93.9%</a:t>
                       </a:r>
                       <a:endParaRPr lang="en-US" sz="1300" dirty="0">
                         <a:latin typeface="Microsoft JhengHei" charset="0"/>
@@ -8920,7 +8934,7 @@
                   <a:schemeClr val="tx2"/>
                 </a:solidFill>
               </a:rPr>
-              <a:t>真高點 1,470 個:判對 1,104 個(75.1%),沒有一個被判成低點</a:t>
+              <a:t>真高點 1,470 個:判對 1,038 個(70.6%),沒有一個被判成低點</a:t>
             </a:r>
             <a:endParaRPr lang="en-US" sz="1500" dirty="0"/>
           </a:p>
@@ -8938,7 +8952,7 @@
                   <a:schemeClr val="tx2"/>
                 </a:solidFill>
               </a:rPr>
-              <a:t>真低點 1,532 個:判對 1,267 個(82.7%),沒有一個被判成高點</a:t>
+              <a:t>真低點 1,532 個:判對 1,222 個(79.8%),沒有一個被判成高點</a:t>
             </a:r>
             <a:endParaRPr lang="en-US" sz="1500" dirty="0"/>
           </a:p>
@@ -8956,7 +8970,7 @@
                   <a:schemeClr val="tx2"/>
                 </a:solidFill>
               </a:rPr>
-              <a:t>判非極值的 11,753 天中,11,122 天真的不是高低點(94.6%)</a:t>
+              <a:t>判非極值的 12,156 天中,11,414 天真的不是高低點(93.9%)</a:t>
             </a:r>
             <a:endParaRPr lang="en-US" sz="1500" dirty="0"/>
           </a:p>
@@ -9064,7 +9078,7 @@
                   <a:schemeClr val="tx1"/>
                 </a:solidFill>
               </a:rPr>
-              <a:t>局部準確度:挑出的候選比亂猜準 3.5–4.1 倍</a:t>
+              <a:t>局部準確度:挑出的候選比亂猜準 3.4–4.2 倍</a:t>
             </a:r>
             <a:endParaRPr lang="en-US" sz="3200" dirty="0"/>
           </a:p>
@@ -9242,7 +9256,7 @@
                   <a:schemeClr val="accent2"/>
                 </a:solidFill>
               </a:rPr>
-              <a:t>75.1% / 82.7%</a:t>
+              <a:t>70.6% / 79.8%</a:t>
             </a:r>
             <a:endParaRPr lang="en-US" sz="2800" dirty="0"/>
           </a:p>
@@ -9341,7 +9355,7 @@
                   <a:schemeClr val="accent3"/>
                 </a:solidFill>
               </a:rPr>
-              <a:t>94.6%</a:t>
+              <a:t>93.9%</a:t>
             </a:r>
             <a:endParaRPr lang="en-US" sz="2800" dirty="0"/>
           </a:p>
@@ -10009,7 +10023,7 @@
                   <a:schemeClr val="accent3"/>
                 </a:solidFill>
               </a:rPr>
-              <a:t>94.6%</a:t>
+              <a:t>93.9%</a:t>
             </a:r>
             <a:endParaRPr lang="en-US" sz="4000" dirty="0"/>
           </a:p>
@@ -10081,7 +10095,7 @@
                   <a:schemeClr val="accent6"/>
                 </a:solidFill>
               </a:rPr>
-              <a:t>11,753 天裡 11,122 天</a:t>
+              <a:t>12,156 天裡 11,414 天</a:t>
             </a:r>
             <a:endParaRPr lang="en-US" sz="1300" dirty="0"/>
           </a:p>
@@ -10131,7 +10145,7 @@
                   <a:schemeClr val="accent2"/>
                 </a:solidFill>
               </a:rPr>
-              <a:t>3.5–4.1×</a:t>
+              <a:t>3.4–4.2×</a:t>
             </a:r>
             <a:endParaRPr lang="en-US" sz="4000" dirty="0"/>
           </a:p>
@@ -10203,7 +10217,7 @@
                   <a:schemeClr val="accent6"/>
                 </a:solidFill>
               </a:rPr>
-              <a:t>高點 7.3% → 25.2%</a:t>
+              <a:t>高點 7.3% → 24.9%</a:t>
             </a:r>
             <a:endParaRPr lang="en-US" sz="1300" dirty="0"/>
           </a:p>
@@ -10217,7 +10231,7 @@
                   <a:schemeClr val="accent6"/>
                 </a:solidFill>
               </a:rPr>
-              <a:t>低點 7.6% → 31.3%</a:t>
+              <a:t>低點 7.6% → 31.6%</a:t>
             </a:r>
             <a:endParaRPr lang="en-US" sz="1300" dirty="0"/>
           </a:p>
@@ -10253,7 +10267,7 @@
                   <a:schemeClr val="accent5"/>
                 </a:solidFill>
               </a:rPr>
-              <a:t>測試期 2025-01 ~ 2026-09 · TW50 · 20,189 個股票日;模型判對 75.1% 的真高點、82.7% 的真低點</a:t>
+              <a:t>測試期 2025-01 ~ 2026-09 · TW50 · 20,189 個股票日;模型判對 70.6% 的真高點、79.8% 的真低點</a:t>
             </a:r>
             <a:endParaRPr lang="en-US" sz="1300" dirty="0"/>
           </a:p>

--- a/method_kline_peak/report/TW50_局部高低點_專題進度.pptx
+++ b/method_kline_peak/report/TW50_局部高低點_專題進度.pptx
@@ -114,26 +114,26 @@
   <p:extLst>
     <p:ext uri="{521415D9-36F7-43E2-AB2F-B90AF26B5E84}">
       <p14:sectionLst xmlns:p14="http://schemas.microsoft.com/office/powerpoint/2010/main">
-        <p14:section name="問題與資料" id="{8dd849fe-5b19-5825-be69-f4eeac6f4244}">
+        <p14:section name="問題與資料" id="{8afa6108-3547-5afe-1f23-03938dae72aa}">
           <p14:sldIdLst>
             <p14:sldId id="256"/>
             <p14:sldId id="257"/>
           </p14:sldIdLst>
         </p14:section>
-        <p14:section name="方法與計分" id="{2c4a1aa0-fb21-5cca-fcf9-356911a62653}">
+        <p14:section name="方法與計分" id="{cd74f4b9-effa-e71b-4808-d62fa66ec366}">
           <p14:sldIdLst>
             <p14:sldId id="258"/>
             <p14:sldId id="259"/>
           </p14:sldIdLst>
         </p14:section>
-        <p14:section name="結果" id="{cd6f79ec-546c-d2cd-f05a-91ccbf839389}">
+        <p14:section name="結果" id="{82dd5203-09d4-d71d-eef9-e983178ecfef}">
           <p14:sldIdLst>
             <p14:sldId id="260"/>
             <p14:sldId id="261"/>
             <p14:sldId id="262"/>
           </p14:sldIdLst>
         </p14:section>
-        <p14:section name="總結" id="{6b244d4a-37eb-a262-6e22-3fea924d5896}">
+        <p14:section name="總結" id="{310b7bf4-7de3-f253-fbee-7913481f5df8}">
           <p14:sldIdLst>
             <p14:sldId id="263"/>
           </p14:sldIdLst>
@@ -8390,7 +8390,7 @@
                           <a:ea typeface="Microsoft JhengHei" pitchFamily="34" charset="-122"/>
                           <a:cs typeface="Microsoft JhengHei" pitchFamily="34" charset="-120"/>
                         </a:rPr>
-                        <a:t>規則基準(論文)</a:t>
+                        <a:t>規則基準</a:t>
                       </a:r>
                       <a:endParaRPr lang="en-US" sz="1300" dirty="0">
                         <a:latin typeface="Microsoft JhengHei" charset="0"/>

--- a/method_kline_peak/report/TW50_局部高低點_專題進度.pptx
+++ b/method_kline_peak/report/TW50_局部高低點_專題進度.pptx
@@ -114,26 +114,26 @@
   <p:extLst>
     <p:ext uri="{521415D9-36F7-43E2-AB2F-B90AF26B5E84}">
       <p14:sectionLst xmlns:p14="http://schemas.microsoft.com/office/powerpoint/2010/main">
-        <p14:section name="問題與資料" id="{8afa6108-3547-5afe-1f23-03938dae72aa}">
+        <p14:section name="問題與資料" id="{1f8cd920-9e09-7292-4e01-d6978bdd4cbe}">
           <p14:sldIdLst>
             <p14:sldId id="256"/>
             <p14:sldId id="257"/>
           </p14:sldIdLst>
         </p14:section>
-        <p14:section name="方法與計分" id="{cd74f4b9-effa-e71b-4808-d62fa66ec366}">
+        <p14:section name="方法與計分" id="{21c2f161-5beb-3b83-f527-3e874ef0b1b9}">
           <p14:sldIdLst>
             <p14:sldId id="258"/>
             <p14:sldId id="259"/>
           </p14:sldIdLst>
         </p14:section>
-        <p14:section name="結果" id="{82dd5203-09d4-d71d-eef9-e983178ecfef}">
+        <p14:section name="結果" id="{6233c603-c9c7-4de8-bec4-9c01498f17b2}">
           <p14:sldIdLst>
             <p14:sldId id="260"/>
             <p14:sldId id="261"/>
             <p14:sldId id="262"/>
           </p14:sldIdLst>
         </p14:section>
-        <p14:section name="總結" id="{310b7bf4-7de3-f253-fbee-7913481f5df8}">
+        <p14:section name="總結" id="{a00ee8c0-e4aa-cb94-1e8d-eb73a4264333}">
           <p14:sldIdLst>
             <p14:sldId id="263"/>
           </p14:sldIdLst>
@@ -1509,7 +1509,7 @@
           <a:p>
             <a:r>
               <a:rPr lang="en-US" dirty="0"/>
-              <a:t>流程分四步。關鍵在第二步的規則:真正的 11 日高點,一定也是近 6 天的高點,所以規則先把所有可能的候選挑出來,保證不漏。第三步才是我們的 AE 加 OC-SVM,它要從候選裡刪掉那些之後 5 天又被超越的假候選。</a:t>
+              <a:t>這頁說明我們丟進模型的是什麼。一個樣本是 11 個交易日,第 6 天是 t。模型只看前 6 天,也就是 t-5 到 t,這些在 t 日收盤時都已經知道;後 5 天只用來貼標籤,模型看不到。每天取 5 個特徵:開、高、低、收都除以 t 日收盤,量除以 10 日均量。t 日收盤除以自己永遠是 1,所以拿掉,總共 29 個數字。表上是台積電 2026-02-25 的實際數字:前 5 天的價格都在 t 日收盤下方,代表一路往上收到 t 日。訓練只用規則挑出的候選日,高點和低點各訓練一組模型。</a:t>
             </a:r>
             <a:endParaRPr lang="en-US" dirty="0"/>
           </a:p>
@@ -4711,7 +4711,7 @@
                   <a:schemeClr val="tx1"/>
                 </a:solidFill>
               </a:rPr>
-              <a:t>方法流程:規則挑候選,AE + OC-SVM 篩候選</a:t>
+              <a:t>訓練輸入:11 天中的前 6 天,每天 5 個特徵</a:t>
             </a:r>
             <a:endParaRPr lang="en-US" sz="3200" dirty="0"/>
           </a:p>
@@ -4719,14 +4719,4273 @@
       </p:sp>
       <p:sp>
         <p:nvSpPr>
-          <p:cNvPr id="3" name="step-1"/>
+          <p:cNvPr id="3" name="day-1"/>
           <p:cNvSpPr/>
           <p:nvPr/>
         </p:nvSpPr>
         <p:spPr>
           <a:xfrm>
-            <a:off x="548640" y="1554480"/>
-            <a:ext cx="2560320" cy="2926080"/>
+            <a:off x="548640" y="1325880"/>
+            <a:ext cx="914400" cy="731520"/>
+          </a:xfrm>
+          <a:prstGeom prst="roundRect">
+            <a:avLst>
+              <a:gd name="adj" fmla="val 7500"/>
+            </a:avLst>
+          </a:prstGeom>
+          <a:solidFill>
+            <a:schemeClr val="tx1"/>
+          </a:solidFill>
+          <a:ln w="12700">
+            <a:solidFill>
+              <a:schemeClr val="tx1"/>
+            </a:solidFill>
+            <a:prstDash val="solid"/>
+          </a:ln>
+        </p:spPr>
+      </p:sp>
+      <p:sp>
+        <p:nvSpPr>
+          <p:cNvPr id="4" name="Text 2"/>
+          <p:cNvSpPr txBox="1"/>
+          <p:nvPr/>
+        </p:nvSpPr>
+        <p:spPr>
+          <a:xfrm>
+            <a:off x="548640" y="1325880"/>
+            <a:ext cx="914400" cy="731520"/>
+          </a:xfrm>
+          <a:prstGeom prst="rect">
+            <a:avLst/>
+          </a:prstGeom>
+          <a:noFill/>
+          <a:ln/>
+        </p:spPr>
+        <p:txBody>
+          <a:bodyPr wrap="square" lIns="0" tIns="0" rIns="0" bIns="0" rtlCol="0" anchor="ctr"/>
+          <a:lstStyle/>
+          <a:p>
+            <a:pPr algn="ctr" indent="0" marL="0">
+              <a:buNone/>
+            </a:pPr>
+            <a:r>
+              <a:rPr lang="en-US" sz="1200" dirty="0">
+                <a:solidFill>
+                  <a:schemeClr val="bg1"/>
+                </a:solidFill>
+              </a:rPr>
+              <a:t>第 1 天</a:t>
+            </a:r>
+            <a:endParaRPr lang="en-US" sz="1500" dirty="0"/>
+          </a:p>
+          <a:p>
+            <a:pPr algn="ctr" indent="0" marL="0">
+              <a:buNone/>
+            </a:pPr>
+            <a:r>
+              <a:rPr lang="en-US" sz="1600" b="1" dirty="0">
+                <a:solidFill>
+                  <a:schemeClr val="bg1"/>
+                </a:solidFill>
+              </a:rPr>
+              <a:t>t-5</a:t>
+            </a:r>
+            <a:endParaRPr lang="en-US" sz="1500" dirty="0"/>
+          </a:p>
+        </p:txBody>
+      </p:sp>
+      <p:sp>
+        <p:nvSpPr>
+          <p:cNvPr id="5" name="day-2"/>
+          <p:cNvSpPr/>
+          <p:nvPr/>
+        </p:nvSpPr>
+        <p:spPr>
+          <a:xfrm>
+            <a:off x="1563624" y="1325880"/>
+            <a:ext cx="914400" cy="731520"/>
+          </a:xfrm>
+          <a:prstGeom prst="roundRect">
+            <a:avLst>
+              <a:gd name="adj" fmla="val 7500"/>
+            </a:avLst>
+          </a:prstGeom>
+          <a:solidFill>
+            <a:schemeClr val="tx1"/>
+          </a:solidFill>
+          <a:ln w="12700">
+            <a:solidFill>
+              <a:schemeClr val="tx1"/>
+            </a:solidFill>
+            <a:prstDash val="solid"/>
+          </a:ln>
+        </p:spPr>
+      </p:sp>
+      <p:sp>
+        <p:nvSpPr>
+          <p:cNvPr id="6" name="Text 4"/>
+          <p:cNvSpPr txBox="1"/>
+          <p:nvPr/>
+        </p:nvSpPr>
+        <p:spPr>
+          <a:xfrm>
+            <a:off x="1563624" y="1325880"/>
+            <a:ext cx="914400" cy="731520"/>
+          </a:xfrm>
+          <a:prstGeom prst="rect">
+            <a:avLst/>
+          </a:prstGeom>
+          <a:noFill/>
+          <a:ln/>
+        </p:spPr>
+        <p:txBody>
+          <a:bodyPr wrap="square" lIns="0" tIns="0" rIns="0" bIns="0" rtlCol="0" anchor="ctr"/>
+          <a:lstStyle/>
+          <a:p>
+            <a:pPr algn="ctr" indent="0" marL="0">
+              <a:buNone/>
+            </a:pPr>
+            <a:r>
+              <a:rPr lang="en-US" sz="1200" dirty="0">
+                <a:solidFill>
+                  <a:schemeClr val="bg1"/>
+                </a:solidFill>
+              </a:rPr>
+              <a:t>第 2 天</a:t>
+            </a:r>
+            <a:endParaRPr lang="en-US" sz="1500" dirty="0"/>
+          </a:p>
+          <a:p>
+            <a:pPr algn="ctr" indent="0" marL="0">
+              <a:buNone/>
+            </a:pPr>
+            <a:r>
+              <a:rPr lang="en-US" sz="1600" b="1" dirty="0">
+                <a:solidFill>
+                  <a:schemeClr val="bg1"/>
+                </a:solidFill>
+              </a:rPr>
+              <a:t>t-4</a:t>
+            </a:r>
+            <a:endParaRPr lang="en-US" sz="1500" dirty="0"/>
+          </a:p>
+        </p:txBody>
+      </p:sp>
+      <p:sp>
+        <p:nvSpPr>
+          <p:cNvPr id="7" name="day-3"/>
+          <p:cNvSpPr/>
+          <p:nvPr/>
+        </p:nvSpPr>
+        <p:spPr>
+          <a:xfrm>
+            <a:off x="2578608" y="1325880"/>
+            <a:ext cx="914400" cy="731520"/>
+          </a:xfrm>
+          <a:prstGeom prst="roundRect">
+            <a:avLst>
+              <a:gd name="adj" fmla="val 7500"/>
+            </a:avLst>
+          </a:prstGeom>
+          <a:solidFill>
+            <a:schemeClr val="tx1"/>
+          </a:solidFill>
+          <a:ln w="12700">
+            <a:solidFill>
+              <a:schemeClr val="tx1"/>
+            </a:solidFill>
+            <a:prstDash val="solid"/>
+          </a:ln>
+        </p:spPr>
+      </p:sp>
+      <p:sp>
+        <p:nvSpPr>
+          <p:cNvPr id="8" name="Text 6"/>
+          <p:cNvSpPr txBox="1"/>
+          <p:nvPr/>
+        </p:nvSpPr>
+        <p:spPr>
+          <a:xfrm>
+            <a:off x="2578608" y="1325880"/>
+            <a:ext cx="914400" cy="731520"/>
+          </a:xfrm>
+          <a:prstGeom prst="rect">
+            <a:avLst/>
+          </a:prstGeom>
+          <a:noFill/>
+          <a:ln/>
+        </p:spPr>
+        <p:txBody>
+          <a:bodyPr wrap="square" lIns="0" tIns="0" rIns="0" bIns="0" rtlCol="0" anchor="ctr"/>
+          <a:lstStyle/>
+          <a:p>
+            <a:pPr algn="ctr" indent="0" marL="0">
+              <a:buNone/>
+            </a:pPr>
+            <a:r>
+              <a:rPr lang="en-US" sz="1200" dirty="0">
+                <a:solidFill>
+                  <a:schemeClr val="bg1"/>
+                </a:solidFill>
+              </a:rPr>
+              <a:t>第 3 天</a:t>
+            </a:r>
+            <a:endParaRPr lang="en-US" sz="1500" dirty="0"/>
+          </a:p>
+          <a:p>
+            <a:pPr algn="ctr" indent="0" marL="0">
+              <a:buNone/>
+            </a:pPr>
+            <a:r>
+              <a:rPr lang="en-US" sz="1600" b="1" dirty="0">
+                <a:solidFill>
+                  <a:schemeClr val="bg1"/>
+                </a:solidFill>
+              </a:rPr>
+              <a:t>t-3</a:t>
+            </a:r>
+            <a:endParaRPr lang="en-US" sz="1500" dirty="0"/>
+          </a:p>
+        </p:txBody>
+      </p:sp>
+      <p:sp>
+        <p:nvSpPr>
+          <p:cNvPr id="9" name="day-4"/>
+          <p:cNvSpPr/>
+          <p:nvPr/>
+        </p:nvSpPr>
+        <p:spPr>
+          <a:xfrm>
+            <a:off x="3593592" y="1325880"/>
+            <a:ext cx="914400" cy="731520"/>
+          </a:xfrm>
+          <a:prstGeom prst="roundRect">
+            <a:avLst>
+              <a:gd name="adj" fmla="val 7500"/>
+            </a:avLst>
+          </a:prstGeom>
+          <a:solidFill>
+            <a:schemeClr val="tx1"/>
+          </a:solidFill>
+          <a:ln w="12700">
+            <a:solidFill>
+              <a:schemeClr val="tx1"/>
+            </a:solidFill>
+            <a:prstDash val="solid"/>
+          </a:ln>
+        </p:spPr>
+      </p:sp>
+      <p:sp>
+        <p:nvSpPr>
+          <p:cNvPr id="10" name="Text 8"/>
+          <p:cNvSpPr txBox="1"/>
+          <p:nvPr/>
+        </p:nvSpPr>
+        <p:spPr>
+          <a:xfrm>
+            <a:off x="3593592" y="1325880"/>
+            <a:ext cx="914400" cy="731520"/>
+          </a:xfrm>
+          <a:prstGeom prst="rect">
+            <a:avLst/>
+          </a:prstGeom>
+          <a:noFill/>
+          <a:ln/>
+        </p:spPr>
+        <p:txBody>
+          <a:bodyPr wrap="square" lIns="0" tIns="0" rIns="0" bIns="0" rtlCol="0" anchor="ctr"/>
+          <a:lstStyle/>
+          <a:p>
+            <a:pPr algn="ctr" indent="0" marL="0">
+              <a:buNone/>
+            </a:pPr>
+            <a:r>
+              <a:rPr lang="en-US" sz="1200" dirty="0">
+                <a:solidFill>
+                  <a:schemeClr val="bg1"/>
+                </a:solidFill>
+              </a:rPr>
+              <a:t>第 4 天</a:t>
+            </a:r>
+            <a:endParaRPr lang="en-US" sz="1500" dirty="0"/>
+          </a:p>
+          <a:p>
+            <a:pPr algn="ctr" indent="0" marL="0">
+              <a:buNone/>
+            </a:pPr>
+            <a:r>
+              <a:rPr lang="en-US" sz="1600" b="1" dirty="0">
+                <a:solidFill>
+                  <a:schemeClr val="bg1"/>
+                </a:solidFill>
+              </a:rPr>
+              <a:t>t-2</a:t>
+            </a:r>
+            <a:endParaRPr lang="en-US" sz="1500" dirty="0"/>
+          </a:p>
+        </p:txBody>
+      </p:sp>
+      <p:sp>
+        <p:nvSpPr>
+          <p:cNvPr id="11" name="day-5"/>
+          <p:cNvSpPr/>
+          <p:nvPr/>
+        </p:nvSpPr>
+        <p:spPr>
+          <a:xfrm>
+            <a:off x="4608576" y="1325880"/>
+            <a:ext cx="914400" cy="731520"/>
+          </a:xfrm>
+          <a:prstGeom prst="roundRect">
+            <a:avLst>
+              <a:gd name="adj" fmla="val 7500"/>
+            </a:avLst>
+          </a:prstGeom>
+          <a:solidFill>
+            <a:schemeClr val="tx1"/>
+          </a:solidFill>
+          <a:ln w="12700">
+            <a:solidFill>
+              <a:schemeClr val="tx1"/>
+            </a:solidFill>
+            <a:prstDash val="solid"/>
+          </a:ln>
+        </p:spPr>
+      </p:sp>
+      <p:sp>
+        <p:nvSpPr>
+          <p:cNvPr id="12" name="Text 10"/>
+          <p:cNvSpPr txBox="1"/>
+          <p:nvPr/>
+        </p:nvSpPr>
+        <p:spPr>
+          <a:xfrm>
+            <a:off x="4608576" y="1325880"/>
+            <a:ext cx="914400" cy="731520"/>
+          </a:xfrm>
+          <a:prstGeom prst="rect">
+            <a:avLst/>
+          </a:prstGeom>
+          <a:noFill/>
+          <a:ln/>
+        </p:spPr>
+        <p:txBody>
+          <a:bodyPr wrap="square" lIns="0" tIns="0" rIns="0" bIns="0" rtlCol="0" anchor="ctr"/>
+          <a:lstStyle/>
+          <a:p>
+            <a:pPr algn="ctr" indent="0" marL="0">
+              <a:buNone/>
+            </a:pPr>
+            <a:r>
+              <a:rPr lang="en-US" sz="1200" dirty="0">
+                <a:solidFill>
+                  <a:schemeClr val="bg1"/>
+                </a:solidFill>
+              </a:rPr>
+              <a:t>第 5 天</a:t>
+            </a:r>
+            <a:endParaRPr lang="en-US" sz="1500" dirty="0"/>
+          </a:p>
+          <a:p>
+            <a:pPr algn="ctr" indent="0" marL="0">
+              <a:buNone/>
+            </a:pPr>
+            <a:r>
+              <a:rPr lang="en-US" sz="1600" b="1" dirty="0">
+                <a:solidFill>
+                  <a:schemeClr val="bg1"/>
+                </a:solidFill>
+              </a:rPr>
+              <a:t>t-1</a:t>
+            </a:r>
+            <a:endParaRPr lang="en-US" sz="1500" dirty="0"/>
+          </a:p>
+        </p:txBody>
+      </p:sp>
+      <p:sp>
+        <p:nvSpPr>
+          <p:cNvPr id="13" name="day-6"/>
+          <p:cNvSpPr/>
+          <p:nvPr/>
+        </p:nvSpPr>
+        <p:spPr>
+          <a:xfrm>
+            <a:off x="5623560" y="1325880"/>
+            <a:ext cx="914400" cy="731520"/>
+          </a:xfrm>
+          <a:prstGeom prst="roundRect">
+            <a:avLst>
+              <a:gd name="adj" fmla="val 7500"/>
+            </a:avLst>
+          </a:prstGeom>
+          <a:solidFill>
+            <a:schemeClr val="accent1"/>
+          </a:solidFill>
+          <a:ln w="12700">
+            <a:solidFill>
+              <a:schemeClr val="accent1"/>
+            </a:solidFill>
+            <a:prstDash val="solid"/>
+          </a:ln>
+        </p:spPr>
+      </p:sp>
+      <p:sp>
+        <p:nvSpPr>
+          <p:cNvPr id="14" name="Text 12"/>
+          <p:cNvSpPr txBox="1"/>
+          <p:nvPr/>
+        </p:nvSpPr>
+        <p:spPr>
+          <a:xfrm>
+            <a:off x="5623560" y="1325880"/>
+            <a:ext cx="914400" cy="731520"/>
+          </a:xfrm>
+          <a:prstGeom prst="rect">
+            <a:avLst/>
+          </a:prstGeom>
+          <a:noFill/>
+          <a:ln/>
+        </p:spPr>
+        <p:txBody>
+          <a:bodyPr wrap="square" lIns="0" tIns="0" rIns="0" bIns="0" rtlCol="0" anchor="ctr"/>
+          <a:lstStyle/>
+          <a:p>
+            <a:pPr algn="ctr" indent="0" marL="0">
+              <a:buNone/>
+            </a:pPr>
+            <a:r>
+              <a:rPr lang="en-US" sz="1200" dirty="0">
+                <a:solidFill>
+                  <a:schemeClr val="bg1"/>
+                </a:solidFill>
+              </a:rPr>
+              <a:t>第 6 天</a:t>
+            </a:r>
+            <a:endParaRPr lang="en-US" sz="1500" dirty="0"/>
+          </a:p>
+          <a:p>
+            <a:pPr algn="ctr" indent="0" marL="0">
+              <a:buNone/>
+            </a:pPr>
+            <a:r>
+              <a:rPr lang="en-US" sz="1600" b="1" dirty="0">
+                <a:solidFill>
+                  <a:schemeClr val="bg1"/>
+                </a:solidFill>
+              </a:rPr>
+              <a:t>t</a:t>
+            </a:r>
+            <a:endParaRPr lang="en-US" sz="1500" dirty="0"/>
+          </a:p>
+        </p:txBody>
+      </p:sp>
+      <p:sp>
+        <p:nvSpPr>
+          <p:cNvPr id="15" name="day-7"/>
+          <p:cNvSpPr/>
+          <p:nvPr/>
+        </p:nvSpPr>
+        <p:spPr>
+          <a:xfrm>
+            <a:off x="6638544" y="1325880"/>
+            <a:ext cx="914400" cy="731520"/>
+          </a:xfrm>
+          <a:prstGeom prst="roundRect">
+            <a:avLst>
+              <a:gd name="adj" fmla="val 7500"/>
+            </a:avLst>
+          </a:prstGeom>
+          <a:solidFill>
+            <a:schemeClr val="bg2"/>
+          </a:solidFill>
+          <a:ln w="12700">
+            <a:solidFill>
+              <a:schemeClr val="bg2"/>
+            </a:solidFill>
+            <a:prstDash val="solid"/>
+          </a:ln>
+        </p:spPr>
+      </p:sp>
+      <p:sp>
+        <p:nvSpPr>
+          <p:cNvPr id="16" name="Text 14"/>
+          <p:cNvSpPr txBox="1"/>
+          <p:nvPr/>
+        </p:nvSpPr>
+        <p:spPr>
+          <a:xfrm>
+            <a:off x="6638544" y="1325880"/>
+            <a:ext cx="914400" cy="731520"/>
+          </a:xfrm>
+          <a:prstGeom prst="rect">
+            <a:avLst/>
+          </a:prstGeom>
+          <a:noFill/>
+          <a:ln/>
+        </p:spPr>
+        <p:txBody>
+          <a:bodyPr wrap="square" lIns="0" tIns="0" rIns="0" bIns="0" rtlCol="0" anchor="ctr"/>
+          <a:lstStyle/>
+          <a:p>
+            <a:pPr algn="ctr" indent="0" marL="0">
+              <a:buNone/>
+            </a:pPr>
+            <a:r>
+              <a:rPr lang="en-US" sz="1200" dirty="0">
+                <a:solidFill>
+                  <a:schemeClr val="accent5"/>
+                </a:solidFill>
+              </a:rPr>
+              <a:t>第 7 天</a:t>
+            </a:r>
+            <a:endParaRPr lang="en-US" sz="1500" dirty="0"/>
+          </a:p>
+          <a:p>
+            <a:pPr algn="ctr" indent="0" marL="0">
+              <a:buNone/>
+            </a:pPr>
+            <a:r>
+              <a:rPr lang="en-US" sz="1600" b="1" dirty="0">
+                <a:solidFill>
+                  <a:schemeClr val="accent5"/>
+                </a:solidFill>
+              </a:rPr>
+              <a:t>t+1</a:t>
+            </a:r>
+            <a:endParaRPr lang="en-US" sz="1500" dirty="0"/>
+          </a:p>
+        </p:txBody>
+      </p:sp>
+      <p:sp>
+        <p:nvSpPr>
+          <p:cNvPr id="17" name="day-8"/>
+          <p:cNvSpPr/>
+          <p:nvPr/>
+        </p:nvSpPr>
+        <p:spPr>
+          <a:xfrm>
+            <a:off x="7653528" y="1325880"/>
+            <a:ext cx="914400" cy="731520"/>
+          </a:xfrm>
+          <a:prstGeom prst="roundRect">
+            <a:avLst>
+              <a:gd name="adj" fmla="val 7500"/>
+            </a:avLst>
+          </a:prstGeom>
+          <a:solidFill>
+            <a:schemeClr val="bg2"/>
+          </a:solidFill>
+          <a:ln w="12700">
+            <a:solidFill>
+              <a:schemeClr val="bg2"/>
+            </a:solidFill>
+            <a:prstDash val="solid"/>
+          </a:ln>
+        </p:spPr>
+      </p:sp>
+      <p:sp>
+        <p:nvSpPr>
+          <p:cNvPr id="18" name="Text 16"/>
+          <p:cNvSpPr txBox="1"/>
+          <p:nvPr/>
+        </p:nvSpPr>
+        <p:spPr>
+          <a:xfrm>
+            <a:off x="7653528" y="1325880"/>
+            <a:ext cx="914400" cy="731520"/>
+          </a:xfrm>
+          <a:prstGeom prst="rect">
+            <a:avLst/>
+          </a:prstGeom>
+          <a:noFill/>
+          <a:ln/>
+        </p:spPr>
+        <p:txBody>
+          <a:bodyPr wrap="square" lIns="0" tIns="0" rIns="0" bIns="0" rtlCol="0" anchor="ctr"/>
+          <a:lstStyle/>
+          <a:p>
+            <a:pPr algn="ctr" indent="0" marL="0">
+              <a:buNone/>
+            </a:pPr>
+            <a:r>
+              <a:rPr lang="en-US" sz="1200" dirty="0">
+                <a:solidFill>
+                  <a:schemeClr val="accent5"/>
+                </a:solidFill>
+              </a:rPr>
+              <a:t>第 8 天</a:t>
+            </a:r>
+            <a:endParaRPr lang="en-US" sz="1500" dirty="0"/>
+          </a:p>
+          <a:p>
+            <a:pPr algn="ctr" indent="0" marL="0">
+              <a:buNone/>
+            </a:pPr>
+            <a:r>
+              <a:rPr lang="en-US" sz="1600" b="1" dirty="0">
+                <a:solidFill>
+                  <a:schemeClr val="accent5"/>
+                </a:solidFill>
+              </a:rPr>
+              <a:t>t+2</a:t>
+            </a:r>
+            <a:endParaRPr lang="en-US" sz="1500" dirty="0"/>
+          </a:p>
+        </p:txBody>
+      </p:sp>
+      <p:sp>
+        <p:nvSpPr>
+          <p:cNvPr id="19" name="day-9"/>
+          <p:cNvSpPr/>
+          <p:nvPr/>
+        </p:nvSpPr>
+        <p:spPr>
+          <a:xfrm>
+            <a:off x="8668512" y="1325880"/>
+            <a:ext cx="914400" cy="731520"/>
+          </a:xfrm>
+          <a:prstGeom prst="roundRect">
+            <a:avLst>
+              <a:gd name="adj" fmla="val 7500"/>
+            </a:avLst>
+          </a:prstGeom>
+          <a:solidFill>
+            <a:schemeClr val="bg2"/>
+          </a:solidFill>
+          <a:ln w="12700">
+            <a:solidFill>
+              <a:schemeClr val="bg2"/>
+            </a:solidFill>
+            <a:prstDash val="solid"/>
+          </a:ln>
+        </p:spPr>
+      </p:sp>
+      <p:sp>
+        <p:nvSpPr>
+          <p:cNvPr id="20" name="Text 18"/>
+          <p:cNvSpPr txBox="1"/>
+          <p:nvPr/>
+        </p:nvSpPr>
+        <p:spPr>
+          <a:xfrm>
+            <a:off x="8668512" y="1325880"/>
+            <a:ext cx="914400" cy="731520"/>
+          </a:xfrm>
+          <a:prstGeom prst="rect">
+            <a:avLst/>
+          </a:prstGeom>
+          <a:noFill/>
+          <a:ln/>
+        </p:spPr>
+        <p:txBody>
+          <a:bodyPr wrap="square" lIns="0" tIns="0" rIns="0" bIns="0" rtlCol="0" anchor="ctr"/>
+          <a:lstStyle/>
+          <a:p>
+            <a:pPr algn="ctr" indent="0" marL="0">
+              <a:buNone/>
+            </a:pPr>
+            <a:r>
+              <a:rPr lang="en-US" sz="1200" dirty="0">
+                <a:solidFill>
+                  <a:schemeClr val="accent5"/>
+                </a:solidFill>
+              </a:rPr>
+              <a:t>第 9 天</a:t>
+            </a:r>
+            <a:endParaRPr lang="en-US" sz="1500" dirty="0"/>
+          </a:p>
+          <a:p>
+            <a:pPr algn="ctr" indent="0" marL="0">
+              <a:buNone/>
+            </a:pPr>
+            <a:r>
+              <a:rPr lang="en-US" sz="1600" b="1" dirty="0">
+                <a:solidFill>
+                  <a:schemeClr val="accent5"/>
+                </a:solidFill>
+              </a:rPr>
+              <a:t>t+3</a:t>
+            </a:r>
+            <a:endParaRPr lang="en-US" sz="1500" dirty="0"/>
+          </a:p>
+        </p:txBody>
+      </p:sp>
+      <p:sp>
+        <p:nvSpPr>
+          <p:cNvPr id="21" name="day-10"/>
+          <p:cNvSpPr/>
+          <p:nvPr/>
+        </p:nvSpPr>
+        <p:spPr>
+          <a:xfrm>
+            <a:off x="9683496" y="1325880"/>
+            <a:ext cx="914400" cy="731520"/>
+          </a:xfrm>
+          <a:prstGeom prst="roundRect">
+            <a:avLst>
+              <a:gd name="adj" fmla="val 7500"/>
+            </a:avLst>
+          </a:prstGeom>
+          <a:solidFill>
+            <a:schemeClr val="bg2"/>
+          </a:solidFill>
+          <a:ln w="12700">
+            <a:solidFill>
+              <a:schemeClr val="bg2"/>
+            </a:solidFill>
+            <a:prstDash val="solid"/>
+          </a:ln>
+        </p:spPr>
+      </p:sp>
+      <p:sp>
+        <p:nvSpPr>
+          <p:cNvPr id="22" name="Text 20"/>
+          <p:cNvSpPr txBox="1"/>
+          <p:nvPr/>
+        </p:nvSpPr>
+        <p:spPr>
+          <a:xfrm>
+            <a:off x="9683496" y="1325880"/>
+            <a:ext cx="914400" cy="731520"/>
+          </a:xfrm>
+          <a:prstGeom prst="rect">
+            <a:avLst/>
+          </a:prstGeom>
+          <a:noFill/>
+          <a:ln/>
+        </p:spPr>
+        <p:txBody>
+          <a:bodyPr wrap="square" lIns="0" tIns="0" rIns="0" bIns="0" rtlCol="0" anchor="ctr"/>
+          <a:lstStyle/>
+          <a:p>
+            <a:pPr algn="ctr" indent="0" marL="0">
+              <a:buNone/>
+            </a:pPr>
+            <a:r>
+              <a:rPr lang="en-US" sz="1200" dirty="0">
+                <a:solidFill>
+                  <a:schemeClr val="accent5"/>
+                </a:solidFill>
+              </a:rPr>
+              <a:t>第 10 天</a:t>
+            </a:r>
+            <a:endParaRPr lang="en-US" sz="1500" dirty="0"/>
+          </a:p>
+          <a:p>
+            <a:pPr algn="ctr" indent="0" marL="0">
+              <a:buNone/>
+            </a:pPr>
+            <a:r>
+              <a:rPr lang="en-US" sz="1600" b="1" dirty="0">
+                <a:solidFill>
+                  <a:schemeClr val="accent5"/>
+                </a:solidFill>
+              </a:rPr>
+              <a:t>t+4</a:t>
+            </a:r>
+            <a:endParaRPr lang="en-US" sz="1500" dirty="0"/>
+          </a:p>
+        </p:txBody>
+      </p:sp>
+      <p:sp>
+        <p:nvSpPr>
+          <p:cNvPr id="23" name="day-11"/>
+          <p:cNvSpPr/>
+          <p:nvPr/>
+        </p:nvSpPr>
+        <p:spPr>
+          <a:xfrm>
+            <a:off x="10698480" y="1325880"/>
+            <a:ext cx="914400" cy="731520"/>
+          </a:xfrm>
+          <a:prstGeom prst="roundRect">
+            <a:avLst>
+              <a:gd name="adj" fmla="val 7500"/>
+            </a:avLst>
+          </a:prstGeom>
+          <a:solidFill>
+            <a:schemeClr val="bg2"/>
+          </a:solidFill>
+          <a:ln w="12700">
+            <a:solidFill>
+              <a:schemeClr val="bg2"/>
+            </a:solidFill>
+            <a:prstDash val="solid"/>
+          </a:ln>
+        </p:spPr>
+      </p:sp>
+      <p:sp>
+        <p:nvSpPr>
+          <p:cNvPr id="24" name="Text 22"/>
+          <p:cNvSpPr txBox="1"/>
+          <p:nvPr/>
+        </p:nvSpPr>
+        <p:spPr>
+          <a:xfrm>
+            <a:off x="10698480" y="1325880"/>
+            <a:ext cx="914400" cy="731520"/>
+          </a:xfrm>
+          <a:prstGeom prst="rect">
+            <a:avLst/>
+          </a:prstGeom>
+          <a:noFill/>
+          <a:ln/>
+        </p:spPr>
+        <p:txBody>
+          <a:bodyPr wrap="square" lIns="0" tIns="0" rIns="0" bIns="0" rtlCol="0" anchor="ctr"/>
+          <a:lstStyle/>
+          <a:p>
+            <a:pPr algn="ctr" indent="0" marL="0">
+              <a:buNone/>
+            </a:pPr>
+            <a:r>
+              <a:rPr lang="en-US" sz="1200" dirty="0">
+                <a:solidFill>
+                  <a:schemeClr val="accent5"/>
+                </a:solidFill>
+              </a:rPr>
+              <a:t>第 11 天</a:t>
+            </a:r>
+            <a:endParaRPr lang="en-US" sz="1500" dirty="0"/>
+          </a:p>
+          <a:p>
+            <a:pPr algn="ctr" indent="0" marL="0">
+              <a:buNone/>
+            </a:pPr>
+            <a:r>
+              <a:rPr lang="en-US" sz="1600" b="1" dirty="0">
+                <a:solidFill>
+                  <a:schemeClr val="accent5"/>
+                </a:solidFill>
+              </a:rPr>
+              <a:t>t+5</a:t>
+            </a:r>
+            <a:endParaRPr lang="en-US" sz="1500" dirty="0"/>
+          </a:p>
+        </p:txBody>
+      </p:sp>
+      <p:sp>
+        <p:nvSpPr>
+          <p:cNvPr id="25" name="bracket-used"/>
+          <p:cNvSpPr/>
+          <p:nvPr/>
+        </p:nvSpPr>
+        <p:spPr>
+          <a:xfrm>
+            <a:off x="548640" y="2194560"/>
+            <a:ext cx="5989320" cy="0"/>
+          </a:xfrm>
+          <a:prstGeom prst="line">
+            <a:avLst/>
+          </a:prstGeom>
+          <a:noFill/>
+          <a:ln w="19050">
+            <a:solidFill>
+              <a:srgbClr val="13202A"/>
+            </a:solidFill>
+            <a:prstDash val="solid"/>
+          </a:ln>
+        </p:spPr>
+      </p:sp>
+      <p:sp>
+        <p:nvSpPr>
+          <p:cNvPr id="26" name="bracket-label"/>
+          <p:cNvSpPr/>
+          <p:nvPr/>
+        </p:nvSpPr>
+        <p:spPr>
+          <a:xfrm>
+            <a:off x="6638544" y="2194560"/>
+            <a:ext cx="4974336" cy="0"/>
+          </a:xfrm>
+          <a:prstGeom prst="line">
+            <a:avLst/>
+          </a:prstGeom>
+          <a:noFill/>
+          <a:ln w="19050">
+            <a:solidFill>
+              <a:srgbClr val="C9D2D9"/>
+            </a:solidFill>
+            <a:prstDash val="solid"/>
+          </a:ln>
+        </p:spPr>
+      </p:sp>
+      <p:sp>
+        <p:nvSpPr>
+          <p:cNvPr id="27" name="Text 25"/>
+          <p:cNvSpPr txBox="1"/>
+          <p:nvPr/>
+        </p:nvSpPr>
+        <p:spPr>
+          <a:xfrm>
+            <a:off x="548640" y="2267712"/>
+            <a:ext cx="5989320" cy="320040"/>
+          </a:xfrm>
+          <a:prstGeom prst="rect">
+            <a:avLst/>
+          </a:prstGeom>
+          <a:noFill/>
+          <a:ln/>
+        </p:spPr>
+        <p:txBody>
+          <a:bodyPr wrap="square" lIns="0" tIns="0" rIns="0" bIns="0" rtlCol="0" anchor="t"/>
+          <a:lstStyle/>
+          <a:p>
+            <a:pPr algn="ctr" indent="0" marL="0">
+              <a:buNone/>
+            </a:pPr>
+            <a:r>
+              <a:rPr lang="en-US" sz="1300" b="1" dirty="0">
+                <a:solidFill>
+                  <a:schemeClr val="tx1"/>
+                </a:solidFill>
+              </a:rPr>
+              <a:t>丟進模型:t 日收盤時都已經知道</a:t>
+            </a:r>
+            <a:endParaRPr lang="en-US" sz="1300" dirty="0"/>
+          </a:p>
+        </p:txBody>
+      </p:sp>
+      <p:sp>
+        <p:nvSpPr>
+          <p:cNvPr id="28" name="Text 26"/>
+          <p:cNvSpPr txBox="1"/>
+          <p:nvPr/>
+        </p:nvSpPr>
+        <p:spPr>
+          <a:xfrm>
+            <a:off x="6638544" y="2267712"/>
+            <a:ext cx="4974336" cy="320040"/>
+          </a:xfrm>
+          <a:prstGeom prst="rect">
+            <a:avLst/>
+          </a:prstGeom>
+          <a:noFill/>
+          <a:ln/>
+        </p:spPr>
+        <p:txBody>
+          <a:bodyPr wrap="square" lIns="0" tIns="0" rIns="0" bIns="0" rtlCol="0" anchor="t"/>
+          <a:lstStyle/>
+          <a:p>
+            <a:pPr algn="ctr" indent="0" marL="0">
+              <a:buNone/>
+            </a:pPr>
+            <a:r>
+              <a:rPr lang="en-US" sz="1300" dirty="0">
+                <a:solidFill>
+                  <a:schemeClr val="accent5"/>
+                </a:solidFill>
+              </a:rPr>
+              <a:t>不丟進模型:只用來貼標籤(看第 6 天是不是 11 天最高 / 最低)</a:t>
+            </a:r>
+            <a:endParaRPr lang="en-US" sz="1300" dirty="0"/>
+          </a:p>
+        </p:txBody>
+      </p:sp>
+      <p:graphicFrame>
+        <p:nvGraphicFramePr>
+          <p:cNvPr id="4" name="Table 0"/>
+          <p:cNvGraphicFramePr>
+            <a:graphicFrameLocks noGrp="1"/>
+          </p:cNvGraphicFramePr>
+          <p:nvPr>
+            <p:extLst>
+              <p:ext uri="{D42A27DB-BD31-4B8C-83A1-F6EECF244321}">
+                <p14:modId xmlns:p14="http://schemas.microsoft.com/office/powerpoint/2010/main" val="1579011935"/>
+              </p:ext>
+            </p:extLst>
+          </p:nvPr>
+        </p:nvGraphicFramePr>
+        <p:xfrm>
+          <a:off x="548640" y="2788920"/>
+          <a:ext cx="7406640" cy="914400"/>
+        </p:xfrm>
+        <a:graphic>
+          <a:graphicData uri="http://schemas.openxmlformats.org/drawingml/2006/table">
+            <a:tbl>
+              <a:tblPr/>
+              <a:tblGrid>
+                <a:gridCol w="640080"/>
+                <a:gridCol w="2103120"/>
+                <a:gridCol w="777240"/>
+                <a:gridCol w="777240"/>
+                <a:gridCol w="777240"/>
+                <a:gridCol w="777240"/>
+                <a:gridCol w="777240"/>
+                <a:gridCol w="777240"/>
+              </a:tblGrid>
+              <a:tr h="365760">
+                <a:tc>
+                  <a:txBody>
+                    <a:bodyPr/>
+                    <a:lstStyle/>
+                    <a:p>
+                      <a:pPr indent="0" marL="0">
+                        <a:buNone/>
+                      </a:pPr>
+                      <a:r>
+                        <a:rPr lang="en-US" sz="1200" b="1" dirty="0">
+                          <a:solidFill>
+                            <a:srgbClr val="7A8691"/>
+                          </a:solidFill>
+                          <a:latin typeface="Microsoft JhengHei" pitchFamily="34" charset="0"/>
+                          <a:ea typeface="Microsoft JhengHei" pitchFamily="34" charset="-122"/>
+                          <a:cs typeface="Microsoft JhengHei" pitchFamily="34" charset="-120"/>
+                        </a:rPr>
+                        <a:t>特徵</a:t>
+                      </a:r>
+                      <a:endParaRPr lang="en-US" sz="1200" dirty="0">
+                        <a:latin typeface="Microsoft JhengHei" charset="0"/>
+                        <a:ea typeface="Microsoft JhengHei" charset="0"/>
+                        <a:cs typeface="Microsoft JhengHei" charset="0"/>
+                      </a:endParaRPr>
+                    </a:p>
+                  </a:txBody>
+                  <a:tcPr marL="73152" marR="73152" marT="0" marB="0" anchor="ctr">
+                    <a:lnL w="9525" cap="flat" cmpd="sng" algn="ctr">
+                      <a:solidFill>
+                        <a:srgbClr val="D9E0E6"/>
+                      </a:solidFill>
+                      <a:prstDash val="solid"/>
+                      <a:round/>
+                      <a:headEnd type="none" w="med" len="med"/>
+                      <a:tailEnd type="none" w="med" len="med"/>
+                    </a:lnL>
+                    <a:lnR w="9525" cap="flat" cmpd="sng" algn="ctr">
+                      <a:solidFill>
+                        <a:srgbClr val="D9E0E6"/>
+                      </a:solidFill>
+                      <a:prstDash val="solid"/>
+                      <a:round/>
+                      <a:headEnd type="none" w="med" len="med"/>
+                      <a:tailEnd type="none" w="med" len="med"/>
+                    </a:lnR>
+                    <a:lnT w="9525" cap="flat" cmpd="sng" algn="ctr">
+                      <a:solidFill>
+                        <a:srgbClr val="D9E0E6"/>
+                      </a:solidFill>
+                      <a:prstDash val="solid"/>
+                      <a:round/>
+                      <a:headEnd type="none" w="med" len="med"/>
+                      <a:tailEnd type="none" w="med" len="med"/>
+                    </a:lnT>
+                    <a:lnB w="9525" cap="flat" cmpd="sng" algn="ctr">
+                      <a:solidFill>
+                        <a:srgbClr val="D9E0E6"/>
+                      </a:solidFill>
+                      <a:prstDash val="solid"/>
+                      <a:round/>
+                      <a:headEnd type="none" w="med" len="med"/>
+                      <a:tailEnd type="none" w="med" len="med"/>
+                    </a:lnB>
+                  </a:tcPr>
+                </a:tc>
+                <a:tc>
+                  <a:txBody>
+                    <a:bodyPr/>
+                    <a:lstStyle/>
+                    <a:p>
+                      <a:pPr indent="0" marL="0">
+                        <a:buNone/>
+                      </a:pPr>
+                      <a:r>
+                        <a:rPr lang="en-US" sz="1200" b="1" dirty="0">
+                          <a:solidFill>
+                            <a:srgbClr val="7A8691"/>
+                          </a:solidFill>
+                          <a:latin typeface="Microsoft JhengHei" pitchFamily="34" charset="0"/>
+                          <a:ea typeface="Microsoft JhengHei" pitchFamily="34" charset="-122"/>
+                          <a:cs typeface="Microsoft JhengHei" pitchFamily="34" charset="-120"/>
+                        </a:rPr>
+                        <a:t>算法</a:t>
+                      </a:r>
+                      <a:endParaRPr lang="en-US" sz="1200" dirty="0">
+                        <a:latin typeface="Microsoft JhengHei" charset="0"/>
+                        <a:ea typeface="Microsoft JhengHei" charset="0"/>
+                        <a:cs typeface="Microsoft JhengHei" charset="0"/>
+                      </a:endParaRPr>
+                    </a:p>
+                  </a:txBody>
+                  <a:tcPr marL="73152" marR="73152" marT="0" marB="0" anchor="ctr">
+                    <a:lnL w="9525" cap="flat" cmpd="sng" algn="ctr">
+                      <a:solidFill>
+                        <a:srgbClr val="D9E0E6"/>
+                      </a:solidFill>
+                      <a:prstDash val="solid"/>
+                      <a:round/>
+                      <a:headEnd type="none" w="med" len="med"/>
+                      <a:tailEnd type="none" w="med" len="med"/>
+                    </a:lnL>
+                    <a:lnR w="9525" cap="flat" cmpd="sng" algn="ctr">
+                      <a:solidFill>
+                        <a:srgbClr val="D9E0E6"/>
+                      </a:solidFill>
+                      <a:prstDash val="solid"/>
+                      <a:round/>
+                      <a:headEnd type="none" w="med" len="med"/>
+                      <a:tailEnd type="none" w="med" len="med"/>
+                    </a:lnR>
+                    <a:lnT w="9525" cap="flat" cmpd="sng" algn="ctr">
+                      <a:solidFill>
+                        <a:srgbClr val="D9E0E6"/>
+                      </a:solidFill>
+                      <a:prstDash val="solid"/>
+                      <a:round/>
+                      <a:headEnd type="none" w="med" len="med"/>
+                      <a:tailEnd type="none" w="med" len="med"/>
+                    </a:lnT>
+                    <a:lnB w="9525" cap="flat" cmpd="sng" algn="ctr">
+                      <a:solidFill>
+                        <a:srgbClr val="D9E0E6"/>
+                      </a:solidFill>
+                      <a:prstDash val="solid"/>
+                      <a:round/>
+                      <a:headEnd type="none" w="med" len="med"/>
+                      <a:tailEnd type="none" w="med" len="med"/>
+                    </a:lnB>
+                  </a:tcPr>
+                </a:tc>
+                <a:tc>
+                  <a:txBody>
+                    <a:bodyPr/>
+                    <a:lstStyle/>
+                    <a:p>
+                      <a:pPr algn="ctr" indent="0" marL="0">
+                        <a:buNone/>
+                      </a:pPr>
+                      <a:r>
+                        <a:rPr lang="en-US" sz="1200" b="1" dirty="0">
+                          <a:solidFill>
+                            <a:srgbClr val="7A8691"/>
+                          </a:solidFill>
+                          <a:latin typeface="Microsoft JhengHei" pitchFamily="34" charset="0"/>
+                          <a:ea typeface="Microsoft JhengHei" pitchFamily="34" charset="-122"/>
+                          <a:cs typeface="Microsoft JhengHei" pitchFamily="34" charset="-120"/>
+                        </a:rPr>
+                        <a:t>t-5</a:t>
+                      </a:r>
+                      <a:endParaRPr lang="en-US" sz="1200" dirty="0">
+                        <a:latin typeface="Microsoft JhengHei" charset="0"/>
+                        <a:ea typeface="Microsoft JhengHei" charset="0"/>
+                        <a:cs typeface="Microsoft JhengHei" charset="0"/>
+                      </a:endParaRPr>
+                    </a:p>
+                  </a:txBody>
+                  <a:tcPr marL="73152" marR="73152" marT="0" marB="0" anchor="ctr">
+                    <a:lnL w="9525" cap="flat" cmpd="sng" algn="ctr">
+                      <a:solidFill>
+                        <a:srgbClr val="D9E0E6"/>
+                      </a:solidFill>
+                      <a:prstDash val="solid"/>
+                      <a:round/>
+                      <a:headEnd type="none" w="med" len="med"/>
+                      <a:tailEnd type="none" w="med" len="med"/>
+                    </a:lnL>
+                    <a:lnR w="9525" cap="flat" cmpd="sng" algn="ctr">
+                      <a:solidFill>
+                        <a:srgbClr val="D9E0E6"/>
+                      </a:solidFill>
+                      <a:prstDash val="solid"/>
+                      <a:round/>
+                      <a:headEnd type="none" w="med" len="med"/>
+                      <a:tailEnd type="none" w="med" len="med"/>
+                    </a:lnR>
+                    <a:lnT w="9525" cap="flat" cmpd="sng" algn="ctr">
+                      <a:solidFill>
+                        <a:srgbClr val="D9E0E6"/>
+                      </a:solidFill>
+                      <a:prstDash val="solid"/>
+                      <a:round/>
+                      <a:headEnd type="none" w="med" len="med"/>
+                      <a:tailEnd type="none" w="med" len="med"/>
+                    </a:lnT>
+                    <a:lnB w="9525" cap="flat" cmpd="sng" algn="ctr">
+                      <a:solidFill>
+                        <a:srgbClr val="D9E0E6"/>
+                      </a:solidFill>
+                      <a:prstDash val="solid"/>
+                      <a:round/>
+                      <a:headEnd type="none" w="med" len="med"/>
+                      <a:tailEnd type="none" w="med" len="med"/>
+                    </a:lnB>
+                  </a:tcPr>
+                </a:tc>
+                <a:tc>
+                  <a:txBody>
+                    <a:bodyPr/>
+                    <a:lstStyle/>
+                    <a:p>
+                      <a:pPr algn="ctr" indent="0" marL="0">
+                        <a:buNone/>
+                      </a:pPr>
+                      <a:r>
+                        <a:rPr lang="en-US" sz="1200" b="1" dirty="0">
+                          <a:solidFill>
+                            <a:srgbClr val="7A8691"/>
+                          </a:solidFill>
+                          <a:latin typeface="Microsoft JhengHei" pitchFamily="34" charset="0"/>
+                          <a:ea typeface="Microsoft JhengHei" pitchFamily="34" charset="-122"/>
+                          <a:cs typeface="Microsoft JhengHei" pitchFamily="34" charset="-120"/>
+                        </a:rPr>
+                        <a:t>t-4</a:t>
+                      </a:r>
+                      <a:endParaRPr lang="en-US" sz="1200" dirty="0">
+                        <a:latin typeface="Microsoft JhengHei" charset="0"/>
+                        <a:ea typeface="Microsoft JhengHei" charset="0"/>
+                        <a:cs typeface="Microsoft JhengHei" charset="0"/>
+                      </a:endParaRPr>
+                    </a:p>
+                  </a:txBody>
+                  <a:tcPr marL="73152" marR="73152" marT="0" marB="0" anchor="ctr">
+                    <a:lnL w="9525" cap="flat" cmpd="sng" algn="ctr">
+                      <a:solidFill>
+                        <a:srgbClr val="D9E0E6"/>
+                      </a:solidFill>
+                      <a:prstDash val="solid"/>
+                      <a:round/>
+                      <a:headEnd type="none" w="med" len="med"/>
+                      <a:tailEnd type="none" w="med" len="med"/>
+                    </a:lnL>
+                    <a:lnR w="9525" cap="flat" cmpd="sng" algn="ctr">
+                      <a:solidFill>
+                        <a:srgbClr val="D9E0E6"/>
+                      </a:solidFill>
+                      <a:prstDash val="solid"/>
+                      <a:round/>
+                      <a:headEnd type="none" w="med" len="med"/>
+                      <a:tailEnd type="none" w="med" len="med"/>
+                    </a:lnR>
+                    <a:lnT w="9525" cap="flat" cmpd="sng" algn="ctr">
+                      <a:solidFill>
+                        <a:srgbClr val="D9E0E6"/>
+                      </a:solidFill>
+                      <a:prstDash val="solid"/>
+                      <a:round/>
+                      <a:headEnd type="none" w="med" len="med"/>
+                      <a:tailEnd type="none" w="med" len="med"/>
+                    </a:lnT>
+                    <a:lnB w="9525" cap="flat" cmpd="sng" algn="ctr">
+                      <a:solidFill>
+                        <a:srgbClr val="D9E0E6"/>
+                      </a:solidFill>
+                      <a:prstDash val="solid"/>
+                      <a:round/>
+                      <a:headEnd type="none" w="med" len="med"/>
+                      <a:tailEnd type="none" w="med" len="med"/>
+                    </a:lnB>
+                  </a:tcPr>
+                </a:tc>
+                <a:tc>
+                  <a:txBody>
+                    <a:bodyPr/>
+                    <a:lstStyle/>
+                    <a:p>
+                      <a:pPr algn="ctr" indent="0" marL="0">
+                        <a:buNone/>
+                      </a:pPr>
+                      <a:r>
+                        <a:rPr lang="en-US" sz="1200" b="1" dirty="0">
+                          <a:solidFill>
+                            <a:srgbClr val="7A8691"/>
+                          </a:solidFill>
+                          <a:latin typeface="Microsoft JhengHei" pitchFamily="34" charset="0"/>
+                          <a:ea typeface="Microsoft JhengHei" pitchFamily="34" charset="-122"/>
+                          <a:cs typeface="Microsoft JhengHei" pitchFamily="34" charset="-120"/>
+                        </a:rPr>
+                        <a:t>t-3</a:t>
+                      </a:r>
+                      <a:endParaRPr lang="en-US" sz="1200" dirty="0">
+                        <a:latin typeface="Microsoft JhengHei" charset="0"/>
+                        <a:ea typeface="Microsoft JhengHei" charset="0"/>
+                        <a:cs typeface="Microsoft JhengHei" charset="0"/>
+                      </a:endParaRPr>
+                    </a:p>
+                  </a:txBody>
+                  <a:tcPr marL="73152" marR="73152" marT="0" marB="0" anchor="ctr">
+                    <a:lnL w="9525" cap="flat" cmpd="sng" algn="ctr">
+                      <a:solidFill>
+                        <a:srgbClr val="D9E0E6"/>
+                      </a:solidFill>
+                      <a:prstDash val="solid"/>
+                      <a:round/>
+                      <a:headEnd type="none" w="med" len="med"/>
+                      <a:tailEnd type="none" w="med" len="med"/>
+                    </a:lnL>
+                    <a:lnR w="9525" cap="flat" cmpd="sng" algn="ctr">
+                      <a:solidFill>
+                        <a:srgbClr val="D9E0E6"/>
+                      </a:solidFill>
+                      <a:prstDash val="solid"/>
+                      <a:round/>
+                      <a:headEnd type="none" w="med" len="med"/>
+                      <a:tailEnd type="none" w="med" len="med"/>
+                    </a:lnR>
+                    <a:lnT w="9525" cap="flat" cmpd="sng" algn="ctr">
+                      <a:solidFill>
+                        <a:srgbClr val="D9E0E6"/>
+                      </a:solidFill>
+                      <a:prstDash val="solid"/>
+                      <a:round/>
+                      <a:headEnd type="none" w="med" len="med"/>
+                      <a:tailEnd type="none" w="med" len="med"/>
+                    </a:lnT>
+                    <a:lnB w="9525" cap="flat" cmpd="sng" algn="ctr">
+                      <a:solidFill>
+                        <a:srgbClr val="D9E0E6"/>
+                      </a:solidFill>
+                      <a:prstDash val="solid"/>
+                      <a:round/>
+                      <a:headEnd type="none" w="med" len="med"/>
+                      <a:tailEnd type="none" w="med" len="med"/>
+                    </a:lnB>
+                  </a:tcPr>
+                </a:tc>
+                <a:tc>
+                  <a:txBody>
+                    <a:bodyPr/>
+                    <a:lstStyle/>
+                    <a:p>
+                      <a:pPr algn="ctr" indent="0" marL="0">
+                        <a:buNone/>
+                      </a:pPr>
+                      <a:r>
+                        <a:rPr lang="en-US" sz="1200" b="1" dirty="0">
+                          <a:solidFill>
+                            <a:srgbClr val="7A8691"/>
+                          </a:solidFill>
+                          <a:latin typeface="Microsoft JhengHei" pitchFamily="34" charset="0"/>
+                          <a:ea typeface="Microsoft JhengHei" pitchFamily="34" charset="-122"/>
+                          <a:cs typeface="Microsoft JhengHei" pitchFamily="34" charset="-120"/>
+                        </a:rPr>
+                        <a:t>t-2</a:t>
+                      </a:r>
+                      <a:endParaRPr lang="en-US" sz="1200" dirty="0">
+                        <a:latin typeface="Microsoft JhengHei" charset="0"/>
+                        <a:ea typeface="Microsoft JhengHei" charset="0"/>
+                        <a:cs typeface="Microsoft JhengHei" charset="0"/>
+                      </a:endParaRPr>
+                    </a:p>
+                  </a:txBody>
+                  <a:tcPr marL="73152" marR="73152" marT="0" marB="0" anchor="ctr">
+                    <a:lnL w="9525" cap="flat" cmpd="sng" algn="ctr">
+                      <a:solidFill>
+                        <a:srgbClr val="D9E0E6"/>
+                      </a:solidFill>
+                      <a:prstDash val="solid"/>
+                      <a:round/>
+                      <a:headEnd type="none" w="med" len="med"/>
+                      <a:tailEnd type="none" w="med" len="med"/>
+                    </a:lnL>
+                    <a:lnR w="9525" cap="flat" cmpd="sng" algn="ctr">
+                      <a:solidFill>
+                        <a:srgbClr val="D9E0E6"/>
+                      </a:solidFill>
+                      <a:prstDash val="solid"/>
+                      <a:round/>
+                      <a:headEnd type="none" w="med" len="med"/>
+                      <a:tailEnd type="none" w="med" len="med"/>
+                    </a:lnR>
+                    <a:lnT w="9525" cap="flat" cmpd="sng" algn="ctr">
+                      <a:solidFill>
+                        <a:srgbClr val="D9E0E6"/>
+                      </a:solidFill>
+                      <a:prstDash val="solid"/>
+                      <a:round/>
+                      <a:headEnd type="none" w="med" len="med"/>
+                      <a:tailEnd type="none" w="med" len="med"/>
+                    </a:lnT>
+                    <a:lnB w="9525" cap="flat" cmpd="sng" algn="ctr">
+                      <a:solidFill>
+                        <a:srgbClr val="D9E0E6"/>
+                      </a:solidFill>
+                      <a:prstDash val="solid"/>
+                      <a:round/>
+                      <a:headEnd type="none" w="med" len="med"/>
+                      <a:tailEnd type="none" w="med" len="med"/>
+                    </a:lnB>
+                  </a:tcPr>
+                </a:tc>
+                <a:tc>
+                  <a:txBody>
+                    <a:bodyPr/>
+                    <a:lstStyle/>
+                    <a:p>
+                      <a:pPr algn="ctr" indent="0" marL="0">
+                        <a:buNone/>
+                      </a:pPr>
+                      <a:r>
+                        <a:rPr lang="en-US" sz="1200" b="1" dirty="0">
+                          <a:solidFill>
+                            <a:srgbClr val="7A8691"/>
+                          </a:solidFill>
+                          <a:latin typeface="Microsoft JhengHei" pitchFamily="34" charset="0"/>
+                          <a:ea typeface="Microsoft JhengHei" pitchFamily="34" charset="-122"/>
+                          <a:cs typeface="Microsoft JhengHei" pitchFamily="34" charset="-120"/>
+                        </a:rPr>
+                        <a:t>t-1</a:t>
+                      </a:r>
+                      <a:endParaRPr lang="en-US" sz="1200" dirty="0">
+                        <a:latin typeface="Microsoft JhengHei" charset="0"/>
+                        <a:ea typeface="Microsoft JhengHei" charset="0"/>
+                        <a:cs typeface="Microsoft JhengHei" charset="0"/>
+                      </a:endParaRPr>
+                    </a:p>
+                  </a:txBody>
+                  <a:tcPr marL="73152" marR="73152" marT="0" marB="0" anchor="ctr">
+                    <a:lnL w="9525" cap="flat" cmpd="sng" algn="ctr">
+                      <a:solidFill>
+                        <a:srgbClr val="D9E0E6"/>
+                      </a:solidFill>
+                      <a:prstDash val="solid"/>
+                      <a:round/>
+                      <a:headEnd type="none" w="med" len="med"/>
+                      <a:tailEnd type="none" w="med" len="med"/>
+                    </a:lnL>
+                    <a:lnR w="9525" cap="flat" cmpd="sng" algn="ctr">
+                      <a:solidFill>
+                        <a:srgbClr val="D9E0E6"/>
+                      </a:solidFill>
+                      <a:prstDash val="solid"/>
+                      <a:round/>
+                      <a:headEnd type="none" w="med" len="med"/>
+                      <a:tailEnd type="none" w="med" len="med"/>
+                    </a:lnR>
+                    <a:lnT w="9525" cap="flat" cmpd="sng" algn="ctr">
+                      <a:solidFill>
+                        <a:srgbClr val="D9E0E6"/>
+                      </a:solidFill>
+                      <a:prstDash val="solid"/>
+                      <a:round/>
+                      <a:headEnd type="none" w="med" len="med"/>
+                      <a:tailEnd type="none" w="med" len="med"/>
+                    </a:lnT>
+                    <a:lnB w="9525" cap="flat" cmpd="sng" algn="ctr">
+                      <a:solidFill>
+                        <a:srgbClr val="D9E0E6"/>
+                      </a:solidFill>
+                      <a:prstDash val="solid"/>
+                      <a:round/>
+                      <a:headEnd type="none" w="med" len="med"/>
+                      <a:tailEnd type="none" w="med" len="med"/>
+                    </a:lnB>
+                  </a:tcPr>
+                </a:tc>
+                <a:tc>
+                  <a:txBody>
+                    <a:bodyPr/>
+                    <a:lstStyle/>
+                    <a:p>
+                      <a:pPr algn="ctr" indent="0" marL="0">
+                        <a:buNone/>
+                      </a:pPr>
+                      <a:r>
+                        <a:rPr lang="en-US" sz="1200" b="1" dirty="0">
+                          <a:solidFill>
+                            <a:srgbClr val="7A8691"/>
+                          </a:solidFill>
+                          <a:latin typeface="Microsoft JhengHei" pitchFamily="34" charset="0"/>
+                          <a:ea typeface="Microsoft JhengHei" pitchFamily="34" charset="-122"/>
+                          <a:cs typeface="Microsoft JhengHei" pitchFamily="34" charset="-120"/>
+                        </a:rPr>
+                        <a:t>t</a:t>
+                      </a:r>
+                      <a:endParaRPr lang="en-US" sz="1200" dirty="0">
+                        <a:latin typeface="Microsoft JhengHei" charset="0"/>
+                        <a:ea typeface="Microsoft JhengHei" charset="0"/>
+                        <a:cs typeface="Microsoft JhengHei" charset="0"/>
+                      </a:endParaRPr>
+                    </a:p>
+                  </a:txBody>
+                  <a:tcPr marL="73152" marR="73152" marT="0" marB="0" anchor="ctr">
+                    <a:lnL w="9525" cap="flat" cmpd="sng" algn="ctr">
+                      <a:solidFill>
+                        <a:srgbClr val="D9E0E6"/>
+                      </a:solidFill>
+                      <a:prstDash val="solid"/>
+                      <a:round/>
+                      <a:headEnd type="none" w="med" len="med"/>
+                      <a:tailEnd type="none" w="med" len="med"/>
+                    </a:lnL>
+                    <a:lnR w="9525" cap="flat" cmpd="sng" algn="ctr">
+                      <a:solidFill>
+                        <a:srgbClr val="D9E0E6"/>
+                      </a:solidFill>
+                      <a:prstDash val="solid"/>
+                      <a:round/>
+                      <a:headEnd type="none" w="med" len="med"/>
+                      <a:tailEnd type="none" w="med" len="med"/>
+                    </a:lnR>
+                    <a:lnT w="9525" cap="flat" cmpd="sng" algn="ctr">
+                      <a:solidFill>
+                        <a:srgbClr val="D9E0E6"/>
+                      </a:solidFill>
+                      <a:prstDash val="solid"/>
+                      <a:round/>
+                      <a:headEnd type="none" w="med" len="med"/>
+                      <a:tailEnd type="none" w="med" len="med"/>
+                    </a:lnT>
+                    <a:lnB w="9525" cap="flat" cmpd="sng" algn="ctr">
+                      <a:solidFill>
+                        <a:srgbClr val="D9E0E6"/>
+                      </a:solidFill>
+                      <a:prstDash val="solid"/>
+                      <a:round/>
+                      <a:headEnd type="none" w="med" len="med"/>
+                      <a:tailEnd type="none" w="med" len="med"/>
+                    </a:lnB>
+                  </a:tcPr>
+                </a:tc>
+              </a:tr>
+              <a:tr h="365760">
+                <a:tc>
+                  <a:txBody>
+                    <a:bodyPr/>
+                    <a:lstStyle/>
+                    <a:p>
+                      <a:pPr indent="0" marL="0">
+                        <a:buNone/>
+                      </a:pPr>
+                      <a:r>
+                        <a:rPr lang="en-US" sz="1300" b="1" dirty="0">
+                          <a:solidFill>
+                            <a:srgbClr val="13202A"/>
+                          </a:solidFill>
+                          <a:latin typeface="Microsoft JhengHei" pitchFamily="34" charset="0"/>
+                          <a:ea typeface="Microsoft JhengHei" pitchFamily="34" charset="-122"/>
+                          <a:cs typeface="Microsoft JhengHei" pitchFamily="34" charset="-120"/>
+                        </a:rPr>
+                        <a:t>開</a:t>
+                      </a:r>
+                      <a:endParaRPr lang="en-US" sz="1300" dirty="0">
+                        <a:latin typeface="Microsoft JhengHei" charset="0"/>
+                        <a:ea typeface="Microsoft JhengHei" charset="0"/>
+                        <a:cs typeface="Microsoft JhengHei" charset="0"/>
+                      </a:endParaRPr>
+                    </a:p>
+                  </a:txBody>
+                  <a:tcPr marL="73152" marR="73152" marT="0" marB="0" anchor="ctr">
+                    <a:lnL w="9525" cap="flat" cmpd="sng" algn="ctr">
+                      <a:solidFill>
+                        <a:srgbClr val="D9E0E6"/>
+                      </a:solidFill>
+                      <a:prstDash val="solid"/>
+                      <a:round/>
+                      <a:headEnd type="none" w="med" len="med"/>
+                      <a:tailEnd type="none" w="med" len="med"/>
+                    </a:lnL>
+                    <a:lnR w="9525" cap="flat" cmpd="sng" algn="ctr">
+                      <a:solidFill>
+                        <a:srgbClr val="D9E0E6"/>
+                      </a:solidFill>
+                      <a:prstDash val="solid"/>
+                      <a:round/>
+                      <a:headEnd type="none" w="med" len="med"/>
+                      <a:tailEnd type="none" w="med" len="med"/>
+                    </a:lnR>
+                    <a:lnT w="9525" cap="flat" cmpd="sng" algn="ctr">
+                      <a:solidFill>
+                        <a:srgbClr val="D9E0E6"/>
+                      </a:solidFill>
+                      <a:prstDash val="solid"/>
+                      <a:round/>
+                      <a:headEnd type="none" w="med" len="med"/>
+                      <a:tailEnd type="none" w="med" len="med"/>
+                    </a:lnT>
+                    <a:lnB w="9525" cap="flat" cmpd="sng" algn="ctr">
+                      <a:solidFill>
+                        <a:srgbClr val="D9E0E6"/>
+                      </a:solidFill>
+                      <a:prstDash val="solid"/>
+                      <a:round/>
+                      <a:headEnd type="none" w="med" len="med"/>
+                      <a:tailEnd type="none" w="med" len="med"/>
+                    </a:lnB>
+                  </a:tcPr>
+                </a:tc>
+                <a:tc>
+                  <a:txBody>
+                    <a:bodyPr/>
+                    <a:lstStyle/>
+                    <a:p>
+                      <a:pPr indent="0" marL="0">
+                        <a:buNone/>
+                      </a:pPr>
+                      <a:r>
+                        <a:rPr lang="en-US" sz="1300" dirty="0">
+                          <a:solidFill>
+                            <a:srgbClr val="47545F"/>
+                          </a:solidFill>
+                          <a:latin typeface="Microsoft JhengHei" pitchFamily="34" charset="0"/>
+                          <a:ea typeface="Microsoft JhengHei" pitchFamily="34" charset="-122"/>
+                          <a:cs typeface="Microsoft JhengHei" pitchFamily="34" charset="-120"/>
+                        </a:rPr>
+                        <a:t>開盤 ÷ t 日收盤</a:t>
+                      </a:r>
+                      <a:endParaRPr lang="en-US" sz="1300" dirty="0">
+                        <a:latin typeface="Microsoft JhengHei" charset="0"/>
+                        <a:ea typeface="Microsoft JhengHei" charset="0"/>
+                        <a:cs typeface="Microsoft JhengHei" charset="0"/>
+                      </a:endParaRPr>
+                    </a:p>
+                  </a:txBody>
+                  <a:tcPr marL="73152" marR="73152" marT="0" marB="0" anchor="ctr">
+                    <a:lnL w="9525" cap="flat" cmpd="sng" algn="ctr">
+                      <a:solidFill>
+                        <a:srgbClr val="D9E0E6"/>
+                      </a:solidFill>
+                      <a:prstDash val="solid"/>
+                      <a:round/>
+                      <a:headEnd type="none" w="med" len="med"/>
+                      <a:tailEnd type="none" w="med" len="med"/>
+                    </a:lnL>
+                    <a:lnR w="9525" cap="flat" cmpd="sng" algn="ctr">
+                      <a:solidFill>
+                        <a:srgbClr val="D9E0E6"/>
+                      </a:solidFill>
+                      <a:prstDash val="solid"/>
+                      <a:round/>
+                      <a:headEnd type="none" w="med" len="med"/>
+                      <a:tailEnd type="none" w="med" len="med"/>
+                    </a:lnR>
+                    <a:lnT w="9525" cap="flat" cmpd="sng" algn="ctr">
+                      <a:solidFill>
+                        <a:srgbClr val="D9E0E6"/>
+                      </a:solidFill>
+                      <a:prstDash val="solid"/>
+                      <a:round/>
+                      <a:headEnd type="none" w="med" len="med"/>
+                      <a:tailEnd type="none" w="med" len="med"/>
+                    </a:lnT>
+                    <a:lnB w="9525" cap="flat" cmpd="sng" algn="ctr">
+                      <a:solidFill>
+                        <a:srgbClr val="D9E0E6"/>
+                      </a:solidFill>
+                      <a:prstDash val="solid"/>
+                      <a:round/>
+                      <a:headEnd type="none" w="med" len="med"/>
+                      <a:tailEnd type="none" w="med" len="med"/>
+                    </a:lnB>
+                  </a:tcPr>
+                </a:tc>
+                <a:tc>
+                  <a:txBody>
+                    <a:bodyPr/>
+                    <a:lstStyle/>
+                    <a:p>
+                      <a:pPr algn="ctr" indent="0" marL="0">
+                        <a:buNone/>
+                      </a:pPr>
+                      <a:r>
+                        <a:rPr lang="en-US" sz="1300" dirty="0">
+                          <a:solidFill>
+                            <a:srgbClr val="13202A"/>
+                          </a:solidFill>
+                          <a:latin typeface="Microsoft JhengHei" pitchFamily="34" charset="0"/>
+                          <a:ea typeface="Microsoft JhengHei" pitchFamily="34" charset="-122"/>
+                          <a:cs typeface="Microsoft JhengHei" pitchFamily="34" charset="-120"/>
+                        </a:rPr>
+                        <a:t>−9.2%</a:t>
+                      </a:r>
+                      <a:endParaRPr lang="en-US" sz="1300" dirty="0">
+                        <a:latin typeface="Microsoft JhengHei" charset="0"/>
+                        <a:ea typeface="Microsoft JhengHei" charset="0"/>
+                        <a:cs typeface="Microsoft JhengHei" charset="0"/>
+                      </a:endParaRPr>
+                    </a:p>
+                  </a:txBody>
+                  <a:tcPr marL="73152" marR="73152" marT="0" marB="0" anchor="ctr">
+                    <a:lnL w="9525" cap="flat" cmpd="sng" algn="ctr">
+                      <a:solidFill>
+                        <a:srgbClr val="D9E0E6"/>
+                      </a:solidFill>
+                      <a:prstDash val="solid"/>
+                      <a:round/>
+                      <a:headEnd type="none" w="med" len="med"/>
+                      <a:tailEnd type="none" w="med" len="med"/>
+                    </a:lnL>
+                    <a:lnR w="9525" cap="flat" cmpd="sng" algn="ctr">
+                      <a:solidFill>
+                        <a:srgbClr val="D9E0E6"/>
+                      </a:solidFill>
+                      <a:prstDash val="solid"/>
+                      <a:round/>
+                      <a:headEnd type="none" w="med" len="med"/>
+                      <a:tailEnd type="none" w="med" len="med"/>
+                    </a:lnR>
+                    <a:lnT w="9525" cap="flat" cmpd="sng" algn="ctr">
+                      <a:solidFill>
+                        <a:srgbClr val="D9E0E6"/>
+                      </a:solidFill>
+                      <a:prstDash val="solid"/>
+                      <a:round/>
+                      <a:headEnd type="none" w="med" len="med"/>
+                      <a:tailEnd type="none" w="med" len="med"/>
+                    </a:lnT>
+                    <a:lnB w="9525" cap="flat" cmpd="sng" algn="ctr">
+                      <a:solidFill>
+                        <a:srgbClr val="D9E0E6"/>
+                      </a:solidFill>
+                      <a:prstDash val="solid"/>
+                      <a:round/>
+                      <a:headEnd type="none" w="med" len="med"/>
+                      <a:tailEnd type="none" w="med" len="med"/>
+                    </a:lnB>
+                    <a:solidFill>
+                      <a:srgbClr val="FFFFFF"/>
+                    </a:solidFill>
+                  </a:tcPr>
+                </a:tc>
+                <a:tc>
+                  <a:txBody>
+                    <a:bodyPr/>
+                    <a:lstStyle/>
+                    <a:p>
+                      <a:pPr algn="ctr" indent="0" marL="0">
+                        <a:buNone/>
+                      </a:pPr>
+                      <a:r>
+                        <a:rPr lang="en-US" sz="1300" dirty="0">
+                          <a:solidFill>
+                            <a:srgbClr val="13202A"/>
+                          </a:solidFill>
+                          <a:latin typeface="Microsoft JhengHei" pitchFamily="34" charset="0"/>
+                          <a:ea typeface="Microsoft JhengHei" pitchFamily="34" charset="-122"/>
+                          <a:cs typeface="Microsoft JhengHei" pitchFamily="34" charset="-120"/>
+                        </a:rPr>
+                        <a:t>−8.4%</a:t>
+                      </a:r>
+                      <a:endParaRPr lang="en-US" sz="1300" dirty="0">
+                        <a:latin typeface="Microsoft JhengHei" charset="0"/>
+                        <a:ea typeface="Microsoft JhengHei" charset="0"/>
+                        <a:cs typeface="Microsoft JhengHei" charset="0"/>
+                      </a:endParaRPr>
+                    </a:p>
+                  </a:txBody>
+                  <a:tcPr marL="73152" marR="73152" marT="0" marB="0" anchor="ctr">
+                    <a:lnL w="9525" cap="flat" cmpd="sng" algn="ctr">
+                      <a:solidFill>
+                        <a:srgbClr val="D9E0E6"/>
+                      </a:solidFill>
+                      <a:prstDash val="solid"/>
+                      <a:round/>
+                      <a:headEnd type="none" w="med" len="med"/>
+                      <a:tailEnd type="none" w="med" len="med"/>
+                    </a:lnL>
+                    <a:lnR w="9525" cap="flat" cmpd="sng" algn="ctr">
+                      <a:solidFill>
+                        <a:srgbClr val="D9E0E6"/>
+                      </a:solidFill>
+                      <a:prstDash val="solid"/>
+                      <a:round/>
+                      <a:headEnd type="none" w="med" len="med"/>
+                      <a:tailEnd type="none" w="med" len="med"/>
+                    </a:lnR>
+                    <a:lnT w="9525" cap="flat" cmpd="sng" algn="ctr">
+                      <a:solidFill>
+                        <a:srgbClr val="D9E0E6"/>
+                      </a:solidFill>
+                      <a:prstDash val="solid"/>
+                      <a:round/>
+                      <a:headEnd type="none" w="med" len="med"/>
+                      <a:tailEnd type="none" w="med" len="med"/>
+                    </a:lnT>
+                    <a:lnB w="9525" cap="flat" cmpd="sng" algn="ctr">
+                      <a:solidFill>
+                        <a:srgbClr val="D9E0E6"/>
+                      </a:solidFill>
+                      <a:prstDash val="solid"/>
+                      <a:round/>
+                      <a:headEnd type="none" w="med" len="med"/>
+                      <a:tailEnd type="none" w="med" len="med"/>
+                    </a:lnB>
+                    <a:solidFill>
+                      <a:srgbClr val="FFFFFF"/>
+                    </a:solidFill>
+                  </a:tcPr>
+                </a:tc>
+                <a:tc>
+                  <a:txBody>
+                    <a:bodyPr/>
+                    <a:lstStyle/>
+                    <a:p>
+                      <a:pPr algn="ctr" indent="0" marL="0">
+                        <a:buNone/>
+                      </a:pPr>
+                      <a:r>
+                        <a:rPr lang="en-US" sz="1300" dirty="0">
+                          <a:solidFill>
+                            <a:srgbClr val="13202A"/>
+                          </a:solidFill>
+                          <a:latin typeface="Microsoft JhengHei" pitchFamily="34" charset="0"/>
+                          <a:ea typeface="Microsoft JhengHei" pitchFamily="34" charset="-122"/>
+                          <a:cs typeface="Microsoft JhengHei" pitchFamily="34" charset="-120"/>
+                        </a:rPr>
+                        <a:t>−6.7%</a:t>
+                      </a:r>
+                      <a:endParaRPr lang="en-US" sz="1300" dirty="0">
+                        <a:latin typeface="Microsoft JhengHei" charset="0"/>
+                        <a:ea typeface="Microsoft JhengHei" charset="0"/>
+                        <a:cs typeface="Microsoft JhengHei" charset="0"/>
+                      </a:endParaRPr>
+                    </a:p>
+                  </a:txBody>
+                  <a:tcPr marL="73152" marR="73152" marT="0" marB="0" anchor="ctr">
+                    <a:lnL w="9525" cap="flat" cmpd="sng" algn="ctr">
+                      <a:solidFill>
+                        <a:srgbClr val="D9E0E6"/>
+                      </a:solidFill>
+                      <a:prstDash val="solid"/>
+                      <a:round/>
+                      <a:headEnd type="none" w="med" len="med"/>
+                      <a:tailEnd type="none" w="med" len="med"/>
+                    </a:lnL>
+                    <a:lnR w="9525" cap="flat" cmpd="sng" algn="ctr">
+                      <a:solidFill>
+                        <a:srgbClr val="D9E0E6"/>
+                      </a:solidFill>
+                      <a:prstDash val="solid"/>
+                      <a:round/>
+                      <a:headEnd type="none" w="med" len="med"/>
+                      <a:tailEnd type="none" w="med" len="med"/>
+                    </a:lnR>
+                    <a:lnT w="9525" cap="flat" cmpd="sng" algn="ctr">
+                      <a:solidFill>
+                        <a:srgbClr val="D9E0E6"/>
+                      </a:solidFill>
+                      <a:prstDash val="solid"/>
+                      <a:round/>
+                      <a:headEnd type="none" w="med" len="med"/>
+                      <a:tailEnd type="none" w="med" len="med"/>
+                    </a:lnT>
+                    <a:lnB w="9525" cap="flat" cmpd="sng" algn="ctr">
+                      <a:solidFill>
+                        <a:srgbClr val="D9E0E6"/>
+                      </a:solidFill>
+                      <a:prstDash val="solid"/>
+                      <a:round/>
+                      <a:headEnd type="none" w="med" len="med"/>
+                      <a:tailEnd type="none" w="med" len="med"/>
+                    </a:lnB>
+                    <a:solidFill>
+                      <a:srgbClr val="FFFFFF"/>
+                    </a:solidFill>
+                  </a:tcPr>
+                </a:tc>
+                <a:tc>
+                  <a:txBody>
+                    <a:bodyPr/>
+                    <a:lstStyle/>
+                    <a:p>
+                      <a:pPr algn="ctr" indent="0" marL="0">
+                        <a:buNone/>
+                      </a:pPr>
+                      <a:r>
+                        <a:rPr lang="en-US" sz="1300" dirty="0">
+                          <a:solidFill>
+                            <a:srgbClr val="13202A"/>
+                          </a:solidFill>
+                          <a:latin typeface="Microsoft JhengHei" pitchFamily="34" charset="0"/>
+                          <a:ea typeface="Microsoft JhengHei" pitchFamily="34" charset="-122"/>
+                          <a:cs typeface="Microsoft JhengHei" pitchFamily="34" charset="-120"/>
+                        </a:rPr>
+                        <a:t>−5.7%</a:t>
+                      </a:r>
+                      <a:endParaRPr lang="en-US" sz="1300" dirty="0">
+                        <a:latin typeface="Microsoft JhengHei" charset="0"/>
+                        <a:ea typeface="Microsoft JhengHei" charset="0"/>
+                        <a:cs typeface="Microsoft JhengHei" charset="0"/>
+                      </a:endParaRPr>
+                    </a:p>
+                  </a:txBody>
+                  <a:tcPr marL="73152" marR="73152" marT="0" marB="0" anchor="ctr">
+                    <a:lnL w="9525" cap="flat" cmpd="sng" algn="ctr">
+                      <a:solidFill>
+                        <a:srgbClr val="D9E0E6"/>
+                      </a:solidFill>
+                      <a:prstDash val="solid"/>
+                      <a:round/>
+                      <a:headEnd type="none" w="med" len="med"/>
+                      <a:tailEnd type="none" w="med" len="med"/>
+                    </a:lnL>
+                    <a:lnR w="9525" cap="flat" cmpd="sng" algn="ctr">
+                      <a:solidFill>
+                        <a:srgbClr val="D9E0E6"/>
+                      </a:solidFill>
+                      <a:prstDash val="solid"/>
+                      <a:round/>
+                      <a:headEnd type="none" w="med" len="med"/>
+                      <a:tailEnd type="none" w="med" len="med"/>
+                    </a:lnR>
+                    <a:lnT w="9525" cap="flat" cmpd="sng" algn="ctr">
+                      <a:solidFill>
+                        <a:srgbClr val="D9E0E6"/>
+                      </a:solidFill>
+                      <a:prstDash val="solid"/>
+                      <a:round/>
+                      <a:headEnd type="none" w="med" len="med"/>
+                      <a:tailEnd type="none" w="med" len="med"/>
+                    </a:lnT>
+                    <a:lnB w="9525" cap="flat" cmpd="sng" algn="ctr">
+                      <a:solidFill>
+                        <a:srgbClr val="D9E0E6"/>
+                      </a:solidFill>
+                      <a:prstDash val="solid"/>
+                      <a:round/>
+                      <a:headEnd type="none" w="med" len="med"/>
+                      <a:tailEnd type="none" w="med" len="med"/>
+                    </a:lnB>
+                    <a:solidFill>
+                      <a:srgbClr val="FFFFFF"/>
+                    </a:solidFill>
+                  </a:tcPr>
+                </a:tc>
+                <a:tc>
+                  <a:txBody>
+                    <a:bodyPr/>
+                    <a:lstStyle/>
+                    <a:p>
+                      <a:pPr algn="ctr" indent="0" marL="0">
+                        <a:buNone/>
+                      </a:pPr>
+                      <a:r>
+                        <a:rPr lang="en-US" sz="1300" dirty="0">
+                          <a:solidFill>
+                            <a:srgbClr val="13202A"/>
+                          </a:solidFill>
+                          <a:latin typeface="Microsoft JhengHei" pitchFamily="34" charset="0"/>
+                          <a:ea typeface="Microsoft JhengHei" pitchFamily="34" charset="-122"/>
+                          <a:cs typeface="Microsoft JhengHei" pitchFamily="34" charset="-120"/>
+                        </a:rPr>
+                        <a:t>−5.0%</a:t>
+                      </a:r>
+                      <a:endParaRPr lang="en-US" sz="1300" dirty="0">
+                        <a:latin typeface="Microsoft JhengHei" charset="0"/>
+                        <a:ea typeface="Microsoft JhengHei" charset="0"/>
+                        <a:cs typeface="Microsoft JhengHei" charset="0"/>
+                      </a:endParaRPr>
+                    </a:p>
+                  </a:txBody>
+                  <a:tcPr marL="73152" marR="73152" marT="0" marB="0" anchor="ctr">
+                    <a:lnL w="9525" cap="flat" cmpd="sng" algn="ctr">
+                      <a:solidFill>
+                        <a:srgbClr val="D9E0E6"/>
+                      </a:solidFill>
+                      <a:prstDash val="solid"/>
+                      <a:round/>
+                      <a:headEnd type="none" w="med" len="med"/>
+                      <a:tailEnd type="none" w="med" len="med"/>
+                    </a:lnL>
+                    <a:lnR w="9525" cap="flat" cmpd="sng" algn="ctr">
+                      <a:solidFill>
+                        <a:srgbClr val="D9E0E6"/>
+                      </a:solidFill>
+                      <a:prstDash val="solid"/>
+                      <a:round/>
+                      <a:headEnd type="none" w="med" len="med"/>
+                      <a:tailEnd type="none" w="med" len="med"/>
+                    </a:lnR>
+                    <a:lnT w="9525" cap="flat" cmpd="sng" algn="ctr">
+                      <a:solidFill>
+                        <a:srgbClr val="D9E0E6"/>
+                      </a:solidFill>
+                      <a:prstDash val="solid"/>
+                      <a:round/>
+                      <a:headEnd type="none" w="med" len="med"/>
+                      <a:tailEnd type="none" w="med" len="med"/>
+                    </a:lnT>
+                    <a:lnB w="9525" cap="flat" cmpd="sng" algn="ctr">
+                      <a:solidFill>
+                        <a:srgbClr val="D9E0E6"/>
+                      </a:solidFill>
+                      <a:prstDash val="solid"/>
+                      <a:round/>
+                      <a:headEnd type="none" w="med" len="med"/>
+                      <a:tailEnd type="none" w="med" len="med"/>
+                    </a:lnB>
+                    <a:solidFill>
+                      <a:srgbClr val="FFFFFF"/>
+                    </a:solidFill>
+                  </a:tcPr>
+                </a:tc>
+                <a:tc>
+                  <a:txBody>
+                    <a:bodyPr/>
+                    <a:lstStyle/>
+                    <a:p>
+                      <a:pPr algn="ctr" indent="0" marL="0">
+                        <a:buNone/>
+                      </a:pPr>
+                      <a:r>
+                        <a:rPr lang="en-US" sz="1300" dirty="0">
+                          <a:solidFill>
+                            <a:srgbClr val="13202A"/>
+                          </a:solidFill>
+                          <a:latin typeface="Microsoft JhengHei" pitchFamily="34" charset="0"/>
+                          <a:ea typeface="Microsoft JhengHei" pitchFamily="34" charset="-122"/>
+                          <a:cs typeface="Microsoft JhengHei" pitchFamily="34" charset="-120"/>
+                        </a:rPr>
+                        <a:t>−1.0%</a:t>
+                      </a:r>
+                      <a:endParaRPr lang="en-US" sz="1300" dirty="0">
+                        <a:latin typeface="Microsoft JhengHei" charset="0"/>
+                        <a:ea typeface="Microsoft JhengHei" charset="0"/>
+                        <a:cs typeface="Microsoft JhengHei" charset="0"/>
+                      </a:endParaRPr>
+                    </a:p>
+                  </a:txBody>
+                  <a:tcPr marL="73152" marR="73152" marT="0" marB="0" anchor="ctr">
+                    <a:lnL w="9525" cap="flat" cmpd="sng" algn="ctr">
+                      <a:solidFill>
+                        <a:srgbClr val="D9E0E6"/>
+                      </a:solidFill>
+                      <a:prstDash val="solid"/>
+                      <a:round/>
+                      <a:headEnd type="none" w="med" len="med"/>
+                      <a:tailEnd type="none" w="med" len="med"/>
+                    </a:lnL>
+                    <a:lnR w="9525" cap="flat" cmpd="sng" algn="ctr">
+                      <a:solidFill>
+                        <a:srgbClr val="D9E0E6"/>
+                      </a:solidFill>
+                      <a:prstDash val="solid"/>
+                      <a:round/>
+                      <a:headEnd type="none" w="med" len="med"/>
+                      <a:tailEnd type="none" w="med" len="med"/>
+                    </a:lnR>
+                    <a:lnT w="9525" cap="flat" cmpd="sng" algn="ctr">
+                      <a:solidFill>
+                        <a:srgbClr val="D9E0E6"/>
+                      </a:solidFill>
+                      <a:prstDash val="solid"/>
+                      <a:round/>
+                      <a:headEnd type="none" w="med" len="med"/>
+                      <a:tailEnd type="none" w="med" len="med"/>
+                    </a:lnT>
+                    <a:lnB w="9525" cap="flat" cmpd="sng" algn="ctr">
+                      <a:solidFill>
+                        <a:srgbClr val="D9E0E6"/>
+                      </a:solidFill>
+                      <a:prstDash val="solid"/>
+                      <a:round/>
+                      <a:headEnd type="none" w="med" len="med"/>
+                      <a:tailEnd type="none" w="med" len="med"/>
+                    </a:lnB>
+                    <a:solidFill>
+                      <a:srgbClr val="FCE9E0"/>
+                    </a:solidFill>
+                  </a:tcPr>
+                </a:tc>
+              </a:tr>
+              <a:tr h="365760">
+                <a:tc>
+                  <a:txBody>
+                    <a:bodyPr/>
+                    <a:lstStyle/>
+                    <a:p>
+                      <a:pPr indent="0" marL="0">
+                        <a:buNone/>
+                      </a:pPr>
+                      <a:r>
+                        <a:rPr lang="en-US" sz="1300" b="1" dirty="0">
+                          <a:solidFill>
+                            <a:srgbClr val="13202A"/>
+                          </a:solidFill>
+                          <a:latin typeface="Microsoft JhengHei" pitchFamily="34" charset="0"/>
+                          <a:ea typeface="Microsoft JhengHei" pitchFamily="34" charset="-122"/>
+                          <a:cs typeface="Microsoft JhengHei" pitchFamily="34" charset="-120"/>
+                        </a:rPr>
+                        <a:t>高</a:t>
+                      </a:r>
+                      <a:endParaRPr lang="en-US" sz="1300" dirty="0">
+                        <a:latin typeface="Microsoft JhengHei" charset="0"/>
+                        <a:ea typeface="Microsoft JhengHei" charset="0"/>
+                        <a:cs typeface="Microsoft JhengHei" charset="0"/>
+                      </a:endParaRPr>
+                    </a:p>
+                  </a:txBody>
+                  <a:tcPr marL="73152" marR="73152" marT="0" marB="0" anchor="ctr">
+                    <a:lnL w="9525" cap="flat" cmpd="sng" algn="ctr">
+                      <a:solidFill>
+                        <a:srgbClr val="D9E0E6"/>
+                      </a:solidFill>
+                      <a:prstDash val="solid"/>
+                      <a:round/>
+                      <a:headEnd type="none" w="med" len="med"/>
+                      <a:tailEnd type="none" w="med" len="med"/>
+                    </a:lnL>
+                    <a:lnR w="9525" cap="flat" cmpd="sng" algn="ctr">
+                      <a:solidFill>
+                        <a:srgbClr val="D9E0E6"/>
+                      </a:solidFill>
+                      <a:prstDash val="solid"/>
+                      <a:round/>
+                      <a:headEnd type="none" w="med" len="med"/>
+                      <a:tailEnd type="none" w="med" len="med"/>
+                    </a:lnR>
+                    <a:lnT w="9525" cap="flat" cmpd="sng" algn="ctr">
+                      <a:solidFill>
+                        <a:srgbClr val="D9E0E6"/>
+                      </a:solidFill>
+                      <a:prstDash val="solid"/>
+                      <a:round/>
+                      <a:headEnd type="none" w="med" len="med"/>
+                      <a:tailEnd type="none" w="med" len="med"/>
+                    </a:lnT>
+                    <a:lnB w="9525" cap="flat" cmpd="sng" algn="ctr">
+                      <a:solidFill>
+                        <a:srgbClr val="D9E0E6"/>
+                      </a:solidFill>
+                      <a:prstDash val="solid"/>
+                      <a:round/>
+                      <a:headEnd type="none" w="med" len="med"/>
+                      <a:tailEnd type="none" w="med" len="med"/>
+                    </a:lnB>
+                  </a:tcPr>
+                </a:tc>
+                <a:tc>
+                  <a:txBody>
+                    <a:bodyPr/>
+                    <a:lstStyle/>
+                    <a:p>
+                      <a:pPr indent="0" marL="0">
+                        <a:buNone/>
+                      </a:pPr>
+                      <a:r>
+                        <a:rPr lang="en-US" sz="1300" dirty="0">
+                          <a:solidFill>
+                            <a:srgbClr val="47545F"/>
+                          </a:solidFill>
+                          <a:latin typeface="Microsoft JhengHei" pitchFamily="34" charset="0"/>
+                          <a:ea typeface="Microsoft JhengHei" pitchFamily="34" charset="-122"/>
+                          <a:cs typeface="Microsoft JhengHei" pitchFamily="34" charset="-120"/>
+                        </a:rPr>
+                        <a:t>最高 ÷ t 日收盤</a:t>
+                      </a:r>
+                      <a:endParaRPr lang="en-US" sz="1300" dirty="0">
+                        <a:latin typeface="Microsoft JhengHei" charset="0"/>
+                        <a:ea typeface="Microsoft JhengHei" charset="0"/>
+                        <a:cs typeface="Microsoft JhengHei" charset="0"/>
+                      </a:endParaRPr>
+                    </a:p>
+                  </a:txBody>
+                  <a:tcPr marL="73152" marR="73152" marT="0" marB="0" anchor="ctr">
+                    <a:lnL w="9525" cap="flat" cmpd="sng" algn="ctr">
+                      <a:solidFill>
+                        <a:srgbClr val="D9E0E6"/>
+                      </a:solidFill>
+                      <a:prstDash val="solid"/>
+                      <a:round/>
+                      <a:headEnd type="none" w="med" len="med"/>
+                      <a:tailEnd type="none" w="med" len="med"/>
+                    </a:lnL>
+                    <a:lnR w="9525" cap="flat" cmpd="sng" algn="ctr">
+                      <a:solidFill>
+                        <a:srgbClr val="D9E0E6"/>
+                      </a:solidFill>
+                      <a:prstDash val="solid"/>
+                      <a:round/>
+                      <a:headEnd type="none" w="med" len="med"/>
+                      <a:tailEnd type="none" w="med" len="med"/>
+                    </a:lnR>
+                    <a:lnT w="9525" cap="flat" cmpd="sng" algn="ctr">
+                      <a:solidFill>
+                        <a:srgbClr val="D9E0E6"/>
+                      </a:solidFill>
+                      <a:prstDash val="solid"/>
+                      <a:round/>
+                      <a:headEnd type="none" w="med" len="med"/>
+                      <a:tailEnd type="none" w="med" len="med"/>
+                    </a:lnT>
+                    <a:lnB w="9525" cap="flat" cmpd="sng" algn="ctr">
+                      <a:solidFill>
+                        <a:srgbClr val="D9E0E6"/>
+                      </a:solidFill>
+                      <a:prstDash val="solid"/>
+                      <a:round/>
+                      <a:headEnd type="none" w="med" len="med"/>
+                      <a:tailEnd type="none" w="med" len="med"/>
+                    </a:lnB>
+                  </a:tcPr>
+                </a:tc>
+                <a:tc>
+                  <a:txBody>
+                    <a:bodyPr/>
+                    <a:lstStyle/>
+                    <a:p>
+                      <a:pPr algn="ctr" indent="0" marL="0">
+                        <a:buNone/>
+                      </a:pPr>
+                      <a:r>
+                        <a:rPr lang="en-US" sz="1300" dirty="0">
+                          <a:solidFill>
+                            <a:srgbClr val="13202A"/>
+                          </a:solidFill>
+                          <a:latin typeface="Microsoft JhengHei" pitchFamily="34" charset="0"/>
+                          <a:ea typeface="Microsoft JhengHei" pitchFamily="34" charset="-122"/>
+                          <a:cs typeface="Microsoft JhengHei" pitchFamily="34" charset="-120"/>
+                        </a:rPr>
+                        <a:t>−8.9%</a:t>
+                      </a:r>
+                      <a:endParaRPr lang="en-US" sz="1300" dirty="0">
+                        <a:latin typeface="Microsoft JhengHei" charset="0"/>
+                        <a:ea typeface="Microsoft JhengHei" charset="0"/>
+                        <a:cs typeface="Microsoft JhengHei" charset="0"/>
+                      </a:endParaRPr>
+                    </a:p>
+                  </a:txBody>
+                  <a:tcPr marL="73152" marR="73152" marT="0" marB="0" anchor="ctr">
+                    <a:lnL w="9525" cap="flat" cmpd="sng" algn="ctr">
+                      <a:solidFill>
+                        <a:srgbClr val="D9E0E6"/>
+                      </a:solidFill>
+                      <a:prstDash val="solid"/>
+                      <a:round/>
+                      <a:headEnd type="none" w="med" len="med"/>
+                      <a:tailEnd type="none" w="med" len="med"/>
+                    </a:lnL>
+                    <a:lnR w="9525" cap="flat" cmpd="sng" algn="ctr">
+                      <a:solidFill>
+                        <a:srgbClr val="D9E0E6"/>
+                      </a:solidFill>
+                      <a:prstDash val="solid"/>
+                      <a:round/>
+                      <a:headEnd type="none" w="med" len="med"/>
+                      <a:tailEnd type="none" w="med" len="med"/>
+                    </a:lnR>
+                    <a:lnT w="9525" cap="flat" cmpd="sng" algn="ctr">
+                      <a:solidFill>
+                        <a:srgbClr val="D9E0E6"/>
+                      </a:solidFill>
+                      <a:prstDash val="solid"/>
+                      <a:round/>
+                      <a:headEnd type="none" w="med" len="med"/>
+                      <a:tailEnd type="none" w="med" len="med"/>
+                    </a:lnT>
+                    <a:lnB w="9525" cap="flat" cmpd="sng" algn="ctr">
+                      <a:solidFill>
+                        <a:srgbClr val="D9E0E6"/>
+                      </a:solidFill>
+                      <a:prstDash val="solid"/>
+                      <a:round/>
+                      <a:headEnd type="none" w="med" len="med"/>
+                      <a:tailEnd type="none" w="med" len="med"/>
+                    </a:lnB>
+                    <a:solidFill>
+                      <a:srgbClr val="FFFFFF"/>
+                    </a:solidFill>
+                  </a:tcPr>
+                </a:tc>
+                <a:tc>
+                  <a:txBody>
+                    <a:bodyPr/>
+                    <a:lstStyle/>
+                    <a:p>
+                      <a:pPr algn="ctr" indent="0" marL="0">
+                        <a:buNone/>
+                      </a:pPr>
+                      <a:r>
+                        <a:rPr lang="en-US" sz="1300" dirty="0">
+                          <a:solidFill>
+                            <a:srgbClr val="13202A"/>
+                          </a:solidFill>
+                          <a:latin typeface="Microsoft JhengHei" pitchFamily="34" charset="0"/>
+                          <a:ea typeface="Microsoft JhengHei" pitchFamily="34" charset="-122"/>
+                          <a:cs typeface="Microsoft JhengHei" pitchFamily="34" charset="-120"/>
+                        </a:rPr>
+                        <a:t>−6.7%</a:t>
+                      </a:r>
+                      <a:endParaRPr lang="en-US" sz="1300" dirty="0">
+                        <a:latin typeface="Microsoft JhengHei" charset="0"/>
+                        <a:ea typeface="Microsoft JhengHei" charset="0"/>
+                        <a:cs typeface="Microsoft JhengHei" charset="0"/>
+                      </a:endParaRPr>
+                    </a:p>
+                  </a:txBody>
+                  <a:tcPr marL="73152" marR="73152" marT="0" marB="0" anchor="ctr">
+                    <a:lnL w="9525" cap="flat" cmpd="sng" algn="ctr">
+                      <a:solidFill>
+                        <a:srgbClr val="D9E0E6"/>
+                      </a:solidFill>
+                      <a:prstDash val="solid"/>
+                      <a:round/>
+                      <a:headEnd type="none" w="med" len="med"/>
+                      <a:tailEnd type="none" w="med" len="med"/>
+                    </a:lnL>
+                    <a:lnR w="9525" cap="flat" cmpd="sng" algn="ctr">
+                      <a:solidFill>
+                        <a:srgbClr val="D9E0E6"/>
+                      </a:solidFill>
+                      <a:prstDash val="solid"/>
+                      <a:round/>
+                      <a:headEnd type="none" w="med" len="med"/>
+                      <a:tailEnd type="none" w="med" len="med"/>
+                    </a:lnR>
+                    <a:lnT w="9525" cap="flat" cmpd="sng" algn="ctr">
+                      <a:solidFill>
+                        <a:srgbClr val="D9E0E6"/>
+                      </a:solidFill>
+                      <a:prstDash val="solid"/>
+                      <a:round/>
+                      <a:headEnd type="none" w="med" len="med"/>
+                      <a:tailEnd type="none" w="med" len="med"/>
+                    </a:lnT>
+                    <a:lnB w="9525" cap="flat" cmpd="sng" algn="ctr">
+                      <a:solidFill>
+                        <a:srgbClr val="D9E0E6"/>
+                      </a:solidFill>
+                      <a:prstDash val="solid"/>
+                      <a:round/>
+                      <a:headEnd type="none" w="med" len="med"/>
+                      <a:tailEnd type="none" w="med" len="med"/>
+                    </a:lnB>
+                    <a:solidFill>
+                      <a:srgbClr val="FFFFFF"/>
+                    </a:solidFill>
+                  </a:tcPr>
+                </a:tc>
+                <a:tc>
+                  <a:txBody>
+                    <a:bodyPr/>
+                    <a:lstStyle/>
+                    <a:p>
+                      <a:pPr algn="ctr" indent="0" marL="0">
+                        <a:buNone/>
+                      </a:pPr>
+                      <a:r>
+                        <a:rPr lang="en-US" sz="1300" dirty="0">
+                          <a:solidFill>
+                            <a:srgbClr val="13202A"/>
+                          </a:solidFill>
+                          <a:latin typeface="Microsoft JhengHei" pitchFamily="34" charset="0"/>
+                          <a:ea typeface="Microsoft JhengHei" pitchFamily="34" charset="-122"/>
+                          <a:cs typeface="Microsoft JhengHei" pitchFamily="34" charset="-120"/>
+                        </a:rPr>
+                        <a:t>−4.5%</a:t>
+                      </a:r>
+                      <a:endParaRPr lang="en-US" sz="1300" dirty="0">
+                        <a:latin typeface="Microsoft JhengHei" charset="0"/>
+                        <a:ea typeface="Microsoft JhengHei" charset="0"/>
+                        <a:cs typeface="Microsoft JhengHei" charset="0"/>
+                      </a:endParaRPr>
+                    </a:p>
+                  </a:txBody>
+                  <a:tcPr marL="73152" marR="73152" marT="0" marB="0" anchor="ctr">
+                    <a:lnL w="9525" cap="flat" cmpd="sng" algn="ctr">
+                      <a:solidFill>
+                        <a:srgbClr val="D9E0E6"/>
+                      </a:solidFill>
+                      <a:prstDash val="solid"/>
+                      <a:round/>
+                      <a:headEnd type="none" w="med" len="med"/>
+                      <a:tailEnd type="none" w="med" len="med"/>
+                    </a:lnL>
+                    <a:lnR w="9525" cap="flat" cmpd="sng" algn="ctr">
+                      <a:solidFill>
+                        <a:srgbClr val="D9E0E6"/>
+                      </a:solidFill>
+                      <a:prstDash val="solid"/>
+                      <a:round/>
+                      <a:headEnd type="none" w="med" len="med"/>
+                      <a:tailEnd type="none" w="med" len="med"/>
+                    </a:lnR>
+                    <a:lnT w="9525" cap="flat" cmpd="sng" algn="ctr">
+                      <a:solidFill>
+                        <a:srgbClr val="D9E0E6"/>
+                      </a:solidFill>
+                      <a:prstDash val="solid"/>
+                      <a:round/>
+                      <a:headEnd type="none" w="med" len="med"/>
+                      <a:tailEnd type="none" w="med" len="med"/>
+                    </a:lnT>
+                    <a:lnB w="9525" cap="flat" cmpd="sng" algn="ctr">
+                      <a:solidFill>
+                        <a:srgbClr val="D9E0E6"/>
+                      </a:solidFill>
+                      <a:prstDash val="solid"/>
+                      <a:round/>
+                      <a:headEnd type="none" w="med" len="med"/>
+                      <a:tailEnd type="none" w="med" len="med"/>
+                    </a:lnB>
+                    <a:solidFill>
+                      <a:srgbClr val="FFFFFF"/>
+                    </a:solidFill>
+                  </a:tcPr>
+                </a:tc>
+                <a:tc>
+                  <a:txBody>
+                    <a:bodyPr/>
+                    <a:lstStyle/>
+                    <a:p>
+                      <a:pPr algn="ctr" indent="0" marL="0">
+                        <a:buNone/>
+                      </a:pPr>
+                      <a:r>
+                        <a:rPr lang="en-US" sz="1300" dirty="0">
+                          <a:solidFill>
+                            <a:srgbClr val="13202A"/>
+                          </a:solidFill>
+                          <a:latin typeface="Microsoft JhengHei" pitchFamily="34" charset="0"/>
+                          <a:ea typeface="Microsoft JhengHei" pitchFamily="34" charset="-122"/>
+                          <a:cs typeface="Microsoft JhengHei" pitchFamily="34" charset="-120"/>
+                        </a:rPr>
+                        <a:t>−4.0%</a:t>
+                      </a:r>
+                      <a:endParaRPr lang="en-US" sz="1300" dirty="0">
+                        <a:latin typeface="Microsoft JhengHei" charset="0"/>
+                        <a:ea typeface="Microsoft JhengHei" charset="0"/>
+                        <a:cs typeface="Microsoft JhengHei" charset="0"/>
+                      </a:endParaRPr>
+                    </a:p>
+                  </a:txBody>
+                  <a:tcPr marL="73152" marR="73152" marT="0" marB="0" anchor="ctr">
+                    <a:lnL w="9525" cap="flat" cmpd="sng" algn="ctr">
+                      <a:solidFill>
+                        <a:srgbClr val="D9E0E6"/>
+                      </a:solidFill>
+                      <a:prstDash val="solid"/>
+                      <a:round/>
+                      <a:headEnd type="none" w="med" len="med"/>
+                      <a:tailEnd type="none" w="med" len="med"/>
+                    </a:lnL>
+                    <a:lnR w="9525" cap="flat" cmpd="sng" algn="ctr">
+                      <a:solidFill>
+                        <a:srgbClr val="D9E0E6"/>
+                      </a:solidFill>
+                      <a:prstDash val="solid"/>
+                      <a:round/>
+                      <a:headEnd type="none" w="med" len="med"/>
+                      <a:tailEnd type="none" w="med" len="med"/>
+                    </a:lnR>
+                    <a:lnT w="9525" cap="flat" cmpd="sng" algn="ctr">
+                      <a:solidFill>
+                        <a:srgbClr val="D9E0E6"/>
+                      </a:solidFill>
+                      <a:prstDash val="solid"/>
+                      <a:round/>
+                      <a:headEnd type="none" w="med" len="med"/>
+                      <a:tailEnd type="none" w="med" len="med"/>
+                    </a:lnT>
+                    <a:lnB w="9525" cap="flat" cmpd="sng" algn="ctr">
+                      <a:solidFill>
+                        <a:srgbClr val="D9E0E6"/>
+                      </a:solidFill>
+                      <a:prstDash val="solid"/>
+                      <a:round/>
+                      <a:headEnd type="none" w="med" len="med"/>
+                      <a:tailEnd type="none" w="med" len="med"/>
+                    </a:lnB>
+                    <a:solidFill>
+                      <a:srgbClr val="FFFFFF"/>
+                    </a:solidFill>
+                  </a:tcPr>
+                </a:tc>
+                <a:tc>
+                  <a:txBody>
+                    <a:bodyPr/>
+                    <a:lstStyle/>
+                    <a:p>
+                      <a:pPr algn="ctr" indent="0" marL="0">
+                        <a:buNone/>
+                      </a:pPr>
+                      <a:r>
+                        <a:rPr lang="en-US" sz="1300" dirty="0">
+                          <a:solidFill>
+                            <a:srgbClr val="13202A"/>
+                          </a:solidFill>
+                          <a:latin typeface="Microsoft JhengHei" pitchFamily="34" charset="0"/>
+                          <a:ea typeface="Microsoft JhengHei" pitchFamily="34" charset="-122"/>
+                          <a:cs typeface="Microsoft JhengHei" pitchFamily="34" charset="-120"/>
+                        </a:rPr>
+                        <a:t>−2.0%</a:t>
+                      </a:r>
+                      <a:endParaRPr lang="en-US" sz="1300" dirty="0">
+                        <a:latin typeface="Microsoft JhengHei" charset="0"/>
+                        <a:ea typeface="Microsoft JhengHei" charset="0"/>
+                        <a:cs typeface="Microsoft JhengHei" charset="0"/>
+                      </a:endParaRPr>
+                    </a:p>
+                  </a:txBody>
+                  <a:tcPr marL="73152" marR="73152" marT="0" marB="0" anchor="ctr">
+                    <a:lnL w="9525" cap="flat" cmpd="sng" algn="ctr">
+                      <a:solidFill>
+                        <a:srgbClr val="D9E0E6"/>
+                      </a:solidFill>
+                      <a:prstDash val="solid"/>
+                      <a:round/>
+                      <a:headEnd type="none" w="med" len="med"/>
+                      <a:tailEnd type="none" w="med" len="med"/>
+                    </a:lnL>
+                    <a:lnR w="9525" cap="flat" cmpd="sng" algn="ctr">
+                      <a:solidFill>
+                        <a:srgbClr val="D9E0E6"/>
+                      </a:solidFill>
+                      <a:prstDash val="solid"/>
+                      <a:round/>
+                      <a:headEnd type="none" w="med" len="med"/>
+                      <a:tailEnd type="none" w="med" len="med"/>
+                    </a:lnR>
+                    <a:lnT w="9525" cap="flat" cmpd="sng" algn="ctr">
+                      <a:solidFill>
+                        <a:srgbClr val="D9E0E6"/>
+                      </a:solidFill>
+                      <a:prstDash val="solid"/>
+                      <a:round/>
+                      <a:headEnd type="none" w="med" len="med"/>
+                      <a:tailEnd type="none" w="med" len="med"/>
+                    </a:lnT>
+                    <a:lnB w="9525" cap="flat" cmpd="sng" algn="ctr">
+                      <a:solidFill>
+                        <a:srgbClr val="D9E0E6"/>
+                      </a:solidFill>
+                      <a:prstDash val="solid"/>
+                      <a:round/>
+                      <a:headEnd type="none" w="med" len="med"/>
+                      <a:tailEnd type="none" w="med" len="med"/>
+                    </a:lnB>
+                    <a:solidFill>
+                      <a:srgbClr val="FFFFFF"/>
+                    </a:solidFill>
+                  </a:tcPr>
+                </a:tc>
+                <a:tc>
+                  <a:txBody>
+                    <a:bodyPr/>
+                    <a:lstStyle/>
+                    <a:p>
+                      <a:pPr algn="ctr" indent="0" marL="0">
+                        <a:buNone/>
+                      </a:pPr>
+                      <a:r>
+                        <a:rPr lang="en-US" sz="1300" dirty="0">
+                          <a:solidFill>
+                            <a:srgbClr val="13202A"/>
+                          </a:solidFill>
+                          <a:latin typeface="Microsoft JhengHei" pitchFamily="34" charset="0"/>
+                          <a:ea typeface="Microsoft JhengHei" pitchFamily="34" charset="-122"/>
+                          <a:cs typeface="Microsoft JhengHei" pitchFamily="34" charset="-120"/>
+                        </a:rPr>
+                        <a:t>+0.5%</a:t>
+                      </a:r>
+                      <a:endParaRPr lang="en-US" sz="1300" dirty="0">
+                        <a:latin typeface="Microsoft JhengHei" charset="0"/>
+                        <a:ea typeface="Microsoft JhengHei" charset="0"/>
+                        <a:cs typeface="Microsoft JhengHei" charset="0"/>
+                      </a:endParaRPr>
+                    </a:p>
+                  </a:txBody>
+                  <a:tcPr marL="73152" marR="73152" marT="0" marB="0" anchor="ctr">
+                    <a:lnL w="9525" cap="flat" cmpd="sng" algn="ctr">
+                      <a:solidFill>
+                        <a:srgbClr val="D9E0E6"/>
+                      </a:solidFill>
+                      <a:prstDash val="solid"/>
+                      <a:round/>
+                      <a:headEnd type="none" w="med" len="med"/>
+                      <a:tailEnd type="none" w="med" len="med"/>
+                    </a:lnL>
+                    <a:lnR w="9525" cap="flat" cmpd="sng" algn="ctr">
+                      <a:solidFill>
+                        <a:srgbClr val="D9E0E6"/>
+                      </a:solidFill>
+                      <a:prstDash val="solid"/>
+                      <a:round/>
+                      <a:headEnd type="none" w="med" len="med"/>
+                      <a:tailEnd type="none" w="med" len="med"/>
+                    </a:lnR>
+                    <a:lnT w="9525" cap="flat" cmpd="sng" algn="ctr">
+                      <a:solidFill>
+                        <a:srgbClr val="D9E0E6"/>
+                      </a:solidFill>
+                      <a:prstDash val="solid"/>
+                      <a:round/>
+                      <a:headEnd type="none" w="med" len="med"/>
+                      <a:tailEnd type="none" w="med" len="med"/>
+                    </a:lnT>
+                    <a:lnB w="9525" cap="flat" cmpd="sng" algn="ctr">
+                      <a:solidFill>
+                        <a:srgbClr val="D9E0E6"/>
+                      </a:solidFill>
+                      <a:prstDash val="solid"/>
+                      <a:round/>
+                      <a:headEnd type="none" w="med" len="med"/>
+                      <a:tailEnd type="none" w="med" len="med"/>
+                    </a:lnB>
+                    <a:solidFill>
+                      <a:srgbClr val="FCE9E0"/>
+                    </a:solidFill>
+                  </a:tcPr>
+                </a:tc>
+              </a:tr>
+              <a:tr h="365760">
+                <a:tc>
+                  <a:txBody>
+                    <a:bodyPr/>
+                    <a:lstStyle/>
+                    <a:p>
+                      <a:pPr indent="0" marL="0">
+                        <a:buNone/>
+                      </a:pPr>
+                      <a:r>
+                        <a:rPr lang="en-US" sz="1300" b="1" dirty="0">
+                          <a:solidFill>
+                            <a:srgbClr val="13202A"/>
+                          </a:solidFill>
+                          <a:latin typeface="Microsoft JhengHei" pitchFamily="34" charset="0"/>
+                          <a:ea typeface="Microsoft JhengHei" pitchFamily="34" charset="-122"/>
+                          <a:cs typeface="Microsoft JhengHei" pitchFamily="34" charset="-120"/>
+                        </a:rPr>
+                        <a:t>低</a:t>
+                      </a:r>
+                      <a:endParaRPr lang="en-US" sz="1300" dirty="0">
+                        <a:latin typeface="Microsoft JhengHei" charset="0"/>
+                        <a:ea typeface="Microsoft JhengHei" charset="0"/>
+                        <a:cs typeface="Microsoft JhengHei" charset="0"/>
+                      </a:endParaRPr>
+                    </a:p>
+                  </a:txBody>
+                  <a:tcPr marL="73152" marR="73152" marT="0" marB="0" anchor="ctr">
+                    <a:lnL w="9525" cap="flat" cmpd="sng" algn="ctr">
+                      <a:solidFill>
+                        <a:srgbClr val="D9E0E6"/>
+                      </a:solidFill>
+                      <a:prstDash val="solid"/>
+                      <a:round/>
+                      <a:headEnd type="none" w="med" len="med"/>
+                      <a:tailEnd type="none" w="med" len="med"/>
+                    </a:lnL>
+                    <a:lnR w="9525" cap="flat" cmpd="sng" algn="ctr">
+                      <a:solidFill>
+                        <a:srgbClr val="D9E0E6"/>
+                      </a:solidFill>
+                      <a:prstDash val="solid"/>
+                      <a:round/>
+                      <a:headEnd type="none" w="med" len="med"/>
+                      <a:tailEnd type="none" w="med" len="med"/>
+                    </a:lnR>
+                    <a:lnT w="9525" cap="flat" cmpd="sng" algn="ctr">
+                      <a:solidFill>
+                        <a:srgbClr val="D9E0E6"/>
+                      </a:solidFill>
+                      <a:prstDash val="solid"/>
+                      <a:round/>
+                      <a:headEnd type="none" w="med" len="med"/>
+                      <a:tailEnd type="none" w="med" len="med"/>
+                    </a:lnT>
+                    <a:lnB w="9525" cap="flat" cmpd="sng" algn="ctr">
+                      <a:solidFill>
+                        <a:srgbClr val="D9E0E6"/>
+                      </a:solidFill>
+                      <a:prstDash val="solid"/>
+                      <a:round/>
+                      <a:headEnd type="none" w="med" len="med"/>
+                      <a:tailEnd type="none" w="med" len="med"/>
+                    </a:lnB>
+                  </a:tcPr>
+                </a:tc>
+                <a:tc>
+                  <a:txBody>
+                    <a:bodyPr/>
+                    <a:lstStyle/>
+                    <a:p>
+                      <a:pPr indent="0" marL="0">
+                        <a:buNone/>
+                      </a:pPr>
+                      <a:r>
+                        <a:rPr lang="en-US" sz="1300" dirty="0">
+                          <a:solidFill>
+                            <a:srgbClr val="47545F"/>
+                          </a:solidFill>
+                          <a:latin typeface="Microsoft JhengHei" pitchFamily="34" charset="0"/>
+                          <a:ea typeface="Microsoft JhengHei" pitchFamily="34" charset="-122"/>
+                          <a:cs typeface="Microsoft JhengHei" pitchFamily="34" charset="-120"/>
+                        </a:rPr>
+                        <a:t>最低 ÷ t 日收盤</a:t>
+                      </a:r>
+                      <a:endParaRPr lang="en-US" sz="1300" dirty="0">
+                        <a:latin typeface="Microsoft JhengHei" charset="0"/>
+                        <a:ea typeface="Microsoft JhengHei" charset="0"/>
+                        <a:cs typeface="Microsoft JhengHei" charset="0"/>
+                      </a:endParaRPr>
+                    </a:p>
+                  </a:txBody>
+                  <a:tcPr marL="73152" marR="73152" marT="0" marB="0" anchor="ctr">
+                    <a:lnL w="9525" cap="flat" cmpd="sng" algn="ctr">
+                      <a:solidFill>
+                        <a:srgbClr val="D9E0E6"/>
+                      </a:solidFill>
+                      <a:prstDash val="solid"/>
+                      <a:round/>
+                      <a:headEnd type="none" w="med" len="med"/>
+                      <a:tailEnd type="none" w="med" len="med"/>
+                    </a:lnL>
+                    <a:lnR w="9525" cap="flat" cmpd="sng" algn="ctr">
+                      <a:solidFill>
+                        <a:srgbClr val="D9E0E6"/>
+                      </a:solidFill>
+                      <a:prstDash val="solid"/>
+                      <a:round/>
+                      <a:headEnd type="none" w="med" len="med"/>
+                      <a:tailEnd type="none" w="med" len="med"/>
+                    </a:lnR>
+                    <a:lnT w="9525" cap="flat" cmpd="sng" algn="ctr">
+                      <a:solidFill>
+                        <a:srgbClr val="D9E0E6"/>
+                      </a:solidFill>
+                      <a:prstDash val="solid"/>
+                      <a:round/>
+                      <a:headEnd type="none" w="med" len="med"/>
+                      <a:tailEnd type="none" w="med" len="med"/>
+                    </a:lnT>
+                    <a:lnB w="9525" cap="flat" cmpd="sng" algn="ctr">
+                      <a:solidFill>
+                        <a:srgbClr val="D9E0E6"/>
+                      </a:solidFill>
+                      <a:prstDash val="solid"/>
+                      <a:round/>
+                      <a:headEnd type="none" w="med" len="med"/>
+                      <a:tailEnd type="none" w="med" len="med"/>
+                    </a:lnB>
+                  </a:tcPr>
+                </a:tc>
+                <a:tc>
+                  <a:txBody>
+                    <a:bodyPr/>
+                    <a:lstStyle/>
+                    <a:p>
+                      <a:pPr algn="ctr" indent="0" marL="0">
+                        <a:buNone/>
+                      </a:pPr>
+                      <a:r>
+                        <a:rPr lang="en-US" sz="1300" dirty="0">
+                          <a:solidFill>
+                            <a:srgbClr val="13202A"/>
+                          </a:solidFill>
+                          <a:latin typeface="Microsoft JhengHei" pitchFamily="34" charset="0"/>
+                          <a:ea typeface="Microsoft JhengHei" pitchFamily="34" charset="-122"/>
+                          <a:cs typeface="Microsoft JhengHei" pitchFamily="34" charset="-120"/>
+                        </a:rPr>
+                        <a:t>−9.9%</a:t>
+                      </a:r>
+                      <a:endParaRPr lang="en-US" sz="1300" dirty="0">
+                        <a:latin typeface="Microsoft JhengHei" charset="0"/>
+                        <a:ea typeface="Microsoft JhengHei" charset="0"/>
+                        <a:cs typeface="Microsoft JhengHei" charset="0"/>
+                      </a:endParaRPr>
+                    </a:p>
+                  </a:txBody>
+                  <a:tcPr marL="73152" marR="73152" marT="0" marB="0" anchor="ctr">
+                    <a:lnL w="9525" cap="flat" cmpd="sng" algn="ctr">
+                      <a:solidFill>
+                        <a:srgbClr val="D9E0E6"/>
+                      </a:solidFill>
+                      <a:prstDash val="solid"/>
+                      <a:round/>
+                      <a:headEnd type="none" w="med" len="med"/>
+                      <a:tailEnd type="none" w="med" len="med"/>
+                    </a:lnL>
+                    <a:lnR w="9525" cap="flat" cmpd="sng" algn="ctr">
+                      <a:solidFill>
+                        <a:srgbClr val="D9E0E6"/>
+                      </a:solidFill>
+                      <a:prstDash val="solid"/>
+                      <a:round/>
+                      <a:headEnd type="none" w="med" len="med"/>
+                      <a:tailEnd type="none" w="med" len="med"/>
+                    </a:lnR>
+                    <a:lnT w="9525" cap="flat" cmpd="sng" algn="ctr">
+                      <a:solidFill>
+                        <a:srgbClr val="D9E0E6"/>
+                      </a:solidFill>
+                      <a:prstDash val="solid"/>
+                      <a:round/>
+                      <a:headEnd type="none" w="med" len="med"/>
+                      <a:tailEnd type="none" w="med" len="med"/>
+                    </a:lnT>
+                    <a:lnB w="9525" cap="flat" cmpd="sng" algn="ctr">
+                      <a:solidFill>
+                        <a:srgbClr val="D9E0E6"/>
+                      </a:solidFill>
+                      <a:prstDash val="solid"/>
+                      <a:round/>
+                      <a:headEnd type="none" w="med" len="med"/>
+                      <a:tailEnd type="none" w="med" len="med"/>
+                    </a:lnB>
+                    <a:solidFill>
+                      <a:srgbClr val="FFFFFF"/>
+                    </a:solidFill>
+                  </a:tcPr>
+                </a:tc>
+                <a:tc>
+                  <a:txBody>
+                    <a:bodyPr/>
+                    <a:lstStyle/>
+                    <a:p>
+                      <a:pPr algn="ctr" indent="0" marL="0">
+                        <a:buNone/>
+                      </a:pPr>
+                      <a:r>
+                        <a:rPr lang="en-US" sz="1300" dirty="0">
+                          <a:solidFill>
+                            <a:srgbClr val="13202A"/>
+                          </a:solidFill>
+                          <a:latin typeface="Microsoft JhengHei" pitchFamily="34" charset="0"/>
+                          <a:ea typeface="Microsoft JhengHei" pitchFamily="34" charset="-122"/>
+                          <a:cs typeface="Microsoft JhengHei" pitchFamily="34" charset="-120"/>
+                        </a:rPr>
+                        <a:t>−8.7%</a:t>
+                      </a:r>
+                      <a:endParaRPr lang="en-US" sz="1300" dirty="0">
+                        <a:latin typeface="Microsoft JhengHei" charset="0"/>
+                        <a:ea typeface="Microsoft JhengHei" charset="0"/>
+                        <a:cs typeface="Microsoft JhengHei" charset="0"/>
+                      </a:endParaRPr>
+                    </a:p>
+                  </a:txBody>
+                  <a:tcPr marL="73152" marR="73152" marT="0" marB="0" anchor="ctr">
+                    <a:lnL w="9525" cap="flat" cmpd="sng" algn="ctr">
+                      <a:solidFill>
+                        <a:srgbClr val="D9E0E6"/>
+                      </a:solidFill>
+                      <a:prstDash val="solid"/>
+                      <a:round/>
+                      <a:headEnd type="none" w="med" len="med"/>
+                      <a:tailEnd type="none" w="med" len="med"/>
+                    </a:lnL>
+                    <a:lnR w="9525" cap="flat" cmpd="sng" algn="ctr">
+                      <a:solidFill>
+                        <a:srgbClr val="D9E0E6"/>
+                      </a:solidFill>
+                      <a:prstDash val="solid"/>
+                      <a:round/>
+                      <a:headEnd type="none" w="med" len="med"/>
+                      <a:tailEnd type="none" w="med" len="med"/>
+                    </a:lnR>
+                    <a:lnT w="9525" cap="flat" cmpd="sng" algn="ctr">
+                      <a:solidFill>
+                        <a:srgbClr val="D9E0E6"/>
+                      </a:solidFill>
+                      <a:prstDash val="solid"/>
+                      <a:round/>
+                      <a:headEnd type="none" w="med" len="med"/>
+                      <a:tailEnd type="none" w="med" len="med"/>
+                    </a:lnT>
+                    <a:lnB w="9525" cap="flat" cmpd="sng" algn="ctr">
+                      <a:solidFill>
+                        <a:srgbClr val="D9E0E6"/>
+                      </a:solidFill>
+                      <a:prstDash val="solid"/>
+                      <a:round/>
+                      <a:headEnd type="none" w="med" len="med"/>
+                      <a:tailEnd type="none" w="med" len="med"/>
+                    </a:lnB>
+                    <a:solidFill>
+                      <a:srgbClr val="FFFFFF"/>
+                    </a:solidFill>
+                  </a:tcPr>
+                </a:tc>
+                <a:tc>
+                  <a:txBody>
+                    <a:bodyPr/>
+                    <a:lstStyle/>
+                    <a:p>
+                      <a:pPr algn="ctr" indent="0" marL="0">
+                        <a:buNone/>
+                      </a:pPr>
+                      <a:r>
+                        <a:rPr lang="en-US" sz="1300" dirty="0">
+                          <a:solidFill>
+                            <a:srgbClr val="13202A"/>
+                          </a:solidFill>
+                          <a:latin typeface="Microsoft JhengHei" pitchFamily="34" charset="0"/>
+                          <a:ea typeface="Microsoft JhengHei" pitchFamily="34" charset="-122"/>
+                          <a:cs typeface="Microsoft JhengHei" pitchFamily="34" charset="-120"/>
+                        </a:rPr>
+                        <a:t>−6.9%</a:t>
+                      </a:r>
+                      <a:endParaRPr lang="en-US" sz="1300" dirty="0">
+                        <a:latin typeface="Microsoft JhengHei" charset="0"/>
+                        <a:ea typeface="Microsoft JhengHei" charset="0"/>
+                        <a:cs typeface="Microsoft JhengHei" charset="0"/>
+                      </a:endParaRPr>
+                    </a:p>
+                  </a:txBody>
+                  <a:tcPr marL="73152" marR="73152" marT="0" marB="0" anchor="ctr">
+                    <a:lnL w="9525" cap="flat" cmpd="sng" algn="ctr">
+                      <a:solidFill>
+                        <a:srgbClr val="D9E0E6"/>
+                      </a:solidFill>
+                      <a:prstDash val="solid"/>
+                      <a:round/>
+                      <a:headEnd type="none" w="med" len="med"/>
+                      <a:tailEnd type="none" w="med" len="med"/>
+                    </a:lnL>
+                    <a:lnR w="9525" cap="flat" cmpd="sng" algn="ctr">
+                      <a:solidFill>
+                        <a:srgbClr val="D9E0E6"/>
+                      </a:solidFill>
+                      <a:prstDash val="solid"/>
+                      <a:round/>
+                      <a:headEnd type="none" w="med" len="med"/>
+                      <a:tailEnd type="none" w="med" len="med"/>
+                    </a:lnR>
+                    <a:lnT w="9525" cap="flat" cmpd="sng" algn="ctr">
+                      <a:solidFill>
+                        <a:srgbClr val="D9E0E6"/>
+                      </a:solidFill>
+                      <a:prstDash val="solid"/>
+                      <a:round/>
+                      <a:headEnd type="none" w="med" len="med"/>
+                      <a:tailEnd type="none" w="med" len="med"/>
+                    </a:lnT>
+                    <a:lnB w="9525" cap="flat" cmpd="sng" algn="ctr">
+                      <a:solidFill>
+                        <a:srgbClr val="D9E0E6"/>
+                      </a:solidFill>
+                      <a:prstDash val="solid"/>
+                      <a:round/>
+                      <a:headEnd type="none" w="med" len="med"/>
+                      <a:tailEnd type="none" w="med" len="med"/>
+                    </a:lnB>
+                    <a:solidFill>
+                      <a:srgbClr val="FFFFFF"/>
+                    </a:solidFill>
+                  </a:tcPr>
+                </a:tc>
+                <a:tc>
+                  <a:txBody>
+                    <a:bodyPr/>
+                    <a:lstStyle/>
+                    <a:p>
+                      <a:pPr algn="ctr" indent="0" marL="0">
+                        <a:buNone/>
+                      </a:pPr>
+                      <a:r>
+                        <a:rPr lang="en-US" sz="1300" dirty="0">
+                          <a:solidFill>
+                            <a:srgbClr val="13202A"/>
+                          </a:solidFill>
+                          <a:latin typeface="Microsoft JhengHei" pitchFamily="34" charset="0"/>
+                          <a:ea typeface="Microsoft JhengHei" pitchFamily="34" charset="-122"/>
+                          <a:cs typeface="Microsoft JhengHei" pitchFamily="34" charset="-120"/>
+                        </a:rPr>
+                        <a:t>−5.7%</a:t>
+                      </a:r>
+                      <a:endParaRPr lang="en-US" sz="1300" dirty="0">
+                        <a:latin typeface="Microsoft JhengHei" charset="0"/>
+                        <a:ea typeface="Microsoft JhengHei" charset="0"/>
+                        <a:cs typeface="Microsoft JhengHei" charset="0"/>
+                      </a:endParaRPr>
+                    </a:p>
+                  </a:txBody>
+                  <a:tcPr marL="73152" marR="73152" marT="0" marB="0" anchor="ctr">
+                    <a:lnL w="9525" cap="flat" cmpd="sng" algn="ctr">
+                      <a:solidFill>
+                        <a:srgbClr val="D9E0E6"/>
+                      </a:solidFill>
+                      <a:prstDash val="solid"/>
+                      <a:round/>
+                      <a:headEnd type="none" w="med" len="med"/>
+                      <a:tailEnd type="none" w="med" len="med"/>
+                    </a:lnL>
+                    <a:lnR w="9525" cap="flat" cmpd="sng" algn="ctr">
+                      <a:solidFill>
+                        <a:srgbClr val="D9E0E6"/>
+                      </a:solidFill>
+                      <a:prstDash val="solid"/>
+                      <a:round/>
+                      <a:headEnd type="none" w="med" len="med"/>
+                      <a:tailEnd type="none" w="med" len="med"/>
+                    </a:lnR>
+                    <a:lnT w="9525" cap="flat" cmpd="sng" algn="ctr">
+                      <a:solidFill>
+                        <a:srgbClr val="D9E0E6"/>
+                      </a:solidFill>
+                      <a:prstDash val="solid"/>
+                      <a:round/>
+                      <a:headEnd type="none" w="med" len="med"/>
+                      <a:tailEnd type="none" w="med" len="med"/>
+                    </a:lnT>
+                    <a:lnB w="9525" cap="flat" cmpd="sng" algn="ctr">
+                      <a:solidFill>
+                        <a:srgbClr val="D9E0E6"/>
+                      </a:solidFill>
+                      <a:prstDash val="solid"/>
+                      <a:round/>
+                      <a:headEnd type="none" w="med" len="med"/>
+                      <a:tailEnd type="none" w="med" len="med"/>
+                    </a:lnB>
+                    <a:solidFill>
+                      <a:srgbClr val="FFFFFF"/>
+                    </a:solidFill>
+                  </a:tcPr>
+                </a:tc>
+                <a:tc>
+                  <a:txBody>
+                    <a:bodyPr/>
+                    <a:lstStyle/>
+                    <a:p>
+                      <a:pPr algn="ctr" indent="0" marL="0">
+                        <a:buNone/>
+                      </a:pPr>
+                      <a:r>
+                        <a:rPr lang="en-US" sz="1300" dirty="0">
+                          <a:solidFill>
+                            <a:srgbClr val="13202A"/>
+                          </a:solidFill>
+                          <a:latin typeface="Microsoft JhengHei" pitchFamily="34" charset="0"/>
+                          <a:ea typeface="Microsoft JhengHei" pitchFamily="34" charset="-122"/>
+                          <a:cs typeface="Microsoft JhengHei" pitchFamily="34" charset="-120"/>
+                        </a:rPr>
+                        <a:t>−5.0%</a:t>
+                      </a:r>
+                      <a:endParaRPr lang="en-US" sz="1300" dirty="0">
+                        <a:latin typeface="Microsoft JhengHei" charset="0"/>
+                        <a:ea typeface="Microsoft JhengHei" charset="0"/>
+                        <a:cs typeface="Microsoft JhengHei" charset="0"/>
+                      </a:endParaRPr>
+                    </a:p>
+                  </a:txBody>
+                  <a:tcPr marL="73152" marR="73152" marT="0" marB="0" anchor="ctr">
+                    <a:lnL w="9525" cap="flat" cmpd="sng" algn="ctr">
+                      <a:solidFill>
+                        <a:srgbClr val="D9E0E6"/>
+                      </a:solidFill>
+                      <a:prstDash val="solid"/>
+                      <a:round/>
+                      <a:headEnd type="none" w="med" len="med"/>
+                      <a:tailEnd type="none" w="med" len="med"/>
+                    </a:lnL>
+                    <a:lnR w="9525" cap="flat" cmpd="sng" algn="ctr">
+                      <a:solidFill>
+                        <a:srgbClr val="D9E0E6"/>
+                      </a:solidFill>
+                      <a:prstDash val="solid"/>
+                      <a:round/>
+                      <a:headEnd type="none" w="med" len="med"/>
+                      <a:tailEnd type="none" w="med" len="med"/>
+                    </a:lnR>
+                    <a:lnT w="9525" cap="flat" cmpd="sng" algn="ctr">
+                      <a:solidFill>
+                        <a:srgbClr val="D9E0E6"/>
+                      </a:solidFill>
+                      <a:prstDash val="solid"/>
+                      <a:round/>
+                      <a:headEnd type="none" w="med" len="med"/>
+                      <a:tailEnd type="none" w="med" len="med"/>
+                    </a:lnT>
+                    <a:lnB w="9525" cap="flat" cmpd="sng" algn="ctr">
+                      <a:solidFill>
+                        <a:srgbClr val="D9E0E6"/>
+                      </a:solidFill>
+                      <a:prstDash val="solid"/>
+                      <a:round/>
+                      <a:headEnd type="none" w="med" len="med"/>
+                      <a:tailEnd type="none" w="med" len="med"/>
+                    </a:lnB>
+                    <a:solidFill>
+                      <a:srgbClr val="FFFFFF"/>
+                    </a:solidFill>
+                  </a:tcPr>
+                </a:tc>
+                <a:tc>
+                  <a:txBody>
+                    <a:bodyPr/>
+                    <a:lstStyle/>
+                    <a:p>
+                      <a:pPr algn="ctr" indent="0" marL="0">
+                        <a:buNone/>
+                      </a:pPr>
+                      <a:r>
+                        <a:rPr lang="en-US" sz="1300" dirty="0">
+                          <a:solidFill>
+                            <a:srgbClr val="13202A"/>
+                          </a:solidFill>
+                          <a:latin typeface="Microsoft JhengHei" pitchFamily="34" charset="0"/>
+                          <a:ea typeface="Microsoft JhengHei" pitchFamily="34" charset="-122"/>
+                          <a:cs typeface="Microsoft JhengHei" pitchFamily="34" charset="-120"/>
+                        </a:rPr>
+                        <a:t>−1.0%</a:t>
+                      </a:r>
+                      <a:endParaRPr lang="en-US" sz="1300" dirty="0">
+                        <a:latin typeface="Microsoft JhengHei" charset="0"/>
+                        <a:ea typeface="Microsoft JhengHei" charset="0"/>
+                        <a:cs typeface="Microsoft JhengHei" charset="0"/>
+                      </a:endParaRPr>
+                    </a:p>
+                  </a:txBody>
+                  <a:tcPr marL="73152" marR="73152" marT="0" marB="0" anchor="ctr">
+                    <a:lnL w="9525" cap="flat" cmpd="sng" algn="ctr">
+                      <a:solidFill>
+                        <a:srgbClr val="D9E0E6"/>
+                      </a:solidFill>
+                      <a:prstDash val="solid"/>
+                      <a:round/>
+                      <a:headEnd type="none" w="med" len="med"/>
+                      <a:tailEnd type="none" w="med" len="med"/>
+                    </a:lnL>
+                    <a:lnR w="9525" cap="flat" cmpd="sng" algn="ctr">
+                      <a:solidFill>
+                        <a:srgbClr val="D9E0E6"/>
+                      </a:solidFill>
+                      <a:prstDash val="solid"/>
+                      <a:round/>
+                      <a:headEnd type="none" w="med" len="med"/>
+                      <a:tailEnd type="none" w="med" len="med"/>
+                    </a:lnR>
+                    <a:lnT w="9525" cap="flat" cmpd="sng" algn="ctr">
+                      <a:solidFill>
+                        <a:srgbClr val="D9E0E6"/>
+                      </a:solidFill>
+                      <a:prstDash val="solid"/>
+                      <a:round/>
+                      <a:headEnd type="none" w="med" len="med"/>
+                      <a:tailEnd type="none" w="med" len="med"/>
+                    </a:lnT>
+                    <a:lnB w="9525" cap="flat" cmpd="sng" algn="ctr">
+                      <a:solidFill>
+                        <a:srgbClr val="D9E0E6"/>
+                      </a:solidFill>
+                      <a:prstDash val="solid"/>
+                      <a:round/>
+                      <a:headEnd type="none" w="med" len="med"/>
+                      <a:tailEnd type="none" w="med" len="med"/>
+                    </a:lnB>
+                    <a:solidFill>
+                      <a:srgbClr val="FCE9E0"/>
+                    </a:solidFill>
+                  </a:tcPr>
+                </a:tc>
+              </a:tr>
+              <a:tr h="365760">
+                <a:tc>
+                  <a:txBody>
+                    <a:bodyPr/>
+                    <a:lstStyle/>
+                    <a:p>
+                      <a:pPr indent="0" marL="0">
+                        <a:buNone/>
+                      </a:pPr>
+                      <a:r>
+                        <a:rPr lang="en-US" sz="1300" b="1" dirty="0">
+                          <a:solidFill>
+                            <a:srgbClr val="13202A"/>
+                          </a:solidFill>
+                          <a:latin typeface="Microsoft JhengHei" pitchFamily="34" charset="0"/>
+                          <a:ea typeface="Microsoft JhengHei" pitchFamily="34" charset="-122"/>
+                          <a:cs typeface="Microsoft JhengHei" pitchFamily="34" charset="-120"/>
+                        </a:rPr>
+                        <a:t>收</a:t>
+                      </a:r>
+                      <a:endParaRPr lang="en-US" sz="1300" dirty="0">
+                        <a:latin typeface="Microsoft JhengHei" charset="0"/>
+                        <a:ea typeface="Microsoft JhengHei" charset="0"/>
+                        <a:cs typeface="Microsoft JhengHei" charset="0"/>
+                      </a:endParaRPr>
+                    </a:p>
+                  </a:txBody>
+                  <a:tcPr marL="73152" marR="73152" marT="0" marB="0" anchor="ctr">
+                    <a:lnL w="9525" cap="flat" cmpd="sng" algn="ctr">
+                      <a:solidFill>
+                        <a:srgbClr val="D9E0E6"/>
+                      </a:solidFill>
+                      <a:prstDash val="solid"/>
+                      <a:round/>
+                      <a:headEnd type="none" w="med" len="med"/>
+                      <a:tailEnd type="none" w="med" len="med"/>
+                    </a:lnL>
+                    <a:lnR w="9525" cap="flat" cmpd="sng" algn="ctr">
+                      <a:solidFill>
+                        <a:srgbClr val="D9E0E6"/>
+                      </a:solidFill>
+                      <a:prstDash val="solid"/>
+                      <a:round/>
+                      <a:headEnd type="none" w="med" len="med"/>
+                      <a:tailEnd type="none" w="med" len="med"/>
+                    </a:lnR>
+                    <a:lnT w="9525" cap="flat" cmpd="sng" algn="ctr">
+                      <a:solidFill>
+                        <a:srgbClr val="D9E0E6"/>
+                      </a:solidFill>
+                      <a:prstDash val="solid"/>
+                      <a:round/>
+                      <a:headEnd type="none" w="med" len="med"/>
+                      <a:tailEnd type="none" w="med" len="med"/>
+                    </a:lnT>
+                    <a:lnB w="9525" cap="flat" cmpd="sng" algn="ctr">
+                      <a:solidFill>
+                        <a:srgbClr val="D9E0E6"/>
+                      </a:solidFill>
+                      <a:prstDash val="solid"/>
+                      <a:round/>
+                      <a:headEnd type="none" w="med" len="med"/>
+                      <a:tailEnd type="none" w="med" len="med"/>
+                    </a:lnB>
+                  </a:tcPr>
+                </a:tc>
+                <a:tc>
+                  <a:txBody>
+                    <a:bodyPr/>
+                    <a:lstStyle/>
+                    <a:p>
+                      <a:pPr indent="0" marL="0">
+                        <a:buNone/>
+                      </a:pPr>
+                      <a:r>
+                        <a:rPr lang="en-US" sz="1300" dirty="0">
+                          <a:solidFill>
+                            <a:srgbClr val="47545F"/>
+                          </a:solidFill>
+                          <a:latin typeface="Microsoft JhengHei" pitchFamily="34" charset="0"/>
+                          <a:ea typeface="Microsoft JhengHei" pitchFamily="34" charset="-122"/>
+                          <a:cs typeface="Microsoft JhengHei" pitchFamily="34" charset="-120"/>
+                        </a:rPr>
+                        <a:t>收盤 ÷ t 日收盤</a:t>
+                      </a:r>
+                      <a:endParaRPr lang="en-US" sz="1300" dirty="0">
+                        <a:latin typeface="Microsoft JhengHei" charset="0"/>
+                        <a:ea typeface="Microsoft JhengHei" charset="0"/>
+                        <a:cs typeface="Microsoft JhengHei" charset="0"/>
+                      </a:endParaRPr>
+                    </a:p>
+                  </a:txBody>
+                  <a:tcPr marL="73152" marR="73152" marT="0" marB="0" anchor="ctr">
+                    <a:lnL w="9525" cap="flat" cmpd="sng" algn="ctr">
+                      <a:solidFill>
+                        <a:srgbClr val="D9E0E6"/>
+                      </a:solidFill>
+                      <a:prstDash val="solid"/>
+                      <a:round/>
+                      <a:headEnd type="none" w="med" len="med"/>
+                      <a:tailEnd type="none" w="med" len="med"/>
+                    </a:lnL>
+                    <a:lnR w="9525" cap="flat" cmpd="sng" algn="ctr">
+                      <a:solidFill>
+                        <a:srgbClr val="D9E0E6"/>
+                      </a:solidFill>
+                      <a:prstDash val="solid"/>
+                      <a:round/>
+                      <a:headEnd type="none" w="med" len="med"/>
+                      <a:tailEnd type="none" w="med" len="med"/>
+                    </a:lnR>
+                    <a:lnT w="9525" cap="flat" cmpd="sng" algn="ctr">
+                      <a:solidFill>
+                        <a:srgbClr val="D9E0E6"/>
+                      </a:solidFill>
+                      <a:prstDash val="solid"/>
+                      <a:round/>
+                      <a:headEnd type="none" w="med" len="med"/>
+                      <a:tailEnd type="none" w="med" len="med"/>
+                    </a:lnT>
+                    <a:lnB w="9525" cap="flat" cmpd="sng" algn="ctr">
+                      <a:solidFill>
+                        <a:srgbClr val="D9E0E6"/>
+                      </a:solidFill>
+                      <a:prstDash val="solid"/>
+                      <a:round/>
+                      <a:headEnd type="none" w="med" len="med"/>
+                      <a:tailEnd type="none" w="med" len="med"/>
+                    </a:lnB>
+                  </a:tcPr>
+                </a:tc>
+                <a:tc>
+                  <a:txBody>
+                    <a:bodyPr/>
+                    <a:lstStyle/>
+                    <a:p>
+                      <a:pPr algn="ctr" indent="0" marL="0">
+                        <a:buNone/>
+                      </a:pPr>
+                      <a:r>
+                        <a:rPr lang="en-US" sz="1300" dirty="0">
+                          <a:solidFill>
+                            <a:srgbClr val="13202A"/>
+                          </a:solidFill>
+                          <a:latin typeface="Microsoft JhengHei" pitchFamily="34" charset="0"/>
+                          <a:ea typeface="Microsoft JhengHei" pitchFamily="34" charset="-122"/>
+                          <a:cs typeface="Microsoft JhengHei" pitchFamily="34" charset="-120"/>
+                        </a:rPr>
+                        <a:t>−9.9%</a:t>
+                      </a:r>
+                      <a:endParaRPr lang="en-US" sz="1300" dirty="0">
+                        <a:latin typeface="Microsoft JhengHei" charset="0"/>
+                        <a:ea typeface="Microsoft JhengHei" charset="0"/>
+                        <a:cs typeface="Microsoft JhengHei" charset="0"/>
+                      </a:endParaRPr>
+                    </a:p>
+                  </a:txBody>
+                  <a:tcPr marL="73152" marR="73152" marT="0" marB="0" anchor="ctr">
+                    <a:lnL w="9525" cap="flat" cmpd="sng" algn="ctr">
+                      <a:solidFill>
+                        <a:srgbClr val="D9E0E6"/>
+                      </a:solidFill>
+                      <a:prstDash val="solid"/>
+                      <a:round/>
+                      <a:headEnd type="none" w="med" len="med"/>
+                      <a:tailEnd type="none" w="med" len="med"/>
+                    </a:lnL>
+                    <a:lnR w="9525" cap="flat" cmpd="sng" algn="ctr">
+                      <a:solidFill>
+                        <a:srgbClr val="D9E0E6"/>
+                      </a:solidFill>
+                      <a:prstDash val="solid"/>
+                      <a:round/>
+                      <a:headEnd type="none" w="med" len="med"/>
+                      <a:tailEnd type="none" w="med" len="med"/>
+                    </a:lnR>
+                    <a:lnT w="9525" cap="flat" cmpd="sng" algn="ctr">
+                      <a:solidFill>
+                        <a:srgbClr val="D9E0E6"/>
+                      </a:solidFill>
+                      <a:prstDash val="solid"/>
+                      <a:round/>
+                      <a:headEnd type="none" w="med" len="med"/>
+                      <a:tailEnd type="none" w="med" len="med"/>
+                    </a:lnT>
+                    <a:lnB w="9525" cap="flat" cmpd="sng" algn="ctr">
+                      <a:solidFill>
+                        <a:srgbClr val="D9E0E6"/>
+                      </a:solidFill>
+                      <a:prstDash val="solid"/>
+                      <a:round/>
+                      <a:headEnd type="none" w="med" len="med"/>
+                      <a:tailEnd type="none" w="med" len="med"/>
+                    </a:lnB>
+                    <a:solidFill>
+                      <a:srgbClr val="FFFFFF"/>
+                    </a:solidFill>
+                  </a:tcPr>
+                </a:tc>
+                <a:tc>
+                  <a:txBody>
+                    <a:bodyPr/>
+                    <a:lstStyle/>
+                    <a:p>
+                      <a:pPr algn="ctr" indent="0" marL="0">
+                        <a:buNone/>
+                      </a:pPr>
+                      <a:r>
+                        <a:rPr lang="en-US" sz="1300" dirty="0">
+                          <a:solidFill>
+                            <a:srgbClr val="13202A"/>
+                          </a:solidFill>
+                          <a:latin typeface="Microsoft JhengHei" pitchFamily="34" charset="0"/>
+                          <a:ea typeface="Microsoft JhengHei" pitchFamily="34" charset="-122"/>
+                          <a:cs typeface="Microsoft JhengHei" pitchFamily="34" charset="-120"/>
+                        </a:rPr>
+                        <a:t>−6.7%</a:t>
+                      </a:r>
+                      <a:endParaRPr lang="en-US" sz="1300" dirty="0">
+                        <a:latin typeface="Microsoft JhengHei" charset="0"/>
+                        <a:ea typeface="Microsoft JhengHei" charset="0"/>
+                        <a:cs typeface="Microsoft JhengHei" charset="0"/>
+                      </a:endParaRPr>
+                    </a:p>
+                  </a:txBody>
+                  <a:tcPr marL="73152" marR="73152" marT="0" marB="0" anchor="ctr">
+                    <a:lnL w="9525" cap="flat" cmpd="sng" algn="ctr">
+                      <a:solidFill>
+                        <a:srgbClr val="D9E0E6"/>
+                      </a:solidFill>
+                      <a:prstDash val="solid"/>
+                      <a:round/>
+                      <a:headEnd type="none" w="med" len="med"/>
+                      <a:tailEnd type="none" w="med" len="med"/>
+                    </a:lnL>
+                    <a:lnR w="9525" cap="flat" cmpd="sng" algn="ctr">
+                      <a:solidFill>
+                        <a:srgbClr val="D9E0E6"/>
+                      </a:solidFill>
+                      <a:prstDash val="solid"/>
+                      <a:round/>
+                      <a:headEnd type="none" w="med" len="med"/>
+                      <a:tailEnd type="none" w="med" len="med"/>
+                    </a:lnR>
+                    <a:lnT w="9525" cap="flat" cmpd="sng" algn="ctr">
+                      <a:solidFill>
+                        <a:srgbClr val="D9E0E6"/>
+                      </a:solidFill>
+                      <a:prstDash val="solid"/>
+                      <a:round/>
+                      <a:headEnd type="none" w="med" len="med"/>
+                      <a:tailEnd type="none" w="med" len="med"/>
+                    </a:lnT>
+                    <a:lnB w="9525" cap="flat" cmpd="sng" algn="ctr">
+                      <a:solidFill>
+                        <a:srgbClr val="D9E0E6"/>
+                      </a:solidFill>
+                      <a:prstDash val="solid"/>
+                      <a:round/>
+                      <a:headEnd type="none" w="med" len="med"/>
+                      <a:tailEnd type="none" w="med" len="med"/>
+                    </a:lnB>
+                    <a:solidFill>
+                      <a:srgbClr val="FFFFFF"/>
+                    </a:solidFill>
+                  </a:tcPr>
+                </a:tc>
+                <a:tc>
+                  <a:txBody>
+                    <a:bodyPr/>
+                    <a:lstStyle/>
+                    <a:p>
+                      <a:pPr algn="ctr" indent="0" marL="0">
+                        <a:buNone/>
+                      </a:pPr>
+                      <a:r>
+                        <a:rPr lang="en-US" sz="1300" dirty="0">
+                          <a:solidFill>
+                            <a:srgbClr val="13202A"/>
+                          </a:solidFill>
+                          <a:latin typeface="Microsoft JhengHei" pitchFamily="34" charset="0"/>
+                          <a:ea typeface="Microsoft JhengHei" pitchFamily="34" charset="-122"/>
+                          <a:cs typeface="Microsoft JhengHei" pitchFamily="34" charset="-120"/>
+                        </a:rPr>
+                        <a:t>−5.0%</a:t>
+                      </a:r>
+                      <a:endParaRPr lang="en-US" sz="1300" dirty="0">
+                        <a:latin typeface="Microsoft JhengHei" charset="0"/>
+                        <a:ea typeface="Microsoft JhengHei" charset="0"/>
+                        <a:cs typeface="Microsoft JhengHei" charset="0"/>
+                      </a:endParaRPr>
+                    </a:p>
+                  </a:txBody>
+                  <a:tcPr marL="73152" marR="73152" marT="0" marB="0" anchor="ctr">
+                    <a:lnL w="9525" cap="flat" cmpd="sng" algn="ctr">
+                      <a:solidFill>
+                        <a:srgbClr val="D9E0E6"/>
+                      </a:solidFill>
+                      <a:prstDash val="solid"/>
+                      <a:round/>
+                      <a:headEnd type="none" w="med" len="med"/>
+                      <a:tailEnd type="none" w="med" len="med"/>
+                    </a:lnL>
+                    <a:lnR w="9525" cap="flat" cmpd="sng" algn="ctr">
+                      <a:solidFill>
+                        <a:srgbClr val="D9E0E6"/>
+                      </a:solidFill>
+                      <a:prstDash val="solid"/>
+                      <a:round/>
+                      <a:headEnd type="none" w="med" len="med"/>
+                      <a:tailEnd type="none" w="med" len="med"/>
+                    </a:lnR>
+                    <a:lnT w="9525" cap="flat" cmpd="sng" algn="ctr">
+                      <a:solidFill>
+                        <a:srgbClr val="D9E0E6"/>
+                      </a:solidFill>
+                      <a:prstDash val="solid"/>
+                      <a:round/>
+                      <a:headEnd type="none" w="med" len="med"/>
+                      <a:tailEnd type="none" w="med" len="med"/>
+                    </a:lnT>
+                    <a:lnB w="9525" cap="flat" cmpd="sng" algn="ctr">
+                      <a:solidFill>
+                        <a:srgbClr val="D9E0E6"/>
+                      </a:solidFill>
+                      <a:prstDash val="solid"/>
+                      <a:round/>
+                      <a:headEnd type="none" w="med" len="med"/>
+                      <a:tailEnd type="none" w="med" len="med"/>
+                    </a:lnB>
+                    <a:solidFill>
+                      <a:srgbClr val="FFFFFF"/>
+                    </a:solidFill>
+                  </a:tcPr>
+                </a:tc>
+                <a:tc>
+                  <a:txBody>
+                    <a:bodyPr/>
+                    <a:lstStyle/>
+                    <a:p>
+                      <a:pPr algn="ctr" indent="0" marL="0">
+                        <a:buNone/>
+                      </a:pPr>
+                      <a:r>
+                        <a:rPr lang="en-US" sz="1300" dirty="0">
+                          <a:solidFill>
+                            <a:srgbClr val="13202A"/>
+                          </a:solidFill>
+                          <a:latin typeface="Microsoft JhengHei" pitchFamily="34" charset="0"/>
+                          <a:ea typeface="Microsoft JhengHei" pitchFamily="34" charset="-122"/>
+                          <a:cs typeface="Microsoft JhengHei" pitchFamily="34" charset="-120"/>
+                        </a:rPr>
+                        <a:t>−5.7%</a:t>
+                      </a:r>
+                      <a:endParaRPr lang="en-US" sz="1300" dirty="0">
+                        <a:latin typeface="Microsoft JhengHei" charset="0"/>
+                        <a:ea typeface="Microsoft JhengHei" charset="0"/>
+                        <a:cs typeface="Microsoft JhengHei" charset="0"/>
+                      </a:endParaRPr>
+                    </a:p>
+                  </a:txBody>
+                  <a:tcPr marL="73152" marR="73152" marT="0" marB="0" anchor="ctr">
+                    <a:lnL w="9525" cap="flat" cmpd="sng" algn="ctr">
+                      <a:solidFill>
+                        <a:srgbClr val="D9E0E6"/>
+                      </a:solidFill>
+                      <a:prstDash val="solid"/>
+                      <a:round/>
+                      <a:headEnd type="none" w="med" len="med"/>
+                      <a:tailEnd type="none" w="med" len="med"/>
+                    </a:lnL>
+                    <a:lnR w="9525" cap="flat" cmpd="sng" algn="ctr">
+                      <a:solidFill>
+                        <a:srgbClr val="D9E0E6"/>
+                      </a:solidFill>
+                      <a:prstDash val="solid"/>
+                      <a:round/>
+                      <a:headEnd type="none" w="med" len="med"/>
+                      <a:tailEnd type="none" w="med" len="med"/>
+                    </a:lnR>
+                    <a:lnT w="9525" cap="flat" cmpd="sng" algn="ctr">
+                      <a:solidFill>
+                        <a:srgbClr val="D9E0E6"/>
+                      </a:solidFill>
+                      <a:prstDash val="solid"/>
+                      <a:round/>
+                      <a:headEnd type="none" w="med" len="med"/>
+                      <a:tailEnd type="none" w="med" len="med"/>
+                    </a:lnT>
+                    <a:lnB w="9525" cap="flat" cmpd="sng" algn="ctr">
+                      <a:solidFill>
+                        <a:srgbClr val="D9E0E6"/>
+                      </a:solidFill>
+                      <a:prstDash val="solid"/>
+                      <a:round/>
+                      <a:headEnd type="none" w="med" len="med"/>
+                      <a:tailEnd type="none" w="med" len="med"/>
+                    </a:lnB>
+                    <a:solidFill>
+                      <a:srgbClr val="FFFFFF"/>
+                    </a:solidFill>
+                  </a:tcPr>
+                </a:tc>
+                <a:tc>
+                  <a:txBody>
+                    <a:bodyPr/>
+                    <a:lstStyle/>
+                    <a:p>
+                      <a:pPr algn="ctr" indent="0" marL="0">
+                        <a:buNone/>
+                      </a:pPr>
+                      <a:r>
+                        <a:rPr lang="en-US" sz="1300" dirty="0">
+                          <a:solidFill>
+                            <a:srgbClr val="13202A"/>
+                          </a:solidFill>
+                          <a:latin typeface="Microsoft JhengHei" pitchFamily="34" charset="0"/>
+                          <a:ea typeface="Microsoft JhengHei" pitchFamily="34" charset="-122"/>
+                          <a:cs typeface="Microsoft JhengHei" pitchFamily="34" charset="-120"/>
+                        </a:rPr>
+                        <a:t>−2.5%</a:t>
+                      </a:r>
+                      <a:endParaRPr lang="en-US" sz="1300" dirty="0">
+                        <a:latin typeface="Microsoft JhengHei" charset="0"/>
+                        <a:ea typeface="Microsoft JhengHei" charset="0"/>
+                        <a:cs typeface="Microsoft JhengHei" charset="0"/>
+                      </a:endParaRPr>
+                    </a:p>
+                  </a:txBody>
+                  <a:tcPr marL="73152" marR="73152" marT="0" marB="0" anchor="ctr">
+                    <a:lnL w="9525" cap="flat" cmpd="sng" algn="ctr">
+                      <a:solidFill>
+                        <a:srgbClr val="D9E0E6"/>
+                      </a:solidFill>
+                      <a:prstDash val="solid"/>
+                      <a:round/>
+                      <a:headEnd type="none" w="med" len="med"/>
+                      <a:tailEnd type="none" w="med" len="med"/>
+                    </a:lnL>
+                    <a:lnR w="9525" cap="flat" cmpd="sng" algn="ctr">
+                      <a:solidFill>
+                        <a:srgbClr val="D9E0E6"/>
+                      </a:solidFill>
+                      <a:prstDash val="solid"/>
+                      <a:round/>
+                      <a:headEnd type="none" w="med" len="med"/>
+                      <a:tailEnd type="none" w="med" len="med"/>
+                    </a:lnR>
+                    <a:lnT w="9525" cap="flat" cmpd="sng" algn="ctr">
+                      <a:solidFill>
+                        <a:srgbClr val="D9E0E6"/>
+                      </a:solidFill>
+                      <a:prstDash val="solid"/>
+                      <a:round/>
+                      <a:headEnd type="none" w="med" len="med"/>
+                      <a:tailEnd type="none" w="med" len="med"/>
+                    </a:lnT>
+                    <a:lnB w="9525" cap="flat" cmpd="sng" algn="ctr">
+                      <a:solidFill>
+                        <a:srgbClr val="D9E0E6"/>
+                      </a:solidFill>
+                      <a:prstDash val="solid"/>
+                      <a:round/>
+                      <a:headEnd type="none" w="med" len="med"/>
+                      <a:tailEnd type="none" w="med" len="med"/>
+                    </a:lnB>
+                    <a:solidFill>
+                      <a:srgbClr val="FFFFFF"/>
+                    </a:solidFill>
+                  </a:tcPr>
+                </a:tc>
+                <a:tc>
+                  <a:txBody>
+                    <a:bodyPr/>
+                    <a:lstStyle/>
+                    <a:p>
+                      <a:pPr algn="ctr" indent="0" marL="0">
+                        <a:buNone/>
+                      </a:pPr>
+                      <a:r>
+                        <a:rPr lang="en-US" sz="1300" dirty="0">
+                          <a:solidFill>
+                            <a:srgbClr val="7A8691"/>
+                          </a:solidFill>
+                          <a:latin typeface="Microsoft JhengHei" pitchFamily="34" charset="0"/>
+                          <a:ea typeface="Microsoft JhengHei" pitchFamily="34" charset="-122"/>
+                          <a:cs typeface="Microsoft JhengHei" pitchFamily="34" charset="-120"/>
+                        </a:rPr>
+                        <a:t>拿掉</a:t>
+                      </a:r>
+                      <a:endParaRPr lang="en-US" sz="1300" dirty="0">
+                        <a:latin typeface="Microsoft JhengHei" charset="0"/>
+                        <a:ea typeface="Microsoft JhengHei" charset="0"/>
+                        <a:cs typeface="Microsoft JhengHei" charset="0"/>
+                      </a:endParaRPr>
+                    </a:p>
+                  </a:txBody>
+                  <a:tcPr marL="73152" marR="73152" marT="0" marB="0" anchor="ctr">
+                    <a:lnL w="9525" cap="flat" cmpd="sng" algn="ctr">
+                      <a:solidFill>
+                        <a:srgbClr val="D9E0E6"/>
+                      </a:solidFill>
+                      <a:prstDash val="solid"/>
+                      <a:round/>
+                      <a:headEnd type="none" w="med" len="med"/>
+                      <a:tailEnd type="none" w="med" len="med"/>
+                    </a:lnL>
+                    <a:lnR w="9525" cap="flat" cmpd="sng" algn="ctr">
+                      <a:solidFill>
+                        <a:srgbClr val="D9E0E6"/>
+                      </a:solidFill>
+                      <a:prstDash val="solid"/>
+                      <a:round/>
+                      <a:headEnd type="none" w="med" len="med"/>
+                      <a:tailEnd type="none" w="med" len="med"/>
+                    </a:lnR>
+                    <a:lnT w="9525" cap="flat" cmpd="sng" algn="ctr">
+                      <a:solidFill>
+                        <a:srgbClr val="D9E0E6"/>
+                      </a:solidFill>
+                      <a:prstDash val="solid"/>
+                      <a:round/>
+                      <a:headEnd type="none" w="med" len="med"/>
+                      <a:tailEnd type="none" w="med" len="med"/>
+                    </a:lnT>
+                    <a:lnB w="9525" cap="flat" cmpd="sng" algn="ctr">
+                      <a:solidFill>
+                        <a:srgbClr val="D9E0E6"/>
+                      </a:solidFill>
+                      <a:prstDash val="solid"/>
+                      <a:round/>
+                      <a:headEnd type="none" w="med" len="med"/>
+                      <a:tailEnd type="none" w="med" len="med"/>
+                    </a:lnB>
+                    <a:solidFill>
+                      <a:srgbClr val="FCE9E0"/>
+                    </a:solidFill>
+                  </a:tcPr>
+                </a:tc>
+              </a:tr>
+              <a:tr h="365760">
+                <a:tc>
+                  <a:txBody>
+                    <a:bodyPr/>
+                    <a:lstStyle/>
+                    <a:p>
+                      <a:pPr indent="0" marL="0">
+                        <a:buNone/>
+                      </a:pPr>
+                      <a:r>
+                        <a:rPr lang="en-US" sz="1300" b="1" dirty="0">
+                          <a:solidFill>
+                            <a:srgbClr val="13202A"/>
+                          </a:solidFill>
+                          <a:latin typeface="Microsoft JhengHei" pitchFamily="34" charset="0"/>
+                          <a:ea typeface="Microsoft JhengHei" pitchFamily="34" charset="-122"/>
+                          <a:cs typeface="Microsoft JhengHei" pitchFamily="34" charset="-120"/>
+                        </a:rPr>
+                        <a:t>量</a:t>
+                      </a:r>
+                      <a:endParaRPr lang="en-US" sz="1300" dirty="0">
+                        <a:latin typeface="Microsoft JhengHei" charset="0"/>
+                        <a:ea typeface="Microsoft JhengHei" charset="0"/>
+                        <a:cs typeface="Microsoft JhengHei" charset="0"/>
+                      </a:endParaRPr>
+                    </a:p>
+                  </a:txBody>
+                  <a:tcPr marL="73152" marR="73152" marT="0" marB="0" anchor="ctr">
+                    <a:lnL w="9525" cap="flat" cmpd="sng" algn="ctr">
+                      <a:solidFill>
+                        <a:srgbClr val="D9E0E6"/>
+                      </a:solidFill>
+                      <a:prstDash val="solid"/>
+                      <a:round/>
+                      <a:headEnd type="none" w="med" len="med"/>
+                      <a:tailEnd type="none" w="med" len="med"/>
+                    </a:lnL>
+                    <a:lnR w="9525" cap="flat" cmpd="sng" algn="ctr">
+                      <a:solidFill>
+                        <a:srgbClr val="D9E0E6"/>
+                      </a:solidFill>
+                      <a:prstDash val="solid"/>
+                      <a:round/>
+                      <a:headEnd type="none" w="med" len="med"/>
+                      <a:tailEnd type="none" w="med" len="med"/>
+                    </a:lnR>
+                    <a:lnT w="9525" cap="flat" cmpd="sng" algn="ctr">
+                      <a:solidFill>
+                        <a:srgbClr val="D9E0E6"/>
+                      </a:solidFill>
+                      <a:prstDash val="solid"/>
+                      <a:round/>
+                      <a:headEnd type="none" w="med" len="med"/>
+                      <a:tailEnd type="none" w="med" len="med"/>
+                    </a:lnT>
+                    <a:lnB w="9525" cap="flat" cmpd="sng" algn="ctr">
+                      <a:solidFill>
+                        <a:srgbClr val="D9E0E6"/>
+                      </a:solidFill>
+                      <a:prstDash val="solid"/>
+                      <a:round/>
+                      <a:headEnd type="none" w="med" len="med"/>
+                      <a:tailEnd type="none" w="med" len="med"/>
+                    </a:lnB>
+                  </a:tcPr>
+                </a:tc>
+                <a:tc>
+                  <a:txBody>
+                    <a:bodyPr/>
+                    <a:lstStyle/>
+                    <a:p>
+                      <a:pPr indent="0" marL="0">
+                        <a:buNone/>
+                      </a:pPr>
+                      <a:r>
+                        <a:rPr lang="en-US" sz="1300" dirty="0">
+                          <a:solidFill>
+                            <a:srgbClr val="47545F"/>
+                          </a:solidFill>
+                          <a:latin typeface="Microsoft JhengHei" pitchFamily="34" charset="0"/>
+                          <a:ea typeface="Microsoft JhengHei" pitchFamily="34" charset="-122"/>
+                          <a:cs typeface="Microsoft JhengHei" pitchFamily="34" charset="-120"/>
+                        </a:rPr>
+                        <a:t>成交量 ÷ 10 日均量</a:t>
+                      </a:r>
+                      <a:endParaRPr lang="en-US" sz="1300" dirty="0">
+                        <a:latin typeface="Microsoft JhengHei" charset="0"/>
+                        <a:ea typeface="Microsoft JhengHei" charset="0"/>
+                        <a:cs typeface="Microsoft JhengHei" charset="0"/>
+                      </a:endParaRPr>
+                    </a:p>
+                  </a:txBody>
+                  <a:tcPr marL="73152" marR="73152" marT="0" marB="0" anchor="ctr">
+                    <a:lnL w="9525" cap="flat" cmpd="sng" algn="ctr">
+                      <a:solidFill>
+                        <a:srgbClr val="D9E0E6"/>
+                      </a:solidFill>
+                      <a:prstDash val="solid"/>
+                      <a:round/>
+                      <a:headEnd type="none" w="med" len="med"/>
+                      <a:tailEnd type="none" w="med" len="med"/>
+                    </a:lnL>
+                    <a:lnR w="9525" cap="flat" cmpd="sng" algn="ctr">
+                      <a:solidFill>
+                        <a:srgbClr val="D9E0E6"/>
+                      </a:solidFill>
+                      <a:prstDash val="solid"/>
+                      <a:round/>
+                      <a:headEnd type="none" w="med" len="med"/>
+                      <a:tailEnd type="none" w="med" len="med"/>
+                    </a:lnR>
+                    <a:lnT w="9525" cap="flat" cmpd="sng" algn="ctr">
+                      <a:solidFill>
+                        <a:srgbClr val="D9E0E6"/>
+                      </a:solidFill>
+                      <a:prstDash val="solid"/>
+                      <a:round/>
+                      <a:headEnd type="none" w="med" len="med"/>
+                      <a:tailEnd type="none" w="med" len="med"/>
+                    </a:lnT>
+                    <a:lnB w="9525" cap="flat" cmpd="sng" algn="ctr">
+                      <a:solidFill>
+                        <a:srgbClr val="D9E0E6"/>
+                      </a:solidFill>
+                      <a:prstDash val="solid"/>
+                      <a:round/>
+                      <a:headEnd type="none" w="med" len="med"/>
+                      <a:tailEnd type="none" w="med" len="med"/>
+                    </a:lnB>
+                  </a:tcPr>
+                </a:tc>
+                <a:tc>
+                  <a:txBody>
+                    <a:bodyPr/>
+                    <a:lstStyle/>
+                    <a:p>
+                      <a:pPr algn="ctr" indent="0" marL="0">
+                        <a:buNone/>
+                      </a:pPr>
+                      <a:r>
+                        <a:rPr lang="en-US" sz="1300" dirty="0">
+                          <a:solidFill>
+                            <a:srgbClr val="13202A"/>
+                          </a:solidFill>
+                          <a:latin typeface="Microsoft JhengHei" pitchFamily="34" charset="0"/>
+                          <a:ea typeface="Microsoft JhengHei" pitchFamily="34" charset="-122"/>
+                          <a:cs typeface="Microsoft JhengHei" pitchFamily="34" charset="-120"/>
+                        </a:rPr>
+                        <a:t>0.95×</a:t>
+                      </a:r>
+                      <a:endParaRPr lang="en-US" sz="1300" dirty="0">
+                        <a:latin typeface="Microsoft JhengHei" charset="0"/>
+                        <a:ea typeface="Microsoft JhengHei" charset="0"/>
+                        <a:cs typeface="Microsoft JhengHei" charset="0"/>
+                      </a:endParaRPr>
+                    </a:p>
+                  </a:txBody>
+                  <a:tcPr marL="73152" marR="73152" marT="0" marB="0" anchor="ctr">
+                    <a:lnL w="9525" cap="flat" cmpd="sng" algn="ctr">
+                      <a:solidFill>
+                        <a:srgbClr val="D9E0E6"/>
+                      </a:solidFill>
+                      <a:prstDash val="solid"/>
+                      <a:round/>
+                      <a:headEnd type="none" w="med" len="med"/>
+                      <a:tailEnd type="none" w="med" len="med"/>
+                    </a:lnL>
+                    <a:lnR w="9525" cap="flat" cmpd="sng" algn="ctr">
+                      <a:solidFill>
+                        <a:srgbClr val="D9E0E6"/>
+                      </a:solidFill>
+                      <a:prstDash val="solid"/>
+                      <a:round/>
+                      <a:headEnd type="none" w="med" len="med"/>
+                      <a:tailEnd type="none" w="med" len="med"/>
+                    </a:lnR>
+                    <a:lnT w="9525" cap="flat" cmpd="sng" algn="ctr">
+                      <a:solidFill>
+                        <a:srgbClr val="D9E0E6"/>
+                      </a:solidFill>
+                      <a:prstDash val="solid"/>
+                      <a:round/>
+                      <a:headEnd type="none" w="med" len="med"/>
+                      <a:tailEnd type="none" w="med" len="med"/>
+                    </a:lnT>
+                    <a:lnB w="9525" cap="flat" cmpd="sng" algn="ctr">
+                      <a:solidFill>
+                        <a:srgbClr val="D9E0E6"/>
+                      </a:solidFill>
+                      <a:prstDash val="solid"/>
+                      <a:round/>
+                      <a:headEnd type="none" w="med" len="med"/>
+                      <a:tailEnd type="none" w="med" len="med"/>
+                    </a:lnB>
+                    <a:solidFill>
+                      <a:srgbClr val="FFFFFF"/>
+                    </a:solidFill>
+                  </a:tcPr>
+                </a:tc>
+                <a:tc>
+                  <a:txBody>
+                    <a:bodyPr/>
+                    <a:lstStyle/>
+                    <a:p>
+                      <a:pPr algn="ctr" indent="0" marL="0">
+                        <a:buNone/>
+                      </a:pPr>
+                      <a:r>
+                        <a:rPr lang="en-US" sz="1300" dirty="0">
+                          <a:solidFill>
+                            <a:srgbClr val="13202A"/>
+                          </a:solidFill>
+                          <a:latin typeface="Microsoft JhengHei" pitchFamily="34" charset="0"/>
+                          <a:ea typeface="Microsoft JhengHei" pitchFamily="34" charset="-122"/>
+                          <a:cs typeface="Microsoft JhengHei" pitchFamily="34" charset="-120"/>
+                        </a:rPr>
+                        <a:t>1.09×</a:t>
+                      </a:r>
+                      <a:endParaRPr lang="en-US" sz="1300" dirty="0">
+                        <a:latin typeface="Microsoft JhengHei" charset="0"/>
+                        <a:ea typeface="Microsoft JhengHei" charset="0"/>
+                        <a:cs typeface="Microsoft JhengHei" charset="0"/>
+                      </a:endParaRPr>
+                    </a:p>
+                  </a:txBody>
+                  <a:tcPr marL="73152" marR="73152" marT="0" marB="0" anchor="ctr">
+                    <a:lnL w="9525" cap="flat" cmpd="sng" algn="ctr">
+                      <a:solidFill>
+                        <a:srgbClr val="D9E0E6"/>
+                      </a:solidFill>
+                      <a:prstDash val="solid"/>
+                      <a:round/>
+                      <a:headEnd type="none" w="med" len="med"/>
+                      <a:tailEnd type="none" w="med" len="med"/>
+                    </a:lnL>
+                    <a:lnR w="9525" cap="flat" cmpd="sng" algn="ctr">
+                      <a:solidFill>
+                        <a:srgbClr val="D9E0E6"/>
+                      </a:solidFill>
+                      <a:prstDash val="solid"/>
+                      <a:round/>
+                      <a:headEnd type="none" w="med" len="med"/>
+                      <a:tailEnd type="none" w="med" len="med"/>
+                    </a:lnR>
+                    <a:lnT w="9525" cap="flat" cmpd="sng" algn="ctr">
+                      <a:solidFill>
+                        <a:srgbClr val="D9E0E6"/>
+                      </a:solidFill>
+                      <a:prstDash val="solid"/>
+                      <a:round/>
+                      <a:headEnd type="none" w="med" len="med"/>
+                      <a:tailEnd type="none" w="med" len="med"/>
+                    </a:lnT>
+                    <a:lnB w="9525" cap="flat" cmpd="sng" algn="ctr">
+                      <a:solidFill>
+                        <a:srgbClr val="D9E0E6"/>
+                      </a:solidFill>
+                      <a:prstDash val="solid"/>
+                      <a:round/>
+                      <a:headEnd type="none" w="med" len="med"/>
+                      <a:tailEnd type="none" w="med" len="med"/>
+                    </a:lnB>
+                    <a:solidFill>
+                      <a:srgbClr val="FFFFFF"/>
+                    </a:solidFill>
+                  </a:tcPr>
+                </a:tc>
+                <a:tc>
+                  <a:txBody>
+                    <a:bodyPr/>
+                    <a:lstStyle/>
+                    <a:p>
+                      <a:pPr algn="ctr" indent="0" marL="0">
+                        <a:buNone/>
+                      </a:pPr>
+                      <a:r>
+                        <a:rPr lang="en-US" sz="1300" dirty="0">
+                          <a:solidFill>
+                            <a:srgbClr val="13202A"/>
+                          </a:solidFill>
+                          <a:latin typeface="Microsoft JhengHei" pitchFamily="34" charset="0"/>
+                          <a:ea typeface="Microsoft JhengHei" pitchFamily="34" charset="-122"/>
+                          <a:cs typeface="Microsoft JhengHei" pitchFamily="34" charset="-120"/>
+                        </a:rPr>
+                        <a:t>1.06×</a:t>
+                      </a:r>
+                      <a:endParaRPr lang="en-US" sz="1300" dirty="0">
+                        <a:latin typeface="Microsoft JhengHei" charset="0"/>
+                        <a:ea typeface="Microsoft JhengHei" charset="0"/>
+                        <a:cs typeface="Microsoft JhengHei" charset="0"/>
+                      </a:endParaRPr>
+                    </a:p>
+                  </a:txBody>
+                  <a:tcPr marL="73152" marR="73152" marT="0" marB="0" anchor="ctr">
+                    <a:lnL w="9525" cap="flat" cmpd="sng" algn="ctr">
+                      <a:solidFill>
+                        <a:srgbClr val="D9E0E6"/>
+                      </a:solidFill>
+                      <a:prstDash val="solid"/>
+                      <a:round/>
+                      <a:headEnd type="none" w="med" len="med"/>
+                      <a:tailEnd type="none" w="med" len="med"/>
+                    </a:lnL>
+                    <a:lnR w="9525" cap="flat" cmpd="sng" algn="ctr">
+                      <a:solidFill>
+                        <a:srgbClr val="D9E0E6"/>
+                      </a:solidFill>
+                      <a:prstDash val="solid"/>
+                      <a:round/>
+                      <a:headEnd type="none" w="med" len="med"/>
+                      <a:tailEnd type="none" w="med" len="med"/>
+                    </a:lnR>
+                    <a:lnT w="9525" cap="flat" cmpd="sng" algn="ctr">
+                      <a:solidFill>
+                        <a:srgbClr val="D9E0E6"/>
+                      </a:solidFill>
+                      <a:prstDash val="solid"/>
+                      <a:round/>
+                      <a:headEnd type="none" w="med" len="med"/>
+                      <a:tailEnd type="none" w="med" len="med"/>
+                    </a:lnT>
+                    <a:lnB w="9525" cap="flat" cmpd="sng" algn="ctr">
+                      <a:solidFill>
+                        <a:srgbClr val="D9E0E6"/>
+                      </a:solidFill>
+                      <a:prstDash val="solid"/>
+                      <a:round/>
+                      <a:headEnd type="none" w="med" len="med"/>
+                      <a:tailEnd type="none" w="med" len="med"/>
+                    </a:lnB>
+                    <a:solidFill>
+                      <a:srgbClr val="FFFFFF"/>
+                    </a:solidFill>
+                  </a:tcPr>
+                </a:tc>
+                <a:tc>
+                  <a:txBody>
+                    <a:bodyPr/>
+                    <a:lstStyle/>
+                    <a:p>
+                      <a:pPr algn="ctr" indent="0" marL="0">
+                        <a:buNone/>
+                      </a:pPr>
+                      <a:r>
+                        <a:rPr lang="en-US" sz="1300" dirty="0">
+                          <a:solidFill>
+                            <a:srgbClr val="13202A"/>
+                          </a:solidFill>
+                          <a:latin typeface="Microsoft JhengHei" pitchFamily="34" charset="0"/>
+                          <a:ea typeface="Microsoft JhengHei" pitchFamily="34" charset="-122"/>
+                          <a:cs typeface="Microsoft JhengHei" pitchFamily="34" charset="-120"/>
+                        </a:rPr>
+                        <a:t>1.82×</a:t>
+                      </a:r>
+                      <a:endParaRPr lang="en-US" sz="1300" dirty="0">
+                        <a:latin typeface="Microsoft JhengHei" charset="0"/>
+                        <a:ea typeface="Microsoft JhengHei" charset="0"/>
+                        <a:cs typeface="Microsoft JhengHei" charset="0"/>
+                      </a:endParaRPr>
+                    </a:p>
+                  </a:txBody>
+                  <a:tcPr marL="73152" marR="73152" marT="0" marB="0" anchor="ctr">
+                    <a:lnL w="9525" cap="flat" cmpd="sng" algn="ctr">
+                      <a:solidFill>
+                        <a:srgbClr val="D9E0E6"/>
+                      </a:solidFill>
+                      <a:prstDash val="solid"/>
+                      <a:round/>
+                      <a:headEnd type="none" w="med" len="med"/>
+                      <a:tailEnd type="none" w="med" len="med"/>
+                    </a:lnL>
+                    <a:lnR w="9525" cap="flat" cmpd="sng" algn="ctr">
+                      <a:solidFill>
+                        <a:srgbClr val="D9E0E6"/>
+                      </a:solidFill>
+                      <a:prstDash val="solid"/>
+                      <a:round/>
+                      <a:headEnd type="none" w="med" len="med"/>
+                      <a:tailEnd type="none" w="med" len="med"/>
+                    </a:lnR>
+                    <a:lnT w="9525" cap="flat" cmpd="sng" algn="ctr">
+                      <a:solidFill>
+                        <a:srgbClr val="D9E0E6"/>
+                      </a:solidFill>
+                      <a:prstDash val="solid"/>
+                      <a:round/>
+                      <a:headEnd type="none" w="med" len="med"/>
+                      <a:tailEnd type="none" w="med" len="med"/>
+                    </a:lnT>
+                    <a:lnB w="9525" cap="flat" cmpd="sng" algn="ctr">
+                      <a:solidFill>
+                        <a:srgbClr val="D9E0E6"/>
+                      </a:solidFill>
+                      <a:prstDash val="solid"/>
+                      <a:round/>
+                      <a:headEnd type="none" w="med" len="med"/>
+                      <a:tailEnd type="none" w="med" len="med"/>
+                    </a:lnB>
+                    <a:solidFill>
+                      <a:srgbClr val="FFFFFF"/>
+                    </a:solidFill>
+                  </a:tcPr>
+                </a:tc>
+                <a:tc>
+                  <a:txBody>
+                    <a:bodyPr/>
+                    <a:lstStyle/>
+                    <a:p>
+                      <a:pPr algn="ctr" indent="0" marL="0">
+                        <a:buNone/>
+                      </a:pPr>
+                      <a:r>
+                        <a:rPr lang="en-US" sz="1300" dirty="0">
+                          <a:solidFill>
+                            <a:srgbClr val="13202A"/>
+                          </a:solidFill>
+                          <a:latin typeface="Microsoft JhengHei" pitchFamily="34" charset="0"/>
+                          <a:ea typeface="Microsoft JhengHei" pitchFamily="34" charset="-122"/>
+                          <a:cs typeface="Microsoft JhengHei" pitchFamily="34" charset="-120"/>
+                        </a:rPr>
+                        <a:t>1.07×</a:t>
+                      </a:r>
+                      <a:endParaRPr lang="en-US" sz="1300" dirty="0">
+                        <a:latin typeface="Microsoft JhengHei" charset="0"/>
+                        <a:ea typeface="Microsoft JhengHei" charset="0"/>
+                        <a:cs typeface="Microsoft JhengHei" charset="0"/>
+                      </a:endParaRPr>
+                    </a:p>
+                  </a:txBody>
+                  <a:tcPr marL="73152" marR="73152" marT="0" marB="0" anchor="ctr">
+                    <a:lnL w="9525" cap="flat" cmpd="sng" algn="ctr">
+                      <a:solidFill>
+                        <a:srgbClr val="D9E0E6"/>
+                      </a:solidFill>
+                      <a:prstDash val="solid"/>
+                      <a:round/>
+                      <a:headEnd type="none" w="med" len="med"/>
+                      <a:tailEnd type="none" w="med" len="med"/>
+                    </a:lnL>
+                    <a:lnR w="9525" cap="flat" cmpd="sng" algn="ctr">
+                      <a:solidFill>
+                        <a:srgbClr val="D9E0E6"/>
+                      </a:solidFill>
+                      <a:prstDash val="solid"/>
+                      <a:round/>
+                      <a:headEnd type="none" w="med" len="med"/>
+                      <a:tailEnd type="none" w="med" len="med"/>
+                    </a:lnR>
+                    <a:lnT w="9525" cap="flat" cmpd="sng" algn="ctr">
+                      <a:solidFill>
+                        <a:srgbClr val="D9E0E6"/>
+                      </a:solidFill>
+                      <a:prstDash val="solid"/>
+                      <a:round/>
+                      <a:headEnd type="none" w="med" len="med"/>
+                      <a:tailEnd type="none" w="med" len="med"/>
+                    </a:lnT>
+                    <a:lnB w="9525" cap="flat" cmpd="sng" algn="ctr">
+                      <a:solidFill>
+                        <a:srgbClr val="D9E0E6"/>
+                      </a:solidFill>
+                      <a:prstDash val="solid"/>
+                      <a:round/>
+                      <a:headEnd type="none" w="med" len="med"/>
+                      <a:tailEnd type="none" w="med" len="med"/>
+                    </a:lnB>
+                    <a:solidFill>
+                      <a:srgbClr val="FFFFFF"/>
+                    </a:solidFill>
+                  </a:tcPr>
+                </a:tc>
+                <a:tc>
+                  <a:txBody>
+                    <a:bodyPr/>
+                    <a:lstStyle/>
+                    <a:p>
+                      <a:pPr algn="ctr" indent="0" marL="0">
+                        <a:buNone/>
+                      </a:pPr>
+                      <a:r>
+                        <a:rPr lang="en-US" sz="1300" dirty="0">
+                          <a:solidFill>
+                            <a:srgbClr val="13202A"/>
+                          </a:solidFill>
+                          <a:latin typeface="Microsoft JhengHei" pitchFamily="34" charset="0"/>
+                          <a:ea typeface="Microsoft JhengHei" pitchFamily="34" charset="-122"/>
+                          <a:cs typeface="Microsoft JhengHei" pitchFamily="34" charset="-120"/>
+                        </a:rPr>
+                        <a:t>1.06×</a:t>
+                      </a:r>
+                      <a:endParaRPr lang="en-US" sz="1300" dirty="0">
+                        <a:latin typeface="Microsoft JhengHei" charset="0"/>
+                        <a:ea typeface="Microsoft JhengHei" charset="0"/>
+                        <a:cs typeface="Microsoft JhengHei" charset="0"/>
+                      </a:endParaRPr>
+                    </a:p>
+                  </a:txBody>
+                  <a:tcPr marL="73152" marR="73152" marT="0" marB="0" anchor="ctr">
+                    <a:lnL w="9525" cap="flat" cmpd="sng" algn="ctr">
+                      <a:solidFill>
+                        <a:srgbClr val="D9E0E6"/>
+                      </a:solidFill>
+                      <a:prstDash val="solid"/>
+                      <a:round/>
+                      <a:headEnd type="none" w="med" len="med"/>
+                      <a:tailEnd type="none" w="med" len="med"/>
+                    </a:lnL>
+                    <a:lnR w="9525" cap="flat" cmpd="sng" algn="ctr">
+                      <a:solidFill>
+                        <a:srgbClr val="D9E0E6"/>
+                      </a:solidFill>
+                      <a:prstDash val="solid"/>
+                      <a:round/>
+                      <a:headEnd type="none" w="med" len="med"/>
+                      <a:tailEnd type="none" w="med" len="med"/>
+                    </a:lnR>
+                    <a:lnT w="9525" cap="flat" cmpd="sng" algn="ctr">
+                      <a:solidFill>
+                        <a:srgbClr val="D9E0E6"/>
+                      </a:solidFill>
+                      <a:prstDash val="solid"/>
+                      <a:round/>
+                      <a:headEnd type="none" w="med" len="med"/>
+                      <a:tailEnd type="none" w="med" len="med"/>
+                    </a:lnT>
+                    <a:lnB w="9525" cap="flat" cmpd="sng" algn="ctr">
+                      <a:solidFill>
+                        <a:srgbClr val="D9E0E6"/>
+                      </a:solidFill>
+                      <a:prstDash val="solid"/>
+                      <a:round/>
+                      <a:headEnd type="none" w="med" len="med"/>
+                      <a:tailEnd type="none" w="med" len="med"/>
+                    </a:lnB>
+                    <a:solidFill>
+                      <a:srgbClr val="FCE9E0"/>
+                    </a:solidFill>
+                  </a:tcPr>
+                </a:tc>
+              </a:tr>
+            </a:tbl>
+          </a:graphicData>
+        </a:graphic>
+      </p:graphicFrame>
+      <p:sp>
+        <p:nvSpPr>
+          <p:cNvPr id="30" name="Text 27"/>
+          <p:cNvSpPr txBox="1"/>
+          <p:nvPr/>
+        </p:nvSpPr>
+        <p:spPr>
+          <a:xfrm>
+            <a:off x="548640" y="5029200"/>
+            <a:ext cx="7406640" cy="320040"/>
+          </a:xfrm>
+          <a:prstGeom prst="rect">
+            <a:avLst/>
+          </a:prstGeom>
+          <a:noFill/>
+          <a:ln/>
+        </p:spPr>
+        <p:txBody>
+          <a:bodyPr wrap="square" lIns="0" tIns="0" rIns="0" bIns="0" rtlCol="0" anchor="t"/>
+          <a:lstStyle/>
+          <a:p>
+            <a:pPr indent="0" marL="0">
+              <a:buNone/>
+            </a:pPr>
+            <a:r>
+              <a:rPr lang="en-US" sz="1100" dirty="0">
+                <a:solidFill>
+                  <a:schemeClr val="accent5"/>
+                </a:solidFill>
+              </a:rPr>
+              <a:t>例:台積電 2026-02-25(第 1 頁的高點)。價格以 % 顯示,模型實際用 ln 值;量的 10 日均量算到 t 日為止。</a:t>
+            </a:r>
+            <a:endParaRPr lang="en-US" sz="1100" dirty="0"/>
+          </a:p>
+        </p:txBody>
+      </p:sp>
+      <p:sp>
+        <p:nvSpPr>
+          <p:cNvPr id="31" name="count-29"/>
+          <p:cNvSpPr/>
+          <p:nvPr/>
+        </p:nvSpPr>
+        <p:spPr>
+          <a:xfrm>
+            <a:off x="8229600" y="2788920"/>
+            <a:ext cx="3383280" cy="2560320"/>
           </a:xfrm>
           <a:prstGeom prst="roundRect">
             <a:avLst>
@@ -4746,75 +9005,14 @@
       </p:sp>
       <p:sp>
         <p:nvSpPr>
-          <p:cNvPr id="4" name="step-dot-1"/>
-          <p:cNvSpPr/>
+          <p:cNvPr id="32" name="Text 29"/>
+          <p:cNvSpPr txBox="1"/>
           <p:nvPr/>
         </p:nvSpPr>
         <p:spPr>
           <a:xfrm>
-            <a:off x="777240" y="1783080"/>
-            <a:ext cx="502920" cy="502920"/>
-          </a:xfrm>
-          <a:prstGeom prst="ellipse">
-            <a:avLst/>
-          </a:prstGeom>
-          <a:solidFill>
-            <a:schemeClr val="tx1"/>
-          </a:solidFill>
-          <a:ln w="12700">
-            <a:solidFill>
-              <a:schemeClr val="tx1"/>
-            </a:solidFill>
-            <a:prstDash val="solid"/>
-          </a:ln>
-        </p:spPr>
-      </p:sp>
-      <p:sp>
-        <p:nvSpPr>
-          <p:cNvPr id="5" name="Text 3"/>
-          <p:cNvSpPr txBox="1"/>
-          <p:nvPr/>
-        </p:nvSpPr>
-        <p:spPr>
-          <a:xfrm>
-            <a:off x="777240" y="1783080"/>
-            <a:ext cx="502920" cy="502920"/>
-          </a:xfrm>
-          <a:prstGeom prst="rect">
-            <a:avLst/>
-          </a:prstGeom>
-          <a:noFill/>
-          <a:ln/>
-        </p:spPr>
-        <p:txBody>
-          <a:bodyPr wrap="square" lIns="0" tIns="0" rIns="0" bIns="0" rtlCol="0" anchor="ctr"/>
-          <a:lstStyle/>
-          <a:p>
-            <a:pPr algn="ctr" indent="0" marL="0">
-              <a:buNone/>
-            </a:pPr>
-            <a:r>
-              <a:rPr lang="en-US" sz="1800" b="1" dirty="0">
-                <a:solidFill>
-                  <a:schemeClr val="bg1"/>
-                </a:solidFill>
-              </a:rPr>
-              <a:t>1</a:t>
-            </a:r>
-            <a:endParaRPr lang="en-US" sz="1800" dirty="0"/>
-          </a:p>
-        </p:txBody>
-      </p:sp>
-      <p:sp>
-        <p:nvSpPr>
-          <p:cNvPr id="6" name="Text 4"/>
-          <p:cNvSpPr txBox="1"/>
-          <p:nvPr/>
-        </p:nvSpPr>
-        <p:spPr>
-          <a:xfrm>
-            <a:off x="777240" y="2468880"/>
-            <a:ext cx="2148840" cy="457200"/>
+            <a:off x="8458200" y="2926080"/>
+            <a:ext cx="3017520" cy="548640"/>
           </a:xfrm>
           <a:prstGeom prst="rect">
             <a:avLst/>
@@ -4830,27 +9028,27 @@
               <a:buNone/>
             </a:pPr>
             <a:r>
-              <a:rPr lang="en-US" sz="1800" b="1" dirty="0">
+              <a:rPr lang="en-US" sz="2400" b="1" dirty="0">
                 <a:solidFill>
-                  <a:schemeClr val="tx1"/>
+                  <a:schemeClr val="accent1"/>
                 </a:solidFill>
               </a:rPr>
-              <a:t>t 日收盤後</a:t>
+              <a:t>6 天 × 5 − 1 = 29</a:t>
             </a:r>
-            <a:endParaRPr lang="en-US" sz="1800" dirty="0"/>
+            <a:endParaRPr lang="en-US" sz="2400" dirty="0"/>
           </a:p>
         </p:txBody>
       </p:sp>
       <p:sp>
         <p:nvSpPr>
-          <p:cNvPr id="7" name="Text 5"/>
+          <p:cNvPr id="33" name="Text 30"/>
           <p:cNvSpPr txBox="1"/>
           <p:nvPr/>
         </p:nvSpPr>
         <p:spPr>
           <a:xfrm>
-            <a:off x="777240" y="2971800"/>
-            <a:ext cx="2148840" cy="1463040"/>
+            <a:off x="8458200" y="3566160"/>
+            <a:ext cx="3017520" cy="1691640"/>
           </a:xfrm>
           <a:prstGeom prst="rect">
             <a:avLst/>
@@ -4862,8 +9060,12 @@
           <a:bodyPr wrap="square" lIns="0" tIns="0" rIns="0" bIns="0" rtlCol="0" anchor="t"/>
           <a:lstStyle/>
           <a:p>
-            <a:pPr indent="0" marL="0">
-              <a:buNone/>
+            <a:pPr marL="342900" indent="-342900">
+              <a:spcAft>
+                <a:spcPts val="800"/>
+              </a:spcAft>
+              <a:buSzPct val="100000"/>
+              <a:buChar char="•"/>
             </a:pPr>
             <a:r>
               <a:rPr lang="en-US" sz="1300" dirty="0">
@@ -4871,51 +9073,62 @@
                   <a:schemeClr val="tx2"/>
                 </a:solidFill>
               </a:rPr>
-              <a:t>取 t-5 ~ t 六根 K 線(開高低收量,29 個數字)</a:t>
+              <a:t>t 日收盤 ÷ 自己永遠是 1,沒有資訊,拿掉</a:t>
             </a:r>
-            <a:endParaRPr lang="en-US" sz="1300" dirty="0"/>
+            <a:endParaRPr lang="en-US" sz="1500" dirty="0"/>
+          </a:p>
+          <a:p>
+            <a:pPr marL="342900" indent="-342900">
+              <a:spcAft>
+                <a:spcPts val="800"/>
+              </a:spcAft>
+              <a:buSzPct val="100000"/>
+              <a:buChar char="•"/>
+            </a:pPr>
+            <a:r>
+              <a:rPr lang="en-US" sz="1300" dirty="0">
+                <a:solidFill>
+                  <a:schemeClr val="tx2"/>
+                </a:solidFill>
+              </a:rPr>
+              <a:t>價格都除以 t 日收盤:只看形狀,不看股價高低</a:t>
+            </a:r>
+            <a:endParaRPr lang="en-US" sz="1500" dirty="0"/>
+          </a:p>
+          <a:p>
+            <a:pPr marL="342900" indent="-342900">
+              <a:spcAft>
+                <a:spcPts val="800"/>
+              </a:spcAft>
+              <a:buSzPct val="100000"/>
+              <a:buChar char="•"/>
+            </a:pPr>
+            <a:r>
+              <a:rPr lang="en-US" sz="1300" dirty="0">
+                <a:solidFill>
+                  <a:schemeClr val="tx2"/>
+                </a:solidFill>
+              </a:rPr>
+              <a:t>量除以 10 日均量:看這幾天是平常的幾倍</a:t>
+            </a:r>
+            <a:endParaRPr lang="en-US" sz="1500" dirty="0"/>
           </a:p>
         </p:txBody>
       </p:sp>
       <p:sp>
         <p:nvSpPr>
-          <p:cNvPr id="8" name="step-arrow-1"/>
+          <p:cNvPr id="34" name="train-samples"/>
           <p:cNvSpPr/>
           <p:nvPr/>
         </p:nvSpPr>
         <p:spPr>
           <a:xfrm>
-            <a:off x="3136392" y="2880360"/>
-            <a:ext cx="219456" cy="274320"/>
-          </a:xfrm>
-          <a:prstGeom prst="rightArrow">
-            <a:avLst/>
-          </a:prstGeom>
-          <a:solidFill>
-            <a:schemeClr val="accent6"/>
-          </a:solidFill>
-          <a:ln w="12700">
-            <a:solidFill>
-              <a:schemeClr val="accent6"/>
-            </a:solidFill>
-            <a:prstDash val="solid"/>
-          </a:ln>
-        </p:spPr>
-      </p:sp>
-      <p:sp>
-        <p:nvSpPr>
-          <p:cNvPr id="9" name="step-2"/>
-          <p:cNvSpPr/>
-          <p:nvPr/>
-        </p:nvSpPr>
-        <p:spPr>
-          <a:xfrm>
-            <a:off x="3383280" y="1554480"/>
-            <a:ext cx="2560320" cy="2926080"/>
+            <a:off x="548640" y="5486400"/>
+            <a:ext cx="11064240" cy="685800"/>
           </a:xfrm>
           <a:prstGeom prst="roundRect">
             <a:avLst>
-              <a:gd name="adj" fmla="val 2857"/>
+              <a:gd name="adj" fmla="val 10667"/>
             </a:avLst>
           </a:prstGeom>
           <a:solidFill>
@@ -4931,39 +9144,14 @@
       </p:sp>
       <p:sp>
         <p:nvSpPr>
-          <p:cNvPr id="10" name="step-dot-2"/>
-          <p:cNvSpPr/>
+          <p:cNvPr id="35" name="Text 32"/>
+          <p:cNvSpPr txBox="1"/>
           <p:nvPr/>
         </p:nvSpPr>
         <p:spPr>
           <a:xfrm>
-            <a:off x="3611880" y="1783080"/>
-            <a:ext cx="502920" cy="502920"/>
-          </a:xfrm>
-          <a:prstGeom prst="ellipse">
-            <a:avLst/>
-          </a:prstGeom>
-          <a:solidFill>
-            <a:schemeClr val="tx1"/>
-          </a:solidFill>
-          <a:ln w="12700">
-            <a:solidFill>
-              <a:schemeClr val="tx1"/>
-            </a:solidFill>
-            <a:prstDash val="solid"/>
-          </a:ln>
-        </p:spPr>
-      </p:sp>
-      <p:sp>
-        <p:nvSpPr>
-          <p:cNvPr id="11" name="Text 9"/>
-          <p:cNvSpPr txBox="1"/>
-          <p:nvPr/>
-        </p:nvSpPr>
-        <p:spPr>
-          <a:xfrm>
-            <a:off x="3611880" y="1783080"/>
-            <a:ext cx="502920" cy="502920"/>
+            <a:off x="777240" y="5486400"/>
+            <a:ext cx="10607040" cy="685800"/>
           </a:xfrm>
           <a:prstGeom prst="rect">
             <a:avLst/>
@@ -4975,78 +9163,17 @@
           <a:bodyPr wrap="square" lIns="0" tIns="0" rIns="0" bIns="0" rtlCol="0" anchor="ctr"/>
           <a:lstStyle/>
           <a:p>
-            <a:pPr algn="ctr" indent="0" marL="0">
-              <a:buNone/>
-            </a:pPr>
-            <a:r>
-              <a:rPr lang="en-US" sz="1800" b="1" dirty="0">
-                <a:solidFill>
-                  <a:schemeClr val="bg1"/>
-                </a:solidFill>
-              </a:rPr>
-              <a:t>2</a:t>
-            </a:r>
-            <a:endParaRPr lang="en-US" sz="1800" dirty="0"/>
-          </a:p>
-        </p:txBody>
-      </p:sp>
-      <p:sp>
-        <p:nvSpPr>
-          <p:cNvPr id="12" name="Text 10"/>
-          <p:cNvSpPr txBox="1"/>
-          <p:nvPr/>
-        </p:nvSpPr>
-        <p:spPr>
-          <a:xfrm>
-            <a:off x="3611880" y="2468880"/>
-            <a:ext cx="2148840" cy="457200"/>
-          </a:xfrm>
-          <a:prstGeom prst="rect">
-            <a:avLst/>
-          </a:prstGeom>
-          <a:noFill/>
-          <a:ln/>
-        </p:spPr>
-        <p:txBody>
-          <a:bodyPr wrap="square" lIns="0" tIns="0" rIns="0" bIns="0" rtlCol="0" anchor="t"/>
-          <a:lstStyle/>
-          <a:p>
             <a:pPr indent="0" marL="0">
               <a:buNone/>
             </a:pPr>
             <a:r>
-              <a:rPr lang="en-US" sz="1800" b="1" dirty="0">
+              <a:rPr lang="en-US" sz="1300" b="1" dirty="0">
                 <a:solidFill>
                   <a:schemeClr val="tx1"/>
                 </a:solidFill>
               </a:rPr>
-              <a:t>規則挑候選</a:t>
+              <a:t>訓練樣本:</a:t>
             </a:r>
-            <a:endParaRPr lang="en-US" sz="1800" dirty="0"/>
-          </a:p>
-        </p:txBody>
-      </p:sp>
-      <p:sp>
-        <p:nvSpPr>
-          <p:cNvPr id="13" name="Text 11"/>
-          <p:cNvSpPr txBox="1"/>
-          <p:nvPr/>
-        </p:nvSpPr>
-        <p:spPr>
-          <a:xfrm>
-            <a:off x="3611880" y="2971800"/>
-            <a:ext cx="2148840" cy="1463040"/>
-          </a:xfrm>
-          <a:prstGeom prst="rect">
-            <a:avLst/>
-          </a:prstGeom>
-          <a:noFill/>
-          <a:ln/>
-        </p:spPr>
-        <p:txBody>
-          <a:bodyPr wrap="square" lIns="0" tIns="0" rIns="0" bIns="0" rtlCol="0" anchor="t"/>
-          <a:lstStyle/>
-          <a:p>
             <a:pPr indent="0" marL="0">
               <a:buNone/>
             </a:pPr>
@@ -5056,453 +9183,9 @@
                   <a:schemeClr val="tx2"/>
                 </a:solidFill>
               </a:rPr>
-              <a:t>t 日收盤是近 6 天最高 → 高點候選;最低 → 低點候選;其餘直接判非極值</a:t>
+              <a:t>2020–2023 的規則候選日(t 日收盤是近 6 天最高 → 高點候選 13,994 天;最低 → 低點候選 11,465 天),高點、低點各訓練一組 AE + OC-SVM。</a:t>
             </a:r>
             <a:endParaRPr lang="en-US" sz="1300" dirty="0"/>
-          </a:p>
-        </p:txBody>
-      </p:sp>
-      <p:sp>
-        <p:nvSpPr>
-          <p:cNvPr id="14" name="step-arrow-2"/>
-          <p:cNvSpPr/>
-          <p:nvPr/>
-        </p:nvSpPr>
-        <p:spPr>
-          <a:xfrm>
-            <a:off x="5971032" y="2880360"/>
-            <a:ext cx="219456" cy="274320"/>
-          </a:xfrm>
-          <a:prstGeom prst="rightArrow">
-            <a:avLst/>
-          </a:prstGeom>
-          <a:solidFill>
-            <a:schemeClr val="accent6"/>
-          </a:solidFill>
-          <a:ln w="12700">
-            <a:solidFill>
-              <a:schemeClr val="accent6"/>
-            </a:solidFill>
-            <a:prstDash val="solid"/>
-          </a:ln>
-        </p:spPr>
-      </p:sp>
-      <p:sp>
-        <p:nvSpPr>
-          <p:cNvPr id="15" name="step-3"/>
-          <p:cNvSpPr/>
-          <p:nvPr/>
-        </p:nvSpPr>
-        <p:spPr>
-          <a:xfrm>
-            <a:off x="6217920" y="1554480"/>
-            <a:ext cx="2560320" cy="2926080"/>
-          </a:xfrm>
-          <a:prstGeom prst="roundRect">
-            <a:avLst>
-              <a:gd name="adj" fmla="val 2857"/>
-            </a:avLst>
-          </a:prstGeom>
-          <a:solidFill>
-            <a:schemeClr val="bg2"/>
-          </a:solidFill>
-          <a:ln w="12700">
-            <a:solidFill>
-              <a:schemeClr val="bg2"/>
-            </a:solidFill>
-            <a:prstDash val="solid"/>
-          </a:ln>
-        </p:spPr>
-      </p:sp>
-      <p:sp>
-        <p:nvSpPr>
-          <p:cNvPr id="16" name="step-dot-3"/>
-          <p:cNvSpPr/>
-          <p:nvPr/>
-        </p:nvSpPr>
-        <p:spPr>
-          <a:xfrm>
-            <a:off x="6446520" y="1783080"/>
-            <a:ext cx="502920" cy="502920"/>
-          </a:xfrm>
-          <a:prstGeom prst="ellipse">
-            <a:avLst/>
-          </a:prstGeom>
-          <a:solidFill>
-            <a:schemeClr val="accent1"/>
-          </a:solidFill>
-          <a:ln w="12700">
-            <a:solidFill>
-              <a:schemeClr val="accent1"/>
-            </a:solidFill>
-            <a:prstDash val="solid"/>
-          </a:ln>
-        </p:spPr>
-      </p:sp>
-      <p:sp>
-        <p:nvSpPr>
-          <p:cNvPr id="17" name="Text 15"/>
-          <p:cNvSpPr txBox="1"/>
-          <p:nvPr/>
-        </p:nvSpPr>
-        <p:spPr>
-          <a:xfrm>
-            <a:off x="6446520" y="1783080"/>
-            <a:ext cx="502920" cy="502920"/>
-          </a:xfrm>
-          <a:prstGeom prst="rect">
-            <a:avLst/>
-          </a:prstGeom>
-          <a:noFill/>
-          <a:ln/>
-        </p:spPr>
-        <p:txBody>
-          <a:bodyPr wrap="square" lIns="0" tIns="0" rIns="0" bIns="0" rtlCol="0" anchor="ctr"/>
-          <a:lstStyle/>
-          <a:p>
-            <a:pPr algn="ctr" indent="0" marL="0">
-              <a:buNone/>
-            </a:pPr>
-            <a:r>
-              <a:rPr lang="en-US" sz="1800" b="1" dirty="0">
-                <a:solidFill>
-                  <a:schemeClr val="bg1"/>
-                </a:solidFill>
-              </a:rPr>
-              <a:t>3</a:t>
-            </a:r>
-            <a:endParaRPr lang="en-US" sz="1800" dirty="0"/>
-          </a:p>
-        </p:txBody>
-      </p:sp>
-      <p:sp>
-        <p:nvSpPr>
-          <p:cNvPr id="18" name="Text 16"/>
-          <p:cNvSpPr txBox="1"/>
-          <p:nvPr/>
-        </p:nvSpPr>
-        <p:spPr>
-          <a:xfrm>
-            <a:off x="6446520" y="2468880"/>
-            <a:ext cx="2148840" cy="457200"/>
-          </a:xfrm>
-          <a:prstGeom prst="rect">
-            <a:avLst/>
-          </a:prstGeom>
-          <a:noFill/>
-          <a:ln/>
-        </p:spPr>
-        <p:txBody>
-          <a:bodyPr wrap="square" lIns="0" tIns="0" rIns="0" bIns="0" rtlCol="0" anchor="t"/>
-          <a:lstStyle/>
-          <a:p>
-            <a:pPr indent="0" marL="0">
-              <a:buNone/>
-            </a:pPr>
-            <a:r>
-              <a:rPr lang="en-US" sz="1800" b="1" dirty="0">
-                <a:solidFill>
-                  <a:schemeClr val="tx1"/>
-                </a:solidFill>
-              </a:rPr>
-              <a:t>AE + OC-SVM 篩選</a:t>
-            </a:r>
-            <a:endParaRPr lang="en-US" sz="1800" dirty="0"/>
-          </a:p>
-        </p:txBody>
-      </p:sp>
-      <p:sp>
-        <p:nvSpPr>
-          <p:cNvPr id="19" name="Text 17"/>
-          <p:cNvSpPr txBox="1"/>
-          <p:nvPr/>
-        </p:nvSpPr>
-        <p:spPr>
-          <a:xfrm>
-            <a:off x="6446520" y="2971800"/>
-            <a:ext cx="2148840" cy="1463040"/>
-          </a:xfrm>
-          <a:prstGeom prst="rect">
-            <a:avLst/>
-          </a:prstGeom>
-          <a:noFill/>
-          <a:ln/>
-        </p:spPr>
-        <p:txBody>
-          <a:bodyPr wrap="square" lIns="0" tIns="0" rIns="0" bIns="0" rtlCol="0" anchor="t"/>
-          <a:lstStyle/>
-          <a:p>
-            <a:pPr indent="0" marL="0">
-              <a:buNone/>
-            </a:pPr>
-            <a:r>
-              <a:rPr lang="en-US" sz="1300" dirty="0">
-                <a:solidFill>
-                  <a:schemeClr val="tx2"/>
-                </a:solidFill>
-              </a:rPr>
-              <a:t>候選落在「真高(低)點」的範圍內才保留,範圍外改判非極值</a:t>
-            </a:r>
-            <a:endParaRPr lang="en-US" sz="1300" dirty="0"/>
-          </a:p>
-        </p:txBody>
-      </p:sp>
-      <p:sp>
-        <p:nvSpPr>
-          <p:cNvPr id="20" name="step-arrow-3"/>
-          <p:cNvSpPr/>
-          <p:nvPr/>
-        </p:nvSpPr>
-        <p:spPr>
-          <a:xfrm>
-            <a:off x="8805672" y="2880360"/>
-            <a:ext cx="219456" cy="274320"/>
-          </a:xfrm>
-          <a:prstGeom prst="rightArrow">
-            <a:avLst/>
-          </a:prstGeom>
-          <a:solidFill>
-            <a:schemeClr val="accent6"/>
-          </a:solidFill>
-          <a:ln w="12700">
-            <a:solidFill>
-              <a:schemeClr val="accent6"/>
-            </a:solidFill>
-            <a:prstDash val="solid"/>
-          </a:ln>
-        </p:spPr>
-      </p:sp>
-      <p:sp>
-        <p:nvSpPr>
-          <p:cNvPr id="21" name="step-4"/>
-          <p:cNvSpPr/>
-          <p:nvPr/>
-        </p:nvSpPr>
-        <p:spPr>
-          <a:xfrm>
-            <a:off x="9052560" y="1554480"/>
-            <a:ext cx="2560320" cy="2926080"/>
-          </a:xfrm>
-          <a:prstGeom prst="roundRect">
-            <a:avLst>
-              <a:gd name="adj" fmla="val 2857"/>
-            </a:avLst>
-          </a:prstGeom>
-          <a:solidFill>
-            <a:schemeClr val="bg2"/>
-          </a:solidFill>
-          <a:ln w="12700">
-            <a:solidFill>
-              <a:schemeClr val="bg2"/>
-            </a:solidFill>
-            <a:prstDash val="solid"/>
-          </a:ln>
-        </p:spPr>
-      </p:sp>
-      <p:sp>
-        <p:nvSpPr>
-          <p:cNvPr id="22" name="step-dot-4"/>
-          <p:cNvSpPr/>
-          <p:nvPr/>
-        </p:nvSpPr>
-        <p:spPr>
-          <a:xfrm>
-            <a:off x="9281160" y="1783080"/>
-            <a:ext cx="502920" cy="502920"/>
-          </a:xfrm>
-          <a:prstGeom prst="ellipse">
-            <a:avLst/>
-          </a:prstGeom>
-          <a:solidFill>
-            <a:schemeClr val="tx1"/>
-          </a:solidFill>
-          <a:ln w="12700">
-            <a:solidFill>
-              <a:schemeClr val="tx1"/>
-            </a:solidFill>
-            <a:prstDash val="solid"/>
-          </a:ln>
-        </p:spPr>
-      </p:sp>
-      <p:sp>
-        <p:nvSpPr>
-          <p:cNvPr id="23" name="Text 21"/>
-          <p:cNvSpPr txBox="1"/>
-          <p:nvPr/>
-        </p:nvSpPr>
-        <p:spPr>
-          <a:xfrm>
-            <a:off x="9281160" y="1783080"/>
-            <a:ext cx="502920" cy="502920"/>
-          </a:xfrm>
-          <a:prstGeom prst="rect">
-            <a:avLst/>
-          </a:prstGeom>
-          <a:noFill/>
-          <a:ln/>
-        </p:spPr>
-        <p:txBody>
-          <a:bodyPr wrap="square" lIns="0" tIns="0" rIns="0" bIns="0" rtlCol="0" anchor="ctr"/>
-          <a:lstStyle/>
-          <a:p>
-            <a:pPr algn="ctr" indent="0" marL="0">
-              <a:buNone/>
-            </a:pPr>
-            <a:r>
-              <a:rPr lang="en-US" sz="1800" b="1" dirty="0">
-                <a:solidFill>
-                  <a:schemeClr val="bg1"/>
-                </a:solidFill>
-              </a:rPr>
-              <a:t>4</a:t>
-            </a:r>
-            <a:endParaRPr lang="en-US" sz="1800" dirty="0"/>
-          </a:p>
-        </p:txBody>
-      </p:sp>
-      <p:sp>
-        <p:nvSpPr>
-          <p:cNvPr id="24" name="Text 22"/>
-          <p:cNvSpPr txBox="1"/>
-          <p:nvPr/>
-        </p:nvSpPr>
-        <p:spPr>
-          <a:xfrm>
-            <a:off x="9281160" y="2468880"/>
-            <a:ext cx="2148840" cy="457200"/>
-          </a:xfrm>
-          <a:prstGeom prst="rect">
-            <a:avLst/>
-          </a:prstGeom>
-          <a:noFill/>
-          <a:ln/>
-        </p:spPr>
-        <p:txBody>
-          <a:bodyPr wrap="square" lIns="0" tIns="0" rIns="0" bIns="0" rtlCol="0" anchor="t"/>
-          <a:lstStyle/>
-          <a:p>
-            <a:pPr indent="0" marL="0">
-              <a:buNone/>
-            </a:pPr>
-            <a:r>
-              <a:rPr lang="en-US" sz="1800" b="1" dirty="0">
-                <a:solidFill>
-                  <a:schemeClr val="tx1"/>
-                </a:solidFill>
-              </a:rPr>
-              <a:t>輸出</a:t>
-            </a:r>
-            <a:endParaRPr lang="en-US" sz="1800" dirty="0"/>
-          </a:p>
-        </p:txBody>
-      </p:sp>
-      <p:sp>
-        <p:nvSpPr>
-          <p:cNvPr id="25" name="Text 23"/>
-          <p:cNvSpPr txBox="1"/>
-          <p:nvPr/>
-        </p:nvSpPr>
-        <p:spPr>
-          <a:xfrm>
-            <a:off x="9281160" y="2971800"/>
-            <a:ext cx="2148840" cy="1463040"/>
-          </a:xfrm>
-          <a:prstGeom prst="rect">
-            <a:avLst/>
-          </a:prstGeom>
-          <a:noFill/>
-          <a:ln/>
-        </p:spPr>
-        <p:txBody>
-          <a:bodyPr wrap="square" lIns="0" tIns="0" rIns="0" bIns="0" rtlCol="0" anchor="t"/>
-          <a:lstStyle/>
-          <a:p>
-            <a:pPr indent="0" marL="0">
-              <a:buNone/>
-            </a:pPr>
-            <a:r>
-              <a:rPr lang="en-US" sz="1300" dirty="0">
-                <a:solidFill>
-                  <a:schemeClr val="tx2"/>
-                </a:solidFill>
-              </a:rPr>
-              <a:t>每天一個判斷:高點 / 非極值 / 低點</a:t>
-            </a:r>
-            <a:endParaRPr lang="en-US" sz="1300" dirty="0"/>
-          </a:p>
-        </p:txBody>
-      </p:sp>
-      <p:sp>
-        <p:nvSpPr>
-          <p:cNvPr id="26" name="why-rule"/>
-          <p:cNvSpPr/>
-          <p:nvPr/>
-        </p:nvSpPr>
-        <p:spPr>
-          <a:xfrm>
-            <a:off x="548640" y="4754880"/>
-            <a:ext cx="11064240" cy="1051560"/>
-          </a:xfrm>
-          <a:prstGeom prst="roundRect">
-            <a:avLst>
-              <a:gd name="adj" fmla="val 6957"/>
-            </a:avLst>
-          </a:prstGeom>
-          <a:solidFill>
-            <a:schemeClr val="bg2"/>
-          </a:solidFill>
-          <a:ln w="12700">
-            <a:solidFill>
-              <a:schemeClr val="bg2"/>
-            </a:solidFill>
-            <a:prstDash val="solid"/>
-          </a:ln>
-        </p:spPr>
-      </p:sp>
-      <p:sp>
-        <p:nvSpPr>
-          <p:cNvPr id="27" name="Text 25"/>
-          <p:cNvSpPr txBox="1"/>
-          <p:nvPr/>
-        </p:nvSpPr>
-        <p:spPr>
-          <a:xfrm>
-            <a:off x="822960" y="4919472"/>
-            <a:ext cx="10515600" cy="777240"/>
-          </a:xfrm>
-          <a:prstGeom prst="rect">
-            <a:avLst/>
-          </a:prstGeom>
-          <a:noFill/>
-          <a:ln/>
-        </p:spPr>
-        <p:txBody>
-          <a:bodyPr wrap="square" lIns="0" tIns="0" rIns="0" bIns="0" rtlCol="0" anchor="t"/>
-          <a:lstStyle/>
-          <a:p>
-            <a:pPr indent="0" marL="0">
-              <a:buNone/>
-            </a:pPr>
-            <a:r>
-              <a:rPr lang="en-US" sz="1400" b="1" dirty="0">
-                <a:solidFill>
-                  <a:schemeClr val="tx1"/>
-                </a:solidFill>
-              </a:rPr>
-              <a:t>為什麼規則不會漏:</a:t>
-            </a:r>
-            <a:pPr indent="0" marL="0">
-              <a:buNone/>
-            </a:pPr>
-            <a:r>
-              <a:rPr lang="en-US" sz="1400" dirty="0">
-                <a:solidFill>
-                  <a:schemeClr val="tx2"/>
-                </a:solidFill>
-              </a:rPr>
-              <a:t>t 日如果是 11 天最高,一定也是近 6 天(t-5 ~ t)最高,而這在 t 日收盤就知道。所以真高低點全部都在候選裡,模型的工作只剩「從候選裡刪掉之後 5 天被超越的假候選」。</a:t>
-            </a:r>
-            <a:endParaRPr lang="en-US" sz="1400" dirty="0"/>
           </a:p>
         </p:txBody>
       </p:sp>

--- a/method_kline_peak/report/TW50_局部高低點_專題進度.pptx
+++ b/method_kline_peak/report/TW50_局部高低點_專題進度.pptx
@@ -114,26 +114,26 @@
   <p:extLst>
     <p:ext uri="{521415D9-36F7-43E2-AB2F-B90AF26B5E84}">
       <p14:sectionLst xmlns:p14="http://schemas.microsoft.com/office/powerpoint/2010/main">
-        <p14:section name="問題與資料" id="{1f8cd920-9e09-7292-4e01-d6978bdd4cbe}">
+        <p14:section name="問題與資料" id="{f316fb7e-b031-3030-5dfe-177fb5289170}">
           <p14:sldIdLst>
             <p14:sldId id="256"/>
             <p14:sldId id="257"/>
           </p14:sldIdLst>
         </p14:section>
-        <p14:section name="方法與計分" id="{21c2f161-5beb-3b83-f527-3e874ef0b1b9}">
+        <p14:section name="方法與計分" id="{474745fa-0119-6ea9-cc97-0ad7bcb72f4d}">
           <p14:sldIdLst>
             <p14:sldId id="258"/>
             <p14:sldId id="259"/>
           </p14:sldIdLst>
         </p14:section>
-        <p14:section name="結果" id="{6233c603-c9c7-4de8-bec4-9c01498f17b2}">
+        <p14:section name="結果" id="{42e84772-2358-baeb-2277-eebdfd2202ba}">
           <p14:sldIdLst>
             <p14:sldId id="260"/>
             <p14:sldId id="261"/>
             <p14:sldId id="262"/>
           </p14:sldIdLst>
         </p14:section>
-        <p14:section name="總結" id="{a00ee8c0-e4aa-cb94-1e8d-eb73a4264333}">
+        <p14:section name="總結" id="{95480b3f-55f0-34cc-6780-285bf4f09dae}">
           <p14:sldIdLst>
             <p14:sldId id="263"/>
           </p14:sldIdLst>
@@ -1421,7 +1421,7 @@
           <a:p>
             <a:r>
               <a:rPr lang="en-US" dirty="0"/>
-              <a:t>資料是 TW50 的 50 檔股票,2016 到 2026 年 9 月的還原日 K,總共約 12.9 萬個股票日。訓練用 2020 到 2023 年 48,585 筆,測試用 2025 年到 2026 年 9 月 20,189 筆。高點和低點各只佔 7 到 8%,這個不平衡很重要,後面算 acc 時會再提到。</a:t>
+              <a:t>資料是 TW50 的 50 檔股票,2016 到 2026 年 9 月的還原日 K,總共 128,867 個股票日。訓練用 2020 到 2023 年 48,585 筆,測試用 2025 年到 2026 年 9 月 20,189 筆;2016 到 2019 年和 2024 年沒有用到,其中 2024 年刻意空下來,讓訓練和測試隔開。四段加起來剛好是 128,867。高點和低點各只佔 7 到 8%,這個不平衡很重要,後面算 acc 時會再提到。</a:t>
             </a:r>
             <a:endParaRPr lang="en-US" dirty="0"/>
           </a:p>
@@ -1509,7 +1509,7 @@
           <a:p>
             <a:r>
               <a:rPr lang="en-US" dirty="0"/>
-              <a:t>這頁說明我們丟進模型的是什麼。一個樣本是 11 個交易日,第 6 天是 t。模型只看前 6 天,也就是 t-5 到 t,這些在 t 日收盤時都已經知道;後 5 天只用來貼標籤,模型看不到。每天取 5 個特徵:開、高、低、收都除以 t 日收盤,量除以 10 日均量。t 日收盤除以自己永遠是 1,所以拿掉,總共 29 個數字。表上是台積電 2026-02-25 的實際數字:前 5 天的價格都在 t 日收盤下方,代表一路往上收到 t 日。訓練只用規則挑出的候選日,高點和低點各訓練一組模型。</a:t>
+              <a:t>這頁說明我們丟進模型的是什麼。一個樣本是 11 個交易日,第 6 天是 t。模型只看前 6 天,也就是 t-5 到 t,這些在 t 日收盤時都已經知道;後 5 天只用來貼標籤,模型看不到。每天取 5 個特徵:開、高、低、收都除以 t 日收盤,量除以 10 日均量。t 日收盤除以自己永遠是 1,所以拿掉,總共 29 個數字。表上是台積電 2026-02-25 的實際數字:前 5 天的價格都在 t 日收盤下方,代表一路往上收到 t 日。訓練時 50 檔股票放在一起,不是每檔一個模型:候選日裡真的是高點的 3,805 天訓練高點模型,真的是低點的 3,656 天訓練低點模型,總共只有 2 組。模型不知道樣本是哪一檔股票,因為價格都除以 t 日收盤、量都除以 10 日均量,不同股票可以放在一起比。</a:t>
             </a:r>
             <a:endParaRPr lang="en-US" dirty="0"/>
           </a:p>
@@ -3497,7 +3497,7 @@
                 <a:gridCol w="1371600"/>
                 <a:gridCol w="4663440"/>
               </a:tblGrid>
-              <a:tr h="475488">
+              <a:tr h="457200">
                 <a:tc>
                   <a:txBody>
                     <a:bodyPr/>
@@ -3629,7 +3629,7 @@
                   </a:tcPr>
                 </a:tc>
               </a:tr>
-              <a:tr h="475488">
+              <a:tr h="457200">
                 <a:tc>
                   <a:txBody>
                     <a:bodyPr/>
@@ -3761,7 +3761,7 @@
                   </a:tcPr>
                 </a:tc>
               </a:tr>
-              <a:tr h="475488">
+              <a:tr h="457200">
                 <a:tc>
                   <a:txBody>
                     <a:bodyPr/>
@@ -3893,7 +3893,7 @@
                   </a:tcPr>
                 </a:tc>
               </a:tr>
-              <a:tr h="475488">
+              <a:tr h="457200">
                 <a:tc>
                   <a:txBody>
                     <a:bodyPr/>
@@ -3911,7 +3911,7 @@
                           <a:ea typeface="Microsoft JhengHei" pitchFamily="34" charset="-122"/>
                           <a:cs typeface="Microsoft JhengHei" pitchFamily="34" charset="-120"/>
                         </a:rPr>
-                        <a:t>期間</a:t>
+                        <a:t>全部</a:t>
                       </a:r>
                       <a:endParaRPr lang="en-US" sz="1400" dirty="0">
                         <a:latin typeface="Microsoft JhengHei" charset="0"/>
@@ -3976,7 +3976,7 @@
                           <a:ea typeface="Microsoft JhengHei" pitchFamily="34" charset="-122"/>
                           <a:cs typeface="Microsoft JhengHei" pitchFamily="34" charset="-120"/>
                         </a:rPr>
-                        <a:t>2016-01 ~ 2026-09,可貼標的股票日 129,067</a:t>
+                        <a:t>2016-01 ~ 2026-09:128,867 個股票日</a:t>
                       </a:r>
                       <a:endParaRPr lang="en-US" sz="1400" dirty="0">
                         <a:latin typeface="Microsoft JhengHei" charset="0"/>
@@ -4025,7 +4025,139 @@
                   </a:tcPr>
                 </a:tc>
               </a:tr>
-              <a:tr h="475488">
+              <a:tr h="457200">
+                <a:tc>
+                  <a:txBody>
+                    <a:bodyPr/>
+                    <a:lstStyle/>
+                    <a:p>
+                      <a:pPr indent="0" marL="0">
+                        <a:buNone/>
+                      </a:pPr>
+                      <a:r>
+                        <a:rPr lang="en-US" sz="1400" b="1" dirty="0">
+                          <a:solidFill>
+                            <a:srgbClr val="7A8691"/>
+                          </a:solidFill>
+                          <a:latin typeface="Microsoft JhengHei" pitchFamily="34" charset="0"/>
+                          <a:ea typeface="Microsoft JhengHei" pitchFamily="34" charset="-122"/>
+                          <a:cs typeface="Microsoft JhengHei" pitchFamily="34" charset="-120"/>
+                        </a:rPr>
+                        <a:t>2016–2019</a:t>
+                      </a:r>
+                      <a:endParaRPr lang="en-US" sz="1400" dirty="0">
+                        <a:latin typeface="Microsoft JhengHei" charset="0"/>
+                        <a:ea typeface="Microsoft JhengHei" charset="0"/>
+                        <a:cs typeface="Microsoft JhengHei" charset="0"/>
+                      </a:endParaRPr>
+                    </a:p>
+                  </a:txBody>
+                  <a:tcPr marL="91440" marR="91440" marT="0" marB="0" anchor="ctr">
+                    <a:lnL w="9525" cap="flat" cmpd="sng" algn="ctr">
+                      <a:solidFill>
+                        <a:srgbClr val="D9E0E6"/>
+                      </a:solidFill>
+                      <a:prstDash val="solid"/>
+                      <a:round/>
+                      <a:headEnd type="none" w="med" len="med"/>
+                      <a:tailEnd type="none" w="med" len="med"/>
+                    </a:lnL>
+                    <a:lnR w="9525" cap="flat" cmpd="sng" algn="ctr">
+                      <a:solidFill>
+                        <a:srgbClr val="D9E0E6"/>
+                      </a:solidFill>
+                      <a:prstDash val="solid"/>
+                      <a:round/>
+                      <a:headEnd type="none" w="med" len="med"/>
+                      <a:tailEnd type="none" w="med" len="med"/>
+                    </a:lnR>
+                    <a:lnT w="9525" cap="flat" cmpd="sng" algn="ctr">
+                      <a:solidFill>
+                        <a:srgbClr val="D9E0E6"/>
+                      </a:solidFill>
+                      <a:prstDash val="solid"/>
+                      <a:round/>
+                      <a:headEnd type="none" w="med" len="med"/>
+                      <a:tailEnd type="none" w="med" len="med"/>
+                    </a:lnT>
+                    <a:lnB w="9525" cap="flat" cmpd="sng" algn="ctr">
+                      <a:solidFill>
+                        <a:srgbClr val="D9E0E6"/>
+                      </a:solidFill>
+                      <a:prstDash val="solid"/>
+                      <a:round/>
+                      <a:headEnd type="none" w="med" len="med"/>
+                      <a:tailEnd type="none" w="med" len="med"/>
+                    </a:lnB>
+                  </a:tcPr>
+                </a:tc>
+                <a:tc>
+                  <a:txBody>
+                    <a:bodyPr/>
+                    <a:lstStyle/>
+                    <a:p>
+                      <a:pPr indent="0" marL="0">
+                        <a:buNone/>
+                      </a:pPr>
+                      <a:r>
+                        <a:rPr lang="en-US" sz="1400" dirty="0">
+                          <a:solidFill>
+                            <a:srgbClr val="7A8691"/>
+                          </a:solidFill>
+                          <a:latin typeface="Microsoft JhengHei" pitchFamily="34" charset="0"/>
+                          <a:ea typeface="Microsoft JhengHei" pitchFamily="34" charset="-122"/>
+                          <a:cs typeface="Microsoft JhengHei" pitchFamily="34" charset="-120"/>
+                        </a:rPr>
+                        <a:t>47,995 筆:沒用到(訓練從 2020 開始)</a:t>
+                      </a:r>
+                      <a:endParaRPr lang="en-US" sz="1400" dirty="0">
+                        <a:latin typeface="Microsoft JhengHei" charset="0"/>
+                        <a:ea typeface="Microsoft JhengHei" charset="0"/>
+                        <a:cs typeface="Microsoft JhengHei" charset="0"/>
+                      </a:endParaRPr>
+                    </a:p>
+                  </a:txBody>
+                  <a:tcPr marL="91440" marR="91440" marT="0" marB="0" anchor="ctr">
+                    <a:lnL w="9525" cap="flat" cmpd="sng" algn="ctr">
+                      <a:solidFill>
+                        <a:srgbClr val="D9E0E6"/>
+                      </a:solidFill>
+                      <a:prstDash val="solid"/>
+                      <a:round/>
+                      <a:headEnd type="none" w="med" len="med"/>
+                      <a:tailEnd type="none" w="med" len="med"/>
+                    </a:lnL>
+                    <a:lnR w="9525" cap="flat" cmpd="sng" algn="ctr">
+                      <a:solidFill>
+                        <a:srgbClr val="D9E0E6"/>
+                      </a:solidFill>
+                      <a:prstDash val="solid"/>
+                      <a:round/>
+                      <a:headEnd type="none" w="med" len="med"/>
+                      <a:tailEnd type="none" w="med" len="med"/>
+                    </a:lnR>
+                    <a:lnT w="9525" cap="flat" cmpd="sng" algn="ctr">
+                      <a:solidFill>
+                        <a:srgbClr val="D9E0E6"/>
+                      </a:solidFill>
+                      <a:prstDash val="solid"/>
+                      <a:round/>
+                      <a:headEnd type="none" w="med" len="med"/>
+                      <a:tailEnd type="none" w="med" len="med"/>
+                    </a:lnT>
+                    <a:lnB w="9525" cap="flat" cmpd="sng" algn="ctr">
+                      <a:solidFill>
+                        <a:srgbClr val="D9E0E6"/>
+                      </a:solidFill>
+                      <a:prstDash val="solid"/>
+                      <a:round/>
+                      <a:headEnd type="none" w="med" len="med"/>
+                      <a:tailEnd type="none" w="med" len="med"/>
+                    </a:lnB>
+                  </a:tcPr>
+                </a:tc>
+              </a:tr>
+              <a:tr h="457200">
                 <a:tc>
                   <a:txBody>
                     <a:bodyPr/>
@@ -4157,7 +4289,7 @@
                   </a:tcPr>
                 </a:tc>
               </a:tr>
-              <a:tr h="475488">
+              <a:tr h="457200">
                 <a:tc>
                   <a:txBody>
                     <a:bodyPr/>
@@ -4240,7 +4372,7 @@
                           <a:ea typeface="Microsoft JhengHei" pitchFamily="34" charset="-122"/>
                           <a:cs typeface="Microsoft JhengHei" pitchFamily="34" charset="-120"/>
                         </a:rPr>
-                        <a:t>高點候選 13,994、低點候選 11,465</a:t>
+                        <a:t>高點 13,994(真 3,805)、低點 11,465(真 3,656)</a:t>
                       </a:r>
                       <a:endParaRPr lang="en-US" sz="1400" dirty="0">
                         <a:latin typeface="Microsoft JhengHei" charset="0"/>
@@ -4289,7 +4421,139 @@
                   </a:tcPr>
                 </a:tc>
               </a:tr>
-              <a:tr h="475488">
+              <a:tr h="457200">
+                <a:tc>
+                  <a:txBody>
+                    <a:bodyPr/>
+                    <a:lstStyle/>
+                    <a:p>
+                      <a:pPr indent="0" marL="0">
+                        <a:buNone/>
+                      </a:pPr>
+                      <a:r>
+                        <a:rPr lang="en-US" sz="1400" b="1" dirty="0">
+                          <a:solidFill>
+                            <a:srgbClr val="7A8691"/>
+                          </a:solidFill>
+                          <a:latin typeface="Microsoft JhengHei" pitchFamily="34" charset="0"/>
+                          <a:ea typeface="Microsoft JhengHei" pitchFamily="34" charset="-122"/>
+                          <a:cs typeface="Microsoft JhengHei" pitchFamily="34" charset="-120"/>
+                        </a:rPr>
+                        <a:t>2024</a:t>
+                      </a:r>
+                      <a:endParaRPr lang="en-US" sz="1400" dirty="0">
+                        <a:latin typeface="Microsoft JhengHei" charset="0"/>
+                        <a:ea typeface="Microsoft JhengHei" charset="0"/>
+                        <a:cs typeface="Microsoft JhengHei" charset="0"/>
+                      </a:endParaRPr>
+                    </a:p>
+                  </a:txBody>
+                  <a:tcPr marL="91440" marR="91440" marT="0" marB="0" anchor="ctr">
+                    <a:lnL w="9525" cap="flat" cmpd="sng" algn="ctr">
+                      <a:solidFill>
+                        <a:srgbClr val="D9E0E6"/>
+                      </a:solidFill>
+                      <a:prstDash val="solid"/>
+                      <a:round/>
+                      <a:headEnd type="none" w="med" len="med"/>
+                      <a:tailEnd type="none" w="med" len="med"/>
+                    </a:lnL>
+                    <a:lnR w="9525" cap="flat" cmpd="sng" algn="ctr">
+                      <a:solidFill>
+                        <a:srgbClr val="D9E0E6"/>
+                      </a:solidFill>
+                      <a:prstDash val="solid"/>
+                      <a:round/>
+                      <a:headEnd type="none" w="med" len="med"/>
+                      <a:tailEnd type="none" w="med" len="med"/>
+                    </a:lnR>
+                    <a:lnT w="9525" cap="flat" cmpd="sng" algn="ctr">
+                      <a:solidFill>
+                        <a:srgbClr val="D9E0E6"/>
+                      </a:solidFill>
+                      <a:prstDash val="solid"/>
+                      <a:round/>
+                      <a:headEnd type="none" w="med" len="med"/>
+                      <a:tailEnd type="none" w="med" len="med"/>
+                    </a:lnT>
+                    <a:lnB w="9525" cap="flat" cmpd="sng" algn="ctr">
+                      <a:solidFill>
+                        <a:srgbClr val="D9E0E6"/>
+                      </a:solidFill>
+                      <a:prstDash val="solid"/>
+                      <a:round/>
+                      <a:headEnd type="none" w="med" len="med"/>
+                      <a:tailEnd type="none" w="med" len="med"/>
+                    </a:lnB>
+                  </a:tcPr>
+                </a:tc>
+                <a:tc>
+                  <a:txBody>
+                    <a:bodyPr/>
+                    <a:lstStyle/>
+                    <a:p>
+                      <a:pPr indent="0" marL="0">
+                        <a:buNone/>
+                      </a:pPr>
+                      <a:r>
+                        <a:rPr lang="en-US" sz="1400" dirty="0">
+                          <a:solidFill>
+                            <a:srgbClr val="7A8691"/>
+                          </a:solidFill>
+                          <a:latin typeface="Microsoft JhengHei" pitchFamily="34" charset="0"/>
+                          <a:ea typeface="Microsoft JhengHei" pitchFamily="34" charset="-122"/>
+                          <a:cs typeface="Microsoft JhengHei" pitchFamily="34" charset="-120"/>
+                        </a:rPr>
+                        <a:t>12,098 筆:沒用到(訓練與測試之間空一年)</a:t>
+                      </a:r>
+                      <a:endParaRPr lang="en-US" sz="1400" dirty="0">
+                        <a:latin typeface="Microsoft JhengHei" charset="0"/>
+                        <a:ea typeface="Microsoft JhengHei" charset="0"/>
+                        <a:cs typeface="Microsoft JhengHei" charset="0"/>
+                      </a:endParaRPr>
+                    </a:p>
+                  </a:txBody>
+                  <a:tcPr marL="91440" marR="91440" marT="0" marB="0" anchor="ctr">
+                    <a:lnL w="9525" cap="flat" cmpd="sng" algn="ctr">
+                      <a:solidFill>
+                        <a:srgbClr val="D9E0E6"/>
+                      </a:solidFill>
+                      <a:prstDash val="solid"/>
+                      <a:round/>
+                      <a:headEnd type="none" w="med" len="med"/>
+                      <a:tailEnd type="none" w="med" len="med"/>
+                    </a:lnL>
+                    <a:lnR w="9525" cap="flat" cmpd="sng" algn="ctr">
+                      <a:solidFill>
+                        <a:srgbClr val="D9E0E6"/>
+                      </a:solidFill>
+                      <a:prstDash val="solid"/>
+                      <a:round/>
+                      <a:headEnd type="none" w="med" len="med"/>
+                      <a:tailEnd type="none" w="med" len="med"/>
+                    </a:lnR>
+                    <a:lnT w="9525" cap="flat" cmpd="sng" algn="ctr">
+                      <a:solidFill>
+                        <a:srgbClr val="D9E0E6"/>
+                      </a:solidFill>
+                      <a:prstDash val="solid"/>
+                      <a:round/>
+                      <a:headEnd type="none" w="med" len="med"/>
+                      <a:tailEnd type="none" w="med" len="med"/>
+                    </a:lnT>
+                    <a:lnB w="9525" cap="flat" cmpd="sng" algn="ctr">
+                      <a:solidFill>
+                        <a:srgbClr val="D9E0E6"/>
+                      </a:solidFill>
+                      <a:prstDash val="solid"/>
+                      <a:round/>
+                      <a:headEnd type="none" w="med" len="med"/>
+                      <a:tailEnd type="none" w="med" len="med"/>
+                    </a:lnB>
+                  </a:tcPr>
+                </a:tc>
+              </a:tr>
+              <a:tr h="457200">
                 <a:tc>
                   <a:txBody>
                     <a:bodyPr/>
@@ -4373,138 +4637,6 @@
                           <a:cs typeface="Microsoft JhengHei" pitchFamily="34" charset="-120"/>
                         </a:rPr>
                         <a:t>2025-01 ~ 2026-09:20,189 筆</a:t>
-                      </a:r>
-                      <a:endParaRPr lang="en-US" sz="1400" dirty="0">
-                        <a:latin typeface="Microsoft JhengHei" charset="0"/>
-                        <a:ea typeface="Microsoft JhengHei" charset="0"/>
-                        <a:cs typeface="Microsoft JhengHei" charset="0"/>
-                      </a:endParaRPr>
-                    </a:p>
-                  </a:txBody>
-                  <a:tcPr marL="91440" marR="91440" marT="0" marB="0" anchor="ctr">
-                    <a:lnL w="9525" cap="flat" cmpd="sng" algn="ctr">
-                      <a:solidFill>
-                        <a:srgbClr val="D9E0E6"/>
-                      </a:solidFill>
-                      <a:prstDash val="solid"/>
-                      <a:round/>
-                      <a:headEnd type="none" w="med" len="med"/>
-                      <a:tailEnd type="none" w="med" len="med"/>
-                    </a:lnL>
-                    <a:lnR w="9525" cap="flat" cmpd="sng" algn="ctr">
-                      <a:solidFill>
-                        <a:srgbClr val="D9E0E6"/>
-                      </a:solidFill>
-                      <a:prstDash val="solid"/>
-                      <a:round/>
-                      <a:headEnd type="none" w="med" len="med"/>
-                      <a:tailEnd type="none" w="med" len="med"/>
-                    </a:lnR>
-                    <a:lnT w="9525" cap="flat" cmpd="sng" algn="ctr">
-                      <a:solidFill>
-                        <a:srgbClr val="D9E0E6"/>
-                      </a:solidFill>
-                      <a:prstDash val="solid"/>
-                      <a:round/>
-                      <a:headEnd type="none" w="med" len="med"/>
-                      <a:tailEnd type="none" w="med" len="med"/>
-                    </a:lnT>
-                    <a:lnB w="9525" cap="flat" cmpd="sng" algn="ctr">
-                      <a:solidFill>
-                        <a:srgbClr val="D9E0E6"/>
-                      </a:solidFill>
-                      <a:prstDash val="solid"/>
-                      <a:round/>
-                      <a:headEnd type="none" w="med" len="med"/>
-                      <a:tailEnd type="none" w="med" len="med"/>
-                    </a:lnB>
-                  </a:tcPr>
-                </a:tc>
-              </a:tr>
-              <a:tr h="475488">
-                <a:tc>
-                  <a:txBody>
-                    <a:bodyPr/>
-                    <a:lstStyle/>
-                    <a:p>
-                      <a:pPr indent="0" marL="0">
-                        <a:buNone/>
-                      </a:pPr>
-                      <a:r>
-                        <a:rPr lang="en-US" sz="1400" b="1" dirty="0">
-                          <a:solidFill>
-                            <a:srgbClr val="13202A"/>
-                          </a:solidFill>
-                          <a:latin typeface="Microsoft JhengHei" pitchFamily="34" charset="0"/>
-                          <a:ea typeface="Microsoft JhengHei" pitchFamily="34" charset="-122"/>
-                          <a:cs typeface="Microsoft JhengHei" pitchFamily="34" charset="-120"/>
-                        </a:rPr>
-                        <a:t>防止偷看</a:t>
-                      </a:r>
-                      <a:endParaRPr lang="en-US" sz="1400" dirty="0">
-                        <a:latin typeface="Microsoft JhengHei" charset="0"/>
-                        <a:ea typeface="Microsoft JhengHei" charset="0"/>
-                        <a:cs typeface="Microsoft JhengHei" charset="0"/>
-                      </a:endParaRPr>
-                    </a:p>
-                  </a:txBody>
-                  <a:tcPr marL="91440" marR="91440" marT="0" marB="0" anchor="ctr">
-                    <a:lnL w="9525" cap="flat" cmpd="sng" algn="ctr">
-                      <a:solidFill>
-                        <a:srgbClr val="D9E0E6"/>
-                      </a:solidFill>
-                      <a:prstDash val="solid"/>
-                      <a:round/>
-                      <a:headEnd type="none" w="med" len="med"/>
-                      <a:tailEnd type="none" w="med" len="med"/>
-                    </a:lnL>
-                    <a:lnR w="9525" cap="flat" cmpd="sng" algn="ctr">
-                      <a:solidFill>
-                        <a:srgbClr val="D9E0E6"/>
-                      </a:solidFill>
-                      <a:prstDash val="solid"/>
-                      <a:round/>
-                      <a:headEnd type="none" w="med" len="med"/>
-                      <a:tailEnd type="none" w="med" len="med"/>
-                    </a:lnR>
-                    <a:lnT w="9525" cap="flat" cmpd="sng" algn="ctr">
-                      <a:solidFill>
-                        <a:srgbClr val="D9E0E6"/>
-                      </a:solidFill>
-                      <a:prstDash val="solid"/>
-                      <a:round/>
-                      <a:headEnd type="none" w="med" len="med"/>
-                      <a:tailEnd type="none" w="med" len="med"/>
-                    </a:lnT>
-                    <a:lnB w="9525" cap="flat" cmpd="sng" algn="ctr">
-                      <a:solidFill>
-                        <a:srgbClr val="D9E0E6"/>
-                      </a:solidFill>
-                      <a:prstDash val="solid"/>
-                      <a:round/>
-                      <a:headEnd type="none" w="med" len="med"/>
-                      <a:tailEnd type="none" w="med" len="med"/>
-                    </a:lnB>
-                  </a:tcPr>
-                </a:tc>
-                <a:tc>
-                  <a:txBody>
-                    <a:bodyPr/>
-                    <a:lstStyle/>
-                    <a:p>
-                      <a:pPr indent="0" marL="0">
-                        <a:buNone/>
-                      </a:pPr>
-                      <a:r>
-                        <a:rPr lang="en-US" sz="1400" dirty="0">
-                          <a:solidFill>
-                            <a:srgbClr val="47545F"/>
-                          </a:solidFill>
-                          <a:latin typeface="Microsoft JhengHei" pitchFamily="34" charset="0"/>
-                          <a:ea typeface="Microsoft JhengHei" pitchFamily="34" charset="-122"/>
-                          <a:cs typeface="Microsoft JhengHei" pitchFamily="34" charset="-120"/>
-                        </a:rPr>
-                        <a:t>測試期開始前 5 個交易日剔除(標籤用到 t+5)</a:t>
                       </a:r>
                       <a:endParaRPr lang="en-US" sz="1400" dirty="0">
                         <a:latin typeface="Microsoft JhengHei" charset="0"/>
@@ -9183,7 +9315,7 @@
                   <a:schemeClr val="tx2"/>
                 </a:solidFill>
               </a:rPr>
-              <a:t>2020–2023 的規則候選日(t 日收盤是近 6 天最高 → 高點候選 13,994 天;最低 → 低點候選 11,465 天),高點、低點各訓練一組 AE + OC-SVM。</a:t>
+              <a:t>50 檔放在一起,不是每檔一個模型。2020–2023 的候選日裡,真高點 3,805 天訓練一組 AE + OC-SVM、真低點 3,656 天訓練另一組,共 2 組。</a:t>
             </a:r>
             <a:endParaRPr lang="en-US" sz="1300" dirty="0"/>
           </a:p>
@@ -10032,7 +10164,7 @@
                   <a:schemeClr val="tx2"/>
                 </a:solidFill>
               </a:rPr>
-              <a:t>訓練樣本:訓練期(2020–2023)的規則候選點;高點、低點各訓練一組 AE + OC-SVM</a:t>
+              <a:t>訓練樣本:50 檔合在一起,2020–2023 候選中的真高點 3,805 天、真低點 3,656 天;高點、低點各一組 AE + OC-SVM</a:t>
             </a:r>
             <a:endParaRPr lang="en-US" sz="1500" dirty="0"/>
           </a:p>

--- a/method_kline_peak/report/TW50_局部高低點_專題進度.pptx
+++ b/method_kline_peak/report/TW50_局部高低點_專題進度.pptx
@@ -114,26 +114,26 @@
   <p:extLst>
     <p:ext uri="{521415D9-36F7-43E2-AB2F-B90AF26B5E84}">
       <p14:sectionLst xmlns:p14="http://schemas.microsoft.com/office/powerpoint/2010/main">
-        <p14:section name="問題與資料" id="{f316fb7e-b031-3030-5dfe-177fb5289170}">
+        <p14:section name="問題與資料" id="{894b7658-b22a-274d-c0ca-2eb4b26ab32e}">
           <p14:sldIdLst>
             <p14:sldId id="256"/>
             <p14:sldId id="257"/>
           </p14:sldIdLst>
         </p14:section>
-        <p14:section name="方法與計分" id="{474745fa-0119-6ea9-cc97-0ad7bcb72f4d}">
+        <p14:section name="方法與計分" id="{ebc797ee-4e3d-1df7-2f68-c05c4df73146}">
           <p14:sldIdLst>
             <p14:sldId id="258"/>
             <p14:sldId id="259"/>
           </p14:sldIdLst>
         </p14:section>
-        <p14:section name="結果" id="{42e84772-2358-baeb-2277-eebdfd2202ba}">
+        <p14:section name="結果" id="{c2a1a1d6-4fb8-3752-55c3-e9a897c7ebba}">
           <p14:sldIdLst>
             <p14:sldId id="260"/>
             <p14:sldId id="261"/>
             <p14:sldId id="262"/>
           </p14:sldIdLst>
         </p14:section>
-        <p14:section name="總結" id="{95480b3f-55f0-34cc-6780-285bf4f09dae}">
+        <p14:section name="總結" id="{8e667cbe-8204-042d-9fa7-3fc23575c66a}">
           <p14:sldIdLst>
             <p14:sldId id="263"/>
           </p14:sldIdLst>
@@ -259,7 +259,7 @@
                 <c:formatCode>General</c:formatCode>
                 <c:ptCount val="3"/>
                 <c:pt idx="0">
-                  <c:v>7.5</c:v>
+                  <c:v>7.6</c:v>
                 </c:pt>
                 <c:pt idx="1">
                   <c:v>84.6</c:v>
@@ -280,7 +280,7 @@
               <c:strCache>
                 <c:ptCount val="1"/>
                 <c:pt idx="0">
-                  <c:v>測試 2025–2026</c:v>
+                  <c:v>測試 2024</c:v>
                 </c:pt>
               </c:strCache>
             </c:strRef>
@@ -342,13 +342,13 @@
                 <c:formatCode>General</c:formatCode>
                 <c:ptCount val="3"/>
                 <c:pt idx="0">
-                  <c:v>7.6</c:v>
+                  <c:v>7.5</c:v>
                 </c:pt>
                 <c:pt idx="1">
-                  <c:v>85.1</c:v>
+                  <c:v>85</c:v>
                 </c:pt>
                 <c:pt idx="2">
-                  <c:v>7.3</c:v>
+                  <c:v>7.4</c:v>
                 </c:pt>
               </c:numCache>
             </c:numRef>
@@ -619,10 +619,10 @@
                 <c:formatCode>General</c:formatCode>
                 <c:ptCount val="2"/>
                 <c:pt idx="0">
-                  <c:v>7.3</c:v>
+                  <c:v>7.4</c:v>
                 </c:pt>
                 <c:pt idx="1">
-                  <c:v>7.6</c:v>
+                  <c:v>7.5</c:v>
                 </c:pt>
               </c:numCache>
             </c:numRef>
@@ -696,10 +696,10 @@
                 <c:formatCode>General</c:formatCode>
                 <c:ptCount val="2"/>
                 <c:pt idx="0">
-                  <c:v>25.4</c:v>
+                  <c:v>27.8</c:v>
                 </c:pt>
                 <c:pt idx="1">
-                  <c:v>32</c:v>
+                  <c:v>30.3</c:v>
                 </c:pt>
               </c:numCache>
             </c:numRef>
@@ -773,10 +773,10 @@
                 <c:formatCode>General</c:formatCode>
                 <c:ptCount val="2"/>
                 <c:pt idx="0">
-                  <c:v>24.9</c:v>
+                  <c:v>27.7</c:v>
                 </c:pt>
                 <c:pt idx="1">
-                  <c:v>31.6</c:v>
+                  <c:v>29.8</c:v>
                 </c:pt>
               </c:numCache>
             </c:numRef>
@@ -1421,7 +1421,7 @@
           <a:p>
             <a:r>
               <a:rPr lang="en-US" dirty="0"/>
-              <a:t>資料是 TW50 的 50 檔股票,2016 到 2026 年 9 月的還原日 K,總共 128,867 個股票日。訓練用 2020 到 2023 年 48,585 筆,測試用 2025 年到 2026 年 9 月 20,189 筆;2016 到 2019 年和 2024 年沒有用到,其中 2024 年刻意空下來,讓訓練和測試隔開。四段加起來剛好是 128,867。高點和低點各只佔 7 到 8%,這個不平衡很重要,後面算 acc 時會再提到。</a:t>
+              <a:t>資料是 TW50 的 50 檔股票,2016 到 2026 年 9 月的還原日 K,總共 128,867 個股票日。訓練用 2020 到 2023 年 48,335 筆,測試用 2024 年整年 12,098 筆。2023 年最後 5 個交易日的 250 筆剔除,因為它們的標籤會用到 2024 年的價格,不剔除等於偷看測試期。2016 到 2019 年和 2025 年以後這份報告沒有用到。加起來剛好是 128,867。高點和低點各只佔 7 到 8%,這個不平衡很重要,後面算 acc 時會再提到。</a:t>
             </a:r>
             <a:endParaRPr lang="en-US" dirty="0"/>
           </a:p>
@@ -1509,7 +1509,7 @@
           <a:p>
             <a:r>
               <a:rPr lang="en-US" dirty="0"/>
-              <a:t>這頁說明我們丟進模型的是什麼。一個樣本是 11 個交易日,第 6 天是 t。模型只看前 6 天,也就是 t-5 到 t,這些在 t 日收盤時都已經知道;後 5 天只用來貼標籤,模型看不到。每天取 5 個特徵:開、高、低、收都除以 t 日收盤,量除以 10 日均量。t 日收盤除以自己永遠是 1,所以拿掉,總共 29 個數字。表上是台積電 2026-02-25 的實際數字:前 5 天的價格都在 t 日收盤下方,代表一路往上收到 t 日。訓練時 50 檔股票放在一起,不是每檔一個模型:候選日裡真的是高點的 3,805 天訓練高點模型,真的是低點的 3,656 天訓練低點模型,總共只有 2 組。模型不知道樣本是哪一檔股票,因為價格都除以 t 日收盤、量都除以 10 日均量,不同股票可以放在一起比。</a:t>
+              <a:t>這頁說明我們丟進模型的是什麼。一個樣本是 11 個交易日,第 6 天是 t。模型只看前 6 天,也就是 t-5 到 t,這些在 t 日收盤時都已經知道;後 5 天只用來貼標籤,模型看不到。每天取 5 個特徵:開、高、低、收都除以 t 日收盤,量除以 10 日均量。t 日收盤除以自己永遠是 1,所以拿掉,總共 29 個數字。表上是台積電 2024-09-26 的實際數字:前 5 天的價格都在 t 日收盤下方,代表一路往上收到 t 日。訓練時 50 檔股票放在一起,不是每檔一個模型:候選日裡真的是高點的 3,769 天訓練高點模型,真的是低點的 3,651 天訓練低點模型,總共只有 2 組。模型不知道樣本是哪一檔股票,因為價格都除以 t 日收盤、量都除以 10 日均量,不同股票可以放在一起比。</a:t>
             </a:r>
             <a:endParaRPr lang="en-US" dirty="0"/>
           </a:p>
@@ -1685,7 +1685,7 @@
           <a:p>
             <a:r>
               <a:rPr lang="en-US" dirty="0"/>
-              <a:t>這是測試期的混淆矩陣。看第一列和最後一列:真低點有 79.8% 被判成低點,真高點有 70.6% 被判成高點,而且高點和低點從來不會互相判錯。右邊的表比較三種做法,模型的 acc 是 67.7%,判非極值時 93.9% 正確。</a:t>
+              <a:t>這是 2024 年測試期的混淆矩陣。看第一列和最後一列:真低點有 84.4% 被判成低點,真高點有 81.6% 被判成高點,而且高點和低點從來不會互相判錯。右邊的表比較三種做法,模型的 acc 是 66.7%,判非極值時 95.5% 正確。</a:t>
             </a:r>
             <a:endParaRPr lang="en-US" dirty="0"/>
           </a:p>
@@ -1773,7 +1773,7 @@
           <a:p>
             <a:r>
               <a:rPr lang="en-US" dirty="0"/>
-              <a:t>這頁是我們說的局部準確度。左圖是命中率:隨機挑一天是高點的機率只有 7.3%,被我們挑出來的候選是 25 到 32%,大約是 3.4 到 4.2 倍。右邊三個數字:真高低點全部進了候選,模型判對 71 到 80%,判非極值時 93.9% 正確。</a:t>
+              <a:t>這頁是我們說的局部準確度。左圖是命中率:隨機挑一天是高點的機率只有 7.4%,被我們挑出來的候選是 28 到 30%,大約是 3.7 到 3.9 倍。右邊三個數字:真高低點 1,809 個只有 1 個沒進候選,模型判對 82 到 84%,判非極值時 95.5% 正確。</a:t>
             </a:r>
             <a:endParaRPr lang="en-US" dirty="0"/>
           </a:p>
@@ -1949,7 +1949,7 @@
           <a:p>
             <a:r>
               <a:rPr lang="en-US" dirty="0"/>
-              <a:t>總結。我們把題目定成找 11 天窗口裡的局部高低點,在 TW50 的測試期:真高低點全部進了候選;模型判出的高點和低點從來不會互相搞錯;模型說「這天不是高低點」時 93.9% 是對的;挑出來的候選是真高低點的機率是隨便挑一天的 3.4 到 4.2 倍。模型最後判對了 71% 的真高點和 80% 的真低點。謝謝。</a:t>
+              <a:t>總結。我們把題目定成找 11 天窗口裡的局部高低點,在 TW50 的 2024 年測試期:真高低點 1,809 個只有 1 個沒進候選;模型判出的高點和低點從來不會互相搞錯;模型說「這天不是高低點」時 95.5% 是對的;挑出來的候選是真高低點的機率是隨便挑一天的 3.7 到 3.9 倍。模型最後判對了 82% 的真高點和 84% 的真低點。謝謝。</a:t>
             </a:r>
             <a:endParaRPr lang="en-US" dirty="0"/>
           </a:p>
@@ -3156,7 +3156,7 @@
                   <a:schemeClr val="accent5"/>
                 </a:solidFill>
               </a:rPr>
-              <a:t>實例:台積電 2026-02-25,t 日收盤 2003 是前後各 5 天裡最高 → 高點</a:t>
+              <a:t>實例:台積電 2024-09-26,t 日收盤 989 是前後各 5 天裡最高 → 高點</a:t>
             </a:r>
             <a:endParaRPr lang="en-US" sz="1200" dirty="0"/>
           </a:p>
@@ -4240,7 +4240,7 @@
                           <a:ea typeface="Microsoft JhengHei" pitchFamily="34" charset="-122"/>
                           <a:cs typeface="Microsoft JhengHei" pitchFamily="34" charset="-120"/>
                         </a:rPr>
-                        <a:t>2020-01 ~ 2023-12:48,585 筆</a:t>
+                        <a:t>2020–2023:48,335 筆(剔除 2023 最後 5 天)</a:t>
                       </a:r>
                       <a:endParaRPr lang="en-US" sz="1400" dirty="0">
                         <a:latin typeface="Microsoft JhengHei" charset="0"/>
@@ -4372,139 +4372,7 @@
                           <a:ea typeface="Microsoft JhengHei" pitchFamily="34" charset="-122"/>
                           <a:cs typeface="Microsoft JhengHei" pitchFamily="34" charset="-120"/>
                         </a:rPr>
-                        <a:t>高點 13,994(真 3,805)、低點 11,465(真 3,656)</a:t>
-                      </a:r>
-                      <a:endParaRPr lang="en-US" sz="1400" dirty="0">
-                        <a:latin typeface="Microsoft JhengHei" charset="0"/>
-                        <a:ea typeface="Microsoft JhengHei" charset="0"/>
-                        <a:cs typeface="Microsoft JhengHei" charset="0"/>
-                      </a:endParaRPr>
-                    </a:p>
-                  </a:txBody>
-                  <a:tcPr marL="91440" marR="91440" marT="0" marB="0" anchor="ctr">
-                    <a:lnL w="9525" cap="flat" cmpd="sng" algn="ctr">
-                      <a:solidFill>
-                        <a:srgbClr val="D9E0E6"/>
-                      </a:solidFill>
-                      <a:prstDash val="solid"/>
-                      <a:round/>
-                      <a:headEnd type="none" w="med" len="med"/>
-                      <a:tailEnd type="none" w="med" len="med"/>
-                    </a:lnL>
-                    <a:lnR w="9525" cap="flat" cmpd="sng" algn="ctr">
-                      <a:solidFill>
-                        <a:srgbClr val="D9E0E6"/>
-                      </a:solidFill>
-                      <a:prstDash val="solid"/>
-                      <a:round/>
-                      <a:headEnd type="none" w="med" len="med"/>
-                      <a:tailEnd type="none" w="med" len="med"/>
-                    </a:lnR>
-                    <a:lnT w="9525" cap="flat" cmpd="sng" algn="ctr">
-                      <a:solidFill>
-                        <a:srgbClr val="D9E0E6"/>
-                      </a:solidFill>
-                      <a:prstDash val="solid"/>
-                      <a:round/>
-                      <a:headEnd type="none" w="med" len="med"/>
-                      <a:tailEnd type="none" w="med" len="med"/>
-                    </a:lnT>
-                    <a:lnB w="9525" cap="flat" cmpd="sng" algn="ctr">
-                      <a:solidFill>
-                        <a:srgbClr val="D9E0E6"/>
-                      </a:solidFill>
-                      <a:prstDash val="solid"/>
-                      <a:round/>
-                      <a:headEnd type="none" w="med" len="med"/>
-                      <a:tailEnd type="none" w="med" len="med"/>
-                    </a:lnB>
-                  </a:tcPr>
-                </a:tc>
-              </a:tr>
-              <a:tr h="457200">
-                <a:tc>
-                  <a:txBody>
-                    <a:bodyPr/>
-                    <a:lstStyle/>
-                    <a:p>
-                      <a:pPr indent="0" marL="0">
-                        <a:buNone/>
-                      </a:pPr>
-                      <a:r>
-                        <a:rPr lang="en-US" sz="1400" b="1" dirty="0">
-                          <a:solidFill>
-                            <a:srgbClr val="7A8691"/>
-                          </a:solidFill>
-                          <a:latin typeface="Microsoft JhengHei" pitchFamily="34" charset="0"/>
-                          <a:ea typeface="Microsoft JhengHei" pitchFamily="34" charset="-122"/>
-                          <a:cs typeface="Microsoft JhengHei" pitchFamily="34" charset="-120"/>
-                        </a:rPr>
-                        <a:t>2024</a:t>
-                      </a:r>
-                      <a:endParaRPr lang="en-US" sz="1400" dirty="0">
-                        <a:latin typeface="Microsoft JhengHei" charset="0"/>
-                        <a:ea typeface="Microsoft JhengHei" charset="0"/>
-                        <a:cs typeface="Microsoft JhengHei" charset="0"/>
-                      </a:endParaRPr>
-                    </a:p>
-                  </a:txBody>
-                  <a:tcPr marL="91440" marR="91440" marT="0" marB="0" anchor="ctr">
-                    <a:lnL w="9525" cap="flat" cmpd="sng" algn="ctr">
-                      <a:solidFill>
-                        <a:srgbClr val="D9E0E6"/>
-                      </a:solidFill>
-                      <a:prstDash val="solid"/>
-                      <a:round/>
-                      <a:headEnd type="none" w="med" len="med"/>
-                      <a:tailEnd type="none" w="med" len="med"/>
-                    </a:lnL>
-                    <a:lnR w="9525" cap="flat" cmpd="sng" algn="ctr">
-                      <a:solidFill>
-                        <a:srgbClr val="D9E0E6"/>
-                      </a:solidFill>
-                      <a:prstDash val="solid"/>
-                      <a:round/>
-                      <a:headEnd type="none" w="med" len="med"/>
-                      <a:tailEnd type="none" w="med" len="med"/>
-                    </a:lnR>
-                    <a:lnT w="9525" cap="flat" cmpd="sng" algn="ctr">
-                      <a:solidFill>
-                        <a:srgbClr val="D9E0E6"/>
-                      </a:solidFill>
-                      <a:prstDash val="solid"/>
-                      <a:round/>
-                      <a:headEnd type="none" w="med" len="med"/>
-                      <a:tailEnd type="none" w="med" len="med"/>
-                    </a:lnT>
-                    <a:lnB w="9525" cap="flat" cmpd="sng" algn="ctr">
-                      <a:solidFill>
-                        <a:srgbClr val="D9E0E6"/>
-                      </a:solidFill>
-                      <a:prstDash val="solid"/>
-                      <a:round/>
-                      <a:headEnd type="none" w="med" len="med"/>
-                      <a:tailEnd type="none" w="med" len="med"/>
-                    </a:lnB>
-                  </a:tcPr>
-                </a:tc>
-                <a:tc>
-                  <a:txBody>
-                    <a:bodyPr/>
-                    <a:lstStyle/>
-                    <a:p>
-                      <a:pPr indent="0" marL="0">
-                        <a:buNone/>
-                      </a:pPr>
-                      <a:r>
-                        <a:rPr lang="en-US" sz="1400" dirty="0">
-                          <a:solidFill>
-                            <a:srgbClr val="7A8691"/>
-                          </a:solidFill>
-                          <a:latin typeface="Microsoft JhengHei" pitchFamily="34" charset="0"/>
-                          <a:ea typeface="Microsoft JhengHei" pitchFamily="34" charset="-122"/>
-                          <a:cs typeface="Microsoft JhengHei" pitchFamily="34" charset="-120"/>
-                        </a:rPr>
-                        <a:t>12,098 筆:沒用到(訓練與測試之間空一年)</a:t>
+                        <a:t>高點 13,866(真 3,769)、低點 11,458(真 3,651)</a:t>
                       </a:r>
                       <a:endParaRPr lang="en-US" sz="1400" dirty="0">
                         <a:latin typeface="Microsoft JhengHei" charset="0"/>
@@ -4636,7 +4504,139 @@
                           <a:ea typeface="Microsoft JhengHei" pitchFamily="34" charset="-122"/>
                           <a:cs typeface="Microsoft JhengHei" pitchFamily="34" charset="-120"/>
                         </a:rPr>
-                        <a:t>2025-01 ~ 2026-09:20,189 筆</a:t>
+                        <a:t>2024 整年:12,098 筆</a:t>
+                      </a:r>
+                      <a:endParaRPr lang="en-US" sz="1400" dirty="0">
+                        <a:latin typeface="Microsoft JhengHei" charset="0"/>
+                        <a:ea typeface="Microsoft JhengHei" charset="0"/>
+                        <a:cs typeface="Microsoft JhengHei" charset="0"/>
+                      </a:endParaRPr>
+                    </a:p>
+                  </a:txBody>
+                  <a:tcPr marL="91440" marR="91440" marT="0" marB="0" anchor="ctr">
+                    <a:lnL w="9525" cap="flat" cmpd="sng" algn="ctr">
+                      <a:solidFill>
+                        <a:srgbClr val="D9E0E6"/>
+                      </a:solidFill>
+                      <a:prstDash val="solid"/>
+                      <a:round/>
+                      <a:headEnd type="none" w="med" len="med"/>
+                      <a:tailEnd type="none" w="med" len="med"/>
+                    </a:lnL>
+                    <a:lnR w="9525" cap="flat" cmpd="sng" algn="ctr">
+                      <a:solidFill>
+                        <a:srgbClr val="D9E0E6"/>
+                      </a:solidFill>
+                      <a:prstDash val="solid"/>
+                      <a:round/>
+                      <a:headEnd type="none" w="med" len="med"/>
+                      <a:tailEnd type="none" w="med" len="med"/>
+                    </a:lnR>
+                    <a:lnT w="9525" cap="flat" cmpd="sng" algn="ctr">
+                      <a:solidFill>
+                        <a:srgbClr val="D9E0E6"/>
+                      </a:solidFill>
+                      <a:prstDash val="solid"/>
+                      <a:round/>
+                      <a:headEnd type="none" w="med" len="med"/>
+                      <a:tailEnd type="none" w="med" len="med"/>
+                    </a:lnT>
+                    <a:lnB w="9525" cap="flat" cmpd="sng" algn="ctr">
+                      <a:solidFill>
+                        <a:srgbClr val="D9E0E6"/>
+                      </a:solidFill>
+                      <a:prstDash val="solid"/>
+                      <a:round/>
+                      <a:headEnd type="none" w="med" len="med"/>
+                      <a:tailEnd type="none" w="med" len="med"/>
+                    </a:lnB>
+                  </a:tcPr>
+                </a:tc>
+              </a:tr>
+              <a:tr h="457200">
+                <a:tc>
+                  <a:txBody>
+                    <a:bodyPr/>
+                    <a:lstStyle/>
+                    <a:p>
+                      <a:pPr indent="0" marL="0">
+                        <a:buNone/>
+                      </a:pPr>
+                      <a:r>
+                        <a:rPr lang="en-US" sz="1400" b="1" dirty="0">
+                          <a:solidFill>
+                            <a:srgbClr val="7A8691"/>
+                          </a:solidFill>
+                          <a:latin typeface="Microsoft JhengHei" pitchFamily="34" charset="0"/>
+                          <a:ea typeface="Microsoft JhengHei" pitchFamily="34" charset="-122"/>
+                          <a:cs typeface="Microsoft JhengHei" pitchFamily="34" charset="-120"/>
+                        </a:rPr>
+                        <a:t>2025–2026</a:t>
+                      </a:r>
+                      <a:endParaRPr lang="en-US" sz="1400" dirty="0">
+                        <a:latin typeface="Microsoft JhengHei" charset="0"/>
+                        <a:ea typeface="Microsoft JhengHei" charset="0"/>
+                        <a:cs typeface="Microsoft JhengHei" charset="0"/>
+                      </a:endParaRPr>
+                    </a:p>
+                  </a:txBody>
+                  <a:tcPr marL="91440" marR="91440" marT="0" marB="0" anchor="ctr">
+                    <a:lnL w="9525" cap="flat" cmpd="sng" algn="ctr">
+                      <a:solidFill>
+                        <a:srgbClr val="D9E0E6"/>
+                      </a:solidFill>
+                      <a:prstDash val="solid"/>
+                      <a:round/>
+                      <a:headEnd type="none" w="med" len="med"/>
+                      <a:tailEnd type="none" w="med" len="med"/>
+                    </a:lnL>
+                    <a:lnR w="9525" cap="flat" cmpd="sng" algn="ctr">
+                      <a:solidFill>
+                        <a:srgbClr val="D9E0E6"/>
+                      </a:solidFill>
+                      <a:prstDash val="solid"/>
+                      <a:round/>
+                      <a:headEnd type="none" w="med" len="med"/>
+                      <a:tailEnd type="none" w="med" len="med"/>
+                    </a:lnR>
+                    <a:lnT w="9525" cap="flat" cmpd="sng" algn="ctr">
+                      <a:solidFill>
+                        <a:srgbClr val="D9E0E6"/>
+                      </a:solidFill>
+                      <a:prstDash val="solid"/>
+                      <a:round/>
+                      <a:headEnd type="none" w="med" len="med"/>
+                      <a:tailEnd type="none" w="med" len="med"/>
+                    </a:lnT>
+                    <a:lnB w="9525" cap="flat" cmpd="sng" algn="ctr">
+                      <a:solidFill>
+                        <a:srgbClr val="D9E0E6"/>
+                      </a:solidFill>
+                      <a:prstDash val="solid"/>
+                      <a:round/>
+                      <a:headEnd type="none" w="med" len="med"/>
+                      <a:tailEnd type="none" w="med" len="med"/>
+                    </a:lnB>
+                  </a:tcPr>
+                </a:tc>
+                <a:tc>
+                  <a:txBody>
+                    <a:bodyPr/>
+                    <a:lstStyle/>
+                    <a:p>
+                      <a:pPr indent="0" marL="0">
+                        <a:buNone/>
+                      </a:pPr>
+                      <a:r>
+                        <a:rPr lang="en-US" sz="1400" dirty="0">
+                          <a:solidFill>
+                            <a:srgbClr val="7A8691"/>
+                          </a:solidFill>
+                          <a:latin typeface="Microsoft JhengHei" pitchFamily="34" charset="0"/>
+                          <a:ea typeface="Microsoft JhengHei" pitchFamily="34" charset="-122"/>
+                          <a:cs typeface="Microsoft JhengHei" pitchFamily="34" charset="-120"/>
+                        </a:rPr>
+                        <a:t>20,189 筆:這份報告沒用到</a:t>
                       </a:r>
                       <a:endParaRPr lang="en-US" sz="1400" dirty="0">
                         <a:latin typeface="Microsoft JhengHei" charset="0"/>
@@ -6516,7 +6516,7 @@
                           <a:ea typeface="Microsoft JhengHei" pitchFamily="34" charset="-122"/>
                           <a:cs typeface="Microsoft JhengHei" pitchFamily="34" charset="-120"/>
                         </a:rPr>
-                        <a:t>−9.2%</a:t>
+                        <a:t>−7.4%</a:t>
                       </a:r>
                       <a:endParaRPr lang="en-US" sz="1300" dirty="0">
                         <a:latin typeface="Microsoft JhengHei" charset="0"/>
@@ -6584,7 +6584,7 @@
                           <a:ea typeface="Microsoft JhengHei" pitchFamily="34" charset="-122"/>
                           <a:cs typeface="Microsoft JhengHei" pitchFamily="34" charset="-120"/>
                         </a:rPr>
-                        <a:t>−8.4%</a:t>
+                        <a:t>−3.3%</a:t>
                       </a:r>
                       <a:endParaRPr lang="en-US" sz="1300" dirty="0">
                         <a:latin typeface="Microsoft JhengHei" charset="0"/>
@@ -6652,7 +6652,7 @@
                           <a:ea typeface="Microsoft JhengHei" pitchFamily="34" charset="-122"/>
                           <a:cs typeface="Microsoft JhengHei" pitchFamily="34" charset="-120"/>
                         </a:rPr>
-                        <a:t>−6.7%</a:t>
+                        <a:t>−4.3%</a:t>
                       </a:r>
                       <a:endParaRPr lang="en-US" sz="1300" dirty="0">
                         <a:latin typeface="Microsoft JhengHei" charset="0"/>
@@ -6720,7 +6720,7 @@
                           <a:ea typeface="Microsoft JhengHei" pitchFamily="34" charset="-122"/>
                           <a:cs typeface="Microsoft JhengHei" pitchFamily="34" charset="-120"/>
                         </a:rPr>
-                        <a:t>−5.7%</a:t>
+                        <a:t>−3.8%</a:t>
                       </a:r>
                       <a:endParaRPr lang="en-US" sz="1300" dirty="0">
                         <a:latin typeface="Microsoft JhengHei" charset="0"/>
@@ -6788,7 +6788,7 @@
                           <a:ea typeface="Microsoft JhengHei" pitchFamily="34" charset="-122"/>
                           <a:cs typeface="Microsoft JhengHei" pitchFamily="34" charset="-120"/>
                         </a:rPr>
-                        <a:t>−5.0%</a:t>
+                        <a:t>−1.5%</a:t>
                       </a:r>
                       <a:endParaRPr lang="en-US" sz="1300" dirty="0">
                         <a:latin typeface="Microsoft JhengHei" charset="0"/>
@@ -6856,7 +6856,7 @@
                           <a:ea typeface="Microsoft JhengHei" pitchFamily="34" charset="-122"/>
                           <a:cs typeface="Microsoft JhengHei" pitchFamily="34" charset="-120"/>
                         </a:rPr>
-                        <a:t>−1.0%</a:t>
+                        <a:t>−0.5%</a:t>
                       </a:r>
                       <a:endParaRPr lang="en-US" sz="1300" dirty="0">
                         <a:latin typeface="Microsoft JhengHei" charset="0"/>
@@ -7056,7 +7056,7 @@
                           <a:ea typeface="Microsoft JhengHei" pitchFamily="34" charset="-122"/>
                           <a:cs typeface="Microsoft JhengHei" pitchFamily="34" charset="-120"/>
                         </a:rPr>
-                        <a:t>−8.9%</a:t>
+                        <a:t>−5.4%</a:t>
                       </a:r>
                       <a:endParaRPr lang="en-US" sz="1300" dirty="0">
                         <a:latin typeface="Microsoft JhengHei" charset="0"/>
@@ -7124,7 +7124,7 @@
                           <a:ea typeface="Microsoft JhengHei" pitchFamily="34" charset="-122"/>
                           <a:cs typeface="Microsoft JhengHei" pitchFamily="34" charset="-120"/>
                         </a:rPr>
-                        <a:t>−6.7%</a:t>
+                        <a:t>−3.3%</a:t>
                       </a:r>
                       <a:endParaRPr lang="en-US" sz="1300" dirty="0">
                         <a:latin typeface="Microsoft JhengHei" charset="0"/>
@@ -7192,7 +7192,7 @@
                           <a:ea typeface="Microsoft JhengHei" pitchFamily="34" charset="-122"/>
                           <a:cs typeface="Microsoft JhengHei" pitchFamily="34" charset="-120"/>
                         </a:rPr>
-                        <a:t>−4.5%</a:t>
+                        <a:t>−3.7%</a:t>
                       </a:r>
                       <a:endParaRPr lang="en-US" sz="1300" dirty="0">
                         <a:latin typeface="Microsoft JhengHei" charset="0"/>
@@ -7260,7 +7260,7 @@
                           <a:ea typeface="Microsoft JhengHei" pitchFamily="34" charset="-122"/>
                           <a:cs typeface="Microsoft JhengHei" pitchFamily="34" charset="-120"/>
                         </a:rPr>
-                        <a:t>−4.0%</a:t>
+                        <a:t>−2.8%</a:t>
                       </a:r>
                       <a:endParaRPr lang="en-US" sz="1300" dirty="0">
                         <a:latin typeface="Microsoft JhengHei" charset="0"/>
@@ -7328,7 +7328,7 @@
                           <a:ea typeface="Microsoft JhengHei" pitchFamily="34" charset="-122"/>
                           <a:cs typeface="Microsoft JhengHei" pitchFamily="34" charset="-120"/>
                         </a:rPr>
-                        <a:t>−2.0%</a:t>
+                        <a:t>−1.0%</a:t>
                       </a:r>
                       <a:endParaRPr lang="en-US" sz="1300" dirty="0">
                         <a:latin typeface="Microsoft JhengHei" charset="0"/>
@@ -7396,7 +7396,7 @@
                           <a:ea typeface="Microsoft JhengHei" pitchFamily="34" charset="-122"/>
                           <a:cs typeface="Microsoft JhengHei" pitchFamily="34" charset="-120"/>
                         </a:rPr>
-                        <a:t>+0.5%</a:t>
+                        <a:t>0.0%</a:t>
                       </a:r>
                       <a:endParaRPr lang="en-US" sz="1300" dirty="0">
                         <a:latin typeface="Microsoft JhengHei" charset="0"/>
@@ -7596,7 +7596,7 @@
                           <a:ea typeface="Microsoft JhengHei" pitchFamily="34" charset="-122"/>
                           <a:cs typeface="Microsoft JhengHei" pitchFamily="34" charset="-120"/>
                         </a:rPr>
-                        <a:t>−9.9%</a:t>
+                        <a:t>−7.8%</a:t>
                       </a:r>
                       <a:endParaRPr lang="en-US" sz="1300" dirty="0">
                         <a:latin typeface="Microsoft JhengHei" charset="0"/>
@@ -7664,7 +7664,7 @@
                           <a:ea typeface="Microsoft JhengHei" pitchFamily="34" charset="-122"/>
                           <a:cs typeface="Microsoft JhengHei" pitchFamily="34" charset="-120"/>
                         </a:rPr>
-                        <a:t>−8.7%</a:t>
+                        <a:t>−4.3%</a:t>
                       </a:r>
                       <a:endParaRPr lang="en-US" sz="1300" dirty="0">
                         <a:latin typeface="Microsoft JhengHei" charset="0"/>
@@ -7732,7 +7732,7 @@
                           <a:ea typeface="Microsoft JhengHei" pitchFamily="34" charset="-122"/>
                           <a:cs typeface="Microsoft JhengHei" pitchFamily="34" charset="-120"/>
                         </a:rPr>
-                        <a:t>−6.9%</a:t>
+                        <a:t>−4.3%</a:t>
                       </a:r>
                       <a:endParaRPr lang="en-US" sz="1300" dirty="0">
                         <a:latin typeface="Microsoft JhengHei" charset="0"/>
@@ -7800,7 +7800,7 @@
                           <a:ea typeface="Microsoft JhengHei" pitchFamily="34" charset="-122"/>
                           <a:cs typeface="Microsoft JhengHei" pitchFamily="34" charset="-120"/>
                         </a:rPr>
-                        <a:t>−5.7%</a:t>
+                        <a:t>−4.3%</a:t>
                       </a:r>
                       <a:endParaRPr lang="en-US" sz="1300" dirty="0">
                         <a:latin typeface="Microsoft JhengHei" charset="0"/>
@@ -7868,7 +7868,7 @@
                           <a:ea typeface="Microsoft JhengHei" pitchFamily="34" charset="-122"/>
                           <a:cs typeface="Microsoft JhengHei" pitchFamily="34" charset="-120"/>
                         </a:rPr>
-                        <a:t>−5.0%</a:t>
+                        <a:t>−1.7%</a:t>
                       </a:r>
                       <a:endParaRPr lang="en-US" sz="1300" dirty="0">
                         <a:latin typeface="Microsoft JhengHei" charset="0"/>
@@ -8136,7 +8136,7 @@
                           <a:ea typeface="Microsoft JhengHei" pitchFamily="34" charset="-122"/>
                           <a:cs typeface="Microsoft JhengHei" pitchFamily="34" charset="-120"/>
                         </a:rPr>
-                        <a:t>−9.9%</a:t>
+                        <a:t>−5.4%</a:t>
                       </a:r>
                       <a:endParaRPr lang="en-US" sz="1300" dirty="0">
                         <a:latin typeface="Microsoft JhengHei" charset="0"/>
@@ -8204,7 +8204,7 @@
                           <a:ea typeface="Microsoft JhengHei" pitchFamily="34" charset="-122"/>
                           <a:cs typeface="Microsoft JhengHei" pitchFamily="34" charset="-120"/>
                         </a:rPr>
-                        <a:t>−6.7%</a:t>
+                        <a:t>−4.1%</a:t>
                       </a:r>
                       <a:endParaRPr lang="en-US" sz="1300" dirty="0">
                         <a:latin typeface="Microsoft JhengHei" charset="0"/>
@@ -8272,7 +8272,7 @@
                           <a:ea typeface="Microsoft JhengHei" pitchFamily="34" charset="-122"/>
                           <a:cs typeface="Microsoft JhengHei" pitchFamily="34" charset="-120"/>
                         </a:rPr>
-                        <a:t>−5.0%</a:t>
+                        <a:t>−3.7%</a:t>
                       </a:r>
                       <a:endParaRPr lang="en-US" sz="1300" dirty="0">
                         <a:latin typeface="Microsoft JhengHei" charset="0"/>
@@ -8340,7 +8340,7 @@
                           <a:ea typeface="Microsoft JhengHei" pitchFamily="34" charset="-122"/>
                           <a:cs typeface="Microsoft JhengHei" pitchFamily="34" charset="-120"/>
                         </a:rPr>
-                        <a:t>−5.7%</a:t>
+                        <a:t>−2.8%</a:t>
                       </a:r>
                       <a:endParaRPr lang="en-US" sz="1300" dirty="0">
                         <a:latin typeface="Microsoft JhengHei" charset="0"/>
@@ -8408,7 +8408,7 @@
                           <a:ea typeface="Microsoft JhengHei" pitchFamily="34" charset="-122"/>
                           <a:cs typeface="Microsoft JhengHei" pitchFamily="34" charset="-120"/>
                         </a:rPr>
-                        <a:t>−2.5%</a:t>
+                        <a:t>−1.0%</a:t>
                       </a:r>
                       <a:endParaRPr lang="en-US" sz="1300" dirty="0">
                         <a:latin typeface="Microsoft JhengHei" charset="0"/>
@@ -8676,7 +8676,7 @@
                           <a:ea typeface="Microsoft JhengHei" pitchFamily="34" charset="-122"/>
                           <a:cs typeface="Microsoft JhengHei" pitchFamily="34" charset="-120"/>
                         </a:rPr>
-                        <a:t>0.95×</a:t>
+                        <a:t>1.03×</a:t>
                       </a:r>
                       <a:endParaRPr lang="en-US" sz="1300" dirty="0">
                         <a:latin typeface="Microsoft JhengHei" charset="0"/>
@@ -8744,7 +8744,7 @@
                           <a:ea typeface="Microsoft JhengHei" pitchFamily="34" charset="-122"/>
                           <a:cs typeface="Microsoft JhengHei" pitchFamily="34" charset="-120"/>
                         </a:rPr>
-                        <a:t>1.09×</a:t>
+                        <a:t>1.89×</a:t>
                       </a:r>
                       <a:endParaRPr lang="en-US" sz="1300" dirty="0">
                         <a:latin typeface="Microsoft JhengHei" charset="0"/>
@@ -8812,7 +8812,7 @@
                           <a:ea typeface="Microsoft JhengHei" pitchFamily="34" charset="-122"/>
                           <a:cs typeface="Microsoft JhengHei" pitchFamily="34" charset="-120"/>
                         </a:rPr>
-                        <a:t>1.06×</a:t>
+                        <a:t>0.45×</a:t>
                       </a:r>
                       <a:endParaRPr lang="en-US" sz="1300" dirty="0">
                         <a:latin typeface="Microsoft JhengHei" charset="0"/>
@@ -8880,7 +8880,7 @@
                           <a:ea typeface="Microsoft JhengHei" pitchFamily="34" charset="-122"/>
                           <a:cs typeface="Microsoft JhengHei" pitchFamily="34" charset="-120"/>
                         </a:rPr>
-                        <a:t>1.82×</a:t>
+                        <a:t>0.84×</a:t>
                       </a:r>
                       <a:endParaRPr lang="en-US" sz="1300" dirty="0">
                         <a:latin typeface="Microsoft JhengHei" charset="0"/>
@@ -8948,7 +8948,7 @@
                           <a:ea typeface="Microsoft JhengHei" pitchFamily="34" charset="-122"/>
                           <a:cs typeface="Microsoft JhengHei" pitchFamily="34" charset="-120"/>
                         </a:rPr>
-                        <a:t>1.07×</a:t>
+                        <a:t>1.24×</a:t>
                       </a:r>
                       <a:endParaRPr lang="en-US" sz="1300" dirty="0">
                         <a:latin typeface="Microsoft JhengHei" charset="0"/>
@@ -9016,7 +9016,7 @@
                           <a:ea typeface="Microsoft JhengHei" pitchFamily="34" charset="-122"/>
                           <a:cs typeface="Microsoft JhengHei" pitchFamily="34" charset="-120"/>
                         </a:rPr>
-                        <a:t>1.06×</a:t>
+                        <a:t>1.20×</a:t>
                       </a:r>
                       <a:endParaRPr lang="en-US" sz="1300" dirty="0">
                         <a:latin typeface="Microsoft JhengHei" charset="0"/>
@@ -9102,7 +9102,7 @@
                   <a:schemeClr val="accent5"/>
                 </a:solidFill>
               </a:rPr>
-              <a:t>例:台積電 2026-02-25(第 1 頁的高點)。價格以 % 顯示,模型實際用 ln 值;量的 10 日均量算到 t 日為止。</a:t>
+              <a:t>例:台積電 2024-09-26(第 1 頁的高點)。價格以 % 顯示,模型實際用 ln 值;量的 10 日均量算到 t 日為止。</a:t>
             </a:r>
             <a:endParaRPr lang="en-US" sz="1100" dirty="0"/>
           </a:p>
@@ -9315,7 +9315,7 @@
                   <a:schemeClr val="tx2"/>
                 </a:solidFill>
               </a:rPr>
-              <a:t>50 檔放在一起,不是每檔一個模型。2020–2023 的候選日裡,真高點 3,805 天訓練一組 AE + OC-SVM、真低點 3,656 天訓練另一組,共 2 組。</a:t>
+              <a:t>50 檔放在一起,不是每檔一個模型。2020–2023 的候選日裡,真高點 3,769 天訓練一組 AE + OC-SVM、真低點 3,651 天訓練另一組,共 2 組。</a:t>
             </a:r>
             <a:endParaRPr lang="en-US" sz="1300" dirty="0"/>
           </a:p>
@@ -10164,7 +10164,7 @@
                   <a:schemeClr val="tx2"/>
                 </a:solidFill>
               </a:rPr>
-              <a:t>訓練樣本:50 檔合在一起,2020–2023 候選中的真高點 3,805 天、真低點 3,656 天;高點、低點各一組 AE + OC-SVM</a:t>
+              <a:t>訓練樣本:50 檔合在一起,2020–2023 候選中的真高點 3,769 天、真低點 3,651 天;高點、低點各一組 AE + OC-SVM</a:t>
             </a:r>
             <a:endParaRPr lang="en-US" sz="1500" dirty="0"/>
           </a:p>
@@ -10687,7 +10687,7 @@
                           <a:ea typeface="Microsoft JhengHei" pitchFamily="34" charset="-122"/>
                           <a:cs typeface="Microsoft JhengHei" pitchFamily="34" charset="-120"/>
                         </a:rPr>
-                        <a:t>1,222</a:t>
+                        <a:t>771</a:t>
                       </a:r>
                       <a:endParaRPr lang="en-US" sz="1400" dirty="0">
                         <a:latin typeface="Microsoft JhengHei" charset="0"/>
@@ -10708,7 +10708,7 @@
                           <a:ea typeface="Microsoft JhengHei" pitchFamily="34" charset="-122"/>
                           <a:cs typeface="Microsoft JhengHei" pitchFamily="34" charset="-120"/>
                         </a:rPr>
-                        <a:t>79.8%</a:t>
+                        <a:t>84.4%</a:t>
                       </a:r>
                       <a:endParaRPr lang="en-US" sz="1400" dirty="0">
                         <a:latin typeface="Microsoft JhengHei" charset="0"/>
@@ -10755,7 +10755,7 @@
                       <a:tailEnd type="none" w="med" len="med"/>
                     </a:lnB>
                     <a:solidFill>
-                      <a:srgbClr val="1C5CAB"/>
+                      <a:srgbClr val="104281"/>
                     </a:solidFill>
                   </a:tcPr>
                 </a:tc>
@@ -10776,7 +10776,7 @@
                           <a:ea typeface="Microsoft JhengHei" pitchFamily="34" charset="-122"/>
                           <a:cs typeface="Microsoft JhengHei" pitchFamily="34" charset="-120"/>
                         </a:rPr>
-                        <a:t>310</a:t>
+                        <a:t>142</a:t>
                       </a:r>
                       <a:endParaRPr lang="en-US" sz="1400" dirty="0">
                         <a:latin typeface="Microsoft JhengHei" charset="0"/>
@@ -10797,7 +10797,7 @@
                           <a:ea typeface="Microsoft JhengHei" pitchFamily="34" charset="-122"/>
                           <a:cs typeface="Microsoft JhengHei" pitchFamily="34" charset="-120"/>
                         </a:rPr>
-                        <a:t>20.2%</a:t>
+                        <a:t>15.6%</a:t>
                       </a:r>
                       <a:endParaRPr lang="en-US" sz="1400" dirty="0">
                         <a:latin typeface="Microsoft JhengHei" charset="0"/>
@@ -10844,7 +10844,7 @@
                       <a:tailEnd type="none" w="med" len="med"/>
                     </a:lnB>
                     <a:solidFill>
-                      <a:srgbClr val="CDE2FB"/>
+                      <a:srgbClr val="F4F8FD"/>
                     </a:solidFill>
                   </a:tcPr>
                 </a:tc>
@@ -11021,7 +11021,7 @@
                           <a:ea typeface="Microsoft JhengHei" pitchFamily="34" charset="-122"/>
                           <a:cs typeface="Microsoft JhengHei" pitchFamily="34" charset="-120"/>
                         </a:rPr>
-                        <a:t>2,646</a:t>
+                        <a:t>1,820</a:t>
                       </a:r>
                       <a:endParaRPr lang="en-US" sz="1400" dirty="0">
                         <a:latin typeface="Microsoft JhengHei" charset="0"/>
@@ -11042,7 +11042,7 @@
                           <a:ea typeface="Microsoft JhengHei" pitchFamily="34" charset="-122"/>
                           <a:cs typeface="Microsoft JhengHei" pitchFamily="34" charset="-120"/>
                         </a:rPr>
-                        <a:t>15.4%</a:t>
+                        <a:t>17.7%</a:t>
                       </a:r>
                       <a:endParaRPr lang="en-US" sz="1400" dirty="0">
                         <a:latin typeface="Microsoft JhengHei" charset="0"/>
@@ -11089,7 +11089,7 @@
                       <a:tailEnd type="none" w="med" len="med"/>
                     </a:lnB>
                     <a:solidFill>
-                      <a:srgbClr val="F4F8FD"/>
+                      <a:srgbClr val="CDE2FB"/>
                     </a:solidFill>
                   </a:tcPr>
                 </a:tc>
@@ -11110,7 +11110,7 @@
                           <a:ea typeface="Microsoft JhengHei" pitchFamily="34" charset="-122"/>
                           <a:cs typeface="Microsoft JhengHei" pitchFamily="34" charset="-120"/>
                         </a:rPr>
-                        <a:t>11,414</a:t>
+                        <a:t>6,562</a:t>
                       </a:r>
                       <a:endParaRPr lang="en-US" sz="1400" dirty="0">
                         <a:latin typeface="Microsoft JhengHei" charset="0"/>
@@ -11131,7 +11131,7 @@
                           <a:ea typeface="Microsoft JhengHei" pitchFamily="34" charset="-122"/>
                           <a:cs typeface="Microsoft JhengHei" pitchFamily="34" charset="-120"/>
                         </a:rPr>
-                        <a:t>66.4%</a:t>
+                        <a:t>63.8%</a:t>
                       </a:r>
                       <a:endParaRPr lang="en-US" sz="1400" dirty="0">
                         <a:latin typeface="Microsoft JhengHei" charset="0"/>
@@ -11199,7 +11199,7 @@
                           <a:ea typeface="Microsoft JhengHei" pitchFamily="34" charset="-122"/>
                           <a:cs typeface="Microsoft JhengHei" pitchFamily="34" charset="-120"/>
                         </a:rPr>
-                        <a:t>3,127</a:t>
+                        <a:t>1,907</a:t>
                       </a:r>
                       <a:endParaRPr lang="en-US" sz="1400" dirty="0">
                         <a:latin typeface="Microsoft JhengHei" charset="0"/>
@@ -11220,7 +11220,7 @@
                           <a:ea typeface="Microsoft JhengHei" pitchFamily="34" charset="-122"/>
                           <a:cs typeface="Microsoft JhengHei" pitchFamily="34" charset="-120"/>
                         </a:rPr>
-                        <a:t>18.2%</a:t>
+                        <a:t>18.5%</a:t>
                       </a:r>
                       <a:endParaRPr lang="en-US" sz="1400" dirty="0">
                         <a:latin typeface="Microsoft JhengHei" charset="0"/>
@@ -11444,7 +11444,7 @@
                           <a:ea typeface="Microsoft JhengHei" pitchFamily="34" charset="-122"/>
                           <a:cs typeface="Microsoft JhengHei" pitchFamily="34" charset="-120"/>
                         </a:rPr>
-                        <a:t>432</a:t>
+                        <a:t>165</a:t>
                       </a:r>
                       <a:endParaRPr lang="en-US" sz="1400" dirty="0">
                         <a:latin typeface="Microsoft JhengHei" charset="0"/>
@@ -11465,7 +11465,7 @@
                           <a:ea typeface="Microsoft JhengHei" pitchFamily="34" charset="-122"/>
                           <a:cs typeface="Microsoft JhengHei" pitchFamily="34" charset="-120"/>
                         </a:rPr>
-                        <a:t>29.4%</a:t>
+                        <a:t>18.4%</a:t>
                       </a:r>
                       <a:endParaRPr lang="en-US" sz="1400" dirty="0">
                         <a:latin typeface="Microsoft JhengHei" charset="0"/>
@@ -11533,7 +11533,7 @@
                           <a:ea typeface="Microsoft JhengHei" pitchFamily="34" charset="-122"/>
                           <a:cs typeface="Microsoft JhengHei" pitchFamily="34" charset="-120"/>
                         </a:rPr>
-                        <a:t>1,038</a:t>
+                        <a:t>731</a:t>
                       </a:r>
                       <a:endParaRPr lang="en-US" sz="1400" dirty="0">
                         <a:latin typeface="Microsoft JhengHei" charset="0"/>
@@ -11554,7 +11554,7 @@
                           <a:ea typeface="Microsoft JhengHei" pitchFamily="34" charset="-122"/>
                           <a:cs typeface="Microsoft JhengHei" pitchFamily="34" charset="-120"/>
                         </a:rPr>
-                        <a:t>70.6%</a:t>
+                        <a:t>81.6%</a:t>
                       </a:r>
                       <a:endParaRPr lang="en-US" sz="1400" dirty="0">
                         <a:latin typeface="Microsoft JhengHei" charset="0"/>
@@ -12008,7 +12008,7 @@
                           <a:ea typeface="Microsoft JhengHei" pitchFamily="34" charset="-122"/>
                           <a:cs typeface="Microsoft JhengHei" pitchFamily="34" charset="-120"/>
                         </a:rPr>
-                        <a:t>85.1%</a:t>
+                        <a:t>85.0%</a:t>
                       </a:r>
                       <a:endParaRPr lang="en-US" sz="1300" dirty="0">
                         <a:latin typeface="Microsoft JhengHei" charset="0"/>
@@ -12073,7 +12073,7 @@
                           <a:ea typeface="Microsoft JhengHei" pitchFamily="34" charset="-122"/>
                           <a:cs typeface="Microsoft JhengHei" pitchFamily="34" charset="-120"/>
                         </a:rPr>
-                        <a:t>30.7%</a:t>
+                        <a:t>30.6%</a:t>
                       </a:r>
                       <a:endParaRPr lang="en-US" sz="1300" dirty="0">
                         <a:latin typeface="Microsoft JhengHei" charset="0"/>
@@ -12138,7 +12138,7 @@
                           <a:ea typeface="Microsoft JhengHei" pitchFamily="34" charset="-122"/>
                           <a:cs typeface="Microsoft JhengHei" pitchFamily="34" charset="-120"/>
                         </a:rPr>
-                        <a:t>85.1%</a:t>
+                        <a:t>85.0%</a:t>
                       </a:r>
                       <a:endParaRPr lang="en-US" sz="1300" dirty="0">
                         <a:latin typeface="Microsoft JhengHei" charset="0"/>
@@ -12270,7 +12270,7 @@
                           <a:ea typeface="Microsoft JhengHei" pitchFamily="34" charset="-122"/>
                           <a:cs typeface="Microsoft JhengHei" pitchFamily="34" charset="-120"/>
                         </a:rPr>
-                        <a:t>62.4%</a:t>
+                        <a:t>63.4%</a:t>
                       </a:r>
                       <a:endParaRPr lang="en-US" sz="1300" dirty="0">
                         <a:latin typeface="Microsoft JhengHei" charset="0"/>
@@ -12335,7 +12335,7 @@
                           <a:ea typeface="Microsoft JhengHei" pitchFamily="34" charset="-122"/>
                           <a:cs typeface="Microsoft JhengHei" pitchFamily="34" charset="-120"/>
                         </a:rPr>
-                        <a:t>53.5%</a:t>
+                        <a:t>54.2%</a:t>
                       </a:r>
                       <a:endParaRPr lang="en-US" sz="1300" dirty="0">
                         <a:latin typeface="Microsoft JhengHei" charset="0"/>
@@ -12532,7 +12532,7 @@
                           <a:ea typeface="Microsoft JhengHei" pitchFamily="34" charset="-122"/>
                           <a:cs typeface="Microsoft JhengHei" pitchFamily="34" charset="-120"/>
                         </a:rPr>
-                        <a:t>67.7%</a:t>
+                        <a:t>66.7%</a:t>
                       </a:r>
                       <a:endParaRPr lang="en-US" sz="1300" dirty="0">
                         <a:latin typeface="Microsoft JhengHei" charset="0"/>
@@ -12597,7 +12597,7 @@
                           <a:ea typeface="Microsoft JhengHei" pitchFamily="34" charset="-122"/>
                           <a:cs typeface="Microsoft JhengHei" pitchFamily="34" charset="-120"/>
                         </a:rPr>
-                        <a:t>53.3%</a:t>
+                        <a:t>54.0%</a:t>
                       </a:r>
                       <a:endParaRPr lang="en-US" sz="1300" dirty="0">
                         <a:latin typeface="Microsoft JhengHei" charset="0"/>
@@ -12662,7 +12662,7 @@
                           <a:ea typeface="Microsoft JhengHei" pitchFamily="34" charset="-122"/>
                           <a:cs typeface="Microsoft JhengHei" pitchFamily="34" charset="-120"/>
                         </a:rPr>
-                        <a:t>93.9%</a:t>
+                        <a:t>95.5%</a:t>
                       </a:r>
                       <a:endParaRPr lang="en-US" sz="1300" dirty="0">
                         <a:latin typeface="Microsoft JhengHei" charset="0"/>
@@ -12749,7 +12749,7 @@
                   <a:schemeClr val="tx2"/>
                 </a:solidFill>
               </a:rPr>
-              <a:t>真高點 1,470 個:判對 1,038 個(70.6%),沒有一個被判成低點</a:t>
+              <a:t>真高點 896 個:判對 731 個(81.6%),沒有一個被判成低點</a:t>
             </a:r>
             <a:endParaRPr lang="en-US" sz="1500" dirty="0"/>
           </a:p>
@@ -12767,7 +12767,7 @@
                   <a:schemeClr val="tx2"/>
                 </a:solidFill>
               </a:rPr>
-              <a:t>真低點 1,532 個:判對 1,222 個(79.8%),沒有一個被判成高點</a:t>
+              <a:t>真低點 913 個:判對 771 個(84.4%),沒有一個被判成高點</a:t>
             </a:r>
             <a:endParaRPr lang="en-US" sz="1500" dirty="0"/>
           </a:p>
@@ -12785,7 +12785,7 @@
                   <a:schemeClr val="tx2"/>
                 </a:solidFill>
               </a:rPr>
-              <a:t>判非極值的 12,156 天中,11,414 天真的不是高低點(93.9%)</a:t>
+              <a:t>判非極值的 6,869 天中,6,562 天真的不是高低點(95.5%)</a:t>
             </a:r>
             <a:endParaRPr lang="en-US" sz="1500" dirty="0"/>
           </a:p>
@@ -12893,7 +12893,7 @@
                   <a:schemeClr val="tx1"/>
                 </a:solidFill>
               </a:rPr>
-              <a:t>局部準確度:挑出的候選比亂猜準 3.4–4.2 倍</a:t>
+              <a:t>局部準確度:挑出的候選比亂猜準 3.7–3.9 倍</a:t>
             </a:r>
             <a:endParaRPr lang="en-US" sz="3200" dirty="0"/>
           </a:p>
@@ -12972,7 +12972,7 @@
                   <a:schemeClr val="accent1"/>
                 </a:solidFill>
               </a:rPr>
-              <a:t>100% / 99.9%</a:t>
+              <a:t>99.9% / 100%</a:t>
             </a:r>
             <a:endParaRPr lang="en-US" sz="2800" dirty="0"/>
           </a:p>
@@ -13071,7 +13071,7 @@
                   <a:schemeClr val="accent2"/>
                 </a:solidFill>
               </a:rPr>
-              <a:t>70.6% / 79.8%</a:t>
+              <a:t>81.6% / 84.4%</a:t>
             </a:r>
             <a:endParaRPr lang="en-US" sz="2800" dirty="0"/>
           </a:p>
@@ -13170,7 +13170,7 @@
                   <a:schemeClr val="accent3"/>
                 </a:solidFill>
               </a:rPr>
-              <a:t>93.9%</a:t>
+              <a:t>95.5%</a:t>
             </a:r>
             <a:endParaRPr lang="en-US" sz="2800" dirty="0"/>
           </a:p>
@@ -13594,7 +13594,7 @@
                   <a:schemeClr val="accent1"/>
                 </a:solidFill>
               </a:rPr>
-              <a:t>100%</a:t>
+              <a:t>99.9%</a:t>
             </a:r>
             <a:endParaRPr lang="en-US" sz="4000" dirty="0"/>
           </a:p>
@@ -13630,7 +13630,7 @@
                   <a:schemeClr val="bg1"/>
                 </a:solidFill>
               </a:rPr>
-              <a:t>真高低點都進了候選</a:t>
+              <a:t>真高低點進了候選</a:t>
             </a:r>
             <a:endParaRPr lang="en-US" sz="1600" dirty="0"/>
           </a:p>
@@ -13666,7 +13666,7 @@
                   <a:schemeClr val="accent6"/>
                 </a:solidFill>
               </a:rPr>
-              <a:t>高點 1,470 / 1,470</a:t>
+              <a:t>高點 895 / 896</a:t>
             </a:r>
             <a:endParaRPr lang="en-US" sz="1300" dirty="0"/>
           </a:p>
@@ -13680,7 +13680,7 @@
                   <a:schemeClr val="accent6"/>
                 </a:solidFill>
               </a:rPr>
-              <a:t>低點 1,531 / 1,532</a:t>
+              <a:t>低點 913 / 913</a:t>
             </a:r>
             <a:endParaRPr lang="en-US" sz="1300" dirty="0"/>
           </a:p>
@@ -13838,7 +13838,7 @@
                   <a:schemeClr val="accent3"/>
                 </a:solidFill>
               </a:rPr>
-              <a:t>93.9%</a:t>
+              <a:t>95.5%</a:t>
             </a:r>
             <a:endParaRPr lang="en-US" sz="4000" dirty="0"/>
           </a:p>
@@ -13910,7 +13910,7 @@
                   <a:schemeClr val="accent6"/>
                 </a:solidFill>
               </a:rPr>
-              <a:t>12,156 天裡 11,414 天</a:t>
+              <a:t>6,869 天裡 6,562 天</a:t>
             </a:r>
             <a:endParaRPr lang="en-US" sz="1300" dirty="0"/>
           </a:p>
@@ -13960,7 +13960,7 @@
                   <a:schemeClr val="accent2"/>
                 </a:solidFill>
               </a:rPr>
-              <a:t>3.4–4.2×</a:t>
+              <a:t>3.7–3.9×</a:t>
             </a:r>
             <a:endParaRPr lang="en-US" sz="4000" dirty="0"/>
           </a:p>
@@ -14032,7 +14032,7 @@
                   <a:schemeClr val="accent6"/>
                 </a:solidFill>
               </a:rPr>
-              <a:t>高點 7.3% → 24.9%</a:t>
+              <a:t>高點 7.4% → 27.7%</a:t>
             </a:r>
             <a:endParaRPr lang="en-US" sz="1300" dirty="0"/>
           </a:p>
@@ -14046,7 +14046,7 @@
                   <a:schemeClr val="accent6"/>
                 </a:solidFill>
               </a:rPr>
-              <a:t>低點 7.6% → 31.6%</a:t>
+              <a:t>低點 7.5% → 29.8%</a:t>
             </a:r>
             <a:endParaRPr lang="en-US" sz="1300" dirty="0"/>
           </a:p>
@@ -14082,7 +14082,7 @@
                   <a:schemeClr val="accent5"/>
                 </a:solidFill>
               </a:rPr>
-              <a:t>測試期 2025-01 ~ 2026-09 · TW50 · 20,189 個股票日;模型判對 70.6% 的真高點、79.8% 的真低點</a:t>
+              <a:t>測試期 2024-01 ~ 2024-12 · TW50 · 12,098 個股票日;模型判對 81.6% 的真高點、84.4% 的真低點</a:t>
             </a:r>
             <a:endParaRPr lang="en-US" sz="1300" dirty="0"/>
           </a:p>

--- a/method_kline_peak/report/TW50_局部高低點_專題進度.pptx
+++ b/method_kline_peak/report/TW50_局部高低點_專題進度.pptx
@@ -13,9 +13,10 @@
     <p:sldId id="261" r:id="rId7"/>
     <p:sldId id="262" r:id="rId8"/>
     <p:sldId id="263" r:id="rId9"/>
+    <p:sldId id="264" r:id="rId10"/>
   </p:sldIdLst>
   <p:notesMasterIdLst>
-    <p:notesMasterId r:id="rId10"/>
+    <p:notesMasterId r:id="rId11"/>
   </p:notesMasterIdLst>
   <p:sldSz cx="12192000" cy="6858000"/>
   <p:notesSz cx="6858000" cy="12192000"/>
@@ -114,28 +115,29 @@
   <p:extLst>
     <p:ext uri="{521415D9-36F7-43E2-AB2F-B90AF26B5E84}">
       <p14:sectionLst xmlns:p14="http://schemas.microsoft.com/office/powerpoint/2010/main">
-        <p14:section name="問題與資料" id="{894b7658-b22a-274d-c0ca-2eb4b26ab32e}">
+        <p14:section name="問題與資料" id="{8b7e2c77-c498-d4a6-2dd5-78d9b8938942}">
           <p14:sldIdLst>
             <p14:sldId id="256"/>
             <p14:sldId id="257"/>
           </p14:sldIdLst>
         </p14:section>
-        <p14:section name="方法與計分" id="{ebc797ee-4e3d-1df7-2f68-c05c4df73146}">
+        <p14:section name="方法與計分" id="{afabe88e-6627-bec7-1525-da124823470e}">
           <p14:sldIdLst>
             <p14:sldId id="258"/>
             <p14:sldId id="259"/>
+            <p14:sldId id="260"/>
           </p14:sldIdLst>
         </p14:section>
-        <p14:section name="結果" id="{c2a1a1d6-4fb8-3752-55c3-e9a897c7ebba}">
+        <p14:section name="結果" id="{4c8599b2-f8b0-b392-3c19-1fec8afc4378}">
           <p14:sldIdLst>
-            <p14:sldId id="260"/>
             <p14:sldId id="261"/>
             <p14:sldId id="262"/>
+            <p14:sldId id="263"/>
           </p14:sldIdLst>
         </p14:section>
-        <p14:section name="總結" id="{8e667cbe-8204-042d-9fa7-3fc23575c66a}">
+        <p14:section name="總結" id="{5ed6581d-6f02-92e9-07ca-7779d6782b18}">
           <p14:sldIdLst>
-            <p14:sldId id="263"/>
+            <p14:sldId id="264"/>
           </p14:sldIdLst>
         </p14:section>
       </p14:sectionLst>
@@ -1421,7 +1423,7 @@
           <a:p>
             <a:r>
               <a:rPr lang="en-US" dirty="0"/>
-              <a:t>資料是 TW50 的 50 檔股票,2016 到 2026 年 9 月的還原日 K,總共 128,867 個股票日。訓練用 2020 到 2023 年 48,335 筆,測試用 2024 年整年 12,098 筆。2023 年最後 5 個交易日的 250 筆剔除,因為它們的標籤會用到 2024 年的價格,不剔除等於偷看測試期。2016 到 2019 年和 2025 年以後這份報告沒有用到。加起來剛好是 128,867。高點和低點各只佔 7 到 8%,這個不平衡很重要,後面算 acc 時會再提到。</a:t>
+              <a:t>資料是 TW50 的 50 檔股票,2020 到 2026 年 9 月的還原日 K,總共 80,872 個股票日。訓練用 2020 到 2023 年 48,335 筆,測試用 2024 年整年 12,098 筆。2023 年最後 5 個交易日的 250 筆剔除,因為它們的標籤會用到 2024 年的價格,不剔除等於偷看測試期。2025 年以後這份報告沒有用到。加起來剛好是 80,872。高點和低點各只佔 7 到 8%,這個不平衡很重要,後面算 acc 時會再提到。</a:t>
             </a:r>
             <a:endParaRPr lang="en-US" dirty="0"/>
           </a:p>
@@ -1685,7 +1687,7 @@
           <a:p>
             <a:r>
               <a:rPr lang="en-US" dirty="0"/>
-              <a:t>這是 2024 年測試期的混淆矩陣。看第一列和最後一列:真低點有 84.4% 被判成低點,真高點有 81.6% 被判成高點,而且高點和低點從來不會互相判錯。右邊的表比較三種做法,模型的 acc 是 66.7%,判非極值時 95.5% 正確。</a:t>
+              <a:t>這頁回答 OC-SVM 只能分兩類,為什麼我們能做三分類。每個 OC-SVM 只回答一件事:這個樣本落不落在它圈出的範圍裡。三分類是規則加兩個 OC-SVM 組出來的:t 日收盤如果是近 6 天最高,就是高點候選,交給只學過真高點的高點 OC-SVM,範圍內判高點,範圍外判非極值;如果是近 6 天最低,就交給低點 OC-SVM;都不是就直接判非極值,不經過模型。一天不可能同時是近 6 天最高和最低,所以每天最多只問一個模型。2024 年 12,098 天裡,高點候選 3,217 天、低點候選 3,016 天,其餘 5,865 天直接判非極值。</a:t>
             </a:r>
             <a:endParaRPr lang="en-US" dirty="0"/>
           </a:p>
@@ -1773,7 +1775,7 @@
           <a:p>
             <a:r>
               <a:rPr lang="en-US" dirty="0"/>
-              <a:t>這頁是我們說的局部準確度。左圖是命中率:隨機挑一天是高點的機率只有 7.4%,被我們挑出來的候選是 28 到 30%,大約是 3.7 到 3.9 倍。右邊三個數字:真高低點 1,809 個只有 1 個沒進候選,模型判對 82 到 84%,判非極值時 95.5% 正確。</a:t>
+              <a:t>這是 2024 年測試期的混淆矩陣。看第一列和最後一列:真低點有 84.4% 被判成低點,真高點有 81.6% 被判成高點,而且高點和低點從來不會互相判錯。右邊的表比較三種做法,模型的 acc 是 66.7%,判非極值時 95.5% 正確。</a:t>
             </a:r>
             <a:endParaRPr lang="en-US" dirty="0"/>
           </a:p>
@@ -1861,7 +1863,7 @@
           <a:p>
             <a:r>
               <a:rPr lang="en-US" dirty="0"/>
-              <a:t>這是測試期四種情況的典型例子:左上判對的高點,右上判對的低點,左下是規則挑出來但被模型正確刪掉的假候選,右下是誤報,判了高點但之後又創新高。每一類都是取報酬最接近中位數的窗口,不是挑最好看的。互動網頁(連結:https://claude.ai/artifact/4YudK9qBr4fnsV4NQatjEe,需先分享權限)可以看全部 50 檔。</a:t>
+              <a:t>這頁是我們說的局部準確度。左圖是命中率:隨機挑一天是高點的機率只有 7.4%,被我們挑出來的候選是 28 到 30%,大約是 3.7 到 3.9 倍。右邊三個數字:真高低點 1,809 個只有 1 個沒進候選,模型判對 82 到 84%,判非極值時 95.5% 正確。</a:t>
             </a:r>
             <a:endParaRPr lang="en-US" dirty="0"/>
           </a:p>
@@ -1949,7 +1951,7 @@
           <a:p>
             <a:r>
               <a:rPr lang="en-US" dirty="0"/>
-              <a:t>總結。我們把題目定成找 11 天窗口裡的局部高低點,在 TW50 的 2024 年測試期:真高低點 1,809 個只有 1 個沒進候選;模型判出的高點和低點從來不會互相搞錯;模型說「這天不是高低點」時 95.5% 是對的;挑出來的候選是真高低點的機率是隨便挑一天的 3.7 到 3.9 倍。模型最後判對了 82% 的真高點和 84% 的真低點。謝謝。</a:t>
+              <a:t>這是測試期四種情況的典型例子:左上判對的高點,右上判對的低點,左下是規則挑出來但被模型正確刪掉的假候選,右下是誤報,判了高點但之後又創新高。每一類都是取報酬最接近中位數的窗口,不是挑最好看的。互動網頁(連結:https://claude.ai/artifact/4YudK9qBr4fnsV4NQatjEe,需先分享權限)可以看全部 50 檔。</a:t>
             </a:r>
             <a:endParaRPr lang="en-US" dirty="0"/>
           </a:p>
@@ -1973,6 +1975,94 @@
             <a:fld id="{F7021451-1387-4CA6-816F-3879F97B5CBC}" type="slidenum">
               <a:rPr lang="en-US"/>
               <a:t>8</a:t>
+            </a:fld>
+            <a:endParaRPr lang="en-US"/>
+          </a:p>
+        </p:txBody>
+      </p:sp>
+    </p:spTree>
+    <p:extLst>
+      <p:ext uri="{BB962C8B-B14F-4D97-AF65-F5344CB8AC3E}">
+        <p14:creationId xmlns:p14="http://schemas.microsoft.com/office/powerpoint/2010/main" val="1024086991"/>
+      </p:ext>
+    </p:extLst>
+  </p:cSld>
+  <p:clrMapOvr>
+    <a:masterClrMapping/>
+  </p:clrMapOvr>
+</p:notes>
+</file>
+
+<file path=ppt/notesSlides/notesSlide9.xml><?xml version="1.0" encoding="utf-8"?>
+<p:notes xmlns:a="http://schemas.openxmlformats.org/drawingml/2006/main" xmlns:r="http://schemas.openxmlformats.org/officeDocument/2006/relationships" xmlns:p="http://schemas.openxmlformats.org/presentationml/2006/main">
+  <p:cSld>
+    <p:spTree>
+      <p:nvGrpSpPr>
+        <p:cNvPr id="1" name=""/>
+        <p:cNvGrpSpPr/>
+        <p:nvPr/>
+      </p:nvGrpSpPr>
+      <p:grpSpPr>
+        <a:xfrm>
+          <a:off x="0" y="0"/>
+          <a:ext cx="0" cy="0"/>
+          <a:chOff x="0" y="0"/>
+          <a:chExt cx="0" cy="0"/>
+        </a:xfrm>
+      </p:grpSpPr>
+      <p:sp>
+        <p:nvSpPr>
+          <p:cNvPr id="2" name="Slide Image Placeholder 1"/>
+          <p:cNvSpPr>
+            <a:spLocks noGrp="1" noRot="1" noChangeAspect="1"/>
+          </p:cNvSpPr>
+          <p:nvPr>
+            <p:ph type="sldImg"/>
+          </p:nvPr>
+        </p:nvSpPr>
+        <p:spPr/>
+      </p:sp>
+      <p:sp>
+        <p:nvSpPr>
+          <p:cNvPr id="3" name="Notes Placeholder 2"/>
+          <p:cNvSpPr>
+            <a:spLocks noGrp="1"/>
+          </p:cNvSpPr>
+          <p:nvPr>
+            <p:ph type="body" idx="1"/>
+          </p:nvPr>
+        </p:nvSpPr>
+        <p:spPr/>
+        <p:txBody>
+          <a:bodyPr/>
+          <a:lstStyle/>
+          <a:p>
+            <a:r>
+              <a:rPr lang="en-US" dirty="0"/>
+              <a:t>總結。我們把題目定成找 11 天窗口裡的局部高低點,在 TW50 的 2024 年測試期:真高低點 1,809 個只有 1 個沒進候選;模型判出的高點和低點從來不會互相搞錯;模型說「這天不是高低點」時 95.5% 是對的;挑出來的候選是真高低點的機率是隨便挑一天的 3.7 到 3.9 倍。模型最後判對了 82% 的真高點和 84% 的真低點。謝謝。</a:t>
+            </a:r>
+            <a:endParaRPr lang="en-US" dirty="0"/>
+          </a:p>
+        </p:txBody>
+      </p:sp>
+      <p:sp>
+        <p:nvSpPr>
+          <p:cNvPr id="4" name="Slide Number Placeholder 3"/>
+          <p:cNvSpPr>
+            <a:spLocks noGrp="1"/>
+          </p:cNvSpPr>
+          <p:nvPr>
+            <p:ph type="sldNum" sz="quarter" idx="10"/>
+          </p:nvPr>
+        </p:nvSpPr>
+        <p:spPr/>
+        <p:txBody>
+          <a:bodyPr/>
+          <a:lstStyle/>
+          <a:p>
+            <a:fld id="{F7021451-1387-4CA6-816F-3879F97B5CBC}" type="slidenum">
+              <a:rPr lang="en-US"/>
+              <a:t>9</a:t>
             </a:fld>
             <a:endParaRPr lang="en-US"/>
           </a:p>
@@ -3465,7 +3555,7 @@
                   <a:schemeClr val="tx1"/>
                 </a:solidFill>
               </a:rPr>
-              <a:t>資料量:TW50 · 2016 ~ 2026 · 12.9 萬個股票日</a:t>
+              <a:t>資料量:TW50 · 2020 ~ 2026 · 8.1 萬個股票日</a:t>
             </a:r>
             <a:endParaRPr lang="en-US" sz="3200" dirty="0"/>
           </a:p>
@@ -3976,139 +4066,7 @@
                           <a:ea typeface="Microsoft JhengHei" pitchFamily="34" charset="-122"/>
                           <a:cs typeface="Microsoft JhengHei" pitchFamily="34" charset="-120"/>
                         </a:rPr>
-                        <a:t>2016-01 ~ 2026-09:128,867 個股票日</a:t>
-                      </a:r>
-                      <a:endParaRPr lang="en-US" sz="1400" dirty="0">
-                        <a:latin typeface="Microsoft JhengHei" charset="0"/>
-                        <a:ea typeface="Microsoft JhengHei" charset="0"/>
-                        <a:cs typeface="Microsoft JhengHei" charset="0"/>
-                      </a:endParaRPr>
-                    </a:p>
-                  </a:txBody>
-                  <a:tcPr marL="91440" marR="91440" marT="0" marB="0" anchor="ctr">
-                    <a:lnL w="9525" cap="flat" cmpd="sng" algn="ctr">
-                      <a:solidFill>
-                        <a:srgbClr val="D9E0E6"/>
-                      </a:solidFill>
-                      <a:prstDash val="solid"/>
-                      <a:round/>
-                      <a:headEnd type="none" w="med" len="med"/>
-                      <a:tailEnd type="none" w="med" len="med"/>
-                    </a:lnL>
-                    <a:lnR w="9525" cap="flat" cmpd="sng" algn="ctr">
-                      <a:solidFill>
-                        <a:srgbClr val="D9E0E6"/>
-                      </a:solidFill>
-                      <a:prstDash val="solid"/>
-                      <a:round/>
-                      <a:headEnd type="none" w="med" len="med"/>
-                      <a:tailEnd type="none" w="med" len="med"/>
-                    </a:lnR>
-                    <a:lnT w="9525" cap="flat" cmpd="sng" algn="ctr">
-                      <a:solidFill>
-                        <a:srgbClr val="D9E0E6"/>
-                      </a:solidFill>
-                      <a:prstDash val="solid"/>
-                      <a:round/>
-                      <a:headEnd type="none" w="med" len="med"/>
-                      <a:tailEnd type="none" w="med" len="med"/>
-                    </a:lnT>
-                    <a:lnB w="9525" cap="flat" cmpd="sng" algn="ctr">
-                      <a:solidFill>
-                        <a:srgbClr val="D9E0E6"/>
-                      </a:solidFill>
-                      <a:prstDash val="solid"/>
-                      <a:round/>
-                      <a:headEnd type="none" w="med" len="med"/>
-                      <a:tailEnd type="none" w="med" len="med"/>
-                    </a:lnB>
-                  </a:tcPr>
-                </a:tc>
-              </a:tr>
-              <a:tr h="457200">
-                <a:tc>
-                  <a:txBody>
-                    <a:bodyPr/>
-                    <a:lstStyle/>
-                    <a:p>
-                      <a:pPr indent="0" marL="0">
-                        <a:buNone/>
-                      </a:pPr>
-                      <a:r>
-                        <a:rPr lang="en-US" sz="1400" b="1" dirty="0">
-                          <a:solidFill>
-                            <a:srgbClr val="7A8691"/>
-                          </a:solidFill>
-                          <a:latin typeface="Microsoft JhengHei" pitchFamily="34" charset="0"/>
-                          <a:ea typeface="Microsoft JhengHei" pitchFamily="34" charset="-122"/>
-                          <a:cs typeface="Microsoft JhengHei" pitchFamily="34" charset="-120"/>
-                        </a:rPr>
-                        <a:t>2016–2019</a:t>
-                      </a:r>
-                      <a:endParaRPr lang="en-US" sz="1400" dirty="0">
-                        <a:latin typeface="Microsoft JhengHei" charset="0"/>
-                        <a:ea typeface="Microsoft JhengHei" charset="0"/>
-                        <a:cs typeface="Microsoft JhengHei" charset="0"/>
-                      </a:endParaRPr>
-                    </a:p>
-                  </a:txBody>
-                  <a:tcPr marL="91440" marR="91440" marT="0" marB="0" anchor="ctr">
-                    <a:lnL w="9525" cap="flat" cmpd="sng" algn="ctr">
-                      <a:solidFill>
-                        <a:srgbClr val="D9E0E6"/>
-                      </a:solidFill>
-                      <a:prstDash val="solid"/>
-                      <a:round/>
-                      <a:headEnd type="none" w="med" len="med"/>
-                      <a:tailEnd type="none" w="med" len="med"/>
-                    </a:lnL>
-                    <a:lnR w="9525" cap="flat" cmpd="sng" algn="ctr">
-                      <a:solidFill>
-                        <a:srgbClr val="D9E0E6"/>
-                      </a:solidFill>
-                      <a:prstDash val="solid"/>
-                      <a:round/>
-                      <a:headEnd type="none" w="med" len="med"/>
-                      <a:tailEnd type="none" w="med" len="med"/>
-                    </a:lnR>
-                    <a:lnT w="9525" cap="flat" cmpd="sng" algn="ctr">
-                      <a:solidFill>
-                        <a:srgbClr val="D9E0E6"/>
-                      </a:solidFill>
-                      <a:prstDash val="solid"/>
-                      <a:round/>
-                      <a:headEnd type="none" w="med" len="med"/>
-                      <a:tailEnd type="none" w="med" len="med"/>
-                    </a:lnT>
-                    <a:lnB w="9525" cap="flat" cmpd="sng" algn="ctr">
-                      <a:solidFill>
-                        <a:srgbClr val="D9E0E6"/>
-                      </a:solidFill>
-                      <a:prstDash val="solid"/>
-                      <a:round/>
-                      <a:headEnd type="none" w="med" len="med"/>
-                      <a:tailEnd type="none" w="med" len="med"/>
-                    </a:lnB>
-                  </a:tcPr>
-                </a:tc>
-                <a:tc>
-                  <a:txBody>
-                    <a:bodyPr/>
-                    <a:lstStyle/>
-                    <a:p>
-                      <a:pPr indent="0" marL="0">
-                        <a:buNone/>
-                      </a:pPr>
-                      <a:r>
-                        <a:rPr lang="en-US" sz="1400" dirty="0">
-                          <a:solidFill>
-                            <a:srgbClr val="7A8691"/>
-                          </a:solidFill>
-                          <a:latin typeface="Microsoft JhengHei" pitchFamily="34" charset="0"/>
-                          <a:ea typeface="Microsoft JhengHei" pitchFamily="34" charset="-122"/>
-                          <a:cs typeface="Microsoft JhengHei" pitchFamily="34" charset="-120"/>
-                        </a:rPr>
-                        <a:t>47,995 筆:沒用到(訓練從 2020 開始)</a:t>
+                        <a:t>2020-01 ~ 2026-09:80,872 個股票日</a:t>
                       </a:r>
                       <a:endParaRPr lang="en-US" sz="1400" dirty="0">
                         <a:latin typeface="Microsoft JhengHei" charset="0"/>
@@ -10308,6 +10266,1478 @@
                   <a:schemeClr val="tx1"/>
                 </a:solidFill>
               </a:rPr>
+              <a:t>三分類怎麼來:規則分流,兩個 OC-SVM 各判一種</a:t>
+            </a:r>
+            <a:endParaRPr lang="en-US" sz="3200" dirty="0"/>
+          </a:p>
+        </p:txBody>
+      </p:sp>
+      <p:sp>
+        <p:nvSpPr>
+          <p:cNvPr id="3" name="flow-start"/>
+          <p:cNvSpPr/>
+          <p:nvPr/>
+        </p:nvSpPr>
+        <p:spPr>
+          <a:xfrm>
+            <a:off x="548640" y="2834640"/>
+            <a:ext cx="1737360" cy="1005840"/>
+          </a:xfrm>
+          <a:prstGeom prst="roundRect">
+            <a:avLst>
+              <a:gd name="adj" fmla="val 7273"/>
+            </a:avLst>
+          </a:prstGeom>
+          <a:solidFill>
+            <a:schemeClr val="bg2"/>
+          </a:solidFill>
+          <a:ln w="12700">
+            <a:solidFill>
+              <a:schemeClr val="bg2"/>
+            </a:solidFill>
+            <a:prstDash val="solid"/>
+          </a:ln>
+        </p:spPr>
+      </p:sp>
+      <p:sp>
+        <p:nvSpPr>
+          <p:cNvPr id="4" name="Text 2"/>
+          <p:cNvSpPr txBox="1"/>
+          <p:nvPr/>
+        </p:nvSpPr>
+        <p:spPr>
+          <a:xfrm>
+            <a:off x="548640" y="2834640"/>
+            <a:ext cx="1737360" cy="1005840"/>
+          </a:xfrm>
+          <a:prstGeom prst="rect">
+            <a:avLst/>
+          </a:prstGeom>
+          <a:noFill/>
+          <a:ln/>
+        </p:spPr>
+        <p:txBody>
+          <a:bodyPr wrap="square" lIns="0" tIns="0" rIns="0" bIns="0" rtlCol="0" anchor="ctr"/>
+          <a:lstStyle/>
+          <a:p>
+            <a:pPr algn="ctr" indent="0" marL="0">
+              <a:buNone/>
+            </a:pPr>
+            <a:r>
+              <a:rPr lang="en-US" sz="1500" b="1" dirty="0">
+                <a:solidFill>
+                  <a:schemeClr val="tx1"/>
+                </a:solidFill>
+              </a:rPr>
+              <a:t>t 日收盤後</a:t>
+            </a:r>
+            <a:endParaRPr lang="en-US" sz="1500" dirty="0"/>
+          </a:p>
+          <a:p>
+            <a:pPr algn="ctr" indent="0" marL="0">
+              <a:buNone/>
+            </a:pPr>
+            <a:r>
+              <a:rPr lang="en-US" sz="1200" dirty="0">
+                <a:solidFill>
+                  <a:schemeClr val="tx2"/>
+                </a:solidFill>
+              </a:rPr>
+              <a:t>算出 29 個數字</a:t>
+            </a:r>
+            <a:endParaRPr lang="en-US" sz="1500" dirty="0"/>
+          </a:p>
+        </p:txBody>
+      </p:sp>
+      <p:sp>
+        <p:nvSpPr>
+          <p:cNvPr id="5" name="flow-a1"/>
+          <p:cNvSpPr/>
+          <p:nvPr/>
+        </p:nvSpPr>
+        <p:spPr>
+          <a:xfrm>
+            <a:off x="2286000" y="3337560"/>
+            <a:ext cx="457200" cy="0"/>
+          </a:xfrm>
+          <a:prstGeom prst="line">
+            <a:avLst/>
+          </a:prstGeom>
+          <a:noFill/>
+          <a:ln w="15875">
+            <a:solidFill>
+              <a:srgbClr val="7A8691"/>
+            </a:solidFill>
+            <a:prstDash val="solid"/>
+            <a:tailEnd type="triangle"/>
+          </a:ln>
+        </p:spPr>
+      </p:sp>
+      <p:sp>
+        <p:nvSpPr>
+          <p:cNvPr id="6" name="flow-rule"/>
+          <p:cNvSpPr/>
+          <p:nvPr/>
+        </p:nvSpPr>
+        <p:spPr>
+          <a:xfrm>
+            <a:off x="2743200" y="2606040"/>
+            <a:ext cx="2194560" cy="1463040"/>
+          </a:xfrm>
+          <a:prstGeom prst="roundRect">
+            <a:avLst>
+              <a:gd name="adj" fmla="val 5000"/>
+            </a:avLst>
+          </a:prstGeom>
+          <a:solidFill>
+            <a:schemeClr val="tx1"/>
+          </a:solidFill>
+          <a:ln w="12700">
+            <a:solidFill>
+              <a:schemeClr val="tx1"/>
+            </a:solidFill>
+            <a:prstDash val="solid"/>
+          </a:ln>
+        </p:spPr>
+      </p:sp>
+      <p:sp>
+        <p:nvSpPr>
+          <p:cNvPr id="7" name="Text 5"/>
+          <p:cNvSpPr txBox="1"/>
+          <p:nvPr/>
+        </p:nvSpPr>
+        <p:spPr>
+          <a:xfrm>
+            <a:off x="2743200" y="2606040"/>
+            <a:ext cx="2194560" cy="1463040"/>
+          </a:xfrm>
+          <a:prstGeom prst="rect">
+            <a:avLst/>
+          </a:prstGeom>
+          <a:noFill/>
+          <a:ln/>
+        </p:spPr>
+        <p:txBody>
+          <a:bodyPr wrap="square" lIns="0" tIns="0" rIns="0" bIns="0" rtlCol="0" anchor="ctr"/>
+          <a:lstStyle/>
+          <a:p>
+            <a:pPr algn="ctr" indent="0" marL="0">
+              <a:buNone/>
+            </a:pPr>
+            <a:r>
+              <a:rPr lang="en-US" sz="1600" b="1" dirty="0">
+                <a:solidFill>
+                  <a:schemeClr val="bg1"/>
+                </a:solidFill>
+              </a:rPr>
+              <a:t>規則</a:t>
+            </a:r>
+            <a:endParaRPr lang="en-US" sz="1500" dirty="0"/>
+          </a:p>
+          <a:p>
+            <a:pPr algn="ctr" indent="0" marL="0">
+              <a:buNone/>
+            </a:pPr>
+            <a:r>
+              <a:rPr lang="en-US" sz="1200" dirty="0">
+                <a:solidFill>
+                  <a:schemeClr val="bg1"/>
+                </a:solidFill>
+              </a:rPr>
+              <a:t>t 日收盤在近 6 天</a:t>
+            </a:r>
+            <a:endParaRPr lang="en-US" sz="1500" dirty="0"/>
+          </a:p>
+          <a:p>
+            <a:pPr algn="ctr" indent="0" marL="0">
+              <a:buNone/>
+            </a:pPr>
+            <a:r>
+              <a:rPr lang="en-US" sz="1200" dirty="0">
+                <a:solidFill>
+                  <a:schemeClr val="bg1"/>
+                </a:solidFill>
+              </a:rPr>
+              <a:t>(t-5 ~ t)是…</a:t>
+            </a:r>
+            <a:endParaRPr lang="en-US" sz="1500" dirty="0"/>
+          </a:p>
+        </p:txBody>
+      </p:sp>
+      <p:sp>
+        <p:nvSpPr>
+          <p:cNvPr id="8" name="flow-a2"/>
+          <p:cNvSpPr/>
+          <p:nvPr/>
+        </p:nvSpPr>
+        <p:spPr>
+          <a:xfrm>
+            <a:off x="4937760" y="3337560"/>
+            <a:ext cx="274320" cy="0"/>
+          </a:xfrm>
+          <a:prstGeom prst="line">
+            <a:avLst/>
+          </a:prstGeom>
+          <a:noFill/>
+          <a:ln w="15875">
+            <a:solidFill>
+              <a:srgbClr val="7A8691"/>
+            </a:solidFill>
+            <a:prstDash val="solid"/>
+          </a:ln>
+        </p:spPr>
+      </p:sp>
+      <p:sp>
+        <p:nvSpPr>
+          <p:cNvPr id="9" name="flow-trunk"/>
+          <p:cNvSpPr/>
+          <p:nvPr/>
+        </p:nvSpPr>
+        <p:spPr>
+          <a:xfrm>
+            <a:off x="5212080" y="1737360"/>
+            <a:ext cx="0" cy="3200400"/>
+          </a:xfrm>
+          <a:prstGeom prst="line">
+            <a:avLst/>
+          </a:prstGeom>
+          <a:noFill/>
+          <a:ln w="15875">
+            <a:solidFill>
+              <a:srgbClr val="7A8691"/>
+            </a:solidFill>
+            <a:prstDash val="solid"/>
+          </a:ln>
+        </p:spPr>
+      </p:sp>
+      <p:sp>
+        <p:nvSpPr>
+          <p:cNvPr id="10" name="flow-b0"/>
+          <p:cNvSpPr/>
+          <p:nvPr/>
+        </p:nvSpPr>
+        <p:spPr>
+          <a:xfrm>
+            <a:off x="5212080" y="1737360"/>
+            <a:ext cx="274320" cy="0"/>
+          </a:xfrm>
+          <a:prstGeom prst="line">
+            <a:avLst/>
+          </a:prstGeom>
+          <a:noFill/>
+          <a:ln w="15875">
+            <a:solidFill>
+              <a:srgbClr val="7A8691"/>
+            </a:solidFill>
+            <a:prstDash val="solid"/>
+            <a:tailEnd type="triangle"/>
+          </a:ln>
+        </p:spPr>
+      </p:sp>
+      <p:sp>
+        <p:nvSpPr>
+          <p:cNvPr id="11" name="flow-b1"/>
+          <p:cNvSpPr/>
+          <p:nvPr/>
+        </p:nvSpPr>
+        <p:spPr>
+          <a:xfrm>
+            <a:off x="5212080" y="3337560"/>
+            <a:ext cx="274320" cy="0"/>
+          </a:xfrm>
+          <a:prstGeom prst="line">
+            <a:avLst/>
+          </a:prstGeom>
+          <a:noFill/>
+          <a:ln w="15875">
+            <a:solidFill>
+              <a:srgbClr val="7A8691"/>
+            </a:solidFill>
+            <a:prstDash val="solid"/>
+            <a:tailEnd type="triangle"/>
+          </a:ln>
+        </p:spPr>
+      </p:sp>
+      <p:sp>
+        <p:nvSpPr>
+          <p:cNvPr id="12" name="flow-b2"/>
+          <p:cNvSpPr/>
+          <p:nvPr/>
+        </p:nvSpPr>
+        <p:spPr>
+          <a:xfrm>
+            <a:off x="5212080" y="4937760"/>
+            <a:ext cx="274320" cy="0"/>
+          </a:xfrm>
+          <a:prstGeom prst="line">
+            <a:avLst/>
+          </a:prstGeom>
+          <a:noFill/>
+          <a:ln w="15875">
+            <a:solidFill>
+              <a:srgbClr val="7A8691"/>
+            </a:solidFill>
+            <a:prstDash val="solid"/>
+            <a:tailEnd type="triangle"/>
+          </a:ln>
+        </p:spPr>
+      </p:sp>
+      <p:sp>
+        <p:nvSpPr>
+          <p:cNvPr id="13" name="cand-high"/>
+          <p:cNvSpPr/>
+          <p:nvPr/>
+        </p:nvSpPr>
+        <p:spPr>
+          <a:xfrm>
+            <a:off x="5486400" y="1280160"/>
+            <a:ext cx="2011680" cy="914400"/>
+          </a:xfrm>
+          <a:prstGeom prst="roundRect">
+            <a:avLst>
+              <a:gd name="adj" fmla="val 8000"/>
+            </a:avLst>
+          </a:prstGeom>
+          <a:solidFill>
+            <a:schemeClr val="bg2"/>
+          </a:solidFill>
+          <a:ln w="12700">
+            <a:solidFill>
+              <a:schemeClr val="bg2"/>
+            </a:solidFill>
+            <a:prstDash val="solid"/>
+          </a:ln>
+        </p:spPr>
+      </p:sp>
+      <p:sp>
+        <p:nvSpPr>
+          <p:cNvPr id="14" name="Text 12"/>
+          <p:cNvSpPr txBox="1"/>
+          <p:nvPr/>
+        </p:nvSpPr>
+        <p:spPr>
+          <a:xfrm>
+            <a:off x="5486400" y="1280160"/>
+            <a:ext cx="2011680" cy="914400"/>
+          </a:xfrm>
+          <a:prstGeom prst="rect">
+            <a:avLst/>
+          </a:prstGeom>
+          <a:noFill/>
+          <a:ln/>
+        </p:spPr>
+        <p:txBody>
+          <a:bodyPr wrap="square" lIns="0" tIns="0" rIns="0" bIns="0" rtlCol="0" anchor="ctr"/>
+          <a:lstStyle/>
+          <a:p>
+            <a:pPr algn="ctr" indent="0" marL="0">
+              <a:buNone/>
+            </a:pPr>
+            <a:r>
+              <a:rPr lang="en-US" sz="1400" b="1" dirty="0">
+                <a:solidFill>
+                  <a:schemeClr val="accent1"/>
+                </a:solidFill>
+              </a:rPr>
+              <a:t>最高 → 高點候選</a:t>
+            </a:r>
+            <a:endParaRPr lang="en-US" sz="1500" dirty="0"/>
+          </a:p>
+          <a:p>
+            <a:pPr algn="ctr" indent="0" marL="0">
+              <a:buNone/>
+            </a:pPr>
+            <a:r>
+              <a:rPr lang="en-US" sz="1200" dirty="0">
+                <a:solidFill>
+                  <a:schemeClr val="tx2"/>
+                </a:solidFill>
+              </a:rPr>
+              <a:t>3,217 天</a:t>
+            </a:r>
+            <a:endParaRPr lang="en-US" sz="1500" dirty="0"/>
+          </a:p>
+        </p:txBody>
+      </p:sp>
+      <p:sp>
+        <p:nvSpPr>
+          <p:cNvPr id="15" name="cand-none"/>
+          <p:cNvSpPr/>
+          <p:nvPr/>
+        </p:nvSpPr>
+        <p:spPr>
+          <a:xfrm>
+            <a:off x="5486400" y="2880360"/>
+            <a:ext cx="2011680" cy="914400"/>
+          </a:xfrm>
+          <a:prstGeom prst="roundRect">
+            <a:avLst>
+              <a:gd name="adj" fmla="val 8000"/>
+            </a:avLst>
+          </a:prstGeom>
+          <a:solidFill>
+            <a:schemeClr val="bg2"/>
+          </a:solidFill>
+          <a:ln w="12700">
+            <a:solidFill>
+              <a:schemeClr val="bg2"/>
+            </a:solidFill>
+            <a:prstDash val="solid"/>
+          </a:ln>
+        </p:spPr>
+      </p:sp>
+      <p:sp>
+        <p:nvSpPr>
+          <p:cNvPr id="16" name="Text 14"/>
+          <p:cNvSpPr txBox="1"/>
+          <p:nvPr/>
+        </p:nvSpPr>
+        <p:spPr>
+          <a:xfrm>
+            <a:off x="5486400" y="2880360"/>
+            <a:ext cx="2011680" cy="914400"/>
+          </a:xfrm>
+          <a:prstGeom prst="rect">
+            <a:avLst/>
+          </a:prstGeom>
+          <a:noFill/>
+          <a:ln/>
+        </p:spPr>
+        <p:txBody>
+          <a:bodyPr wrap="square" lIns="0" tIns="0" rIns="0" bIns="0" rtlCol="0" anchor="ctr"/>
+          <a:lstStyle/>
+          <a:p>
+            <a:pPr algn="ctr" indent="0" marL="0">
+              <a:buNone/>
+            </a:pPr>
+            <a:r>
+              <a:rPr lang="en-US" sz="1400" b="1" dirty="0">
+                <a:solidFill>
+                  <a:schemeClr val="tx1"/>
+                </a:solidFill>
+              </a:rPr>
+              <a:t>都不是</a:t>
+            </a:r>
+            <a:endParaRPr lang="en-US" sz="1500" dirty="0"/>
+          </a:p>
+          <a:p>
+            <a:pPr algn="ctr" indent="0" marL="0">
+              <a:buNone/>
+            </a:pPr>
+            <a:r>
+              <a:rPr lang="en-US" sz="1200" dirty="0">
+                <a:solidFill>
+                  <a:schemeClr val="tx2"/>
+                </a:solidFill>
+              </a:rPr>
+              <a:t>5,865 天</a:t>
+            </a:r>
+            <a:endParaRPr lang="en-US" sz="1500" dirty="0"/>
+          </a:p>
+        </p:txBody>
+      </p:sp>
+      <p:sp>
+        <p:nvSpPr>
+          <p:cNvPr id="17" name="cand-low"/>
+          <p:cNvSpPr/>
+          <p:nvPr/>
+        </p:nvSpPr>
+        <p:spPr>
+          <a:xfrm>
+            <a:off x="5486400" y="4480560"/>
+            <a:ext cx="2011680" cy="914400"/>
+          </a:xfrm>
+          <a:prstGeom prst="roundRect">
+            <a:avLst>
+              <a:gd name="adj" fmla="val 8000"/>
+            </a:avLst>
+          </a:prstGeom>
+          <a:solidFill>
+            <a:schemeClr val="bg2"/>
+          </a:solidFill>
+          <a:ln w="12700">
+            <a:solidFill>
+              <a:schemeClr val="bg2"/>
+            </a:solidFill>
+            <a:prstDash val="solid"/>
+          </a:ln>
+        </p:spPr>
+      </p:sp>
+      <p:sp>
+        <p:nvSpPr>
+          <p:cNvPr id="18" name="Text 16"/>
+          <p:cNvSpPr txBox="1"/>
+          <p:nvPr/>
+        </p:nvSpPr>
+        <p:spPr>
+          <a:xfrm>
+            <a:off x="5486400" y="4480560"/>
+            <a:ext cx="2011680" cy="914400"/>
+          </a:xfrm>
+          <a:prstGeom prst="rect">
+            <a:avLst/>
+          </a:prstGeom>
+          <a:noFill/>
+          <a:ln/>
+        </p:spPr>
+        <p:txBody>
+          <a:bodyPr wrap="square" lIns="0" tIns="0" rIns="0" bIns="0" rtlCol="0" anchor="ctr"/>
+          <a:lstStyle/>
+          <a:p>
+            <a:pPr algn="ctr" indent="0" marL="0">
+              <a:buNone/>
+            </a:pPr>
+            <a:r>
+              <a:rPr lang="en-US" sz="1400" b="1" dirty="0">
+                <a:solidFill>
+                  <a:schemeClr val="accent2"/>
+                </a:solidFill>
+              </a:rPr>
+              <a:t>最低 → 低點候選</a:t>
+            </a:r>
+            <a:endParaRPr lang="en-US" sz="1500" dirty="0"/>
+          </a:p>
+          <a:p>
+            <a:pPr algn="ctr" indent="0" marL="0">
+              <a:buNone/>
+            </a:pPr>
+            <a:r>
+              <a:rPr lang="en-US" sz="1200" dirty="0">
+                <a:solidFill>
+                  <a:schemeClr val="tx2"/>
+                </a:solidFill>
+              </a:rPr>
+              <a:t>3,016 天</a:t>
+            </a:r>
+            <a:endParaRPr lang="en-US" sz="1500" dirty="0"/>
+          </a:p>
+        </p:txBody>
+      </p:sp>
+      <p:sp>
+        <p:nvSpPr>
+          <p:cNvPr id="19" name="flow-c1"/>
+          <p:cNvSpPr/>
+          <p:nvPr/>
+        </p:nvSpPr>
+        <p:spPr>
+          <a:xfrm>
+            <a:off x="7498080" y="1737360"/>
+            <a:ext cx="365760" cy="0"/>
+          </a:xfrm>
+          <a:prstGeom prst="line">
+            <a:avLst/>
+          </a:prstGeom>
+          <a:noFill/>
+          <a:ln w="15875">
+            <a:solidFill>
+              <a:srgbClr val="7A8691"/>
+            </a:solidFill>
+            <a:prstDash val="solid"/>
+            <a:tailEnd type="triangle"/>
+          </a:ln>
+        </p:spPr>
+      </p:sp>
+      <p:sp>
+        <p:nvSpPr>
+          <p:cNvPr id="20" name="flow-c3"/>
+          <p:cNvSpPr/>
+          <p:nvPr/>
+        </p:nvSpPr>
+        <p:spPr>
+          <a:xfrm>
+            <a:off x="7498080" y="4937760"/>
+            <a:ext cx="365760" cy="0"/>
+          </a:xfrm>
+          <a:prstGeom prst="line">
+            <a:avLst/>
+          </a:prstGeom>
+          <a:noFill/>
+          <a:ln w="15875">
+            <a:solidFill>
+              <a:srgbClr val="7A8691"/>
+            </a:solidFill>
+            <a:prstDash val="solid"/>
+            <a:tailEnd type="triangle"/>
+          </a:ln>
+        </p:spPr>
+      </p:sp>
+      <p:sp>
+        <p:nvSpPr>
+          <p:cNvPr id="21" name="ocsvm-high"/>
+          <p:cNvSpPr/>
+          <p:nvPr/>
+        </p:nvSpPr>
+        <p:spPr>
+          <a:xfrm>
+            <a:off x="7863840" y="1280160"/>
+            <a:ext cx="1737360" cy="914400"/>
+          </a:xfrm>
+          <a:prstGeom prst="roundRect">
+            <a:avLst>
+              <a:gd name="adj" fmla="val 8000"/>
+            </a:avLst>
+          </a:prstGeom>
+          <a:solidFill>
+            <a:schemeClr val="tx1"/>
+          </a:solidFill>
+          <a:ln w="12700">
+            <a:solidFill>
+              <a:schemeClr val="tx1"/>
+            </a:solidFill>
+            <a:prstDash val="solid"/>
+          </a:ln>
+        </p:spPr>
+      </p:sp>
+      <p:sp>
+        <p:nvSpPr>
+          <p:cNvPr id="22" name="Text 20"/>
+          <p:cNvSpPr txBox="1"/>
+          <p:nvPr/>
+        </p:nvSpPr>
+        <p:spPr>
+          <a:xfrm>
+            <a:off x="7863840" y="1280160"/>
+            <a:ext cx="1737360" cy="914400"/>
+          </a:xfrm>
+          <a:prstGeom prst="rect">
+            <a:avLst/>
+          </a:prstGeom>
+          <a:noFill/>
+          <a:ln/>
+        </p:spPr>
+        <p:txBody>
+          <a:bodyPr wrap="square" lIns="0" tIns="0" rIns="0" bIns="0" rtlCol="0" anchor="ctr"/>
+          <a:lstStyle/>
+          <a:p>
+            <a:pPr algn="ctr" indent="0" marL="0">
+              <a:buNone/>
+            </a:pPr>
+            <a:r>
+              <a:rPr lang="en-US" sz="1400" b="1" dirty="0">
+                <a:solidFill>
+                  <a:schemeClr val="bg1"/>
+                </a:solidFill>
+              </a:rPr>
+              <a:t>高點 OC-SVM</a:t>
+            </a:r>
+            <a:endParaRPr lang="en-US" sz="1500" dirty="0"/>
+          </a:p>
+          <a:p>
+            <a:pPr algn="ctr" indent="0" marL="0">
+              <a:buNone/>
+            </a:pPr>
+            <a:r>
+              <a:rPr lang="en-US" sz="1100" dirty="0">
+                <a:solidFill>
+                  <a:schemeClr val="bg1"/>
+                </a:solidFill>
+              </a:rPr>
+              <a:t>只學過真高點</a:t>
+            </a:r>
+            <a:endParaRPr lang="en-US" sz="1500" dirty="0"/>
+          </a:p>
+        </p:txBody>
+      </p:sp>
+      <p:sp>
+        <p:nvSpPr>
+          <p:cNvPr id="23" name="ocsvm-low"/>
+          <p:cNvSpPr/>
+          <p:nvPr/>
+        </p:nvSpPr>
+        <p:spPr>
+          <a:xfrm>
+            <a:off x="7863840" y="4480560"/>
+            <a:ext cx="1737360" cy="914400"/>
+          </a:xfrm>
+          <a:prstGeom prst="roundRect">
+            <a:avLst>
+              <a:gd name="adj" fmla="val 8000"/>
+            </a:avLst>
+          </a:prstGeom>
+          <a:solidFill>
+            <a:schemeClr val="tx1"/>
+          </a:solidFill>
+          <a:ln w="12700">
+            <a:solidFill>
+              <a:schemeClr val="tx1"/>
+            </a:solidFill>
+            <a:prstDash val="solid"/>
+          </a:ln>
+        </p:spPr>
+      </p:sp>
+      <p:sp>
+        <p:nvSpPr>
+          <p:cNvPr id="24" name="Text 22"/>
+          <p:cNvSpPr txBox="1"/>
+          <p:nvPr/>
+        </p:nvSpPr>
+        <p:spPr>
+          <a:xfrm>
+            <a:off x="7863840" y="4480560"/>
+            <a:ext cx="1737360" cy="914400"/>
+          </a:xfrm>
+          <a:prstGeom prst="rect">
+            <a:avLst/>
+          </a:prstGeom>
+          <a:noFill/>
+          <a:ln/>
+        </p:spPr>
+        <p:txBody>
+          <a:bodyPr wrap="square" lIns="0" tIns="0" rIns="0" bIns="0" rtlCol="0" anchor="ctr"/>
+          <a:lstStyle/>
+          <a:p>
+            <a:pPr algn="ctr" indent="0" marL="0">
+              <a:buNone/>
+            </a:pPr>
+            <a:r>
+              <a:rPr lang="en-US" sz="1400" b="1" dirty="0">
+                <a:solidFill>
+                  <a:schemeClr val="bg1"/>
+                </a:solidFill>
+              </a:rPr>
+              <a:t>低點 OC-SVM</a:t>
+            </a:r>
+            <a:endParaRPr lang="en-US" sz="1500" dirty="0"/>
+          </a:p>
+          <a:p>
+            <a:pPr algn="ctr" indent="0" marL="0">
+              <a:buNone/>
+            </a:pPr>
+            <a:r>
+              <a:rPr lang="en-US" sz="1100" dirty="0">
+                <a:solidFill>
+                  <a:schemeClr val="bg1"/>
+                </a:solidFill>
+              </a:rPr>
+              <a:t>只學過真低點</a:t>
+            </a:r>
+            <a:endParaRPr lang="en-US" sz="1500" dirty="0"/>
+          </a:p>
+        </p:txBody>
+      </p:sp>
+      <p:sp>
+        <p:nvSpPr>
+          <p:cNvPr id="25" name="flow-c2"/>
+          <p:cNvSpPr/>
+          <p:nvPr/>
+        </p:nvSpPr>
+        <p:spPr>
+          <a:xfrm>
+            <a:off x="7498080" y="3337560"/>
+            <a:ext cx="2423160" cy="0"/>
+          </a:xfrm>
+          <a:prstGeom prst="line">
+            <a:avLst/>
+          </a:prstGeom>
+          <a:noFill/>
+          <a:ln w="15875">
+            <a:solidFill>
+              <a:srgbClr val="7A8691"/>
+            </a:solidFill>
+            <a:prstDash val="solid"/>
+            <a:tailEnd type="triangle"/>
+          </a:ln>
+        </p:spPr>
+      </p:sp>
+      <p:sp>
+        <p:nvSpPr>
+          <p:cNvPr id="26" name="Text 24"/>
+          <p:cNvSpPr txBox="1"/>
+          <p:nvPr/>
+        </p:nvSpPr>
+        <p:spPr>
+          <a:xfrm>
+            <a:off x="7863840" y="2971800"/>
+            <a:ext cx="1737360" cy="274320"/>
+          </a:xfrm>
+          <a:prstGeom prst="rect">
+            <a:avLst/>
+          </a:prstGeom>
+          <a:noFill/>
+          <a:ln/>
+        </p:spPr>
+        <p:txBody>
+          <a:bodyPr wrap="square" lIns="0" tIns="0" rIns="0" bIns="0" rtlCol="0" anchor="t"/>
+          <a:lstStyle/>
+          <a:p>
+            <a:pPr algn="ctr" indent="0" marL="0">
+              <a:buNone/>
+            </a:pPr>
+            <a:r>
+              <a:rPr lang="en-US" sz="1100" dirty="0">
+                <a:solidFill>
+                  <a:schemeClr val="accent5"/>
+                </a:solidFill>
+              </a:rPr>
+              <a:t>不經過模型</a:t>
+            </a:r>
+            <a:endParaRPr lang="en-US" sz="1100" dirty="0"/>
+          </a:p>
+        </p:txBody>
+      </p:sp>
+      <p:sp>
+        <p:nvSpPr>
+          <p:cNvPr id="27" name="fork-0"/>
+          <p:cNvSpPr/>
+          <p:nvPr/>
+        </p:nvSpPr>
+        <p:spPr>
+          <a:xfrm>
+            <a:off x="9601200" y="1737360"/>
+            <a:ext cx="109728" cy="0"/>
+          </a:xfrm>
+          <a:prstGeom prst="line">
+            <a:avLst/>
+          </a:prstGeom>
+          <a:noFill/>
+          <a:ln w="15875">
+            <a:solidFill>
+              <a:srgbClr val="7A8691"/>
+            </a:solidFill>
+            <a:prstDash val="solid"/>
+          </a:ln>
+        </p:spPr>
+      </p:sp>
+      <p:sp>
+        <p:nvSpPr>
+          <p:cNvPr id="28" name="fork-v-0"/>
+          <p:cNvSpPr/>
+          <p:nvPr/>
+        </p:nvSpPr>
+        <p:spPr>
+          <a:xfrm>
+            <a:off x="9710928" y="1463040"/>
+            <a:ext cx="0" cy="548640"/>
+          </a:xfrm>
+          <a:prstGeom prst="line">
+            <a:avLst/>
+          </a:prstGeom>
+          <a:noFill/>
+          <a:ln w="15875">
+            <a:solidFill>
+              <a:srgbClr val="7A8691"/>
+            </a:solidFill>
+            <a:prstDash val="solid"/>
+          </a:ln>
+        </p:spPr>
+      </p:sp>
+      <p:sp>
+        <p:nvSpPr>
+          <p:cNvPr id="29" name="fork-in-0"/>
+          <p:cNvSpPr/>
+          <p:nvPr/>
+        </p:nvSpPr>
+        <p:spPr>
+          <a:xfrm>
+            <a:off x="9710928" y="1463040"/>
+            <a:ext cx="210312" cy="0"/>
+          </a:xfrm>
+          <a:prstGeom prst="line">
+            <a:avLst/>
+          </a:prstGeom>
+          <a:noFill/>
+          <a:ln w="15875">
+            <a:solidFill>
+              <a:srgbClr val="7A8691"/>
+            </a:solidFill>
+            <a:prstDash val="solid"/>
+            <a:tailEnd type="triangle"/>
+          </a:ln>
+        </p:spPr>
+      </p:sp>
+      <p:sp>
+        <p:nvSpPr>
+          <p:cNvPr id="30" name="fork-out-0"/>
+          <p:cNvSpPr/>
+          <p:nvPr/>
+        </p:nvSpPr>
+        <p:spPr>
+          <a:xfrm>
+            <a:off x="9710928" y="2011680"/>
+            <a:ext cx="210312" cy="0"/>
+          </a:xfrm>
+          <a:prstGeom prst="line">
+            <a:avLst/>
+          </a:prstGeom>
+          <a:noFill/>
+          <a:ln w="15875">
+            <a:solidFill>
+              <a:srgbClr val="7A8691"/>
+            </a:solidFill>
+            <a:prstDash val="solid"/>
+            <a:tailEnd type="triangle"/>
+          </a:ln>
+        </p:spPr>
+      </p:sp>
+      <p:sp>
+        <p:nvSpPr>
+          <p:cNvPr id="31" name="out-in-0"/>
+          <p:cNvSpPr/>
+          <p:nvPr/>
+        </p:nvSpPr>
+        <p:spPr>
+          <a:xfrm>
+            <a:off x="9921240" y="1234440"/>
+            <a:ext cx="1719072" cy="457200"/>
+          </a:xfrm>
+          <a:prstGeom prst="roundRect">
+            <a:avLst>
+              <a:gd name="adj" fmla="val 12000"/>
+            </a:avLst>
+          </a:prstGeom>
+          <a:solidFill>
+            <a:schemeClr val="accent1"/>
+          </a:solidFill>
+          <a:ln w="12700">
+            <a:solidFill>
+              <a:schemeClr val="accent1"/>
+            </a:solidFill>
+            <a:prstDash val="solid"/>
+          </a:ln>
+        </p:spPr>
+      </p:sp>
+      <p:sp>
+        <p:nvSpPr>
+          <p:cNvPr id="32" name="Text 30"/>
+          <p:cNvSpPr txBox="1"/>
+          <p:nvPr/>
+        </p:nvSpPr>
+        <p:spPr>
+          <a:xfrm>
+            <a:off x="9921240" y="1234440"/>
+            <a:ext cx="1719072" cy="457200"/>
+          </a:xfrm>
+          <a:prstGeom prst="rect">
+            <a:avLst/>
+          </a:prstGeom>
+          <a:noFill/>
+          <a:ln/>
+        </p:spPr>
+        <p:txBody>
+          <a:bodyPr wrap="square" lIns="0" tIns="0" rIns="0" bIns="0" rtlCol="0" anchor="ctr"/>
+          <a:lstStyle/>
+          <a:p>
+            <a:pPr algn="ctr" indent="0" marL="0">
+              <a:buNone/>
+            </a:pPr>
+            <a:r>
+              <a:rPr lang="en-US" sz="1200" b="1" dirty="0">
+                <a:solidFill>
+                  <a:schemeClr val="bg1"/>
+                </a:solidFill>
+              </a:rPr>
+              <a:t>範圍內:高點 2,638</a:t>
+            </a:r>
+            <a:endParaRPr lang="en-US" sz="1200" dirty="0"/>
+          </a:p>
+        </p:txBody>
+      </p:sp>
+      <p:sp>
+        <p:nvSpPr>
+          <p:cNvPr id="33" name="out-out-0"/>
+          <p:cNvSpPr/>
+          <p:nvPr/>
+        </p:nvSpPr>
+        <p:spPr>
+          <a:xfrm>
+            <a:off x="9921240" y="1783080"/>
+            <a:ext cx="1719072" cy="457200"/>
+          </a:xfrm>
+          <a:prstGeom prst="roundRect">
+            <a:avLst>
+              <a:gd name="adj" fmla="val 12000"/>
+            </a:avLst>
+          </a:prstGeom>
+          <a:solidFill>
+            <a:schemeClr val="bg2"/>
+          </a:solidFill>
+          <a:ln w="12700">
+            <a:solidFill>
+              <a:schemeClr val="bg2"/>
+            </a:solidFill>
+            <a:prstDash val="solid"/>
+          </a:ln>
+        </p:spPr>
+      </p:sp>
+      <p:sp>
+        <p:nvSpPr>
+          <p:cNvPr id="34" name="Text 32"/>
+          <p:cNvSpPr txBox="1"/>
+          <p:nvPr/>
+        </p:nvSpPr>
+        <p:spPr>
+          <a:xfrm>
+            <a:off x="9921240" y="1783080"/>
+            <a:ext cx="1719072" cy="457200"/>
+          </a:xfrm>
+          <a:prstGeom prst="rect">
+            <a:avLst/>
+          </a:prstGeom>
+          <a:noFill/>
+          <a:ln/>
+        </p:spPr>
+        <p:txBody>
+          <a:bodyPr wrap="square" lIns="0" tIns="0" rIns="0" bIns="0" rtlCol="0" anchor="ctr"/>
+          <a:lstStyle/>
+          <a:p>
+            <a:pPr algn="ctr" indent="0" marL="0">
+              <a:buNone/>
+            </a:pPr>
+            <a:r>
+              <a:rPr lang="en-US" sz="1200" b="1" dirty="0">
+                <a:solidFill>
+                  <a:schemeClr val="tx1"/>
+                </a:solidFill>
+              </a:rPr>
+              <a:t>範圍外:非極值 579</a:t>
+            </a:r>
+            <a:endParaRPr lang="en-US" sz="1200" dirty="0"/>
+          </a:p>
+        </p:txBody>
+      </p:sp>
+      <p:sp>
+        <p:nvSpPr>
+          <p:cNvPr id="35" name="fork-1"/>
+          <p:cNvSpPr/>
+          <p:nvPr/>
+        </p:nvSpPr>
+        <p:spPr>
+          <a:xfrm>
+            <a:off x="9601200" y="4937760"/>
+            <a:ext cx="109728" cy="0"/>
+          </a:xfrm>
+          <a:prstGeom prst="line">
+            <a:avLst/>
+          </a:prstGeom>
+          <a:noFill/>
+          <a:ln w="15875">
+            <a:solidFill>
+              <a:srgbClr val="7A8691"/>
+            </a:solidFill>
+            <a:prstDash val="solid"/>
+          </a:ln>
+        </p:spPr>
+      </p:sp>
+      <p:sp>
+        <p:nvSpPr>
+          <p:cNvPr id="36" name="fork-v-1"/>
+          <p:cNvSpPr/>
+          <p:nvPr/>
+        </p:nvSpPr>
+        <p:spPr>
+          <a:xfrm>
+            <a:off x="9710928" y="4663440"/>
+            <a:ext cx="0" cy="548640"/>
+          </a:xfrm>
+          <a:prstGeom prst="line">
+            <a:avLst/>
+          </a:prstGeom>
+          <a:noFill/>
+          <a:ln w="15875">
+            <a:solidFill>
+              <a:srgbClr val="7A8691"/>
+            </a:solidFill>
+            <a:prstDash val="solid"/>
+          </a:ln>
+        </p:spPr>
+      </p:sp>
+      <p:sp>
+        <p:nvSpPr>
+          <p:cNvPr id="37" name="fork-in-1"/>
+          <p:cNvSpPr/>
+          <p:nvPr/>
+        </p:nvSpPr>
+        <p:spPr>
+          <a:xfrm>
+            <a:off x="9710928" y="4663440"/>
+            <a:ext cx="210312" cy="0"/>
+          </a:xfrm>
+          <a:prstGeom prst="line">
+            <a:avLst/>
+          </a:prstGeom>
+          <a:noFill/>
+          <a:ln w="15875">
+            <a:solidFill>
+              <a:srgbClr val="7A8691"/>
+            </a:solidFill>
+            <a:prstDash val="solid"/>
+            <a:tailEnd type="triangle"/>
+          </a:ln>
+        </p:spPr>
+      </p:sp>
+      <p:sp>
+        <p:nvSpPr>
+          <p:cNvPr id="38" name="fork-out-1"/>
+          <p:cNvSpPr/>
+          <p:nvPr/>
+        </p:nvSpPr>
+        <p:spPr>
+          <a:xfrm>
+            <a:off x="9710928" y="5212080"/>
+            <a:ext cx="210312" cy="0"/>
+          </a:xfrm>
+          <a:prstGeom prst="line">
+            <a:avLst/>
+          </a:prstGeom>
+          <a:noFill/>
+          <a:ln w="15875">
+            <a:solidFill>
+              <a:srgbClr val="7A8691"/>
+            </a:solidFill>
+            <a:prstDash val="solid"/>
+            <a:tailEnd type="triangle"/>
+          </a:ln>
+        </p:spPr>
+      </p:sp>
+      <p:sp>
+        <p:nvSpPr>
+          <p:cNvPr id="39" name="out-in-1"/>
+          <p:cNvSpPr/>
+          <p:nvPr/>
+        </p:nvSpPr>
+        <p:spPr>
+          <a:xfrm>
+            <a:off x="9921240" y="4434840"/>
+            <a:ext cx="1719072" cy="457200"/>
+          </a:xfrm>
+          <a:prstGeom prst="roundRect">
+            <a:avLst>
+              <a:gd name="adj" fmla="val 12000"/>
+            </a:avLst>
+          </a:prstGeom>
+          <a:solidFill>
+            <a:schemeClr val="accent2"/>
+          </a:solidFill>
+          <a:ln w="12700">
+            <a:solidFill>
+              <a:schemeClr val="accent2"/>
+            </a:solidFill>
+            <a:prstDash val="solid"/>
+          </a:ln>
+        </p:spPr>
+      </p:sp>
+      <p:sp>
+        <p:nvSpPr>
+          <p:cNvPr id="40" name="Text 38"/>
+          <p:cNvSpPr txBox="1"/>
+          <p:nvPr/>
+        </p:nvSpPr>
+        <p:spPr>
+          <a:xfrm>
+            <a:off x="9921240" y="4434840"/>
+            <a:ext cx="1719072" cy="457200"/>
+          </a:xfrm>
+          <a:prstGeom prst="rect">
+            <a:avLst/>
+          </a:prstGeom>
+          <a:noFill/>
+          <a:ln/>
+        </p:spPr>
+        <p:txBody>
+          <a:bodyPr wrap="square" lIns="0" tIns="0" rIns="0" bIns="0" rtlCol="0" anchor="ctr"/>
+          <a:lstStyle/>
+          <a:p>
+            <a:pPr algn="ctr" indent="0" marL="0">
+              <a:buNone/>
+            </a:pPr>
+            <a:r>
+              <a:rPr lang="en-US" sz="1200" b="1" dirty="0">
+                <a:solidFill>
+                  <a:schemeClr val="bg1"/>
+                </a:solidFill>
+              </a:rPr>
+              <a:t>範圍內:低點 2,591</a:t>
+            </a:r>
+            <a:endParaRPr lang="en-US" sz="1200" dirty="0"/>
+          </a:p>
+        </p:txBody>
+      </p:sp>
+      <p:sp>
+        <p:nvSpPr>
+          <p:cNvPr id="41" name="out-out-1"/>
+          <p:cNvSpPr/>
+          <p:nvPr/>
+        </p:nvSpPr>
+        <p:spPr>
+          <a:xfrm>
+            <a:off x="9921240" y="4983480"/>
+            <a:ext cx="1719072" cy="457200"/>
+          </a:xfrm>
+          <a:prstGeom prst="roundRect">
+            <a:avLst>
+              <a:gd name="adj" fmla="val 12000"/>
+            </a:avLst>
+          </a:prstGeom>
+          <a:solidFill>
+            <a:schemeClr val="bg2"/>
+          </a:solidFill>
+          <a:ln w="12700">
+            <a:solidFill>
+              <a:schemeClr val="bg2"/>
+            </a:solidFill>
+            <a:prstDash val="solid"/>
+          </a:ln>
+        </p:spPr>
+      </p:sp>
+      <p:sp>
+        <p:nvSpPr>
+          <p:cNvPr id="42" name="Text 40"/>
+          <p:cNvSpPr txBox="1"/>
+          <p:nvPr/>
+        </p:nvSpPr>
+        <p:spPr>
+          <a:xfrm>
+            <a:off x="9921240" y="4983480"/>
+            <a:ext cx="1719072" cy="457200"/>
+          </a:xfrm>
+          <a:prstGeom prst="rect">
+            <a:avLst/>
+          </a:prstGeom>
+          <a:noFill/>
+          <a:ln/>
+        </p:spPr>
+        <p:txBody>
+          <a:bodyPr wrap="square" lIns="0" tIns="0" rIns="0" bIns="0" rtlCol="0" anchor="ctr"/>
+          <a:lstStyle/>
+          <a:p>
+            <a:pPr algn="ctr" indent="0" marL="0">
+              <a:buNone/>
+            </a:pPr>
+            <a:r>
+              <a:rPr lang="en-US" sz="1200" b="1" dirty="0">
+                <a:solidFill>
+                  <a:schemeClr val="tx1"/>
+                </a:solidFill>
+              </a:rPr>
+              <a:t>範圍外:非極值 425</a:t>
+            </a:r>
+            <a:endParaRPr lang="en-US" sz="1200" dirty="0"/>
+          </a:p>
+        </p:txBody>
+      </p:sp>
+      <p:sp>
+        <p:nvSpPr>
+          <p:cNvPr id="43" name="out-none"/>
+          <p:cNvSpPr/>
+          <p:nvPr/>
+        </p:nvSpPr>
+        <p:spPr>
+          <a:xfrm>
+            <a:off x="9921240" y="3108960"/>
+            <a:ext cx="1719072" cy="457200"/>
+          </a:xfrm>
+          <a:prstGeom prst="roundRect">
+            <a:avLst>
+              <a:gd name="adj" fmla="val 12000"/>
+            </a:avLst>
+          </a:prstGeom>
+          <a:solidFill>
+            <a:schemeClr val="bg2"/>
+          </a:solidFill>
+          <a:ln w="12700">
+            <a:solidFill>
+              <a:schemeClr val="bg2"/>
+            </a:solidFill>
+            <a:prstDash val="solid"/>
+          </a:ln>
+        </p:spPr>
+      </p:sp>
+      <p:sp>
+        <p:nvSpPr>
+          <p:cNvPr id="44" name="Text 42"/>
+          <p:cNvSpPr txBox="1"/>
+          <p:nvPr/>
+        </p:nvSpPr>
+        <p:spPr>
+          <a:xfrm>
+            <a:off x="9921240" y="3108960"/>
+            <a:ext cx="1719072" cy="457200"/>
+          </a:xfrm>
+          <a:prstGeom prst="rect">
+            <a:avLst/>
+          </a:prstGeom>
+          <a:noFill/>
+          <a:ln/>
+        </p:spPr>
+        <p:txBody>
+          <a:bodyPr wrap="square" lIns="0" tIns="0" rIns="0" bIns="0" rtlCol="0" anchor="ctr"/>
+          <a:lstStyle/>
+          <a:p>
+            <a:pPr algn="ctr" indent="0" marL="0">
+              <a:buNone/>
+            </a:pPr>
+            <a:r>
+              <a:rPr lang="en-US" sz="1200" b="1" dirty="0">
+                <a:solidFill>
+                  <a:schemeClr val="tx1"/>
+                </a:solidFill>
+              </a:rPr>
+              <a:t>非極值 5,865</a:t>
+            </a:r>
+            <a:endParaRPr lang="en-US" sz="1200" dirty="0"/>
+          </a:p>
+        </p:txBody>
+      </p:sp>
+      <p:sp>
+        <p:nvSpPr>
+          <p:cNvPr id="45" name="Text 43"/>
+          <p:cNvSpPr txBox="1"/>
+          <p:nvPr/>
+        </p:nvSpPr>
+        <p:spPr>
+          <a:xfrm>
+            <a:off x="548640" y="5669280"/>
+            <a:ext cx="11064240" cy="502920"/>
+          </a:xfrm>
+          <a:prstGeom prst="rect">
+            <a:avLst/>
+          </a:prstGeom>
+          <a:noFill/>
+          <a:ln/>
+        </p:spPr>
+        <p:txBody>
+          <a:bodyPr wrap="square" lIns="0" tIns="0" rIns="0" bIns="0" rtlCol="0" anchor="ctr"/>
+          <a:lstStyle/>
+          <a:p>
+            <a:pPr indent="0" marL="0">
+              <a:buNone/>
+            </a:pPr>
+            <a:r>
+              <a:rPr lang="en-US" sz="1300" dirty="0">
+                <a:solidFill>
+                  <a:schemeClr val="tx2"/>
+                </a:solidFill>
+              </a:rPr>
+              <a:t>高點候選只會變成高點或非極值,低點候選只會變成低點或非極值,</a:t>
+            </a:r>
+            <a:pPr indent="0" marL="0">
+              <a:buNone/>
+            </a:pPr>
+            <a:r>
+              <a:rPr lang="en-US" sz="1300" b="1" dirty="0">
+                <a:solidFill>
+                  <a:schemeClr val="tx1"/>
+                </a:solidFill>
+              </a:rPr>
+              <a:t>所以高低點互相判錯 0 次是流程保證的。</a:t>
+            </a:r>
+            <a:pPr indent="0" marL="0">
+              <a:buNone/>
+            </a:pPr>
+            <a:r>
+              <a:rPr lang="en-US" sz="1300" dirty="0">
+                <a:solidFill>
+                  <a:schemeClr val="accent5"/>
+                </a:solidFill>
+              </a:rPr>
+              <a:t>數字為 2024 測試期 12,098 天(種子 42)。</a:t>
+            </a:r>
+            <a:endParaRPr lang="en-US" sz="1300" dirty="0"/>
+          </a:p>
+        </p:txBody>
+      </p:sp>
+      <p:sp>
+        <p:nvSpPr>
+          <p:cNvPr id="25" name="Slide Number Placeholder 0"/>
+          <p:cNvSpPr>
+            <a:spLocks noGrp="1"/>
+          </p:cNvSpPr>
+          <p:nvPr>
+            <p:ph type="sldNum" sz="quarter" idx="4294967295"/>
+          </p:nvPr>
+        </p:nvSpPr>
+        <p:spPr>
+          <a:xfrm>
+            <a:off x="11201400" y="6355080"/>
+            <a:ext cx="457200" cy="274320"/>
+          </a:xfrm>
+          <a:prstGeom prst="rect">
+            <a:avLst/>
+          </a:prstGeom>
+          <a:extLst>
+            <a:ext uri="{C572A759-6A51-4108-AA02-DFA0A04FC94B}">
+              <ma14:wrappingTextBoxFlag xmlns:ma14="http://schemas.microsoft.com/office/mac/drawingml/2011/main" val="0"/>
+            </a:ext>
+          </a:extLst>
+        </p:spPr>
+        <p:txBody>
+          <a:bodyPr/>
+          <a:lstStyle>
+            <a:lvl1pPr>
+              <a:defRPr sz="1000">
+                <a:solidFill>
+                  <a:srgbClr val="7A8691"/>
+                </a:solidFill>
+              </a:defRPr>
+            </a:lvl1pPr>
+          </a:lstStyle>
+          <a:p>
+            <a:pPr algn="r"/>
+            <a:fld id="{F7021451-1387-4CA6-816F-3879F97B5CBC}" type="slidenum">
+              <a:rPr b="0" lang="en-US"/>
+              <a:t>5</a:t>
+            </a:fld>
+            <a:endParaRPr lang="en-US"/>
+          </a:p>
+        </p:txBody>
+      </p:sp>
+    </p:spTree>
+  </p:cSld>
+  <p:clrMapOvr>
+    <a:masterClrMapping/>
+  </p:clrMapOvr>
+</p:sld>
+</file>
+
+<file path=ppt/slides/slide6.xml><?xml version="1.0" encoding="utf-8"?>
+<p:sld xmlns:a="http://schemas.openxmlformats.org/drawingml/2006/main" xmlns:r="http://schemas.openxmlformats.org/officeDocument/2006/relationships" xmlns:p="http://schemas.openxmlformats.org/presentationml/2006/main">
+  <p:cSld name="Slide 6">
+    <p:spTree>
+      <p:nvGrpSpPr>
+        <p:cNvPr id="1" name=""/>
+        <p:cNvGrpSpPr/>
+        <p:nvPr/>
+      </p:nvGrpSpPr>
+      <p:grpSpPr>
+        <a:xfrm>
+          <a:off x="0" y="0"/>
+          <a:ext cx="0" cy="0"/>
+          <a:chOff x="0" y="0"/>
+          <a:chExt cx="0" cy="0"/>
+        </a:xfrm>
+      </p:grpSpPr>
+      <p:sp>
+        <p:nvSpPr>
+          <p:cNvPr id="2" name="Text 11"/>
+          <p:cNvSpPr/>
+          <p:nvPr>
+            <p:ph idx="111" type="title" hasCustomPrompt="1"/>
+          </p:nvPr>
+        </p:nvSpPr>
+        <p:spPr>
+          <a:xfrm>
+            <a:off x="548640" y="320040"/>
+            <a:ext cx="9418320" cy="777240"/>
+          </a:xfrm>
+          <a:prstGeom prst="rect">
+            <a:avLst/>
+          </a:prstGeom>
+          <a:noFill/>
+          <a:ln/>
+        </p:spPr>
+        <p:txBody>
+          <a:bodyPr wrap="square" lIns="0" tIns="0" rIns="0" bIns="0" rtlCol="0" anchor="ctr"/>
+          <a:lstStyle/>
+          <a:p>
+            <a:pPr indent="0" marL="0">
+              <a:buNone/>
+            </a:pPr>
+            <a:r>
+              <a:rPr lang="en-US" sz="3200" b="1" dirty="0">
+                <a:solidFill>
+                  <a:schemeClr val="tx1"/>
+                </a:solidFill>
+              </a:rPr>
               <a:t>測試結果:真高低點幾乎都在模型的判斷裡</a:t>
             </a:r>
             <a:endParaRPr lang="en-US" sz="3200" dirty="0"/>
@@ -10316,7 +11746,7 @@
       </p:sp>
       <p:graphicFrame>
         <p:nvGraphicFramePr>
-          <p:cNvPr id="6" name="Table 0"/>
+          <p:cNvPr id="7" name="Table 0"/>
           <p:cNvGraphicFramePr>
             <a:graphicFrameLocks noGrp="1"/>
           </p:cNvGraphicFramePr>
@@ -11648,7 +13078,7 @@
       </p:sp>
       <p:graphicFrame>
         <p:nvGraphicFramePr>
-          <p:cNvPr id="11" name="Table 1"/>
+          <p:cNvPr id="13" name="Table 1"/>
           <p:cNvGraphicFramePr>
             <a:graphicFrameLocks noGrp="1"/>
           </p:cNvGraphicFramePr>
@@ -12830,427 +14260,6 @@
             <a:pPr algn="r"/>
             <a:fld id="{F7021451-1387-4CA6-816F-3879F97B5CBC}" type="slidenum">
               <a:rPr b="0" lang="en-US"/>
-              <a:t>5</a:t>
-            </a:fld>
-            <a:endParaRPr lang="en-US"/>
-          </a:p>
-        </p:txBody>
-      </p:sp>
-    </p:spTree>
-  </p:cSld>
-  <p:clrMapOvr>
-    <a:masterClrMapping/>
-  </p:clrMapOvr>
-</p:sld>
-</file>
-
-<file path=ppt/slides/slide6.xml><?xml version="1.0" encoding="utf-8"?>
-<p:sld xmlns:a="http://schemas.openxmlformats.org/drawingml/2006/main" xmlns:r="http://schemas.openxmlformats.org/officeDocument/2006/relationships" xmlns:p="http://schemas.openxmlformats.org/presentationml/2006/main">
-  <p:cSld name="Slide 6">
-    <p:spTree>
-      <p:nvGrpSpPr>
-        <p:cNvPr id="1" name=""/>
-        <p:cNvGrpSpPr/>
-        <p:nvPr/>
-      </p:nvGrpSpPr>
-      <p:grpSpPr>
-        <a:xfrm>
-          <a:off x="0" y="0"/>
-          <a:ext cx="0" cy="0"/>
-          <a:chOff x="0" y="0"/>
-          <a:chExt cx="0" cy="0"/>
-        </a:xfrm>
-      </p:grpSpPr>
-      <p:sp>
-        <p:nvSpPr>
-          <p:cNvPr id="2" name="Text 11"/>
-          <p:cNvSpPr/>
-          <p:nvPr>
-            <p:ph idx="111" type="title" hasCustomPrompt="1"/>
-          </p:nvPr>
-        </p:nvSpPr>
-        <p:spPr>
-          <a:xfrm>
-            <a:off x="548640" y="320040"/>
-            <a:ext cx="9418320" cy="777240"/>
-          </a:xfrm>
-          <a:prstGeom prst="rect">
-            <a:avLst/>
-          </a:prstGeom>
-          <a:noFill/>
-          <a:ln/>
-        </p:spPr>
-        <p:txBody>
-          <a:bodyPr wrap="square" lIns="0" tIns="0" rIns="0" bIns="0" rtlCol="0" anchor="ctr"/>
-          <a:lstStyle/>
-          <a:p>
-            <a:pPr indent="0" marL="0">
-              <a:buNone/>
-            </a:pPr>
-            <a:r>
-              <a:rPr lang="en-US" sz="3200" b="1" dirty="0">
-                <a:solidFill>
-                  <a:schemeClr val="tx1"/>
-                </a:solidFill>
-              </a:rPr>
-              <a:t>局部準確度:挑出的候選比亂猜準 3.7–3.9 倍</a:t>
-            </a:r>
-            <a:endParaRPr lang="en-US" sz="3200" dirty="0"/>
-          </a:p>
-        </p:txBody>
-      </p:sp>
-      <p:graphicFrame>
-        <p:nvGraphicFramePr>
-          <p:cNvPr id="3" name="precision-chart" descr=""/>
-          <p:cNvGraphicFramePr/>
-          <p:nvPr/>
-        </p:nvGraphicFramePr>
-        <p:xfrm>
-          <a:off x="548640" y="1371600"/>
-          <a:ext cx="6583680" cy="4389120"/>
-        </p:xfrm>
-        <a:graphic xmlns:a="http://schemas.openxmlformats.org/drawingml/2006/main">
-          <a:graphicData uri="http://schemas.openxmlformats.org/drawingml/2006/chart">
-            <c:chart xmlns:c="http://schemas.openxmlformats.org/drawingml/2006/chart" r:id="rId1"/>
-          </a:graphicData>
-        </a:graphic>
-      </p:graphicFrame>
-      <p:sp>
-        <p:nvSpPr>
-          <p:cNvPr id="4" name="loc-0"/>
-          <p:cNvSpPr/>
-          <p:nvPr/>
-        </p:nvSpPr>
-        <p:spPr>
-          <a:xfrm>
-            <a:off x="7498080" y="1463040"/>
-            <a:ext cx="4114800" cy="1280160"/>
-          </a:xfrm>
-          <a:prstGeom prst="roundRect">
-            <a:avLst>
-              <a:gd name="adj" fmla="val 5714"/>
-            </a:avLst>
-          </a:prstGeom>
-          <a:solidFill>
-            <a:schemeClr val="bg2"/>
-          </a:solidFill>
-          <a:ln w="12700">
-            <a:solidFill>
-              <a:schemeClr val="bg2"/>
-            </a:solidFill>
-            <a:prstDash val="solid"/>
-          </a:ln>
-        </p:spPr>
-      </p:sp>
-      <p:sp>
-        <p:nvSpPr>
-          <p:cNvPr id="5" name="Text 2"/>
-          <p:cNvSpPr txBox="1"/>
-          <p:nvPr/>
-        </p:nvSpPr>
-        <p:spPr>
-          <a:xfrm>
-            <a:off x="7726680" y="1600200"/>
-            <a:ext cx="3749040" cy="594360"/>
-          </a:xfrm>
-          <a:prstGeom prst="rect">
-            <a:avLst/>
-          </a:prstGeom>
-          <a:noFill/>
-          <a:ln/>
-        </p:spPr>
-        <p:txBody>
-          <a:bodyPr wrap="square" lIns="0" tIns="0" rIns="0" bIns="0" rtlCol="0" anchor="t"/>
-          <a:lstStyle/>
-          <a:p>
-            <a:pPr indent="0" marL="0">
-              <a:buNone/>
-            </a:pPr>
-            <a:r>
-              <a:rPr lang="en-US" sz="2800" b="1" dirty="0">
-                <a:solidFill>
-                  <a:schemeClr val="accent1"/>
-                </a:solidFill>
-              </a:rPr>
-              <a:t>99.9% / 100%</a:t>
-            </a:r>
-            <a:endParaRPr lang="en-US" sz="2800" dirty="0"/>
-          </a:p>
-        </p:txBody>
-      </p:sp>
-      <p:sp>
-        <p:nvSpPr>
-          <p:cNvPr id="6" name="Text 3"/>
-          <p:cNvSpPr txBox="1"/>
-          <p:nvPr/>
-        </p:nvSpPr>
-        <p:spPr>
-          <a:xfrm>
-            <a:off x="7726680" y="2212848"/>
-            <a:ext cx="3749040" cy="411480"/>
-          </a:xfrm>
-          <a:prstGeom prst="rect">
-            <a:avLst/>
-          </a:prstGeom>
-          <a:noFill/>
-          <a:ln/>
-        </p:spPr>
-        <p:txBody>
-          <a:bodyPr wrap="square" lIns="0" tIns="0" rIns="0" bIns="0" rtlCol="0" anchor="t"/>
-          <a:lstStyle/>
-          <a:p>
-            <a:pPr indent="0" marL="0">
-              <a:buNone/>
-            </a:pPr>
-            <a:r>
-              <a:rPr lang="en-US" sz="1300" dirty="0">
-                <a:solidFill>
-                  <a:schemeClr val="tx2"/>
-                </a:solidFill>
-              </a:rPr>
-              <a:t>規則找到的真高點 / 真低點</a:t>
-            </a:r>
-            <a:endParaRPr lang="en-US" sz="1300" dirty="0"/>
-          </a:p>
-        </p:txBody>
-      </p:sp>
-      <p:sp>
-        <p:nvSpPr>
-          <p:cNvPr id="7" name="loc-1"/>
-          <p:cNvSpPr/>
-          <p:nvPr/>
-        </p:nvSpPr>
-        <p:spPr>
-          <a:xfrm>
-            <a:off x="7498080" y="2926080"/>
-            <a:ext cx="4114800" cy="1280160"/>
-          </a:xfrm>
-          <a:prstGeom prst="roundRect">
-            <a:avLst>
-              <a:gd name="adj" fmla="val 5714"/>
-            </a:avLst>
-          </a:prstGeom>
-          <a:solidFill>
-            <a:schemeClr val="bg2"/>
-          </a:solidFill>
-          <a:ln w="12700">
-            <a:solidFill>
-              <a:schemeClr val="bg2"/>
-            </a:solidFill>
-            <a:prstDash val="solid"/>
-          </a:ln>
-        </p:spPr>
-      </p:sp>
-      <p:sp>
-        <p:nvSpPr>
-          <p:cNvPr id="8" name="Text 5"/>
-          <p:cNvSpPr txBox="1"/>
-          <p:nvPr/>
-        </p:nvSpPr>
-        <p:spPr>
-          <a:xfrm>
-            <a:off x="7726680" y="3063240"/>
-            <a:ext cx="3749040" cy="594360"/>
-          </a:xfrm>
-          <a:prstGeom prst="rect">
-            <a:avLst/>
-          </a:prstGeom>
-          <a:noFill/>
-          <a:ln/>
-        </p:spPr>
-        <p:txBody>
-          <a:bodyPr wrap="square" lIns="0" tIns="0" rIns="0" bIns="0" rtlCol="0" anchor="t"/>
-          <a:lstStyle/>
-          <a:p>
-            <a:pPr indent="0" marL="0">
-              <a:buNone/>
-            </a:pPr>
-            <a:r>
-              <a:rPr lang="en-US" sz="2800" b="1" dirty="0">
-                <a:solidFill>
-                  <a:schemeClr val="accent2"/>
-                </a:solidFill>
-              </a:rPr>
-              <a:t>81.6% / 84.4%</a:t>
-            </a:r>
-            <a:endParaRPr lang="en-US" sz="2800" dirty="0"/>
-          </a:p>
-        </p:txBody>
-      </p:sp>
-      <p:sp>
-        <p:nvSpPr>
-          <p:cNvPr id="9" name="Text 6"/>
-          <p:cNvSpPr txBox="1"/>
-          <p:nvPr/>
-        </p:nvSpPr>
-        <p:spPr>
-          <a:xfrm>
-            <a:off x="7726680" y="3675888"/>
-            <a:ext cx="3749040" cy="411480"/>
-          </a:xfrm>
-          <a:prstGeom prst="rect">
-            <a:avLst/>
-          </a:prstGeom>
-          <a:noFill/>
-          <a:ln/>
-        </p:spPr>
-        <p:txBody>
-          <a:bodyPr wrap="square" lIns="0" tIns="0" rIns="0" bIns="0" rtlCol="0" anchor="t"/>
-          <a:lstStyle/>
-          <a:p>
-            <a:pPr indent="0" marL="0">
-              <a:buNone/>
-            </a:pPr>
-            <a:r>
-              <a:rPr lang="en-US" sz="1300" dirty="0">
-                <a:solidFill>
-                  <a:schemeClr val="tx2"/>
-                </a:solidFill>
-              </a:rPr>
-              <a:t>模型判對的真高點 / 真低點</a:t>
-            </a:r>
-            <a:endParaRPr lang="en-US" sz="1300" dirty="0"/>
-          </a:p>
-        </p:txBody>
-      </p:sp>
-      <p:sp>
-        <p:nvSpPr>
-          <p:cNvPr id="10" name="loc-2"/>
-          <p:cNvSpPr/>
-          <p:nvPr/>
-        </p:nvSpPr>
-        <p:spPr>
-          <a:xfrm>
-            <a:off x="7498080" y="4389120"/>
-            <a:ext cx="4114800" cy="1280160"/>
-          </a:xfrm>
-          <a:prstGeom prst="roundRect">
-            <a:avLst>
-              <a:gd name="adj" fmla="val 5714"/>
-            </a:avLst>
-          </a:prstGeom>
-          <a:solidFill>
-            <a:schemeClr val="bg2"/>
-          </a:solidFill>
-          <a:ln w="12700">
-            <a:solidFill>
-              <a:schemeClr val="bg2"/>
-            </a:solidFill>
-            <a:prstDash val="solid"/>
-          </a:ln>
-        </p:spPr>
-      </p:sp>
-      <p:sp>
-        <p:nvSpPr>
-          <p:cNvPr id="11" name="Text 8"/>
-          <p:cNvSpPr txBox="1"/>
-          <p:nvPr/>
-        </p:nvSpPr>
-        <p:spPr>
-          <a:xfrm>
-            <a:off x="7726680" y="4526280"/>
-            <a:ext cx="3749040" cy="594360"/>
-          </a:xfrm>
-          <a:prstGeom prst="rect">
-            <a:avLst/>
-          </a:prstGeom>
-          <a:noFill/>
-          <a:ln/>
-        </p:spPr>
-        <p:txBody>
-          <a:bodyPr wrap="square" lIns="0" tIns="0" rIns="0" bIns="0" rtlCol="0" anchor="t"/>
-          <a:lstStyle/>
-          <a:p>
-            <a:pPr indent="0" marL="0">
-              <a:buNone/>
-            </a:pPr>
-            <a:r>
-              <a:rPr lang="en-US" sz="2800" b="1" dirty="0">
-                <a:solidFill>
-                  <a:schemeClr val="accent3"/>
-                </a:solidFill>
-              </a:rPr>
-              <a:t>95.5%</a:t>
-            </a:r>
-            <a:endParaRPr lang="en-US" sz="2800" dirty="0"/>
-          </a:p>
-        </p:txBody>
-      </p:sp>
-      <p:sp>
-        <p:nvSpPr>
-          <p:cNvPr id="12" name="Text 9"/>
-          <p:cNvSpPr txBox="1"/>
-          <p:nvPr/>
-        </p:nvSpPr>
-        <p:spPr>
-          <a:xfrm>
-            <a:off x="7726680" y="5138928"/>
-            <a:ext cx="3749040" cy="411480"/>
-          </a:xfrm>
-          <a:prstGeom prst="rect">
-            <a:avLst/>
-          </a:prstGeom>
-          <a:noFill/>
-          <a:ln/>
-        </p:spPr>
-        <p:txBody>
-          <a:bodyPr wrap="square" lIns="0" tIns="0" rIns="0" bIns="0" rtlCol="0" anchor="t"/>
-          <a:lstStyle/>
-          <a:p>
-            <a:pPr indent="0" marL="0">
-              <a:buNone/>
-            </a:pPr>
-            <a:r>
-              <a:rPr lang="en-US" sz="1300" dirty="0">
-                <a:solidFill>
-                  <a:schemeClr val="tx2"/>
-                </a:solidFill>
-              </a:rPr>
-              <a:t>模型判非極值時的正確率</a:t>
-            </a:r>
-            <a:endParaRPr lang="en-US" sz="1300" dirty="0"/>
-          </a:p>
-        </p:txBody>
-      </p:sp>
-      <p:sp>
-        <p:nvSpPr>
-          <p:cNvPr id="25" name="Slide Number Placeholder 0"/>
-          <p:cNvSpPr>
-            <a:spLocks noGrp="1"/>
-          </p:cNvSpPr>
-          <p:nvPr>
-            <p:ph type="sldNum" sz="quarter" idx="4294967295"/>
-          </p:nvPr>
-        </p:nvSpPr>
-        <p:spPr>
-          <a:xfrm>
-            <a:off x="11201400" y="6355080"/>
-            <a:ext cx="457200" cy="274320"/>
-          </a:xfrm>
-          <a:prstGeom prst="rect">
-            <a:avLst/>
-          </a:prstGeom>
-          <a:extLst>
-            <a:ext uri="{C572A759-6A51-4108-AA02-DFA0A04FC94B}">
-              <ma14:wrappingTextBoxFlag xmlns:ma14="http://schemas.microsoft.com/office/mac/drawingml/2011/main" val="0"/>
-            </a:ext>
-          </a:extLst>
-        </p:spPr>
-        <p:txBody>
-          <a:bodyPr/>
-          <a:lstStyle>
-            <a:lvl1pPr>
-              <a:defRPr sz="1000">
-                <a:solidFill>
-                  <a:srgbClr val="7A8691"/>
-                </a:solidFill>
-              </a:defRPr>
-            </a:lvl1pPr>
-          </a:lstStyle>
-          <a:p>
-            <a:pPr algn="r"/>
-            <a:fld id="{F7021451-1387-4CA6-816F-3879F97B5CBC}" type="slidenum">
-              <a:rPr b="0" lang="en-US"/>
               <a:t>6</a:t>
             </a:fld>
             <a:endParaRPr lang="en-US"/>
@@ -13314,6 +14323,427 @@
                   <a:schemeClr val="tx1"/>
                 </a:solidFill>
               </a:rPr>
+              <a:t>局部準確度:挑出的候選比亂猜準 3.7–3.9 倍</a:t>
+            </a:r>
+            <a:endParaRPr lang="en-US" sz="3200" dirty="0"/>
+          </a:p>
+        </p:txBody>
+      </p:sp>
+      <p:graphicFrame>
+        <p:nvGraphicFramePr>
+          <p:cNvPr id="3" name="precision-chart" descr=""/>
+          <p:cNvGraphicFramePr/>
+          <p:nvPr/>
+        </p:nvGraphicFramePr>
+        <p:xfrm>
+          <a:off x="548640" y="1371600"/>
+          <a:ext cx="6583680" cy="4389120"/>
+        </p:xfrm>
+        <a:graphic xmlns:a="http://schemas.openxmlformats.org/drawingml/2006/main">
+          <a:graphicData uri="http://schemas.openxmlformats.org/drawingml/2006/chart">
+            <c:chart xmlns:c="http://schemas.openxmlformats.org/drawingml/2006/chart" r:id="rId1"/>
+          </a:graphicData>
+        </a:graphic>
+      </p:graphicFrame>
+      <p:sp>
+        <p:nvSpPr>
+          <p:cNvPr id="4" name="loc-0"/>
+          <p:cNvSpPr/>
+          <p:nvPr/>
+        </p:nvSpPr>
+        <p:spPr>
+          <a:xfrm>
+            <a:off x="7498080" y="1463040"/>
+            <a:ext cx="4114800" cy="1280160"/>
+          </a:xfrm>
+          <a:prstGeom prst="roundRect">
+            <a:avLst>
+              <a:gd name="adj" fmla="val 5714"/>
+            </a:avLst>
+          </a:prstGeom>
+          <a:solidFill>
+            <a:schemeClr val="bg2"/>
+          </a:solidFill>
+          <a:ln w="12700">
+            <a:solidFill>
+              <a:schemeClr val="bg2"/>
+            </a:solidFill>
+            <a:prstDash val="solid"/>
+          </a:ln>
+        </p:spPr>
+      </p:sp>
+      <p:sp>
+        <p:nvSpPr>
+          <p:cNvPr id="5" name="Text 2"/>
+          <p:cNvSpPr txBox="1"/>
+          <p:nvPr/>
+        </p:nvSpPr>
+        <p:spPr>
+          <a:xfrm>
+            <a:off x="7726680" y="1600200"/>
+            <a:ext cx="3749040" cy="594360"/>
+          </a:xfrm>
+          <a:prstGeom prst="rect">
+            <a:avLst/>
+          </a:prstGeom>
+          <a:noFill/>
+          <a:ln/>
+        </p:spPr>
+        <p:txBody>
+          <a:bodyPr wrap="square" lIns="0" tIns="0" rIns="0" bIns="0" rtlCol="0" anchor="t"/>
+          <a:lstStyle/>
+          <a:p>
+            <a:pPr indent="0" marL="0">
+              <a:buNone/>
+            </a:pPr>
+            <a:r>
+              <a:rPr lang="en-US" sz="2800" b="1" dirty="0">
+                <a:solidFill>
+                  <a:schemeClr val="accent1"/>
+                </a:solidFill>
+              </a:rPr>
+              <a:t>99.9% / 100%</a:t>
+            </a:r>
+            <a:endParaRPr lang="en-US" sz="2800" dirty="0"/>
+          </a:p>
+        </p:txBody>
+      </p:sp>
+      <p:sp>
+        <p:nvSpPr>
+          <p:cNvPr id="6" name="Text 3"/>
+          <p:cNvSpPr txBox="1"/>
+          <p:nvPr/>
+        </p:nvSpPr>
+        <p:spPr>
+          <a:xfrm>
+            <a:off x="7726680" y="2212848"/>
+            <a:ext cx="3749040" cy="411480"/>
+          </a:xfrm>
+          <a:prstGeom prst="rect">
+            <a:avLst/>
+          </a:prstGeom>
+          <a:noFill/>
+          <a:ln/>
+        </p:spPr>
+        <p:txBody>
+          <a:bodyPr wrap="square" lIns="0" tIns="0" rIns="0" bIns="0" rtlCol="0" anchor="t"/>
+          <a:lstStyle/>
+          <a:p>
+            <a:pPr indent="0" marL="0">
+              <a:buNone/>
+            </a:pPr>
+            <a:r>
+              <a:rPr lang="en-US" sz="1300" dirty="0">
+                <a:solidFill>
+                  <a:schemeClr val="tx2"/>
+                </a:solidFill>
+              </a:rPr>
+              <a:t>規則找到的真高點 / 真低點</a:t>
+            </a:r>
+            <a:endParaRPr lang="en-US" sz="1300" dirty="0"/>
+          </a:p>
+        </p:txBody>
+      </p:sp>
+      <p:sp>
+        <p:nvSpPr>
+          <p:cNvPr id="7" name="loc-1"/>
+          <p:cNvSpPr/>
+          <p:nvPr/>
+        </p:nvSpPr>
+        <p:spPr>
+          <a:xfrm>
+            <a:off x="7498080" y="2926080"/>
+            <a:ext cx="4114800" cy="1280160"/>
+          </a:xfrm>
+          <a:prstGeom prst="roundRect">
+            <a:avLst>
+              <a:gd name="adj" fmla="val 5714"/>
+            </a:avLst>
+          </a:prstGeom>
+          <a:solidFill>
+            <a:schemeClr val="bg2"/>
+          </a:solidFill>
+          <a:ln w="12700">
+            <a:solidFill>
+              <a:schemeClr val="bg2"/>
+            </a:solidFill>
+            <a:prstDash val="solid"/>
+          </a:ln>
+        </p:spPr>
+      </p:sp>
+      <p:sp>
+        <p:nvSpPr>
+          <p:cNvPr id="8" name="Text 5"/>
+          <p:cNvSpPr txBox="1"/>
+          <p:nvPr/>
+        </p:nvSpPr>
+        <p:spPr>
+          <a:xfrm>
+            <a:off x="7726680" y="3063240"/>
+            <a:ext cx="3749040" cy="594360"/>
+          </a:xfrm>
+          <a:prstGeom prst="rect">
+            <a:avLst/>
+          </a:prstGeom>
+          <a:noFill/>
+          <a:ln/>
+        </p:spPr>
+        <p:txBody>
+          <a:bodyPr wrap="square" lIns="0" tIns="0" rIns="0" bIns="0" rtlCol="0" anchor="t"/>
+          <a:lstStyle/>
+          <a:p>
+            <a:pPr indent="0" marL="0">
+              <a:buNone/>
+            </a:pPr>
+            <a:r>
+              <a:rPr lang="en-US" sz="2800" b="1" dirty="0">
+                <a:solidFill>
+                  <a:schemeClr val="accent2"/>
+                </a:solidFill>
+              </a:rPr>
+              <a:t>81.6% / 84.4%</a:t>
+            </a:r>
+            <a:endParaRPr lang="en-US" sz="2800" dirty="0"/>
+          </a:p>
+        </p:txBody>
+      </p:sp>
+      <p:sp>
+        <p:nvSpPr>
+          <p:cNvPr id="9" name="Text 6"/>
+          <p:cNvSpPr txBox="1"/>
+          <p:nvPr/>
+        </p:nvSpPr>
+        <p:spPr>
+          <a:xfrm>
+            <a:off x="7726680" y="3675888"/>
+            <a:ext cx="3749040" cy="411480"/>
+          </a:xfrm>
+          <a:prstGeom prst="rect">
+            <a:avLst/>
+          </a:prstGeom>
+          <a:noFill/>
+          <a:ln/>
+        </p:spPr>
+        <p:txBody>
+          <a:bodyPr wrap="square" lIns="0" tIns="0" rIns="0" bIns="0" rtlCol="0" anchor="t"/>
+          <a:lstStyle/>
+          <a:p>
+            <a:pPr indent="0" marL="0">
+              <a:buNone/>
+            </a:pPr>
+            <a:r>
+              <a:rPr lang="en-US" sz="1300" dirty="0">
+                <a:solidFill>
+                  <a:schemeClr val="tx2"/>
+                </a:solidFill>
+              </a:rPr>
+              <a:t>模型判對的真高點 / 真低點</a:t>
+            </a:r>
+            <a:endParaRPr lang="en-US" sz="1300" dirty="0"/>
+          </a:p>
+        </p:txBody>
+      </p:sp>
+      <p:sp>
+        <p:nvSpPr>
+          <p:cNvPr id="10" name="loc-2"/>
+          <p:cNvSpPr/>
+          <p:nvPr/>
+        </p:nvSpPr>
+        <p:spPr>
+          <a:xfrm>
+            <a:off x="7498080" y="4389120"/>
+            <a:ext cx="4114800" cy="1280160"/>
+          </a:xfrm>
+          <a:prstGeom prst="roundRect">
+            <a:avLst>
+              <a:gd name="adj" fmla="val 5714"/>
+            </a:avLst>
+          </a:prstGeom>
+          <a:solidFill>
+            <a:schemeClr val="bg2"/>
+          </a:solidFill>
+          <a:ln w="12700">
+            <a:solidFill>
+              <a:schemeClr val="bg2"/>
+            </a:solidFill>
+            <a:prstDash val="solid"/>
+          </a:ln>
+        </p:spPr>
+      </p:sp>
+      <p:sp>
+        <p:nvSpPr>
+          <p:cNvPr id="11" name="Text 8"/>
+          <p:cNvSpPr txBox="1"/>
+          <p:nvPr/>
+        </p:nvSpPr>
+        <p:spPr>
+          <a:xfrm>
+            <a:off x="7726680" y="4526280"/>
+            <a:ext cx="3749040" cy="594360"/>
+          </a:xfrm>
+          <a:prstGeom prst="rect">
+            <a:avLst/>
+          </a:prstGeom>
+          <a:noFill/>
+          <a:ln/>
+        </p:spPr>
+        <p:txBody>
+          <a:bodyPr wrap="square" lIns="0" tIns="0" rIns="0" bIns="0" rtlCol="0" anchor="t"/>
+          <a:lstStyle/>
+          <a:p>
+            <a:pPr indent="0" marL="0">
+              <a:buNone/>
+            </a:pPr>
+            <a:r>
+              <a:rPr lang="en-US" sz="2800" b="1" dirty="0">
+                <a:solidFill>
+                  <a:schemeClr val="accent3"/>
+                </a:solidFill>
+              </a:rPr>
+              <a:t>95.5%</a:t>
+            </a:r>
+            <a:endParaRPr lang="en-US" sz="2800" dirty="0"/>
+          </a:p>
+        </p:txBody>
+      </p:sp>
+      <p:sp>
+        <p:nvSpPr>
+          <p:cNvPr id="12" name="Text 9"/>
+          <p:cNvSpPr txBox="1"/>
+          <p:nvPr/>
+        </p:nvSpPr>
+        <p:spPr>
+          <a:xfrm>
+            <a:off x="7726680" y="5138928"/>
+            <a:ext cx="3749040" cy="411480"/>
+          </a:xfrm>
+          <a:prstGeom prst="rect">
+            <a:avLst/>
+          </a:prstGeom>
+          <a:noFill/>
+          <a:ln/>
+        </p:spPr>
+        <p:txBody>
+          <a:bodyPr wrap="square" lIns="0" tIns="0" rIns="0" bIns="0" rtlCol="0" anchor="t"/>
+          <a:lstStyle/>
+          <a:p>
+            <a:pPr indent="0" marL="0">
+              <a:buNone/>
+            </a:pPr>
+            <a:r>
+              <a:rPr lang="en-US" sz="1300" dirty="0">
+                <a:solidFill>
+                  <a:schemeClr val="tx2"/>
+                </a:solidFill>
+              </a:rPr>
+              <a:t>模型判非極值時的正確率</a:t>
+            </a:r>
+            <a:endParaRPr lang="en-US" sz="1300" dirty="0"/>
+          </a:p>
+        </p:txBody>
+      </p:sp>
+      <p:sp>
+        <p:nvSpPr>
+          <p:cNvPr id="25" name="Slide Number Placeholder 0"/>
+          <p:cNvSpPr>
+            <a:spLocks noGrp="1"/>
+          </p:cNvSpPr>
+          <p:nvPr>
+            <p:ph type="sldNum" sz="quarter" idx="4294967295"/>
+          </p:nvPr>
+        </p:nvSpPr>
+        <p:spPr>
+          <a:xfrm>
+            <a:off x="11201400" y="6355080"/>
+            <a:ext cx="457200" cy="274320"/>
+          </a:xfrm>
+          <a:prstGeom prst="rect">
+            <a:avLst/>
+          </a:prstGeom>
+          <a:extLst>
+            <a:ext uri="{C572A759-6A51-4108-AA02-DFA0A04FC94B}">
+              <ma14:wrappingTextBoxFlag xmlns:ma14="http://schemas.microsoft.com/office/mac/drawingml/2011/main" val="0"/>
+            </a:ext>
+          </a:extLst>
+        </p:spPr>
+        <p:txBody>
+          <a:bodyPr/>
+          <a:lstStyle>
+            <a:lvl1pPr>
+              <a:defRPr sz="1000">
+                <a:solidFill>
+                  <a:srgbClr val="7A8691"/>
+                </a:solidFill>
+              </a:defRPr>
+            </a:lvl1pPr>
+          </a:lstStyle>
+          <a:p>
+            <a:pPr algn="r"/>
+            <a:fld id="{F7021451-1387-4CA6-816F-3879F97B5CBC}" type="slidenum">
+              <a:rPr b="0" lang="en-US"/>
+              <a:t>7</a:t>
+            </a:fld>
+            <a:endParaRPr lang="en-US"/>
+          </a:p>
+        </p:txBody>
+      </p:sp>
+    </p:spTree>
+  </p:cSld>
+  <p:clrMapOvr>
+    <a:masterClrMapping/>
+  </p:clrMapOvr>
+</p:sld>
+</file>
+
+<file path=ppt/slides/slide8.xml><?xml version="1.0" encoding="utf-8"?>
+<p:sld xmlns:a="http://schemas.openxmlformats.org/drawingml/2006/main" xmlns:r="http://schemas.openxmlformats.org/officeDocument/2006/relationships" xmlns:p="http://schemas.openxmlformats.org/presentationml/2006/main">
+  <p:cSld name="Slide 8">
+    <p:spTree>
+      <p:nvGrpSpPr>
+        <p:cNvPr id="1" name=""/>
+        <p:cNvGrpSpPr/>
+        <p:nvPr/>
+      </p:nvGrpSpPr>
+      <p:grpSpPr>
+        <a:xfrm>
+          <a:off x="0" y="0"/>
+          <a:ext cx="0" cy="0"/>
+          <a:chOff x="0" y="0"/>
+          <a:chExt cx="0" cy="0"/>
+        </a:xfrm>
+      </p:grpSpPr>
+      <p:sp>
+        <p:nvSpPr>
+          <p:cNvPr id="2" name="Text 11"/>
+          <p:cNvSpPr/>
+          <p:nvPr>
+            <p:ph idx="111" type="title" hasCustomPrompt="1"/>
+          </p:nvPr>
+        </p:nvSpPr>
+        <p:spPr>
+          <a:xfrm>
+            <a:off x="548640" y="320040"/>
+            <a:ext cx="9418320" cy="777240"/>
+          </a:xfrm>
+          <a:prstGeom prst="rect">
+            <a:avLst/>
+          </a:prstGeom>
+          <a:noFill/>
+          <a:ln/>
+        </p:spPr>
+        <p:txBody>
+          <a:bodyPr wrap="square" lIns="0" tIns="0" rIns="0" bIns="0" rtlCol="0" anchor="ctr"/>
+          <a:lstStyle/>
+          <a:p>
+            <a:pPr indent="0" marL="0">
+              <a:buNone/>
+            </a:pPr>
+            <a:r>
+              <a:rPr lang="en-US" sz="3200" b="1" dirty="0">
+                <a:solidFill>
+                  <a:schemeClr val="tx1"/>
+                </a:solidFill>
+              </a:rPr>
               <a:t>找到的結果長什麼樣</a:t>
             </a:r>
             <a:endParaRPr lang="en-US" sz="3200" dirty="0"/>
@@ -13495,7 +14925,7 @@
             <a:pPr algn="r"/>
             <a:fld id="{F7021451-1387-4CA6-816F-3879F97B5CBC}" type="slidenum">
               <a:rPr b="0" lang="en-US"/>
-              <a:t>7</a:t>
+              <a:t>8</a:t>
             </a:fld>
             <a:endParaRPr lang="en-US"/>
           </a:p>
@@ -13509,9 +14939,9 @@
 </p:sld>
 </file>
 
-<file path=ppt/slides/slide8.xml><?xml version="1.0" encoding="utf-8"?>
+<file path=ppt/slides/slide9.xml><?xml version="1.0" encoding="utf-8"?>
 <p:sld xmlns:a="http://schemas.openxmlformats.org/drawingml/2006/main" xmlns:r="http://schemas.openxmlformats.org/officeDocument/2006/relationships" xmlns:p="http://schemas.openxmlformats.org/presentationml/2006/main">
-  <p:cSld name="Slide 8">
+  <p:cSld name="Slide 9">
     <p:spTree>
       <p:nvGrpSpPr>
         <p:cNvPr id="1" name=""/>

--- a/method_kline_peak/report/TW50_局部高低點_專題進度.pptx
+++ b/method_kline_peak/report/TW50_局部高低點_專題進度.pptx
@@ -115,27 +115,27 @@
   <p:extLst>
     <p:ext uri="{521415D9-36F7-43E2-AB2F-B90AF26B5E84}">
       <p14:sectionLst xmlns:p14="http://schemas.microsoft.com/office/powerpoint/2010/main">
-        <p14:section name="問題與資料" id="{8b7e2c77-c498-d4a6-2dd5-78d9b8938942}">
+        <p14:section name="問題與資料" id="{7d59136b-ff63-2dd3-26da-1c5c4b40748d}">
           <p14:sldIdLst>
             <p14:sldId id="256"/>
             <p14:sldId id="257"/>
           </p14:sldIdLst>
         </p14:section>
-        <p14:section name="方法與計分" id="{afabe88e-6627-bec7-1525-da124823470e}">
+        <p14:section name="方法與計分" id="{baab0284-40e2-7ff2-27f2-f52f53cc93fa}">
           <p14:sldIdLst>
             <p14:sldId id="258"/>
             <p14:sldId id="259"/>
             <p14:sldId id="260"/>
           </p14:sldIdLst>
         </p14:section>
-        <p14:section name="結果" id="{4c8599b2-f8b0-b392-3c19-1fec8afc4378}">
+        <p14:section name="結果" id="{f2878c43-7731-8fce-4dfa-04d948c0c09e}">
           <p14:sldIdLst>
             <p14:sldId id="261"/>
             <p14:sldId id="262"/>
             <p14:sldId id="263"/>
           </p14:sldIdLst>
         </p14:section>
-        <p14:section name="總結" id="{5ed6581d-6f02-92e9-07ca-7779d6782b18}">
+        <p14:section name="總結" id="{d4835151-0d92-9420-6d6e-fd1bb7f2c6c2}">
           <p14:sldIdLst>
             <p14:sldId id="264"/>
           </p14:sldIdLst>
@@ -1511,7 +1511,7 @@
           <a:p>
             <a:r>
               <a:rPr lang="en-US" dirty="0"/>
-              <a:t>這頁說明我們丟進模型的是什麼。一個樣本是 11 個交易日,第 6 天是 t。模型只看前 6 天,也就是 t-5 到 t,這些在 t 日收盤時都已經知道;後 5 天只用來貼標籤,模型看不到。每天取 5 個特徵:開、高、低、收都除以 t 日收盤,量除以 10 日均量。t 日收盤除以自己永遠是 1,所以拿掉,總共 29 個數字。表上是台積電 2024-09-26 的實際數字:前 5 天的價格都在 t 日收盤下方,代表一路往上收到 t 日。訓練時 50 檔股票放在一起,不是每檔一個模型:候選日裡真的是高點的 3,769 天訓練高點模型,真的是低點的 3,651 天訓練低點模型,總共只有 2 組。模型不知道樣本是哪一檔股票,因為價格都除以 t 日收盤、量都除以 10 日均量,不同股票可以放在一起比。</a:t>
+              <a:t>這頁說明我們丟進模型的是什麼。一個樣本是 11 個交易日,第 6 天是 t。模型只看前 6 天,也就是 t-5 到 t,這些在 t 日收盤時都已經知道;後 5 天只用來貼標籤,模型看不到。每天取 5 個特徵:開、高、低、收都除以 t 日收盤,量除以 10 日均量。t 日收盤除以自己永遠是 1,所以拿掉,總共 29 個數字。表上是廣達 2024-11-08 的實際數字:前 5 天的收盤從 -7.0% 一路升到 -0.8%,代表連漲 5 天收到 t 日;量也越來越大。訓練時 50 檔股票放在一起,不是每檔一個模型:候選日裡真的是高點的 3,769 天訓練高點模型,真的是低點的 3,651 天訓練低點模型,總共只有 2 組。模型不知道樣本是哪一檔股票,因為價格都除以 t 日收盤、量都除以 10 日均量,不同股票可以放在一起比。</a:t>
             </a:r>
             <a:endParaRPr lang="en-US" dirty="0"/>
           </a:p>
@@ -3246,7 +3246,7 @@
                   <a:schemeClr val="accent5"/>
                 </a:solidFill>
               </a:rPr>
-              <a:t>實例:台積電 2024-09-26,t 日收盤 989 是前後各 5 天裡最高 → 高點</a:t>
+              <a:t>實例:廣達 2024-11-08,連漲 5 天後收在 300(十字線),之後 5 天都收在 300 以下、t+5 跌到 272 → 高點</a:t>
             </a:r>
             <a:endParaRPr lang="en-US" sz="1200" dirty="0"/>
           </a:p>
@@ -6474,7 +6474,7 @@
                           <a:ea typeface="Microsoft JhengHei" pitchFamily="34" charset="-122"/>
                           <a:cs typeface="Microsoft JhengHei" pitchFamily="34" charset="-120"/>
                         </a:rPr>
-                        <a:t>−7.4%</a:t>
+                        <a:t>−11.6%</a:t>
                       </a:r>
                       <a:endParaRPr lang="en-US" sz="1300" dirty="0">
                         <a:latin typeface="Microsoft JhengHei" charset="0"/>
@@ -6542,7 +6542,7 @@
                           <a:ea typeface="Microsoft JhengHei" pitchFamily="34" charset="-122"/>
                           <a:cs typeface="Microsoft JhengHei" pitchFamily="34" charset="-120"/>
                         </a:rPr>
-                        <a:t>−3.3%</a:t>
+                        <a:t>−6.6%</a:t>
                       </a:r>
                       <a:endParaRPr lang="en-US" sz="1300" dirty="0">
                         <a:latin typeface="Microsoft JhengHei" charset="0"/>
@@ -6610,7 +6610,7 @@
                           <a:ea typeface="Microsoft JhengHei" pitchFamily="34" charset="-122"/>
                           <a:cs typeface="Microsoft JhengHei" pitchFamily="34" charset="-120"/>
                         </a:rPr>
-                        <a:t>−4.3%</a:t>
+                        <a:t>−5.3%</a:t>
                       </a:r>
                       <a:endParaRPr lang="en-US" sz="1300" dirty="0">
                         <a:latin typeface="Microsoft JhengHei" charset="0"/>
@@ -6678,7 +6678,7 @@
                           <a:ea typeface="Microsoft JhengHei" pitchFamily="34" charset="-122"/>
                           <a:cs typeface="Microsoft JhengHei" pitchFamily="34" charset="-120"/>
                         </a:rPr>
-                        <a:t>−3.8%</a:t>
+                        <a:t>−2.7%</a:t>
                       </a:r>
                       <a:endParaRPr lang="en-US" sz="1300" dirty="0">
                         <a:latin typeface="Microsoft JhengHei" charset="0"/>
@@ -6814,7 +6814,7 @@
                           <a:ea typeface="Microsoft JhengHei" pitchFamily="34" charset="-122"/>
                           <a:cs typeface="Microsoft JhengHei" pitchFamily="34" charset="-120"/>
                         </a:rPr>
-                        <a:t>−0.5%</a:t>
+                        <a:t>0.0%</a:t>
                       </a:r>
                       <a:endParaRPr lang="en-US" sz="1300" dirty="0">
                         <a:latin typeface="Microsoft JhengHei" charset="0"/>
@@ -7014,7 +7014,7 @@
                           <a:ea typeface="Microsoft JhengHei" pitchFamily="34" charset="-122"/>
                           <a:cs typeface="Microsoft JhengHei" pitchFamily="34" charset="-120"/>
                         </a:rPr>
-                        <a:t>−5.4%</a:t>
+                        <a:t>−6.3%</a:t>
                       </a:r>
                       <a:endParaRPr lang="en-US" sz="1300" dirty="0">
                         <a:latin typeface="Microsoft JhengHei" charset="0"/>
@@ -7082,7 +7082,7 @@
                           <a:ea typeface="Microsoft JhengHei" pitchFamily="34" charset="-122"/>
                           <a:cs typeface="Microsoft JhengHei" pitchFamily="34" charset="-120"/>
                         </a:rPr>
-                        <a:t>−3.3%</a:t>
+                        <a:t>−4.1%</a:t>
                       </a:r>
                       <a:endParaRPr lang="en-US" sz="1300" dirty="0">
                         <a:latin typeface="Microsoft JhengHei" charset="0"/>
@@ -7150,7 +7150,7 @@
                           <a:ea typeface="Microsoft JhengHei" pitchFamily="34" charset="-122"/>
                           <a:cs typeface="Microsoft JhengHei" pitchFamily="34" charset="-120"/>
                         </a:rPr>
-                        <a:t>−3.7%</a:t>
+                        <a:t>−2.4%</a:t>
                       </a:r>
                       <a:endParaRPr lang="en-US" sz="1300" dirty="0">
                         <a:latin typeface="Microsoft JhengHei" charset="0"/>
@@ -7218,7 +7218,7 @@
                           <a:ea typeface="Microsoft JhengHei" pitchFamily="34" charset="-122"/>
                           <a:cs typeface="Microsoft JhengHei" pitchFamily="34" charset="-120"/>
                         </a:rPr>
-                        <a:t>−2.8%</a:t>
+                        <a:t>−1.1%</a:t>
                       </a:r>
                       <a:endParaRPr lang="en-US" sz="1300" dirty="0">
                         <a:latin typeface="Microsoft JhengHei" charset="0"/>
@@ -7286,7 +7286,7 @@
                           <a:ea typeface="Microsoft JhengHei" pitchFamily="34" charset="-122"/>
                           <a:cs typeface="Microsoft JhengHei" pitchFamily="34" charset="-120"/>
                         </a:rPr>
-                        <a:t>−1.0%</a:t>
+                        <a:t>+0.3%</a:t>
                       </a:r>
                       <a:endParaRPr lang="en-US" sz="1300" dirty="0">
                         <a:latin typeface="Microsoft JhengHei" charset="0"/>
@@ -7354,7 +7354,7 @@
                           <a:ea typeface="Microsoft JhengHei" pitchFamily="34" charset="-122"/>
                           <a:cs typeface="Microsoft JhengHei" pitchFamily="34" charset="-120"/>
                         </a:rPr>
-                        <a:t>0.0%</a:t>
+                        <a:t>+1.5%</a:t>
                       </a:r>
                       <a:endParaRPr lang="en-US" sz="1300" dirty="0">
                         <a:latin typeface="Microsoft JhengHei" charset="0"/>
@@ -7554,7 +7554,7 @@
                           <a:ea typeface="Microsoft JhengHei" pitchFamily="34" charset="-122"/>
                           <a:cs typeface="Microsoft JhengHei" pitchFamily="34" charset="-120"/>
                         </a:rPr>
-                        <a:t>−7.8%</a:t>
+                        <a:t>−11.7%</a:t>
                       </a:r>
                       <a:endParaRPr lang="en-US" sz="1300" dirty="0">
                         <a:latin typeface="Microsoft JhengHei" charset="0"/>
@@ -7622,7 +7622,7 @@
                           <a:ea typeface="Microsoft JhengHei" pitchFamily="34" charset="-122"/>
                           <a:cs typeface="Microsoft JhengHei" pitchFamily="34" charset="-120"/>
                         </a:rPr>
-                        <a:t>−4.3%</a:t>
+                        <a:t>−6.7%</a:t>
                       </a:r>
                       <a:endParaRPr lang="en-US" sz="1300" dirty="0">
                         <a:latin typeface="Microsoft JhengHei" charset="0"/>
@@ -7690,7 +7690,7 @@
                           <a:ea typeface="Microsoft JhengHei" pitchFamily="34" charset="-122"/>
                           <a:cs typeface="Microsoft JhengHei" pitchFamily="34" charset="-120"/>
                         </a:rPr>
-                        <a:t>−4.3%</a:t>
+                        <a:t>−5.6%</a:t>
                       </a:r>
                       <a:endParaRPr lang="en-US" sz="1300" dirty="0">
                         <a:latin typeface="Microsoft JhengHei" charset="0"/>
@@ -7758,7 +7758,7 @@
                           <a:ea typeface="Microsoft JhengHei" pitchFamily="34" charset="-122"/>
                           <a:cs typeface="Microsoft JhengHei" pitchFamily="34" charset="-120"/>
                         </a:rPr>
-                        <a:t>−4.3%</a:t>
+                        <a:t>−3.0%</a:t>
                       </a:r>
                       <a:endParaRPr lang="en-US" sz="1300" dirty="0">
                         <a:latin typeface="Microsoft JhengHei" charset="0"/>
@@ -7826,7 +7826,7 @@
                           <a:ea typeface="Microsoft JhengHei" pitchFamily="34" charset="-122"/>
                           <a:cs typeface="Microsoft JhengHei" pitchFamily="34" charset="-120"/>
                         </a:rPr>
-                        <a:t>−1.7%</a:t>
+                        <a:t>−2.4%</a:t>
                       </a:r>
                       <a:endParaRPr lang="en-US" sz="1300" dirty="0">
                         <a:latin typeface="Microsoft JhengHei" charset="0"/>
@@ -7894,7 +7894,7 @@
                           <a:ea typeface="Microsoft JhengHei" pitchFamily="34" charset="-122"/>
                           <a:cs typeface="Microsoft JhengHei" pitchFamily="34" charset="-120"/>
                         </a:rPr>
-                        <a:t>−1.0%</a:t>
+                        <a:t>−0.5%</a:t>
                       </a:r>
                       <a:endParaRPr lang="en-US" sz="1300" dirty="0">
                         <a:latin typeface="Microsoft JhengHei" charset="0"/>
@@ -8094,7 +8094,7 @@
                           <a:ea typeface="Microsoft JhengHei" pitchFamily="34" charset="-122"/>
                           <a:cs typeface="Microsoft JhengHei" pitchFamily="34" charset="-120"/>
                         </a:rPr>
-                        <a:t>−5.4%</a:t>
+                        <a:t>−7.0%</a:t>
                       </a:r>
                       <a:endParaRPr lang="en-US" sz="1300" dirty="0">
                         <a:latin typeface="Microsoft JhengHei" charset="0"/>
@@ -8162,7 +8162,7 @@
                           <a:ea typeface="Microsoft JhengHei" pitchFamily="34" charset="-122"/>
                           <a:cs typeface="Microsoft JhengHei" pitchFamily="34" charset="-120"/>
                         </a:rPr>
-                        <a:t>−4.1%</a:t>
+                        <a:t>−4.4%</a:t>
                       </a:r>
                       <a:endParaRPr lang="en-US" sz="1300" dirty="0">
                         <a:latin typeface="Microsoft JhengHei" charset="0"/>
@@ -8230,7 +8230,7 @@
                           <a:ea typeface="Microsoft JhengHei" pitchFamily="34" charset="-122"/>
                           <a:cs typeface="Microsoft JhengHei" pitchFamily="34" charset="-120"/>
                         </a:rPr>
-                        <a:t>−3.7%</a:t>
+                        <a:t>−3.0%</a:t>
                       </a:r>
                       <a:endParaRPr lang="en-US" sz="1300" dirty="0">
                         <a:latin typeface="Microsoft JhengHei" charset="0"/>
@@ -8298,7 +8298,7 @@
                           <a:ea typeface="Microsoft JhengHei" pitchFamily="34" charset="-122"/>
                           <a:cs typeface="Microsoft JhengHei" pitchFamily="34" charset="-120"/>
                         </a:rPr>
-                        <a:t>−2.8%</a:t>
+                        <a:t>−2.3%</a:t>
                       </a:r>
                       <a:endParaRPr lang="en-US" sz="1300" dirty="0">
                         <a:latin typeface="Microsoft JhengHei" charset="0"/>
@@ -8366,7 +8366,7 @@
                           <a:ea typeface="Microsoft JhengHei" pitchFamily="34" charset="-122"/>
                           <a:cs typeface="Microsoft JhengHei" pitchFamily="34" charset="-120"/>
                         </a:rPr>
-                        <a:t>−1.0%</a:t>
+                        <a:t>−0.8%</a:t>
                       </a:r>
                       <a:endParaRPr lang="en-US" sz="1300" dirty="0">
                         <a:latin typeface="Microsoft JhengHei" charset="0"/>
@@ -8634,7 +8634,7 @@
                           <a:ea typeface="Microsoft JhengHei" pitchFamily="34" charset="-122"/>
                           <a:cs typeface="Microsoft JhengHei" pitchFamily="34" charset="-120"/>
                         </a:rPr>
-                        <a:t>1.03×</a:t>
+                        <a:t>0.92×</a:t>
                       </a:r>
                       <a:endParaRPr lang="en-US" sz="1300" dirty="0">
                         <a:latin typeface="Microsoft JhengHei" charset="0"/>
@@ -8702,7 +8702,7 @@
                           <a:ea typeface="Microsoft JhengHei" pitchFamily="34" charset="-122"/>
                           <a:cs typeface="Microsoft JhengHei" pitchFamily="34" charset="-120"/>
                         </a:rPr>
-                        <a:t>1.89×</a:t>
+                        <a:t>1.00×</a:t>
                       </a:r>
                       <a:endParaRPr lang="en-US" sz="1300" dirty="0">
                         <a:latin typeface="Microsoft JhengHei" charset="0"/>
@@ -8770,7 +8770,7 @@
                           <a:ea typeface="Microsoft JhengHei" pitchFamily="34" charset="-122"/>
                           <a:cs typeface="Microsoft JhengHei" pitchFamily="34" charset="-120"/>
                         </a:rPr>
-                        <a:t>0.45×</a:t>
+                        <a:t>1.08×</a:t>
                       </a:r>
                       <a:endParaRPr lang="en-US" sz="1300" dirty="0">
                         <a:latin typeface="Microsoft JhengHei" charset="0"/>
@@ -8838,7 +8838,7 @@
                           <a:ea typeface="Microsoft JhengHei" pitchFamily="34" charset="-122"/>
                           <a:cs typeface="Microsoft JhengHei" pitchFamily="34" charset="-120"/>
                         </a:rPr>
-                        <a:t>0.84×</a:t>
+                        <a:t>1.29×</a:t>
                       </a:r>
                       <a:endParaRPr lang="en-US" sz="1300" dirty="0">
                         <a:latin typeface="Microsoft JhengHei" charset="0"/>
@@ -8906,7 +8906,7 @@
                           <a:ea typeface="Microsoft JhengHei" pitchFamily="34" charset="-122"/>
                           <a:cs typeface="Microsoft JhengHei" pitchFamily="34" charset="-120"/>
                         </a:rPr>
-                        <a:t>1.24×</a:t>
+                        <a:t>1.21×</a:t>
                       </a:r>
                       <a:endParaRPr lang="en-US" sz="1300" dirty="0">
                         <a:latin typeface="Microsoft JhengHei" charset="0"/>
@@ -8974,7 +8974,7 @@
                           <a:ea typeface="Microsoft JhengHei" pitchFamily="34" charset="-122"/>
                           <a:cs typeface="Microsoft JhengHei" pitchFamily="34" charset="-120"/>
                         </a:rPr>
-                        <a:t>1.20×</a:t>
+                        <a:t>1.35×</a:t>
                       </a:r>
                       <a:endParaRPr lang="en-US" sz="1300" dirty="0">
                         <a:latin typeface="Microsoft JhengHei" charset="0"/>
@@ -9060,7 +9060,7 @@
                   <a:schemeClr val="accent5"/>
                 </a:solidFill>
               </a:rPr>
-              <a:t>例:台積電 2024-09-26(第 1 頁的高點)。價格以 % 顯示,模型實際用 ln 值;量的 10 日均量算到 t 日為止。</a:t>
+              <a:t>例:廣達 2024-11-08(第 1 頁的高點)。價格以 % 顯示,模型實際用 ln 值;量的 10 日均量算到 t 日為止。</a:t>
             </a:r>
             <a:endParaRPr lang="en-US" sz="1100" dirty="0"/>
           </a:p>
